--- a/src/assets/PersonalFinanceManager_Apresentacao .pptx
+++ b/src/assets/PersonalFinanceManager_Apresentacao .pptx
@@ -17,6 +17,8 @@
     <p:sldId id="262" r:id="rId10"/>
     <p:sldId id="263" r:id="rId11"/>
     <p:sldId id="264" r:id="rId12"/>
+    <p:sldId id="265" r:id="rId13"/>
+    <p:sldId id="266" r:id="rId14"/>
   </p:sldIdLst>
   <p:sldSz cx="12192000" cy="6858000"/>
   <p:notesSz cx="6858000" cy="12192000"/>
@@ -68,24 +70,80 @@
             <a:noAutofit/>
           </a:bodyPr>
           <a:p>
-            <a:r>
-              <a:rPr lang="pt-PT" sz="1800" b="0" u="none" strike="noStrike">
-                <a:solidFill>
-                  <a:schemeClr val="dk1"/>
-                </a:solidFill>
-                <a:effectLst/>
-                <a:uFillTx/>
-                <a:latin typeface="Calibri"/>
-              </a:rPr>
-              <a:t>Clique para mover o diapositivo</a:t>
-            </a:r>
-            <a:endParaRPr lang="pt-PT" sz="1800" b="0" u="none" strike="noStrike">
-              <a:solidFill>
-                <a:schemeClr val="dk1"/>
-              </a:solidFill>
-              <a:effectLst/>
-              <a:uFillTx/>
-              <a:latin typeface="Calibri"/>
+            <a:pPr algn="ctr"/>
+            <a:r>
+              <a:rPr lang="pt-PT" sz="4400" b="0" u="none" strike="noStrike">
+                <a:solidFill>
+                  <a:srgbClr val="000000"/>
+                </a:solidFill>
+                <a:effectLst/>
+                <a:uFillTx/>
+                <a:latin typeface="Arial"/>
+              </a:rPr>
+              <a:t>Clique </a:t>
+            </a:r>
+            <a:r>
+              <a:rPr lang="pt-PT" sz="4400" b="0" u="none" strike="noStrike">
+                <a:solidFill>
+                  <a:srgbClr val="000000"/>
+                </a:solidFill>
+                <a:effectLst/>
+                <a:uFillTx/>
+                <a:latin typeface="Arial"/>
+              </a:rPr>
+              <a:t>para </a:t>
+            </a:r>
+            <a:r>
+              <a:rPr lang="pt-PT" sz="4400" b="0" u="none" strike="noStrike">
+                <a:solidFill>
+                  <a:srgbClr val="000000"/>
+                </a:solidFill>
+                <a:effectLst/>
+                <a:uFillTx/>
+                <a:latin typeface="Arial"/>
+              </a:rPr>
+              <a:t>mover </a:t>
+            </a:r>
+            <a:r>
+              <a:rPr lang="pt-PT" sz="4400" b="0" u="none" strike="noStrike">
+                <a:solidFill>
+                  <a:srgbClr val="000000"/>
+                </a:solidFill>
+                <a:effectLst/>
+                <a:uFillTx/>
+                <a:latin typeface="Arial"/>
+              </a:rPr>
+              <a:t>o </a:t>
+            </a:r>
+            <a:r>
+              <a:rPr lang="pt-PT" sz="4400" b="0" u="none" strike="noStrike">
+                <a:solidFill>
+                  <a:srgbClr val="000000"/>
+                </a:solidFill>
+                <a:effectLst/>
+                <a:uFillTx/>
+                <a:latin typeface="Arial"/>
+              </a:rPr>
+              <a:t>diaposit</a:t>
+            </a:r>
+            <a:r>
+              <a:rPr lang="pt-PT" sz="4400" b="0" u="none" strike="noStrike">
+                <a:solidFill>
+                  <a:srgbClr val="000000"/>
+                </a:solidFill>
+                <a:effectLst/>
+                <a:uFillTx/>
+                <a:latin typeface="Arial"/>
+              </a:rPr>
+              <a:t>ivo</a:t>
+            </a:r>
+            <a:endParaRPr lang="pt-PT" sz="4400" b="0" u="none" strike="noStrike">
+              <a:solidFill>
+                <a:srgbClr val="000000"/>
+              </a:solidFill>
+              <a:effectLst/>
+              <a:uFillTx/>
+              <a:latin typeface="Arial"/>
             </a:endParaRPr>
           </a:p>
         </p:txBody>
@@ -141,7 +199,7 @@
                 <a:uFillTx/>
                 <a:latin typeface="Arial"/>
               </a:rPr>
-              <a:t>editar o </a:t>
+              <a:t>editar o formato </a:t>
             </a:r>
             <a:r>
               <a:rPr lang="pt-PT" sz="2000" b="0" u="none" strike="noStrike">
@@ -152,18 +210,7 @@
                 <a:uFillTx/>
                 <a:latin typeface="Arial"/>
               </a:rPr>
-              <a:t>formato das </a:t>
-            </a:r>
-            <a:r>
-              <a:rPr lang="pt-PT" sz="2000" b="0" u="none" strike="noStrike">
-                <a:solidFill>
-                  <a:srgbClr val="000000"/>
-                </a:solidFill>
-                <a:effectLst/>
-                <a:uFillTx/>
-                <a:latin typeface="Arial"/>
-              </a:rPr>
-              <a:t>notas</a:t>
+              <a:t>das notas</a:t>
             </a:r>
             <a:endParaRPr lang="pt-PT" sz="2000" b="0" u="none" strike="noStrike">
               <a:solidFill>
@@ -405,7 +452,7 @@
             <a:pPr indent="0" algn="r">
               <a:buNone/>
             </a:pPr>
-            <a:fld id="{3D77119E-7EAF-4454-A018-D0177F5BE46D}" type="slidenum">
+            <a:fld id="{32DA2B6E-6140-4115-B121-24F75F25A69E}" type="slidenum">
               <a:rPr lang="pt-PT" sz="1400" b="0" u="none" strike="noStrike">
                 <a:solidFill>
                   <a:srgbClr val="000000"/>
@@ -452,7 +499,7 @@
       </p:grpSpPr>
       <p:sp>
         <p:nvSpPr>
-          <p:cNvPr id="191" name="PlaceHolder 1"/>
+          <p:cNvPr id="217" name="PlaceHolder 1"/>
           <p:cNvSpPr>
             <a:spLocks noGrp="1"/>
           </p:cNvSpPr>
@@ -463,19 +510,19 @@
         <p:spPr>
           <a:xfrm>
             <a:off x="685800" y="1143000"/>
-            <a:ext cx="5486040" cy="3085920"/>
-          </a:xfrm>
-          <a:prstGeom prst="rect">
-            <a:avLst/>
-          </a:prstGeom>
-          <a:ln w="0">
-            <a:noFill/>
-          </a:ln>
-        </p:spPr>
-      </p:sp>
-      <p:sp>
-        <p:nvSpPr>
-          <p:cNvPr id="192" name="PlaceHolder 2"/>
+            <a:ext cx="5484960" cy="3084840"/>
+          </a:xfrm>
+          <a:prstGeom prst="rect">
+            <a:avLst/>
+          </a:prstGeom>
+          <a:ln w="0">
+            <a:noFill/>
+          </a:ln>
+        </p:spPr>
+      </p:sp>
+      <p:sp>
+        <p:nvSpPr>
+          <p:cNvPr id="218" name="PlaceHolder 2"/>
           <p:cNvSpPr>
             <a:spLocks noGrp="1"/>
           </p:cNvSpPr>
@@ -486,7 +533,7 @@
         <p:spPr>
           <a:xfrm>
             <a:off x="685800" y="4400640"/>
-            <a:ext cx="5486040" cy="3600000"/>
+            <a:ext cx="5484960" cy="3598920"/>
           </a:xfrm>
           <a:prstGeom prst="rect">
             <a:avLst/>
@@ -517,7 +564,7 @@
       </p:sp>
       <p:sp>
         <p:nvSpPr>
-          <p:cNvPr id="193" name="PlaceHolder 3"/>
+          <p:cNvPr id="219" name="PlaceHolder 3"/>
           <p:cNvSpPr>
             <a:spLocks noGrp="1"/>
           </p:cNvSpPr>
@@ -528,7 +575,7 @@
         <p:spPr>
           <a:xfrm>
             <a:off x="3884760" y="8685360"/>
-            <a:ext cx="2971440" cy="458280"/>
+            <a:ext cx="2970360" cy="457200"/>
           </a:xfrm>
           <a:prstGeom prst="rect">
             <a:avLst/>
@@ -548,7 +595,10 @@
                 <a:spcPct val="100000"/>
               </a:lnSpc>
               <a:buNone/>
-              <a:defRPr lang="en-US" sz="1200" b="0" u="none" strike="noStrike">
+              <a:tabLst>
+                <a:tab algn="l" pos="0"/>
+              </a:tabLst>
+              <a:defRPr lang="pt-PT" sz="1200" b="0" u="none" strike="noStrike">
                 <a:solidFill>
                   <a:schemeClr val="dk1"/>
                 </a:solidFill>
@@ -565,9 +615,12 @@
                 <a:spcPct val="100000"/>
               </a:lnSpc>
               <a:buNone/>
-            </a:pPr>
-            <a:fld id="{13760AE3-7FBD-409D-A48F-9017B2A0AA8C}" type="slidenum">
-              <a:rPr lang="en-US" sz="1200" b="0" u="none" strike="noStrike">
+              <a:tabLst>
+                <a:tab algn="l" pos="0"/>
+              </a:tabLst>
+            </a:pPr>
+            <a:fld id="{D8131AF4-F4D0-4ECC-AAB0-EAD12C37A54F}" type="slidenum">
+              <a:rPr lang="pt-PT" sz="1200" b="0" u="none" strike="noStrike">
                 <a:solidFill>
                   <a:schemeClr val="dk1"/>
                 </a:solidFill>
@@ -577,6 +630,340 @@
                 <a:ea typeface="+mn-ea"/>
               </a:rPr>
               <a:t>1</a:t>
+            </a:fld>
+            <a:endParaRPr lang="pt-PT" sz="1200" b="0" u="none" strike="noStrike">
+              <a:solidFill>
+                <a:srgbClr val="000000"/>
+              </a:solidFill>
+              <a:effectLst/>
+              <a:uFillTx/>
+              <a:latin typeface="Times New Roman"/>
+            </a:endParaRPr>
+          </a:p>
+        </p:txBody>
+      </p:sp>
+    </p:spTree>
+  </p:cSld>
+</p:notes>
+</file>
+
+<file path=ppt/notesSlides/notesSlide10.xml><?xml version="1.0" encoding="utf-8"?>
+<p:notes xmlns:a="http://schemas.openxmlformats.org/drawingml/2006/main" xmlns:p="http://schemas.openxmlformats.org/presentationml/2006/main" xmlns:r="http://schemas.openxmlformats.org/officeDocument/2006/relationships" xmlns:p14="http://schemas.microsoft.com/office/powerpoint/2010/main" xmlns:p15="http://schemas.microsoft.com/office/powerpoint/2012/main" xmlns:mc="http://schemas.openxmlformats.org/markup-compatibility/2006">
+  <p:cSld>
+    <p:spTree>
+      <p:nvGrpSpPr>
+        <p:cNvPr id="1" name=""/>
+        <p:cNvGrpSpPr/>
+        <p:nvPr/>
+      </p:nvGrpSpPr>
+      <p:grpSpPr>
+        <a:xfrm>
+          <a:off x="0" y="0"/>
+          <a:ext cx="0" cy="0"/>
+          <a:chOff x="0" y="0"/>
+          <a:chExt cx="0" cy="0"/>
+        </a:xfrm>
+      </p:grpSpPr>
+      <p:sp>
+        <p:nvSpPr>
+          <p:cNvPr id="244" name="PlaceHolder 1"/>
+          <p:cNvSpPr>
+            <a:spLocks noGrp="1"/>
+          </p:cNvSpPr>
+          <p:nvPr>
+            <p:ph type="sldImg"/>
+          </p:nvPr>
+        </p:nvSpPr>
+        <p:spPr>
+          <a:xfrm>
+            <a:off x="685800" y="1143000"/>
+            <a:ext cx="5484960" cy="3084840"/>
+          </a:xfrm>
+          <a:prstGeom prst="rect">
+            <a:avLst/>
+          </a:prstGeom>
+          <a:ln w="0">
+            <a:noFill/>
+          </a:ln>
+        </p:spPr>
+      </p:sp>
+      <p:sp>
+        <p:nvSpPr>
+          <p:cNvPr id="245" name="PlaceHolder 2"/>
+          <p:cNvSpPr>
+            <a:spLocks noGrp="1"/>
+          </p:cNvSpPr>
+          <p:nvPr>
+            <p:ph type="body"/>
+          </p:nvPr>
+        </p:nvSpPr>
+        <p:spPr>
+          <a:xfrm>
+            <a:off x="685800" y="4400640"/>
+            <a:ext cx="5484960" cy="3598920"/>
+          </a:xfrm>
+          <a:prstGeom prst="rect">
+            <a:avLst/>
+          </a:prstGeom>
+          <a:noFill/>
+          <a:ln w="0">
+            <a:noFill/>
+          </a:ln>
+        </p:spPr>
+        <p:txBody>
+          <a:bodyPr lIns="91440" rIns="91440" tIns="45720" bIns="45720" anchor="t">
+            <a:noAutofit/>
+          </a:bodyPr>
+          <a:p>
+            <a:pPr indent="0">
+              <a:buNone/>
+            </a:pPr>
+            <a:endParaRPr lang="pt-PT" sz="1800" b="0" u="none" strike="noStrike">
+              <a:solidFill>
+                <a:srgbClr val="000000"/>
+              </a:solidFill>
+              <a:effectLst/>
+              <a:uFillTx/>
+              <a:latin typeface="Arial"/>
+            </a:endParaRPr>
+          </a:p>
+        </p:txBody>
+      </p:sp>
+      <p:sp>
+        <p:nvSpPr>
+          <p:cNvPr id="246" name="PlaceHolder 3"/>
+          <p:cNvSpPr>
+            <a:spLocks noGrp="1"/>
+          </p:cNvSpPr>
+          <p:nvPr>
+            <p:ph type="sldNum" idx="13"/>
+          </p:nvPr>
+        </p:nvSpPr>
+        <p:spPr>
+          <a:xfrm>
+            <a:off x="3884760" y="8685360"/>
+            <a:ext cx="2970360" cy="457200"/>
+          </a:xfrm>
+          <a:prstGeom prst="rect">
+            <a:avLst/>
+          </a:prstGeom>
+          <a:noFill/>
+          <a:ln w="0">
+            <a:noFill/>
+          </a:ln>
+        </p:spPr>
+        <p:txBody>
+          <a:bodyPr lIns="91440" rIns="91440" tIns="45720" bIns="45720" anchor="b">
+            <a:noAutofit/>
+          </a:bodyPr>
+          <a:lstStyle>
+            <a:lvl1pPr indent="0" algn="r" defTabSz="914400">
+              <a:lnSpc>
+                <a:spcPct val="100000"/>
+              </a:lnSpc>
+              <a:buNone/>
+              <a:tabLst>
+                <a:tab algn="l" pos="0"/>
+              </a:tabLst>
+              <a:defRPr lang="pt-PT" sz="1200" b="0" u="none" strike="noStrike">
+                <a:solidFill>
+                  <a:schemeClr val="dk1"/>
+                </a:solidFill>
+                <a:effectLst/>
+                <a:uFillTx/>
+                <a:latin typeface="+mn-lt"/>
+                <a:ea typeface="+mn-ea"/>
+              </a:defRPr>
+            </a:lvl1pPr>
+          </a:lstStyle>
+          <a:p>
+            <a:pPr indent="0" algn="r" defTabSz="914400">
+              <a:lnSpc>
+                <a:spcPct val="100000"/>
+              </a:lnSpc>
+              <a:buNone/>
+              <a:tabLst>
+                <a:tab algn="l" pos="0"/>
+              </a:tabLst>
+            </a:pPr>
+            <a:fld id="{B3FAE561-3E8B-47C7-9206-E4DE4CC3651E}" type="slidenum">
+              <a:rPr lang="pt-PT" sz="1200" b="0" u="none" strike="noStrike">
+                <a:solidFill>
+                  <a:schemeClr val="dk1"/>
+                </a:solidFill>
+                <a:effectLst/>
+                <a:uFillTx/>
+                <a:latin typeface="+mn-lt"/>
+                <a:ea typeface="+mn-ea"/>
+              </a:rPr>
+              <a:t>&lt;número&gt;</a:t>
+            </a:fld>
+            <a:endParaRPr lang="pt-PT" sz="1200" b="0" u="none" strike="noStrike">
+              <a:solidFill>
+                <a:srgbClr val="000000"/>
+              </a:solidFill>
+              <a:effectLst/>
+              <a:uFillTx/>
+              <a:latin typeface="Times New Roman"/>
+            </a:endParaRPr>
+          </a:p>
+        </p:txBody>
+      </p:sp>
+    </p:spTree>
+  </p:cSld>
+</p:notes>
+</file>
+
+<file path=ppt/notesSlides/notesSlide11.xml><?xml version="1.0" encoding="utf-8"?>
+<p:notes xmlns:a="http://schemas.openxmlformats.org/drawingml/2006/main" xmlns:p="http://schemas.openxmlformats.org/presentationml/2006/main" xmlns:r="http://schemas.openxmlformats.org/officeDocument/2006/relationships" xmlns:p14="http://schemas.microsoft.com/office/powerpoint/2010/main" xmlns:p15="http://schemas.microsoft.com/office/powerpoint/2012/main" xmlns:mc="http://schemas.openxmlformats.org/markup-compatibility/2006">
+  <p:cSld>
+    <p:spTree>
+      <p:nvGrpSpPr>
+        <p:cNvPr id="1" name=""/>
+        <p:cNvGrpSpPr/>
+        <p:nvPr/>
+      </p:nvGrpSpPr>
+      <p:grpSpPr>
+        <a:xfrm>
+          <a:off x="0" y="0"/>
+          <a:ext cx="0" cy="0"/>
+          <a:chOff x="0" y="0"/>
+          <a:chExt cx="0" cy="0"/>
+        </a:xfrm>
+      </p:grpSpPr>
+      <p:sp>
+        <p:nvSpPr>
+          <p:cNvPr id="247" name="PlaceHolder 1"/>
+          <p:cNvSpPr>
+            <a:spLocks noGrp="1"/>
+          </p:cNvSpPr>
+          <p:nvPr>
+            <p:ph type="sldImg"/>
+          </p:nvPr>
+        </p:nvSpPr>
+        <p:spPr>
+          <a:xfrm>
+            <a:off x="685800" y="1143000"/>
+            <a:ext cx="5484960" cy="3084840"/>
+          </a:xfrm>
+          <a:prstGeom prst="rect">
+            <a:avLst/>
+          </a:prstGeom>
+          <a:ln w="0">
+            <a:noFill/>
+          </a:ln>
+        </p:spPr>
+      </p:sp>
+      <p:sp>
+        <p:nvSpPr>
+          <p:cNvPr id="248" name="PlaceHolder 2"/>
+          <p:cNvSpPr>
+            <a:spLocks noGrp="1"/>
+          </p:cNvSpPr>
+          <p:nvPr>
+            <p:ph type="body"/>
+          </p:nvPr>
+        </p:nvSpPr>
+        <p:spPr>
+          <a:xfrm>
+            <a:off x="685800" y="4400640"/>
+            <a:ext cx="5484960" cy="3598920"/>
+          </a:xfrm>
+          <a:prstGeom prst="rect">
+            <a:avLst/>
+          </a:prstGeom>
+          <a:noFill/>
+          <a:ln w="0">
+            <a:noFill/>
+          </a:ln>
+        </p:spPr>
+        <p:txBody>
+          <a:bodyPr lIns="91440" rIns="91440" tIns="45720" bIns="45720" anchor="t">
+            <a:noAutofit/>
+          </a:bodyPr>
+          <a:p>
+            <a:pPr indent="0">
+              <a:buNone/>
+            </a:pPr>
+            <a:endParaRPr lang="pt-PT" sz="1800" b="0" u="none" strike="noStrike">
+              <a:solidFill>
+                <a:srgbClr val="000000"/>
+              </a:solidFill>
+              <a:effectLst/>
+              <a:uFillTx/>
+              <a:latin typeface="Arial"/>
+            </a:endParaRPr>
+          </a:p>
+        </p:txBody>
+      </p:sp>
+      <p:sp>
+        <p:nvSpPr>
+          <p:cNvPr id="249" name="PlaceHolder 3"/>
+          <p:cNvSpPr>
+            <a:spLocks noGrp="1"/>
+          </p:cNvSpPr>
+          <p:nvPr>
+            <p:ph type="sldNum" idx="14"/>
+          </p:nvPr>
+        </p:nvSpPr>
+        <p:spPr>
+          <a:xfrm>
+            <a:off x="3884760" y="8685360"/>
+            <a:ext cx="2970360" cy="457200"/>
+          </a:xfrm>
+          <a:prstGeom prst="rect">
+            <a:avLst/>
+          </a:prstGeom>
+          <a:noFill/>
+          <a:ln w="0">
+            <a:noFill/>
+          </a:ln>
+        </p:spPr>
+        <p:txBody>
+          <a:bodyPr lIns="91440" rIns="91440" tIns="45720" bIns="45720" anchor="b">
+            <a:noAutofit/>
+          </a:bodyPr>
+          <a:lstStyle>
+            <a:lvl1pPr indent="0" algn="r" defTabSz="914400">
+              <a:lnSpc>
+                <a:spcPct val="100000"/>
+              </a:lnSpc>
+              <a:buNone/>
+              <a:tabLst>
+                <a:tab algn="l" pos="0"/>
+              </a:tabLst>
+              <a:defRPr lang="pt-PT" sz="1200" b="0" u="none" strike="noStrike">
+                <a:solidFill>
+                  <a:schemeClr val="dk1"/>
+                </a:solidFill>
+                <a:effectLst/>
+                <a:uFillTx/>
+                <a:latin typeface="+mn-lt"/>
+                <a:ea typeface="+mn-ea"/>
+              </a:defRPr>
+            </a:lvl1pPr>
+          </a:lstStyle>
+          <a:p>
+            <a:pPr indent="0" algn="r" defTabSz="914400">
+              <a:lnSpc>
+                <a:spcPct val="100000"/>
+              </a:lnSpc>
+              <a:buNone/>
+              <a:tabLst>
+                <a:tab algn="l" pos="0"/>
+              </a:tabLst>
+            </a:pPr>
+            <a:fld id="{EFD28D19-E466-4C92-B834-6198A655DAFA}" type="slidenum">
+              <a:rPr lang="pt-PT" sz="1200" b="0" u="none" strike="noStrike">
+                <a:solidFill>
+                  <a:schemeClr val="dk1"/>
+                </a:solidFill>
+                <a:effectLst/>
+                <a:uFillTx/>
+                <a:latin typeface="+mn-lt"/>
+                <a:ea typeface="+mn-ea"/>
+              </a:rPr>
+              <a:t>&lt;número&gt;</a:t>
             </a:fld>
             <a:endParaRPr lang="pt-PT" sz="1200" b="0" u="none" strike="noStrike">
               <a:solidFill>
@@ -613,7 +1000,7 @@
       </p:grpSpPr>
       <p:sp>
         <p:nvSpPr>
-          <p:cNvPr id="194" name="PlaceHolder 1"/>
+          <p:cNvPr id="220" name="PlaceHolder 1"/>
           <p:cNvSpPr>
             <a:spLocks noGrp="1"/>
           </p:cNvSpPr>
@@ -624,19 +1011,19 @@
         <p:spPr>
           <a:xfrm>
             <a:off x="685800" y="1143000"/>
-            <a:ext cx="5486040" cy="3085920"/>
-          </a:xfrm>
-          <a:prstGeom prst="rect">
-            <a:avLst/>
-          </a:prstGeom>
-          <a:ln w="0">
-            <a:noFill/>
-          </a:ln>
-        </p:spPr>
-      </p:sp>
-      <p:sp>
-        <p:nvSpPr>
-          <p:cNvPr id="195" name="PlaceHolder 2"/>
+            <a:ext cx="5484960" cy="3084840"/>
+          </a:xfrm>
+          <a:prstGeom prst="rect">
+            <a:avLst/>
+          </a:prstGeom>
+          <a:ln w="0">
+            <a:noFill/>
+          </a:ln>
+        </p:spPr>
+      </p:sp>
+      <p:sp>
+        <p:nvSpPr>
+          <p:cNvPr id="221" name="PlaceHolder 2"/>
           <p:cNvSpPr>
             <a:spLocks noGrp="1"/>
           </p:cNvSpPr>
@@ -647,7 +1034,7 @@
         <p:spPr>
           <a:xfrm>
             <a:off x="685800" y="4400640"/>
-            <a:ext cx="5486040" cy="3600000"/>
+            <a:ext cx="5484960" cy="3598920"/>
           </a:xfrm>
           <a:prstGeom prst="rect">
             <a:avLst/>
@@ -678,7 +1065,7 @@
       </p:sp>
       <p:sp>
         <p:nvSpPr>
-          <p:cNvPr id="196" name="PlaceHolder 3"/>
+          <p:cNvPr id="222" name="PlaceHolder 3"/>
           <p:cNvSpPr>
             <a:spLocks noGrp="1"/>
           </p:cNvSpPr>
@@ -689,7 +1076,7 @@
         <p:spPr>
           <a:xfrm>
             <a:off x="3884760" y="8685360"/>
-            <a:ext cx="2971440" cy="458280"/>
+            <a:ext cx="2970360" cy="457200"/>
           </a:xfrm>
           <a:prstGeom prst="rect">
             <a:avLst/>
@@ -709,7 +1096,10 @@
                 <a:spcPct val="100000"/>
               </a:lnSpc>
               <a:buNone/>
-              <a:defRPr lang="en-US" sz="1200" b="0" u="none" strike="noStrike">
+              <a:tabLst>
+                <a:tab algn="l" pos="0"/>
+              </a:tabLst>
+              <a:defRPr lang="pt-PT" sz="1200" b="0" u="none" strike="noStrike">
                 <a:solidFill>
                   <a:schemeClr val="dk1"/>
                 </a:solidFill>
@@ -726,9 +1116,12 @@
                 <a:spcPct val="100000"/>
               </a:lnSpc>
               <a:buNone/>
-            </a:pPr>
-            <a:fld id="{10AFC782-C8E3-49BD-B5A8-3EF89FE71CB1}" type="slidenum">
-              <a:rPr lang="en-US" sz="1200" b="0" u="none" strike="noStrike">
+              <a:tabLst>
+                <a:tab algn="l" pos="0"/>
+              </a:tabLst>
+            </a:pPr>
+            <a:fld id="{B9E390C7-6D8B-43A2-9A6C-424909A20E8B}" type="slidenum">
+              <a:rPr lang="pt-PT" sz="1200" b="0" u="none" strike="noStrike">
                 <a:solidFill>
                   <a:schemeClr val="dk1"/>
                 </a:solidFill>
@@ -774,7 +1167,7 @@
       </p:grpSpPr>
       <p:sp>
         <p:nvSpPr>
-          <p:cNvPr id="197" name="PlaceHolder 1"/>
+          <p:cNvPr id="223" name="PlaceHolder 1"/>
           <p:cNvSpPr>
             <a:spLocks noGrp="1"/>
           </p:cNvSpPr>
@@ -785,19 +1178,19 @@
         <p:spPr>
           <a:xfrm>
             <a:off x="685800" y="1143000"/>
-            <a:ext cx="5486040" cy="3085920"/>
-          </a:xfrm>
-          <a:prstGeom prst="rect">
-            <a:avLst/>
-          </a:prstGeom>
-          <a:ln w="0">
-            <a:noFill/>
-          </a:ln>
-        </p:spPr>
-      </p:sp>
-      <p:sp>
-        <p:nvSpPr>
-          <p:cNvPr id="198" name="PlaceHolder 2"/>
+            <a:ext cx="5484960" cy="3084840"/>
+          </a:xfrm>
+          <a:prstGeom prst="rect">
+            <a:avLst/>
+          </a:prstGeom>
+          <a:ln w="0">
+            <a:noFill/>
+          </a:ln>
+        </p:spPr>
+      </p:sp>
+      <p:sp>
+        <p:nvSpPr>
+          <p:cNvPr id="224" name="PlaceHolder 2"/>
           <p:cNvSpPr>
             <a:spLocks noGrp="1"/>
           </p:cNvSpPr>
@@ -808,7 +1201,7 @@
         <p:spPr>
           <a:xfrm>
             <a:off x="685800" y="4400640"/>
-            <a:ext cx="5486040" cy="3600000"/>
+            <a:ext cx="5484960" cy="3598920"/>
           </a:xfrm>
           <a:prstGeom prst="rect">
             <a:avLst/>
@@ -839,7 +1232,7 @@
       </p:sp>
       <p:sp>
         <p:nvSpPr>
-          <p:cNvPr id="199" name="PlaceHolder 3"/>
+          <p:cNvPr id="225" name="PlaceHolder 3"/>
           <p:cNvSpPr>
             <a:spLocks noGrp="1"/>
           </p:cNvSpPr>
@@ -850,7 +1243,7 @@
         <p:spPr>
           <a:xfrm>
             <a:off x="3884760" y="8685360"/>
-            <a:ext cx="2971440" cy="458280"/>
+            <a:ext cx="2970360" cy="457200"/>
           </a:xfrm>
           <a:prstGeom prst="rect">
             <a:avLst/>
@@ -870,7 +1263,10 @@
                 <a:spcPct val="100000"/>
               </a:lnSpc>
               <a:buNone/>
-              <a:defRPr lang="en-US" sz="1200" b="0" u="none" strike="noStrike">
+              <a:tabLst>
+                <a:tab algn="l" pos="0"/>
+              </a:tabLst>
+              <a:defRPr lang="pt-PT" sz="1200" b="0" u="none" strike="noStrike">
                 <a:solidFill>
                   <a:schemeClr val="dk1"/>
                 </a:solidFill>
@@ -887,9 +1283,12 @@
                 <a:spcPct val="100000"/>
               </a:lnSpc>
               <a:buNone/>
-            </a:pPr>
-            <a:fld id="{9564020B-67D6-495F-895E-B840FBE4E36A}" type="slidenum">
-              <a:rPr lang="en-US" sz="1200" b="0" u="none" strike="noStrike">
+              <a:tabLst>
+                <a:tab algn="l" pos="0"/>
+              </a:tabLst>
+            </a:pPr>
+            <a:fld id="{B1EC6872-1DD1-43A9-8FB0-793C82083943}" type="slidenum">
+              <a:rPr lang="pt-PT" sz="1200" b="0" u="none" strike="noStrike">
                 <a:solidFill>
                   <a:schemeClr val="dk1"/>
                 </a:solidFill>
@@ -935,7 +1334,7 @@
       </p:grpSpPr>
       <p:sp>
         <p:nvSpPr>
-          <p:cNvPr id="200" name="PlaceHolder 1"/>
+          <p:cNvPr id="226" name="PlaceHolder 1"/>
           <p:cNvSpPr>
             <a:spLocks noGrp="1"/>
           </p:cNvSpPr>
@@ -946,19 +1345,19 @@
         <p:spPr>
           <a:xfrm>
             <a:off x="685800" y="1143000"/>
-            <a:ext cx="5486040" cy="3085920"/>
-          </a:xfrm>
-          <a:prstGeom prst="rect">
-            <a:avLst/>
-          </a:prstGeom>
-          <a:ln w="0">
-            <a:noFill/>
-          </a:ln>
-        </p:spPr>
-      </p:sp>
-      <p:sp>
-        <p:nvSpPr>
-          <p:cNvPr id="201" name="PlaceHolder 2"/>
+            <a:ext cx="5484960" cy="3084840"/>
+          </a:xfrm>
+          <a:prstGeom prst="rect">
+            <a:avLst/>
+          </a:prstGeom>
+          <a:ln w="0">
+            <a:noFill/>
+          </a:ln>
+        </p:spPr>
+      </p:sp>
+      <p:sp>
+        <p:nvSpPr>
+          <p:cNvPr id="227" name="PlaceHolder 2"/>
           <p:cNvSpPr>
             <a:spLocks noGrp="1"/>
           </p:cNvSpPr>
@@ -969,7 +1368,7 @@
         <p:spPr>
           <a:xfrm>
             <a:off x="685800" y="4400640"/>
-            <a:ext cx="5486040" cy="3600000"/>
+            <a:ext cx="5484960" cy="3598920"/>
           </a:xfrm>
           <a:prstGeom prst="rect">
             <a:avLst/>
@@ -1000,7 +1399,7 @@
       </p:sp>
       <p:sp>
         <p:nvSpPr>
-          <p:cNvPr id="202" name="PlaceHolder 3"/>
+          <p:cNvPr id="228" name="PlaceHolder 3"/>
           <p:cNvSpPr>
             <a:spLocks noGrp="1"/>
           </p:cNvSpPr>
@@ -1011,7 +1410,7 @@
         <p:spPr>
           <a:xfrm>
             <a:off x="3884760" y="8685360"/>
-            <a:ext cx="2971440" cy="458280"/>
+            <a:ext cx="2970360" cy="457200"/>
           </a:xfrm>
           <a:prstGeom prst="rect">
             <a:avLst/>
@@ -1031,7 +1430,10 @@
                 <a:spcPct val="100000"/>
               </a:lnSpc>
               <a:buNone/>
-              <a:defRPr lang="en-US" sz="1200" b="0" u="none" strike="noStrike">
+              <a:tabLst>
+                <a:tab algn="l" pos="0"/>
+              </a:tabLst>
+              <a:defRPr lang="pt-PT" sz="1200" b="0" u="none" strike="noStrike">
                 <a:solidFill>
                   <a:schemeClr val="dk1"/>
                 </a:solidFill>
@@ -1048,9 +1450,12 @@
                 <a:spcPct val="100000"/>
               </a:lnSpc>
               <a:buNone/>
-            </a:pPr>
-            <a:fld id="{9B059363-962D-42BD-BD2B-5EC41608B7A3}" type="slidenum">
-              <a:rPr lang="en-US" sz="1200" b="0" u="none" strike="noStrike">
+              <a:tabLst>
+                <a:tab algn="l" pos="0"/>
+              </a:tabLst>
+            </a:pPr>
+            <a:fld id="{7BA71C1C-2BF1-476D-97A2-F6E07BFECE47}" type="slidenum">
+              <a:rPr lang="pt-PT" sz="1200" b="0" u="none" strike="noStrike">
                 <a:solidFill>
                   <a:schemeClr val="dk1"/>
                 </a:solidFill>
@@ -1096,7 +1501,7 @@
       </p:grpSpPr>
       <p:sp>
         <p:nvSpPr>
-          <p:cNvPr id="203" name="PlaceHolder 1"/>
+          <p:cNvPr id="229" name="PlaceHolder 1"/>
           <p:cNvSpPr>
             <a:spLocks noGrp="1"/>
           </p:cNvSpPr>
@@ -1107,19 +1512,19 @@
         <p:spPr>
           <a:xfrm>
             <a:off x="685800" y="1143000"/>
-            <a:ext cx="5486040" cy="3085920"/>
-          </a:xfrm>
-          <a:prstGeom prst="rect">
-            <a:avLst/>
-          </a:prstGeom>
-          <a:ln w="0">
-            <a:noFill/>
-          </a:ln>
-        </p:spPr>
-      </p:sp>
-      <p:sp>
-        <p:nvSpPr>
-          <p:cNvPr id="204" name="PlaceHolder 2"/>
+            <a:ext cx="5484960" cy="3084840"/>
+          </a:xfrm>
+          <a:prstGeom prst="rect">
+            <a:avLst/>
+          </a:prstGeom>
+          <a:ln w="0">
+            <a:noFill/>
+          </a:ln>
+        </p:spPr>
+      </p:sp>
+      <p:sp>
+        <p:nvSpPr>
+          <p:cNvPr id="230" name="PlaceHolder 2"/>
           <p:cNvSpPr>
             <a:spLocks noGrp="1"/>
           </p:cNvSpPr>
@@ -1130,7 +1535,7 @@
         <p:spPr>
           <a:xfrm>
             <a:off x="685800" y="4400640"/>
-            <a:ext cx="5486040" cy="3600000"/>
+            <a:ext cx="5484960" cy="3598920"/>
           </a:xfrm>
           <a:prstGeom prst="rect">
             <a:avLst/>
@@ -1161,7 +1566,7 @@
       </p:sp>
       <p:sp>
         <p:nvSpPr>
-          <p:cNvPr id="205" name="PlaceHolder 3"/>
+          <p:cNvPr id="231" name="PlaceHolder 3"/>
           <p:cNvSpPr>
             <a:spLocks noGrp="1"/>
           </p:cNvSpPr>
@@ -1172,7 +1577,7 @@
         <p:spPr>
           <a:xfrm>
             <a:off x="3884760" y="8685360"/>
-            <a:ext cx="2971440" cy="458280"/>
+            <a:ext cx="2970360" cy="457200"/>
           </a:xfrm>
           <a:prstGeom prst="rect">
             <a:avLst/>
@@ -1192,7 +1597,10 @@
                 <a:spcPct val="100000"/>
               </a:lnSpc>
               <a:buNone/>
-              <a:defRPr lang="en-US" sz="1200" b="0" u="none" strike="noStrike">
+              <a:tabLst>
+                <a:tab algn="l" pos="0"/>
+              </a:tabLst>
+              <a:defRPr lang="pt-PT" sz="1200" b="0" u="none" strike="noStrike">
                 <a:solidFill>
                   <a:schemeClr val="dk1"/>
                 </a:solidFill>
@@ -1209,9 +1617,12 @@
                 <a:spcPct val="100000"/>
               </a:lnSpc>
               <a:buNone/>
-            </a:pPr>
-            <a:fld id="{6360BA2F-0126-484C-9A99-0B8126E71620}" type="slidenum">
-              <a:rPr lang="en-US" sz="1200" b="0" u="none" strike="noStrike">
+              <a:tabLst>
+                <a:tab algn="l" pos="0"/>
+              </a:tabLst>
+            </a:pPr>
+            <a:fld id="{7890DEC8-F478-4897-8F48-51D7399159C8}" type="slidenum">
+              <a:rPr lang="pt-PT" sz="1200" b="0" u="none" strike="noStrike">
                 <a:solidFill>
                   <a:schemeClr val="dk1"/>
                 </a:solidFill>
@@ -1257,7 +1668,7 @@
       </p:grpSpPr>
       <p:sp>
         <p:nvSpPr>
-          <p:cNvPr id="206" name="PlaceHolder 1"/>
+          <p:cNvPr id="232" name="PlaceHolder 1"/>
           <p:cNvSpPr>
             <a:spLocks noGrp="1"/>
           </p:cNvSpPr>
@@ -1268,19 +1679,19 @@
         <p:spPr>
           <a:xfrm>
             <a:off x="685800" y="1143000"/>
-            <a:ext cx="5486040" cy="3085920"/>
-          </a:xfrm>
-          <a:prstGeom prst="rect">
-            <a:avLst/>
-          </a:prstGeom>
-          <a:ln w="0">
-            <a:noFill/>
-          </a:ln>
-        </p:spPr>
-      </p:sp>
-      <p:sp>
-        <p:nvSpPr>
-          <p:cNvPr id="207" name="PlaceHolder 2"/>
+            <a:ext cx="5484960" cy="3084840"/>
+          </a:xfrm>
+          <a:prstGeom prst="rect">
+            <a:avLst/>
+          </a:prstGeom>
+          <a:ln w="0">
+            <a:noFill/>
+          </a:ln>
+        </p:spPr>
+      </p:sp>
+      <p:sp>
+        <p:nvSpPr>
+          <p:cNvPr id="233" name="PlaceHolder 2"/>
           <p:cNvSpPr>
             <a:spLocks noGrp="1"/>
           </p:cNvSpPr>
@@ -1291,7 +1702,7 @@
         <p:spPr>
           <a:xfrm>
             <a:off x="685800" y="4400640"/>
-            <a:ext cx="5486040" cy="3600000"/>
+            <a:ext cx="5484960" cy="3598920"/>
           </a:xfrm>
           <a:prstGeom prst="rect">
             <a:avLst/>
@@ -1322,7 +1733,7 @@
       </p:sp>
       <p:sp>
         <p:nvSpPr>
-          <p:cNvPr id="208" name="PlaceHolder 3"/>
+          <p:cNvPr id="234" name="PlaceHolder 3"/>
           <p:cNvSpPr>
             <a:spLocks noGrp="1"/>
           </p:cNvSpPr>
@@ -1333,7 +1744,7 @@
         <p:spPr>
           <a:xfrm>
             <a:off x="3884760" y="8685360"/>
-            <a:ext cx="2971440" cy="458280"/>
+            <a:ext cx="2970360" cy="457200"/>
           </a:xfrm>
           <a:prstGeom prst="rect">
             <a:avLst/>
@@ -1353,7 +1764,10 @@
                 <a:spcPct val="100000"/>
               </a:lnSpc>
               <a:buNone/>
-              <a:defRPr lang="en-US" sz="1200" b="0" u="none" strike="noStrike">
+              <a:tabLst>
+                <a:tab algn="l" pos="0"/>
+              </a:tabLst>
+              <a:defRPr lang="pt-PT" sz="1200" b="0" u="none" strike="noStrike">
                 <a:solidFill>
                   <a:schemeClr val="dk1"/>
                 </a:solidFill>
@@ -1370,9 +1784,12 @@
                 <a:spcPct val="100000"/>
               </a:lnSpc>
               <a:buNone/>
-            </a:pPr>
-            <a:fld id="{5F1FB7FA-079B-427C-8464-7FD5ECA0EEA8}" type="slidenum">
-              <a:rPr lang="en-US" sz="1200" b="0" u="none" strike="noStrike">
+              <a:tabLst>
+                <a:tab algn="l" pos="0"/>
+              </a:tabLst>
+            </a:pPr>
+            <a:fld id="{ADF7EC21-FA6A-4593-A00E-F7CA719407B9}" type="slidenum">
+              <a:rPr lang="pt-PT" sz="1200" b="0" u="none" strike="noStrike">
                 <a:solidFill>
                   <a:schemeClr val="dk1"/>
                 </a:solidFill>
@@ -1418,7 +1835,7 @@
       </p:grpSpPr>
       <p:sp>
         <p:nvSpPr>
-          <p:cNvPr id="209" name="PlaceHolder 1"/>
+          <p:cNvPr id="235" name="PlaceHolder 1"/>
           <p:cNvSpPr>
             <a:spLocks noGrp="1"/>
           </p:cNvSpPr>
@@ -1429,19 +1846,19 @@
         <p:spPr>
           <a:xfrm>
             <a:off x="685800" y="1143000"/>
-            <a:ext cx="5486040" cy="3085920"/>
-          </a:xfrm>
-          <a:prstGeom prst="rect">
-            <a:avLst/>
-          </a:prstGeom>
-          <a:ln w="0">
-            <a:noFill/>
-          </a:ln>
-        </p:spPr>
-      </p:sp>
-      <p:sp>
-        <p:nvSpPr>
-          <p:cNvPr id="210" name="PlaceHolder 2"/>
+            <a:ext cx="5484960" cy="3084840"/>
+          </a:xfrm>
+          <a:prstGeom prst="rect">
+            <a:avLst/>
+          </a:prstGeom>
+          <a:ln w="0">
+            <a:noFill/>
+          </a:ln>
+        </p:spPr>
+      </p:sp>
+      <p:sp>
+        <p:nvSpPr>
+          <p:cNvPr id="236" name="PlaceHolder 2"/>
           <p:cNvSpPr>
             <a:spLocks noGrp="1"/>
           </p:cNvSpPr>
@@ -1452,7 +1869,7 @@
         <p:spPr>
           <a:xfrm>
             <a:off x="685800" y="4400640"/>
-            <a:ext cx="5486040" cy="3600000"/>
+            <a:ext cx="5484960" cy="3598920"/>
           </a:xfrm>
           <a:prstGeom prst="rect">
             <a:avLst/>
@@ -1483,7 +1900,7 @@
       </p:sp>
       <p:sp>
         <p:nvSpPr>
-          <p:cNvPr id="211" name="PlaceHolder 3"/>
+          <p:cNvPr id="237" name="PlaceHolder 3"/>
           <p:cNvSpPr>
             <a:spLocks noGrp="1"/>
           </p:cNvSpPr>
@@ -1494,7 +1911,7 @@
         <p:spPr>
           <a:xfrm>
             <a:off x="3884760" y="8685360"/>
-            <a:ext cx="2971440" cy="458280"/>
+            <a:ext cx="2970360" cy="457200"/>
           </a:xfrm>
           <a:prstGeom prst="rect">
             <a:avLst/>
@@ -1514,7 +1931,10 @@
                 <a:spcPct val="100000"/>
               </a:lnSpc>
               <a:buNone/>
-              <a:defRPr lang="en-US" sz="1200" b="0" u="none" strike="noStrike">
+              <a:tabLst>
+                <a:tab algn="l" pos="0"/>
+              </a:tabLst>
+              <a:defRPr lang="pt-PT" sz="1200" b="0" u="none" strike="noStrike">
                 <a:solidFill>
                   <a:schemeClr val="dk1"/>
                 </a:solidFill>
@@ -1531,9 +1951,12 @@
                 <a:spcPct val="100000"/>
               </a:lnSpc>
               <a:buNone/>
-            </a:pPr>
-            <a:fld id="{25226753-C991-4E77-9E96-B2335942C26C}" type="slidenum">
-              <a:rPr lang="en-US" sz="1200" b="0" u="none" strike="noStrike">
+              <a:tabLst>
+                <a:tab algn="l" pos="0"/>
+              </a:tabLst>
+            </a:pPr>
+            <a:fld id="{B5B6CD51-178C-44E3-A19D-4950ED69BD45}" type="slidenum">
+              <a:rPr lang="pt-PT" sz="1200" b="0" u="none" strike="noStrike">
                 <a:solidFill>
                   <a:schemeClr val="dk1"/>
                 </a:solidFill>
@@ -1579,7 +2002,7 @@
       </p:grpSpPr>
       <p:sp>
         <p:nvSpPr>
-          <p:cNvPr id="212" name="PlaceHolder 1"/>
+          <p:cNvPr id="238" name="PlaceHolder 1"/>
           <p:cNvSpPr>
             <a:spLocks noGrp="1"/>
           </p:cNvSpPr>
@@ -1590,19 +2013,19 @@
         <p:spPr>
           <a:xfrm>
             <a:off x="685800" y="1143000"/>
-            <a:ext cx="5486040" cy="3085920"/>
-          </a:xfrm>
-          <a:prstGeom prst="rect">
-            <a:avLst/>
-          </a:prstGeom>
-          <a:ln w="0">
-            <a:noFill/>
-          </a:ln>
-        </p:spPr>
-      </p:sp>
-      <p:sp>
-        <p:nvSpPr>
-          <p:cNvPr id="213" name="PlaceHolder 2"/>
+            <a:ext cx="5484960" cy="3084840"/>
+          </a:xfrm>
+          <a:prstGeom prst="rect">
+            <a:avLst/>
+          </a:prstGeom>
+          <a:ln w="0">
+            <a:noFill/>
+          </a:ln>
+        </p:spPr>
+      </p:sp>
+      <p:sp>
+        <p:nvSpPr>
+          <p:cNvPr id="239" name="PlaceHolder 2"/>
           <p:cNvSpPr>
             <a:spLocks noGrp="1"/>
           </p:cNvSpPr>
@@ -1613,7 +2036,7 @@
         <p:spPr>
           <a:xfrm>
             <a:off x="685800" y="4400640"/>
-            <a:ext cx="5486040" cy="3600000"/>
+            <a:ext cx="5484960" cy="3598920"/>
           </a:xfrm>
           <a:prstGeom prst="rect">
             <a:avLst/>
@@ -1644,7 +2067,7 @@
       </p:sp>
       <p:sp>
         <p:nvSpPr>
-          <p:cNvPr id="214" name="PlaceHolder 3"/>
+          <p:cNvPr id="240" name="PlaceHolder 3"/>
           <p:cNvSpPr>
             <a:spLocks noGrp="1"/>
           </p:cNvSpPr>
@@ -1655,7 +2078,7 @@
         <p:spPr>
           <a:xfrm>
             <a:off x="3884760" y="8685360"/>
-            <a:ext cx="2971440" cy="458280"/>
+            <a:ext cx="2970360" cy="457200"/>
           </a:xfrm>
           <a:prstGeom prst="rect">
             <a:avLst/>
@@ -1675,7 +2098,10 @@
                 <a:spcPct val="100000"/>
               </a:lnSpc>
               <a:buNone/>
-              <a:defRPr lang="en-US" sz="1200" b="0" u="none" strike="noStrike">
+              <a:tabLst>
+                <a:tab algn="l" pos="0"/>
+              </a:tabLst>
+              <a:defRPr lang="pt-PT" sz="1200" b="0" u="none" strike="noStrike">
                 <a:solidFill>
                   <a:schemeClr val="dk1"/>
                 </a:solidFill>
@@ -1692,9 +2118,12 @@
                 <a:spcPct val="100000"/>
               </a:lnSpc>
               <a:buNone/>
-            </a:pPr>
-            <a:fld id="{67232928-39DE-43DB-8666-E2008E9E98AC}" type="slidenum">
-              <a:rPr lang="en-US" sz="1200" b="0" u="none" strike="noStrike">
+              <a:tabLst>
+                <a:tab algn="l" pos="0"/>
+              </a:tabLst>
+            </a:pPr>
+            <a:fld id="{AA0B5F14-0820-4B45-88A6-3E78504E913C}" type="slidenum">
+              <a:rPr lang="pt-PT" sz="1200" b="0" u="none" strike="noStrike">
                 <a:solidFill>
                   <a:schemeClr val="dk1"/>
                 </a:solidFill>
@@ -1740,7 +2169,7 @@
       </p:grpSpPr>
       <p:sp>
         <p:nvSpPr>
-          <p:cNvPr id="215" name="PlaceHolder 1"/>
+          <p:cNvPr id="241" name="PlaceHolder 1"/>
           <p:cNvSpPr>
             <a:spLocks noGrp="1"/>
           </p:cNvSpPr>
@@ -1751,19 +2180,19 @@
         <p:spPr>
           <a:xfrm>
             <a:off x="685800" y="1143000"/>
-            <a:ext cx="5486040" cy="3085920"/>
-          </a:xfrm>
-          <a:prstGeom prst="rect">
-            <a:avLst/>
-          </a:prstGeom>
-          <a:ln w="0">
-            <a:noFill/>
-          </a:ln>
-        </p:spPr>
-      </p:sp>
-      <p:sp>
-        <p:nvSpPr>
-          <p:cNvPr id="216" name="PlaceHolder 2"/>
+            <a:ext cx="5484960" cy="3084840"/>
+          </a:xfrm>
+          <a:prstGeom prst="rect">
+            <a:avLst/>
+          </a:prstGeom>
+          <a:ln w="0">
+            <a:noFill/>
+          </a:ln>
+        </p:spPr>
+      </p:sp>
+      <p:sp>
+        <p:nvSpPr>
+          <p:cNvPr id="242" name="PlaceHolder 2"/>
           <p:cNvSpPr>
             <a:spLocks noGrp="1"/>
           </p:cNvSpPr>
@@ -1774,7 +2203,7 @@
         <p:spPr>
           <a:xfrm>
             <a:off x="685800" y="4400640"/>
-            <a:ext cx="5486040" cy="3600000"/>
+            <a:ext cx="5484960" cy="3598920"/>
           </a:xfrm>
           <a:prstGeom prst="rect">
             <a:avLst/>
@@ -1805,7 +2234,7 @@
       </p:sp>
       <p:sp>
         <p:nvSpPr>
-          <p:cNvPr id="217" name="PlaceHolder 3"/>
+          <p:cNvPr id="243" name="PlaceHolder 3"/>
           <p:cNvSpPr>
             <a:spLocks noGrp="1"/>
           </p:cNvSpPr>
@@ -1816,7 +2245,7 @@
         <p:spPr>
           <a:xfrm>
             <a:off x="3884760" y="8685360"/>
-            <a:ext cx="2971440" cy="458280"/>
+            <a:ext cx="2970360" cy="457200"/>
           </a:xfrm>
           <a:prstGeom prst="rect">
             <a:avLst/>
@@ -1836,7 +2265,10 @@
                 <a:spcPct val="100000"/>
               </a:lnSpc>
               <a:buNone/>
-              <a:defRPr lang="en-US" sz="1200" b="0" u="none" strike="noStrike">
+              <a:tabLst>
+                <a:tab algn="l" pos="0"/>
+              </a:tabLst>
+              <a:defRPr lang="pt-PT" sz="1200" b="0" u="none" strike="noStrike">
                 <a:solidFill>
                   <a:schemeClr val="dk1"/>
                 </a:solidFill>
@@ -1853,9 +2285,12 @@
                 <a:spcPct val="100000"/>
               </a:lnSpc>
               <a:buNone/>
-            </a:pPr>
-            <a:fld id="{85120108-A1DA-4ECF-B520-2BA577979630}" type="slidenum">
-              <a:rPr lang="en-US" sz="1200" b="0" u="none" strike="noStrike">
+              <a:tabLst>
+                <a:tab algn="l" pos="0"/>
+              </a:tabLst>
+            </a:pPr>
+            <a:fld id="{5E9B02F3-F6D4-4EF1-AFA0-CE176635D7CD}" type="slidenum">
+              <a:rPr lang="pt-PT" sz="1200" b="0" u="none" strike="noStrike">
                 <a:solidFill>
                   <a:schemeClr val="dk1"/>
                 </a:solidFill>
@@ -1956,27 +2391,82 @@
             <a:noAutofit/>
           </a:bodyPr>
           <a:p>
-            <a:pPr indent="0">
+            <a:pPr indent="0" algn="ctr">
               <a:buNone/>
             </a:pPr>
             <a:r>
-              <a:rPr lang="pt-PT" sz="1800" b="0" u="none" strike="noStrike">
-                <a:solidFill>
-                  <a:schemeClr val="dk1"/>
-                </a:solidFill>
-                <a:effectLst/>
-                <a:uFillTx/>
-                <a:latin typeface="Calibri"/>
-              </a:rPr>
-              <a:t>Clique para editar o formato do título</a:t>
-            </a:r>
-            <a:endParaRPr lang="pt-PT" sz="1800" b="0" u="none" strike="noStrike">
-              <a:solidFill>
-                <a:schemeClr val="dk1"/>
-              </a:solidFill>
-              <a:effectLst/>
-              <a:uFillTx/>
-              <a:latin typeface="Calibri"/>
+              <a:rPr lang="pt-PT" sz="4400" b="0" u="none" strike="noStrike">
+                <a:solidFill>
+                  <a:srgbClr val="000000"/>
+                </a:solidFill>
+                <a:effectLst/>
+                <a:uFillTx/>
+                <a:latin typeface="Arial"/>
+              </a:rPr>
+              <a:t>Clique </a:t>
+            </a:r>
+            <a:r>
+              <a:rPr lang="pt-PT" sz="4400" b="0" u="none" strike="noStrike">
+                <a:solidFill>
+                  <a:srgbClr val="000000"/>
+                </a:solidFill>
+                <a:effectLst/>
+                <a:uFillTx/>
+                <a:latin typeface="Arial"/>
+              </a:rPr>
+              <a:t>para </a:t>
+            </a:r>
+            <a:r>
+              <a:rPr lang="pt-PT" sz="4400" b="0" u="none" strike="noStrike">
+                <a:solidFill>
+                  <a:srgbClr val="000000"/>
+                </a:solidFill>
+                <a:effectLst/>
+                <a:uFillTx/>
+                <a:latin typeface="Arial"/>
+              </a:rPr>
+              <a:t>editar o </a:t>
+            </a:r>
+            <a:r>
+              <a:rPr lang="pt-PT" sz="4400" b="0" u="none" strike="noStrike">
+                <a:solidFill>
+                  <a:srgbClr val="000000"/>
+                </a:solidFill>
+                <a:effectLst/>
+                <a:uFillTx/>
+                <a:latin typeface="Arial"/>
+              </a:rPr>
+              <a:t>formato </a:t>
+            </a:r>
+            <a:r>
+              <a:rPr lang="pt-PT" sz="4400" b="0" u="none" strike="noStrike">
+                <a:solidFill>
+                  <a:srgbClr val="000000"/>
+                </a:solidFill>
+                <a:effectLst/>
+                <a:uFillTx/>
+                <a:latin typeface="Arial"/>
+              </a:rPr>
+              <a:t>do </a:t>
+            </a:r>
+            <a:r>
+              <a:rPr lang="pt-PT" sz="4400" b="0" u="none" strike="noStrike">
+                <a:solidFill>
+                  <a:srgbClr val="000000"/>
+                </a:solidFill>
+                <a:effectLst/>
+                <a:uFillTx/>
+                <a:latin typeface="Arial"/>
+              </a:rPr>
+              <a:t>título</a:t>
+            </a:r>
+            <a:endParaRPr lang="pt-PT" sz="4400" b="0" u="none" strike="noStrike">
+              <a:solidFill>
+                <a:srgbClr val="000000"/>
+              </a:solidFill>
+              <a:effectLst/>
+              <a:uFillTx/>
+              <a:latin typeface="Arial"/>
             </a:endParaRPr>
           </a:p>
         </p:txBody>
@@ -2023,21 +2513,21 @@
             <a:r>
               <a:rPr lang="pt-PT" sz="3200" b="0" u="none" strike="noStrike">
                 <a:solidFill>
-                  <a:schemeClr val="dk1"/>
-                </a:solidFill>
-                <a:effectLst/>
-                <a:uFillTx/>
-                <a:latin typeface="Calibri"/>
+                  <a:srgbClr val="000000"/>
+                </a:solidFill>
+                <a:effectLst/>
+                <a:uFillTx/>
+                <a:latin typeface="Arial"/>
               </a:rPr>
               <a:t>Clique para editar o formato de texto dos tópicos</a:t>
             </a:r>
             <a:endParaRPr lang="pt-PT" sz="3200" b="0" u="none" strike="noStrike">
               <a:solidFill>
-                <a:schemeClr val="dk1"/>
-              </a:solidFill>
-              <a:effectLst/>
-              <a:uFillTx/>
-              <a:latin typeface="Calibri"/>
+                <a:srgbClr val="000000"/>
+              </a:solidFill>
+              <a:effectLst/>
+              <a:uFillTx/>
+              <a:latin typeface="Arial"/>
             </a:endParaRPr>
           </a:p>
           <a:p>
@@ -2053,23 +2543,23 @@
               <a:buChar char=""/>
             </a:pPr>
             <a:r>
-              <a:rPr lang="pt-PT" sz="2400" b="0" u="none" strike="noStrike">
-                <a:solidFill>
-                  <a:schemeClr val="dk1"/>
-                </a:solidFill>
-                <a:effectLst/>
-                <a:uFillTx/>
-                <a:latin typeface="Calibri"/>
+              <a:rPr lang="pt-PT" sz="2800" b="0" u="none" strike="noStrike">
+                <a:solidFill>
+                  <a:srgbClr val="000000"/>
+                </a:solidFill>
+                <a:effectLst/>
+                <a:uFillTx/>
+                <a:latin typeface="Arial"/>
               </a:rPr>
               <a:t>Segundo nível de tópicos</a:t>
             </a:r>
-            <a:endParaRPr lang="pt-PT" sz="2400" b="0" u="none" strike="noStrike">
-              <a:solidFill>
-                <a:schemeClr val="dk1"/>
-              </a:solidFill>
-              <a:effectLst/>
-              <a:uFillTx/>
-              <a:latin typeface="Calibri"/>
+            <a:endParaRPr lang="pt-PT" sz="2800" b="0" u="none" strike="noStrike">
+              <a:solidFill>
+                <a:srgbClr val="000000"/>
+              </a:solidFill>
+              <a:effectLst/>
+              <a:uFillTx/>
+              <a:latin typeface="Arial"/>
             </a:endParaRPr>
           </a:p>
           <a:p>
@@ -2085,23 +2575,23 @@
               <a:buChar char=""/>
             </a:pPr>
             <a:r>
-              <a:rPr lang="pt-PT" sz="2000" b="0" u="none" strike="noStrike">
-                <a:solidFill>
-                  <a:schemeClr val="dk1"/>
-                </a:solidFill>
-                <a:effectLst/>
-                <a:uFillTx/>
-                <a:latin typeface="Calibri"/>
+              <a:rPr lang="pt-PT" sz="2400" b="0" u="none" strike="noStrike">
+                <a:solidFill>
+                  <a:srgbClr val="000000"/>
+                </a:solidFill>
+                <a:effectLst/>
+                <a:uFillTx/>
+                <a:latin typeface="Arial"/>
               </a:rPr>
               <a:t>Terceiro nível de tópicos</a:t>
             </a:r>
-            <a:endParaRPr lang="pt-PT" sz="2000" b="0" u="none" strike="noStrike">
-              <a:solidFill>
-                <a:schemeClr val="dk1"/>
-              </a:solidFill>
-              <a:effectLst/>
-              <a:uFillTx/>
-              <a:latin typeface="Calibri"/>
+            <a:endParaRPr lang="pt-PT" sz="2400" b="0" u="none" strike="noStrike">
+              <a:solidFill>
+                <a:srgbClr val="000000"/>
+              </a:solidFill>
+              <a:effectLst/>
+              <a:uFillTx/>
+              <a:latin typeface="Arial"/>
             </a:endParaRPr>
           </a:p>
           <a:p>
@@ -2119,21 +2609,21 @@
             <a:r>
               <a:rPr lang="pt-PT" sz="2000" b="0" u="none" strike="noStrike">
                 <a:solidFill>
-                  <a:schemeClr val="dk1"/>
-                </a:solidFill>
-                <a:effectLst/>
-                <a:uFillTx/>
-                <a:latin typeface="Calibri"/>
+                  <a:srgbClr val="000000"/>
+                </a:solidFill>
+                <a:effectLst/>
+                <a:uFillTx/>
+                <a:latin typeface="Arial"/>
               </a:rPr>
               <a:t>Quarto nível de tópicos</a:t>
             </a:r>
             <a:endParaRPr lang="pt-PT" sz="2000" b="0" u="none" strike="noStrike">
               <a:solidFill>
-                <a:schemeClr val="dk1"/>
-              </a:solidFill>
-              <a:effectLst/>
-              <a:uFillTx/>
-              <a:latin typeface="Calibri"/>
+                <a:srgbClr val="000000"/>
+              </a:solidFill>
+              <a:effectLst/>
+              <a:uFillTx/>
+              <a:latin typeface="Arial"/>
             </a:endParaRPr>
           </a:p>
           <a:p>
@@ -2151,21 +2641,21 @@
             <a:r>
               <a:rPr lang="pt-PT" sz="2000" b="0" u="none" strike="noStrike">
                 <a:solidFill>
-                  <a:schemeClr val="dk1"/>
-                </a:solidFill>
-                <a:effectLst/>
-                <a:uFillTx/>
-                <a:latin typeface="Calibri"/>
+                  <a:srgbClr val="000000"/>
+                </a:solidFill>
+                <a:effectLst/>
+                <a:uFillTx/>
+                <a:latin typeface="Arial"/>
               </a:rPr>
               <a:t>Quinto nível de tópicos</a:t>
             </a:r>
             <a:endParaRPr lang="pt-PT" sz="2000" b="0" u="none" strike="noStrike">
               <a:solidFill>
-                <a:schemeClr val="dk1"/>
-              </a:solidFill>
-              <a:effectLst/>
-              <a:uFillTx/>
-              <a:latin typeface="Calibri"/>
+                <a:srgbClr val="000000"/>
+              </a:solidFill>
+              <a:effectLst/>
+              <a:uFillTx/>
+              <a:latin typeface="Arial"/>
             </a:endParaRPr>
           </a:p>
           <a:p>
@@ -2183,21 +2673,21 @@
             <a:r>
               <a:rPr lang="pt-PT" sz="2000" b="0" u="none" strike="noStrike">
                 <a:solidFill>
-                  <a:schemeClr val="dk1"/>
-                </a:solidFill>
-                <a:effectLst/>
-                <a:uFillTx/>
-                <a:latin typeface="Calibri"/>
+                  <a:srgbClr val="000000"/>
+                </a:solidFill>
+                <a:effectLst/>
+                <a:uFillTx/>
+                <a:latin typeface="Arial"/>
               </a:rPr>
               <a:t>Sexto nível de tópicos</a:t>
             </a:r>
             <a:endParaRPr lang="pt-PT" sz="2000" b="0" u="none" strike="noStrike">
               <a:solidFill>
-                <a:schemeClr val="dk1"/>
-              </a:solidFill>
-              <a:effectLst/>
-              <a:uFillTx/>
-              <a:latin typeface="Calibri"/>
+                <a:srgbClr val="000000"/>
+              </a:solidFill>
+              <a:effectLst/>
+              <a:uFillTx/>
+              <a:latin typeface="Arial"/>
             </a:endParaRPr>
           </a:p>
           <a:p>
@@ -2215,21 +2705,21 @@
             <a:r>
               <a:rPr lang="pt-PT" sz="2000" b="0" u="none" strike="noStrike">
                 <a:solidFill>
-                  <a:schemeClr val="dk1"/>
-                </a:solidFill>
-                <a:effectLst/>
-                <a:uFillTx/>
-                <a:latin typeface="Calibri"/>
+                  <a:srgbClr val="000000"/>
+                </a:solidFill>
+                <a:effectLst/>
+                <a:uFillTx/>
+                <a:latin typeface="Arial"/>
               </a:rPr>
               <a:t>Sétimo nível de tópicos</a:t>
             </a:r>
             <a:endParaRPr lang="pt-PT" sz="2000" b="0" u="none" strike="noStrike">
               <a:solidFill>
-                <a:schemeClr val="dk1"/>
-              </a:solidFill>
-              <a:effectLst/>
-              <a:uFillTx/>
-              <a:latin typeface="Calibri"/>
+                <a:srgbClr val="000000"/>
+              </a:solidFill>
+              <a:effectLst/>
+              <a:uFillTx/>
+              <a:latin typeface="Arial"/>
             </a:endParaRPr>
           </a:p>
         </p:txBody>
@@ -2276,7 +2766,7 @@
         <p:spPr>
           <a:xfrm>
             <a:off x="822960" y="822960"/>
-            <a:ext cx="1005480" cy="1005480"/>
+            <a:ext cx="1004400" cy="1004400"/>
           </a:xfrm>
           <a:prstGeom prst="roundRect">
             <a:avLst>
@@ -2301,6 +2791,11 @@
             <a:noAutofit/>
           </a:bodyPr>
           <a:p>
+            <a:pPr>
+              <a:lnSpc>
+                <a:spcPct val="100000"/>
+              </a:lnSpc>
+            </a:pPr>
             <a:endParaRPr lang="pt-PT" sz="1800" b="0" u="none" strike="noStrike">
               <a:solidFill>
                 <a:srgbClr val="ffffff"/>
@@ -2321,7 +2816,7 @@
         <p:spPr>
           <a:xfrm>
             <a:off x="822960" y="822960"/>
-            <a:ext cx="1005480" cy="1005480"/>
+            <a:ext cx="1004400" cy="1004400"/>
           </a:xfrm>
           <a:prstGeom prst="rect">
             <a:avLst/>
@@ -2382,7 +2877,7 @@
         <p:spPr>
           <a:xfrm>
             <a:off x="822960" y="2651760"/>
-            <a:ext cx="10515240" cy="1005480"/>
+            <a:ext cx="10514160" cy="1004400"/>
           </a:xfrm>
           <a:prstGeom prst="rect">
             <a:avLst/>
@@ -2443,7 +2938,7 @@
         <p:spPr>
           <a:xfrm>
             <a:off x="822960" y="3493080"/>
-            <a:ext cx="10515240" cy="548280"/>
+            <a:ext cx="10514160" cy="547200"/>
           </a:xfrm>
           <a:prstGeom prst="rect">
             <a:avLst/>
@@ -2547,7 +3042,7 @@
         <p:spPr>
           <a:xfrm>
             <a:off x="822960" y="5486400"/>
-            <a:ext cx="5486040" cy="365400"/>
+            <a:ext cx="5484960" cy="364320"/>
           </a:xfrm>
           <a:prstGeom prst="rect">
             <a:avLst/>
@@ -2608,7 +3103,7 @@
         <p:spPr>
           <a:xfrm>
             <a:off x="822960" y="5852160"/>
-            <a:ext cx="5486040" cy="365400"/>
+            <a:ext cx="5484960" cy="364320"/>
           </a:xfrm>
           <a:prstGeom prst="rect">
             <a:avLst/>
@@ -2650,6 +3145,1212 @@
               <a:t>Orientação: Prof. Eng. Sebilson Cristovão</a:t>
             </a:r>
             <a:endParaRPr lang="pt-PT" sz="1200" b="0" u="none" strike="noStrike">
+              <a:solidFill>
+                <a:srgbClr val="ffffff"/>
+              </a:solidFill>
+              <a:effectLst/>
+              <a:uFillTx/>
+              <a:latin typeface="Arial"/>
+            </a:endParaRPr>
+          </a:p>
+        </p:txBody>
+      </p:sp>
+    </p:spTree>
+  </p:cSld>
+  <mc:AlternateContent>
+    <mc:Choice Requires="p14">
+      <p:transition spd="slow" p14:dur="2000"/>
+    </mc:Choice>
+    <mc:Fallback>
+      <p:transition spd="slow"/>
+    </mc:Fallback>
+  </mc:AlternateContent>
+</p:sld>
+</file>
+
+<file path=ppt/slides/slide10.xml><?xml version="1.0" encoding="utf-8"?>
+<p:sld xmlns:a="http://schemas.openxmlformats.org/drawingml/2006/main" xmlns:p="http://schemas.openxmlformats.org/presentationml/2006/main" xmlns:r="http://schemas.openxmlformats.org/officeDocument/2006/relationships" xmlns:p14="http://schemas.microsoft.com/office/powerpoint/2010/main" xmlns:p15="http://schemas.microsoft.com/office/powerpoint/2012/main" xmlns:mc="http://schemas.openxmlformats.org/markup-compatibility/2006">
+  <p:cSld>
+    <p:bg>
+      <p:bgPr>
+        <a:solidFill>
+          <a:srgbClr val="f2f4f7"/>
+        </a:solidFill>
+      </p:bgPr>
+    </p:bg>
+    <p:spTree>
+      <p:nvGrpSpPr>
+        <p:cNvPr id="1" name=""/>
+        <p:cNvGrpSpPr/>
+        <p:nvPr/>
+      </p:nvGrpSpPr>
+      <p:grpSpPr>
+        <a:xfrm>
+          <a:off x="0" y="0"/>
+          <a:ext cx="0" cy="0"/>
+          <a:chOff x="0" y="0"/>
+          <a:chExt cx="0" cy="0"/>
+        </a:xfrm>
+      </p:grpSpPr>
+      <p:sp>
+        <p:nvSpPr>
+          <p:cNvPr id="196" name="Text 36"/>
+          <p:cNvSpPr/>
+          <p:nvPr/>
+        </p:nvSpPr>
+        <p:spPr>
+          <a:xfrm>
+            <a:off x="640080" y="457200"/>
+            <a:ext cx="7313760" cy="318600"/>
+          </a:xfrm>
+          <a:prstGeom prst="rect">
+            <a:avLst/>
+          </a:prstGeom>
+          <a:noFill/>
+          <a:ln w="0">
+            <a:noFill/>
+          </a:ln>
+        </p:spPr>
+        <p:style>
+          <a:lnRef idx="0"/>
+          <a:fillRef idx="0"/>
+          <a:effectRef idx="0"/>
+          <a:fontRef idx="minor"/>
+        </p:style>
+        <p:txBody>
+          <a:bodyPr lIns="90000" rIns="90000" tIns="45000" bIns="45000" anchor="ctr">
+            <a:noAutofit/>
+          </a:bodyPr>
+          <a:p>
+            <a:pPr defTabSz="914400">
+              <a:lnSpc>
+                <a:spcPct val="100000"/>
+              </a:lnSpc>
+              <a:tabLst>
+                <a:tab algn="l" pos="0"/>
+              </a:tabLst>
+            </a:pPr>
+            <a:r>
+              <a:rPr lang="pt-PT" sz="1200" b="1" u="none" spc="99" strike="noStrike">
+                <a:solidFill>
+                  <a:srgbClr val="1f6f63"/>
+                </a:solidFill>
+                <a:effectLst/>
+                <a:uFillTx/>
+                <a:latin typeface="Inter"/>
+                <a:ea typeface="Inter"/>
+              </a:rPr>
+              <a:t>07</a:t>
+            </a:r>
+            <a:endParaRPr lang="pt-PT" sz="1200" b="0" u="none" strike="noStrike">
+              <a:solidFill>
+                <a:srgbClr val="000000"/>
+              </a:solidFill>
+              <a:effectLst/>
+              <a:uFillTx/>
+              <a:latin typeface="Arial"/>
+            </a:endParaRPr>
+          </a:p>
+        </p:txBody>
+      </p:sp>
+      <p:sp>
+        <p:nvSpPr>
+          <p:cNvPr id="197" name="Text 38"/>
+          <p:cNvSpPr/>
+          <p:nvPr/>
+        </p:nvSpPr>
+        <p:spPr>
+          <a:xfrm>
+            <a:off x="640080" y="749880"/>
+            <a:ext cx="10056960" cy="684360"/>
+          </a:xfrm>
+          <a:prstGeom prst="rect">
+            <a:avLst/>
+          </a:prstGeom>
+          <a:noFill/>
+          <a:ln w="0">
+            <a:noFill/>
+          </a:ln>
+        </p:spPr>
+        <p:style>
+          <a:lnRef idx="0"/>
+          <a:fillRef idx="0"/>
+          <a:effectRef idx="0"/>
+          <a:fontRef idx="minor"/>
+        </p:style>
+        <p:txBody>
+          <a:bodyPr lIns="90000" rIns="90000" tIns="45000" bIns="45000" anchor="ctr">
+            <a:noAutofit/>
+          </a:bodyPr>
+          <a:p>
+            <a:pPr defTabSz="914400">
+              <a:lnSpc>
+                <a:spcPct val="100000"/>
+              </a:lnSpc>
+              <a:tabLst>
+                <a:tab algn="l" pos="0"/>
+              </a:tabLst>
+            </a:pPr>
+            <a:r>
+              <a:rPr lang="pt-PT" sz="2800" b="1" u="none" strike="noStrike">
+                <a:solidFill>
+                  <a:srgbClr val="0d2b2e"/>
+                </a:solidFill>
+                <a:effectLst/>
+                <a:uFillTx/>
+                <a:latin typeface="Poppins"/>
+                <a:ea typeface="Poppins"/>
+              </a:rPr>
+              <a:t>Demonstração</a:t>
+            </a:r>
+            <a:endParaRPr lang="pt-PT" sz="2800" b="0" u="none" strike="noStrike">
+              <a:solidFill>
+                <a:srgbClr val="000000"/>
+              </a:solidFill>
+              <a:effectLst/>
+              <a:uFillTx/>
+              <a:latin typeface="Arial"/>
+            </a:endParaRPr>
+          </a:p>
+        </p:txBody>
+      </p:sp>
+      <p:sp>
+        <p:nvSpPr>
+          <p:cNvPr id="198" name="Shape 21"/>
+          <p:cNvSpPr/>
+          <p:nvPr/>
+        </p:nvSpPr>
+        <p:spPr>
+          <a:xfrm rot="5429400">
+            <a:off x="886680" y="1900440"/>
+            <a:ext cx="2673000" cy="3663000"/>
+          </a:xfrm>
+          <a:prstGeom prst="roundRect">
+            <a:avLst>
+              <a:gd name="adj" fmla="val 3509"/>
+            </a:avLst>
+          </a:prstGeom>
+          <a:solidFill>
+            <a:srgbClr val="ffffff"/>
+          </a:solidFill>
+          <a:ln w="0">
+            <a:noFill/>
+          </a:ln>
+          <a:effectLst>
+            <a:outerShdw algn="bl" blurRad="76320" dir="5400000" dist="25560" kx="0" ky="0" rotWithShape="0" sx="100000" sy="100000">
+              <a:srgbClr val="000000">
+                <a:alpha val="10000"/>
+              </a:srgbClr>
+            </a:outerShdw>
+          </a:effectLst>
+        </p:spPr>
+        <p:style>
+          <a:lnRef idx="0"/>
+          <a:fillRef idx="0"/>
+          <a:effectRef idx="0"/>
+          <a:fontRef idx="minor"/>
+        </p:style>
+        <p:txBody>
+          <a:bodyPr lIns="90000" rIns="90000" tIns="45000" bIns="45000" anchor="t">
+            <a:noAutofit/>
+          </a:bodyPr>
+          <a:p>
+            <a:endParaRPr lang="pt-PT" sz="1800" b="0" u="none" strike="noStrike">
+              <a:solidFill>
+                <a:srgbClr val="000000"/>
+              </a:solidFill>
+              <a:effectLst/>
+              <a:uFillTx/>
+              <a:latin typeface="Arial"/>
+            </a:endParaRPr>
+          </a:p>
+        </p:txBody>
+      </p:sp>
+      <p:sp>
+        <p:nvSpPr>
+          <p:cNvPr id="199" name="Text 39"/>
+          <p:cNvSpPr/>
+          <p:nvPr/>
+        </p:nvSpPr>
+        <p:spPr>
+          <a:xfrm>
+            <a:off x="600480" y="2563560"/>
+            <a:ext cx="2204280" cy="467640"/>
+          </a:xfrm>
+          <a:prstGeom prst="rect">
+            <a:avLst/>
+          </a:prstGeom>
+          <a:noFill/>
+          <a:ln w="0">
+            <a:noFill/>
+          </a:ln>
+        </p:spPr>
+        <p:style>
+          <a:lnRef idx="0"/>
+          <a:fillRef idx="0"/>
+          <a:effectRef idx="0"/>
+          <a:fontRef idx="minor"/>
+        </p:style>
+        <p:txBody>
+          <a:bodyPr lIns="90000" rIns="90000" tIns="45000" bIns="45000" anchor="ctr">
+            <a:noAutofit/>
+          </a:bodyPr>
+          <a:p>
+            <a:pPr defTabSz="914400">
+              <a:lnSpc>
+                <a:spcPct val="100000"/>
+              </a:lnSpc>
+              <a:tabLst>
+                <a:tab algn="l" pos="0"/>
+              </a:tabLst>
+            </a:pPr>
+            <a:r>
+              <a:rPr lang="pt-PT" sz="1300" b="1" u="none" strike="noStrike">
+                <a:solidFill>
+                  <a:srgbClr val="0d2b2e"/>
+                </a:solidFill>
+                <a:effectLst/>
+                <a:uFillTx/>
+                <a:latin typeface="Poppins"/>
+                <a:ea typeface="Poppins"/>
+              </a:rPr>
+              <a:t>Charts</a:t>
+            </a:r>
+            <a:endParaRPr lang="pt-PT" sz="1300" b="0" u="none" strike="noStrike">
+              <a:solidFill>
+                <a:srgbClr val="000000"/>
+              </a:solidFill>
+              <a:effectLst/>
+              <a:uFillTx/>
+              <a:latin typeface="Arial"/>
+            </a:endParaRPr>
+          </a:p>
+        </p:txBody>
+      </p:sp>
+      <p:sp>
+        <p:nvSpPr>
+          <p:cNvPr id="200" name="Text 40"/>
+          <p:cNvSpPr/>
+          <p:nvPr/>
+        </p:nvSpPr>
+        <p:spPr>
+          <a:xfrm>
+            <a:off x="457200" y="6537960"/>
+            <a:ext cx="5484960" cy="272880"/>
+          </a:xfrm>
+          <a:prstGeom prst="rect">
+            <a:avLst/>
+          </a:prstGeom>
+          <a:noFill/>
+          <a:ln w="0">
+            <a:noFill/>
+          </a:ln>
+        </p:spPr>
+        <p:style>
+          <a:lnRef idx="0"/>
+          <a:fillRef idx="0"/>
+          <a:effectRef idx="0"/>
+          <a:fontRef idx="minor"/>
+        </p:style>
+        <p:txBody>
+          <a:bodyPr lIns="90000" rIns="90000" tIns="45000" bIns="45000" anchor="ctr">
+            <a:noAutofit/>
+          </a:bodyPr>
+          <a:p>
+            <a:pPr defTabSz="914400">
+              <a:lnSpc>
+                <a:spcPct val="100000"/>
+              </a:lnSpc>
+              <a:tabLst>
+                <a:tab algn="l" pos="0"/>
+              </a:tabLst>
+            </a:pPr>
+            <a:r>
+              <a:rPr lang="pt-PT" sz="900" b="0" u="none" strike="noStrike">
+                <a:solidFill>
+                  <a:srgbClr val="5f6b6a"/>
+                </a:solidFill>
+                <a:effectLst/>
+                <a:uFillTx/>
+                <a:latin typeface="Inter"/>
+                <a:ea typeface="Inter"/>
+              </a:rPr>
+              <a:t>Personal Finance Manager</a:t>
+            </a:r>
+            <a:endParaRPr lang="pt-PT" sz="900" b="0" u="none" strike="noStrike">
+              <a:solidFill>
+                <a:srgbClr val="000000"/>
+              </a:solidFill>
+              <a:effectLst/>
+              <a:uFillTx/>
+              <a:latin typeface="Arial"/>
+            </a:endParaRPr>
+          </a:p>
+        </p:txBody>
+      </p:sp>
+      <p:sp>
+        <p:nvSpPr>
+          <p:cNvPr id="201" name="Text 41"/>
+          <p:cNvSpPr/>
+          <p:nvPr/>
+        </p:nvSpPr>
+        <p:spPr>
+          <a:xfrm>
+            <a:off x="11521440" y="6537960"/>
+            <a:ext cx="455760" cy="272880"/>
+          </a:xfrm>
+          <a:prstGeom prst="rect">
+            <a:avLst/>
+          </a:prstGeom>
+          <a:noFill/>
+          <a:ln w="0">
+            <a:noFill/>
+          </a:ln>
+        </p:spPr>
+        <p:style>
+          <a:lnRef idx="0"/>
+          <a:fillRef idx="0"/>
+          <a:effectRef idx="0"/>
+          <a:fontRef idx="minor"/>
+        </p:style>
+        <p:txBody>
+          <a:bodyPr lIns="90000" rIns="90000" tIns="45000" bIns="45000" anchor="ctr">
+            <a:noAutofit/>
+          </a:bodyPr>
+          <a:p>
+            <a:pPr algn="r" defTabSz="914400">
+              <a:lnSpc>
+                <a:spcPct val="100000"/>
+              </a:lnSpc>
+              <a:tabLst>
+                <a:tab algn="l" pos="0"/>
+              </a:tabLst>
+            </a:pPr>
+            <a:r>
+              <a:rPr lang="pt-PT" sz="900" b="0" u="none" strike="noStrike">
+                <a:solidFill>
+                  <a:srgbClr val="5f6b6a"/>
+                </a:solidFill>
+                <a:effectLst/>
+                <a:uFillTx/>
+                <a:latin typeface="Inter"/>
+                <a:ea typeface="Inter"/>
+              </a:rPr>
+              <a:t>8</a:t>
+            </a:r>
+            <a:endParaRPr lang="pt-PT" sz="900" b="0" u="none" strike="noStrike">
+              <a:solidFill>
+                <a:srgbClr val="000000"/>
+              </a:solidFill>
+              <a:effectLst/>
+              <a:uFillTx/>
+              <a:latin typeface="Arial"/>
+            </a:endParaRPr>
+          </a:p>
+        </p:txBody>
+      </p:sp>
+      <p:sp>
+        <p:nvSpPr>
+          <p:cNvPr id="202" name="Shape 25"/>
+          <p:cNvSpPr/>
+          <p:nvPr/>
+        </p:nvSpPr>
+        <p:spPr>
+          <a:xfrm rot="5427600">
+            <a:off x="4651560" y="1988640"/>
+            <a:ext cx="2673000" cy="3502080"/>
+          </a:xfrm>
+          <a:prstGeom prst="roundRect">
+            <a:avLst>
+              <a:gd name="adj" fmla="val 3509"/>
+            </a:avLst>
+          </a:prstGeom>
+          <a:solidFill>
+            <a:srgbClr val="ffffff"/>
+          </a:solidFill>
+          <a:ln w="0">
+            <a:noFill/>
+          </a:ln>
+          <a:effectLst>
+            <a:outerShdw algn="bl" blurRad="76320" dir="5400000" dist="25560" kx="0" ky="0" rotWithShape="0" sx="100000" sy="100000">
+              <a:srgbClr val="000000">
+                <a:alpha val="10000"/>
+              </a:srgbClr>
+            </a:outerShdw>
+          </a:effectLst>
+        </p:spPr>
+        <p:style>
+          <a:lnRef idx="0"/>
+          <a:fillRef idx="0"/>
+          <a:effectRef idx="0"/>
+          <a:fontRef idx="minor"/>
+        </p:style>
+        <p:txBody>
+          <a:bodyPr lIns="90000" rIns="90000" tIns="45000" bIns="45000" anchor="t">
+            <a:noAutofit/>
+          </a:bodyPr>
+          <a:p>
+            <a:endParaRPr lang="pt-PT" sz="1800" b="0" u="none" strike="noStrike">
+              <a:solidFill>
+                <a:srgbClr val="000000"/>
+              </a:solidFill>
+              <a:effectLst/>
+              <a:uFillTx/>
+              <a:latin typeface="Arial"/>
+            </a:endParaRPr>
+          </a:p>
+        </p:txBody>
+      </p:sp>
+      <p:sp>
+        <p:nvSpPr>
+          <p:cNvPr id="203" name="Shape 29"/>
+          <p:cNvSpPr/>
+          <p:nvPr/>
+        </p:nvSpPr>
+        <p:spPr>
+          <a:xfrm rot="5428800">
+            <a:off x="8392680" y="2022120"/>
+            <a:ext cx="2673360" cy="3533400"/>
+          </a:xfrm>
+          <a:prstGeom prst="roundRect">
+            <a:avLst>
+              <a:gd name="adj" fmla="val 3509"/>
+            </a:avLst>
+          </a:prstGeom>
+          <a:solidFill>
+            <a:srgbClr val="ffffff"/>
+          </a:solidFill>
+          <a:ln w="0">
+            <a:noFill/>
+          </a:ln>
+          <a:effectLst>
+            <a:outerShdw algn="bl" blurRad="76320" dir="5400000" dist="25560" kx="0" ky="0" rotWithShape="0" sx="100000" sy="100000">
+              <a:srgbClr val="000000">
+                <a:alpha val="10000"/>
+              </a:srgbClr>
+            </a:outerShdw>
+          </a:effectLst>
+        </p:spPr>
+        <p:style>
+          <a:lnRef idx="0"/>
+          <a:fillRef idx="0"/>
+          <a:effectRef idx="0"/>
+          <a:fontRef idx="minor"/>
+        </p:style>
+        <p:txBody>
+          <a:bodyPr lIns="90000" rIns="90000" tIns="45000" bIns="45000" anchor="t">
+            <a:noAutofit/>
+          </a:bodyPr>
+          <a:p>
+            <a:endParaRPr lang="pt-PT" sz="1800" b="0" u="none" strike="noStrike">
+              <a:solidFill>
+                <a:srgbClr val="000000"/>
+              </a:solidFill>
+              <a:effectLst/>
+              <a:uFillTx/>
+              <a:latin typeface="Arial"/>
+            </a:endParaRPr>
+          </a:p>
+        </p:txBody>
+      </p:sp>
+      <p:sp>
+        <p:nvSpPr>
+          <p:cNvPr id="204" name="Text 42"/>
+          <p:cNvSpPr/>
+          <p:nvPr/>
+        </p:nvSpPr>
+        <p:spPr>
+          <a:xfrm>
+            <a:off x="4406760" y="2608920"/>
+            <a:ext cx="2203920" cy="467640"/>
+          </a:xfrm>
+          <a:prstGeom prst="rect">
+            <a:avLst/>
+          </a:prstGeom>
+          <a:noFill/>
+          <a:ln w="0">
+            <a:noFill/>
+          </a:ln>
+        </p:spPr>
+        <p:style>
+          <a:lnRef idx="0"/>
+          <a:fillRef idx="0"/>
+          <a:effectRef idx="0"/>
+          <a:fontRef idx="minor"/>
+        </p:style>
+        <p:txBody>
+          <a:bodyPr lIns="90000" rIns="90000" tIns="45000" bIns="45000" anchor="ctr">
+            <a:noAutofit/>
+          </a:bodyPr>
+          <a:p>
+            <a:pPr defTabSz="914400">
+              <a:lnSpc>
+                <a:spcPct val="100000"/>
+              </a:lnSpc>
+              <a:tabLst>
+                <a:tab algn="l" pos="0"/>
+              </a:tabLst>
+            </a:pPr>
+            <a:r>
+              <a:rPr lang="pt-PT" sz="1300" b="1" u="none" strike="noStrike">
+                <a:solidFill>
+                  <a:srgbClr val="0d2b2e"/>
+                </a:solidFill>
+                <a:effectLst/>
+                <a:uFillTx/>
+                <a:latin typeface="Poppins"/>
+                <a:ea typeface="Poppins"/>
+              </a:rPr>
+              <a:t>Movimentações</a:t>
+            </a:r>
+            <a:endParaRPr lang="pt-PT" sz="1300" b="0" u="none" strike="noStrike">
+              <a:solidFill>
+                <a:srgbClr val="000000"/>
+              </a:solidFill>
+              <a:effectLst/>
+              <a:uFillTx/>
+              <a:latin typeface="Arial"/>
+            </a:endParaRPr>
+          </a:p>
+        </p:txBody>
+      </p:sp>
+      <p:sp>
+        <p:nvSpPr>
+          <p:cNvPr id="205" name="Text 43"/>
+          <p:cNvSpPr/>
+          <p:nvPr/>
+        </p:nvSpPr>
+        <p:spPr>
+          <a:xfrm>
+            <a:off x="8130960" y="2608560"/>
+            <a:ext cx="2203920" cy="467640"/>
+          </a:xfrm>
+          <a:prstGeom prst="rect">
+            <a:avLst/>
+          </a:prstGeom>
+          <a:noFill/>
+          <a:ln w="0">
+            <a:noFill/>
+          </a:ln>
+        </p:spPr>
+        <p:style>
+          <a:lnRef idx="0"/>
+          <a:fillRef idx="0"/>
+          <a:effectRef idx="0"/>
+          <a:fontRef idx="minor"/>
+        </p:style>
+        <p:txBody>
+          <a:bodyPr lIns="90000" rIns="90000" tIns="45000" bIns="45000" anchor="ctr">
+            <a:noAutofit/>
+          </a:bodyPr>
+          <a:p>
+            <a:pPr defTabSz="914400">
+              <a:lnSpc>
+                <a:spcPct val="100000"/>
+              </a:lnSpc>
+              <a:tabLst>
+                <a:tab algn="l" pos="0"/>
+              </a:tabLst>
+            </a:pPr>
+            <a:r>
+              <a:rPr lang="pt-PT" sz="1300" b="1" u="none" strike="noStrike">
+                <a:solidFill>
+                  <a:srgbClr val="0d2b2e"/>
+                </a:solidFill>
+                <a:effectLst/>
+                <a:uFillTx/>
+                <a:latin typeface="Poppins"/>
+                <a:ea typeface="Poppins"/>
+              </a:rPr>
+              <a:t>Relatório</a:t>
+            </a:r>
+            <a:endParaRPr lang="pt-PT" sz="1300" b="0" u="none" strike="noStrike">
+              <a:solidFill>
+                <a:srgbClr val="000000"/>
+              </a:solidFill>
+              <a:effectLst/>
+              <a:uFillTx/>
+              <a:latin typeface="Arial"/>
+            </a:endParaRPr>
+          </a:p>
+        </p:txBody>
+      </p:sp>
+      <p:pic>
+        <p:nvPicPr>
+          <p:cNvPr id="206" name=""/>
+          <p:cNvPicPr/>
+          <p:nvPr/>
+        </p:nvPicPr>
+        <p:blipFill>
+          <a:blip r:embed="rId1"/>
+          <a:stretch/>
+        </p:blipFill>
+        <p:spPr>
+          <a:xfrm>
+            <a:off x="529920" y="3116880"/>
+            <a:ext cx="3257640" cy="1799640"/>
+          </a:xfrm>
+          <a:prstGeom prst="rect">
+            <a:avLst/>
+          </a:prstGeom>
+          <a:noFill/>
+          <a:ln w="0">
+            <a:noFill/>
+          </a:ln>
+        </p:spPr>
+      </p:pic>
+      <p:pic>
+        <p:nvPicPr>
+          <p:cNvPr id="207" name=""/>
+          <p:cNvPicPr/>
+          <p:nvPr/>
+        </p:nvPicPr>
+        <p:blipFill>
+          <a:blip r:embed="rId2"/>
+          <a:stretch/>
+        </p:blipFill>
+        <p:spPr>
+          <a:xfrm>
+            <a:off x="4337640" y="3118320"/>
+            <a:ext cx="3256560" cy="1806120"/>
+          </a:xfrm>
+          <a:prstGeom prst="rect">
+            <a:avLst/>
+          </a:prstGeom>
+          <a:noFill/>
+          <a:ln w="0">
+            <a:noFill/>
+          </a:ln>
+        </p:spPr>
+      </p:pic>
+      <p:pic>
+        <p:nvPicPr>
+          <p:cNvPr id="208" name=""/>
+          <p:cNvPicPr/>
+          <p:nvPr/>
+        </p:nvPicPr>
+        <p:blipFill>
+          <a:blip r:embed="rId3"/>
+          <a:stretch/>
+        </p:blipFill>
+        <p:spPr>
+          <a:xfrm>
+            <a:off x="8083440" y="3210840"/>
+            <a:ext cx="3249720" cy="1746720"/>
+          </a:xfrm>
+          <a:prstGeom prst="rect">
+            <a:avLst/>
+          </a:prstGeom>
+          <a:noFill/>
+          <a:ln w="0">
+            <a:noFill/>
+          </a:ln>
+        </p:spPr>
+      </p:pic>
+    </p:spTree>
+  </p:cSld>
+  <mc:AlternateContent>
+    <mc:Choice Requires="p14">
+      <p:transition spd="slow" p14:dur="2000"/>
+    </mc:Choice>
+    <mc:Fallback>
+      <p:transition spd="slow"/>
+    </mc:Fallback>
+  </mc:AlternateContent>
+</p:sld>
+</file>
+
+<file path=ppt/slides/slide11.xml><?xml version="1.0" encoding="utf-8"?>
+<p:sld xmlns:a="http://schemas.openxmlformats.org/drawingml/2006/main" xmlns:p="http://schemas.openxmlformats.org/presentationml/2006/main" xmlns:r="http://schemas.openxmlformats.org/officeDocument/2006/relationships" xmlns:p14="http://schemas.microsoft.com/office/powerpoint/2010/main" xmlns:p15="http://schemas.microsoft.com/office/powerpoint/2012/main" xmlns:mc="http://schemas.openxmlformats.org/markup-compatibility/2006">
+  <p:cSld>
+    <p:bg>
+      <p:bgPr>
+        <a:solidFill>
+          <a:srgbClr val="0d2b2e"/>
+        </a:solidFill>
+      </p:bgPr>
+    </p:bg>
+    <p:spTree>
+      <p:nvGrpSpPr>
+        <p:cNvPr id="1" name=""/>
+        <p:cNvGrpSpPr/>
+        <p:nvPr/>
+      </p:nvGrpSpPr>
+      <p:grpSpPr>
+        <a:xfrm>
+          <a:off x="0" y="0"/>
+          <a:ext cx="0" cy="0"/>
+          <a:chOff x="0" y="0"/>
+          <a:chExt cx="0" cy="0"/>
+        </a:xfrm>
+      </p:grpSpPr>
+      <p:sp>
+        <p:nvSpPr>
+          <p:cNvPr id="209" name="Text 0"/>
+          <p:cNvSpPr/>
+          <p:nvPr/>
+        </p:nvSpPr>
+        <p:spPr>
+          <a:xfrm>
+            <a:off x="640080" y="457200"/>
+            <a:ext cx="7313760" cy="318600"/>
+          </a:xfrm>
+          <a:prstGeom prst="rect">
+            <a:avLst/>
+          </a:prstGeom>
+          <a:noFill/>
+          <a:ln w="0">
+            <a:noFill/>
+          </a:ln>
+        </p:spPr>
+        <p:style>
+          <a:lnRef idx="0"/>
+          <a:fillRef idx="0"/>
+          <a:effectRef idx="0"/>
+          <a:fontRef idx="minor"/>
+        </p:style>
+        <p:txBody>
+          <a:bodyPr lIns="90000" rIns="90000" tIns="45000" bIns="45000" anchor="ctr">
+            <a:noAutofit/>
+          </a:bodyPr>
+          <a:p>
+            <a:pPr defTabSz="914400">
+              <a:lnSpc>
+                <a:spcPct val="100000"/>
+              </a:lnSpc>
+              <a:tabLst>
+                <a:tab algn="l" pos="0"/>
+              </a:tabLst>
+            </a:pPr>
+            <a:r>
+              <a:rPr lang="en-US" sz="1200" b="1" u="none" spc="99" strike="noStrike">
+                <a:solidFill>
+                  <a:srgbClr val="4caf87"/>
+                </a:solidFill>
+                <a:effectLst/>
+                <a:uFillTx/>
+                <a:latin typeface="Inter"/>
+                <a:ea typeface="Inter"/>
+              </a:rPr>
+              <a:t>08</a:t>
+            </a:r>
+            <a:endParaRPr lang="pt-PT" sz="1200" b="0" u="none" strike="noStrike">
+              <a:solidFill>
+                <a:srgbClr val="ffffff"/>
+              </a:solidFill>
+              <a:effectLst/>
+              <a:uFillTx/>
+              <a:latin typeface="Arial"/>
+            </a:endParaRPr>
+          </a:p>
+        </p:txBody>
+      </p:sp>
+      <p:sp>
+        <p:nvSpPr>
+          <p:cNvPr id="210" name="Text 1"/>
+          <p:cNvSpPr/>
+          <p:nvPr/>
+        </p:nvSpPr>
+        <p:spPr>
+          <a:xfrm>
+            <a:off x="640080" y="749880"/>
+            <a:ext cx="10056960" cy="684360"/>
+          </a:xfrm>
+          <a:prstGeom prst="rect">
+            <a:avLst/>
+          </a:prstGeom>
+          <a:noFill/>
+          <a:ln w="0">
+            <a:noFill/>
+          </a:ln>
+        </p:spPr>
+        <p:style>
+          <a:lnRef idx="0"/>
+          <a:fillRef idx="0"/>
+          <a:effectRef idx="0"/>
+          <a:fontRef idx="minor"/>
+        </p:style>
+        <p:txBody>
+          <a:bodyPr lIns="90000" rIns="90000" tIns="45000" bIns="45000" anchor="ctr">
+            <a:noAutofit/>
+          </a:bodyPr>
+          <a:p>
+            <a:pPr defTabSz="914400">
+              <a:lnSpc>
+                <a:spcPct val="100000"/>
+              </a:lnSpc>
+              <a:tabLst>
+                <a:tab algn="l" pos="0"/>
+              </a:tabLst>
+            </a:pPr>
+            <a:r>
+              <a:rPr lang="en-US" sz="2800" b="1" u="none" strike="noStrike">
+                <a:solidFill>
+                  <a:srgbClr val="ffffff"/>
+                </a:solidFill>
+                <a:effectLst/>
+                <a:uFillTx/>
+                <a:latin typeface="Poppins"/>
+                <a:ea typeface="Poppins"/>
+              </a:rPr>
+              <a:t>Conclusão</a:t>
+            </a:r>
+            <a:endParaRPr lang="pt-PT" sz="2800" b="0" u="none" strike="noStrike">
+              <a:solidFill>
+                <a:srgbClr val="ffffff"/>
+              </a:solidFill>
+              <a:effectLst/>
+              <a:uFillTx/>
+              <a:latin typeface="Arial"/>
+            </a:endParaRPr>
+          </a:p>
+        </p:txBody>
+      </p:sp>
+      <p:sp>
+        <p:nvSpPr>
+          <p:cNvPr id="211" name="Text 2"/>
+          <p:cNvSpPr/>
+          <p:nvPr/>
+        </p:nvSpPr>
+        <p:spPr>
+          <a:xfrm>
+            <a:off x="640080" y="1737360"/>
+            <a:ext cx="10239840" cy="912960"/>
+          </a:xfrm>
+          <a:prstGeom prst="rect">
+            <a:avLst/>
+          </a:prstGeom>
+          <a:noFill/>
+          <a:ln w="0">
+            <a:noFill/>
+          </a:ln>
+        </p:spPr>
+        <p:style>
+          <a:lnRef idx="0"/>
+          <a:fillRef idx="0"/>
+          <a:effectRef idx="0"/>
+          <a:fontRef idx="minor"/>
+        </p:style>
+        <p:txBody>
+          <a:bodyPr lIns="90000" rIns="90000" tIns="45000" bIns="45000" anchor="ctr">
+            <a:noAutofit/>
+          </a:bodyPr>
+          <a:p>
+            <a:pPr defTabSz="914400">
+              <a:lnSpc>
+                <a:spcPct val="140000"/>
+              </a:lnSpc>
+              <a:tabLst>
+                <a:tab algn="l" pos="0"/>
+              </a:tabLst>
+            </a:pPr>
+            <a:r>
+              <a:rPr lang="en-US" sz="1400" b="0" u="none" strike="noStrike">
+                <a:solidFill>
+                  <a:srgbClr val="bfe3d1"/>
+                </a:solidFill>
+                <a:effectLst/>
+                <a:uFillTx/>
+                <a:latin typeface="Inter"/>
+                <a:ea typeface="Inter"/>
+              </a:rPr>
+              <a:t>O desenvolvimento do Personal Finance Manager permitiu aplicar, de forma prática, conceitos fundamentais de programação orientada a objetos, modelação de bases de dados e construção de interfaces gráficas em Python.</a:t>
+            </a:r>
+            <a:endParaRPr lang="pt-PT" sz="1400" b="0" u="none" strike="noStrike">
+              <a:solidFill>
+                <a:srgbClr val="ffffff"/>
+              </a:solidFill>
+              <a:effectLst/>
+              <a:uFillTx/>
+              <a:latin typeface="Arial"/>
+            </a:endParaRPr>
+          </a:p>
+        </p:txBody>
+      </p:sp>
+      <p:sp>
+        <p:nvSpPr>
+          <p:cNvPr id="212" name="Text 3"/>
+          <p:cNvSpPr/>
+          <p:nvPr/>
+        </p:nvSpPr>
+        <p:spPr>
+          <a:xfrm>
+            <a:off x="640080" y="2606040"/>
+            <a:ext cx="10239840" cy="1004400"/>
+          </a:xfrm>
+          <a:prstGeom prst="rect">
+            <a:avLst/>
+          </a:prstGeom>
+          <a:noFill/>
+          <a:ln w="0">
+            <a:noFill/>
+          </a:ln>
+        </p:spPr>
+        <p:style>
+          <a:lnRef idx="0"/>
+          <a:fillRef idx="0"/>
+          <a:effectRef idx="0"/>
+          <a:fontRef idx="minor"/>
+        </p:style>
+        <p:txBody>
+          <a:bodyPr lIns="90000" rIns="90000" tIns="45000" bIns="45000" anchor="ctr">
+            <a:noAutofit/>
+          </a:bodyPr>
+          <a:p>
+            <a:pPr defTabSz="914400">
+              <a:lnSpc>
+                <a:spcPct val="140000"/>
+              </a:lnSpc>
+              <a:tabLst>
+                <a:tab algn="l" pos="0"/>
+              </a:tabLst>
+            </a:pPr>
+            <a:r>
+              <a:rPr lang="en-US" sz="1400" b="0" u="none" strike="noStrike">
+                <a:solidFill>
+                  <a:srgbClr val="bfe3d1"/>
+                </a:solidFill>
+                <a:effectLst/>
+                <a:uFillTx/>
+                <a:latin typeface="Inter"/>
+                <a:ea typeface="Inter"/>
+              </a:rPr>
+              <a:t>A arquitetura em camadas construída garantiu um desenvolvimento organizado e sustentável e deixou claramente documentadas as decisões tomadas e as melhorias a realizar no futuro.</a:t>
+            </a:r>
+            <a:endParaRPr lang="pt-PT" sz="1400" b="0" u="none" strike="noStrike">
+              <a:solidFill>
+                <a:srgbClr val="ffffff"/>
+              </a:solidFill>
+              <a:effectLst/>
+              <a:uFillTx/>
+              <a:latin typeface="Arial"/>
+            </a:endParaRPr>
+          </a:p>
+        </p:txBody>
+      </p:sp>
+      <p:sp>
+        <p:nvSpPr>
+          <p:cNvPr id="213" name="Shape 4"/>
+          <p:cNvSpPr/>
+          <p:nvPr/>
+        </p:nvSpPr>
+        <p:spPr>
+          <a:xfrm>
+            <a:off x="640080" y="3977640"/>
+            <a:ext cx="10239840" cy="1415880"/>
+          </a:xfrm>
+          <a:prstGeom prst="roundRect">
+            <a:avLst>
+              <a:gd name="adj" fmla="val 7742"/>
+            </a:avLst>
+          </a:prstGeom>
+          <a:solidFill>
+            <a:srgbClr val="133b3d"/>
+          </a:solidFill>
+          <a:ln w="0">
+            <a:noFill/>
+          </a:ln>
+        </p:spPr>
+        <p:style>
+          <a:lnRef idx="0"/>
+          <a:fillRef idx="0"/>
+          <a:effectRef idx="0"/>
+          <a:fontRef idx="minor"/>
+        </p:style>
+        <p:txBody>
+          <a:bodyPr lIns="90000" rIns="90000" tIns="45000" bIns="45000" anchor="t">
+            <a:noAutofit/>
+          </a:bodyPr>
+          <a:p>
+            <a:pPr>
+              <a:lnSpc>
+                <a:spcPct val="100000"/>
+              </a:lnSpc>
+            </a:pPr>
+            <a:endParaRPr lang="pt-PT" sz="1800" b="0" u="none" strike="noStrike">
+              <a:solidFill>
+                <a:srgbClr val="ffffff"/>
+              </a:solidFill>
+              <a:effectLst/>
+              <a:uFillTx/>
+              <a:latin typeface="Arial"/>
+            </a:endParaRPr>
+          </a:p>
+        </p:txBody>
+      </p:sp>
+      <p:sp>
+        <p:nvSpPr>
+          <p:cNvPr id="214" name="Text 5"/>
+          <p:cNvSpPr/>
+          <p:nvPr/>
+        </p:nvSpPr>
+        <p:spPr>
+          <a:xfrm>
+            <a:off x="960120" y="4160520"/>
+            <a:ext cx="9599760" cy="1095840"/>
+          </a:xfrm>
+          <a:prstGeom prst="rect">
+            <a:avLst/>
+          </a:prstGeom>
+          <a:noFill/>
+          <a:ln w="0">
+            <a:noFill/>
+          </a:ln>
+        </p:spPr>
+        <p:style>
+          <a:lnRef idx="0"/>
+          <a:fillRef idx="0"/>
+          <a:effectRef idx="0"/>
+          <a:fontRef idx="minor"/>
+        </p:style>
+        <p:txBody>
+          <a:bodyPr lIns="90000" rIns="90000" tIns="45000" bIns="45000" anchor="ctr">
+            <a:noAutofit/>
+          </a:bodyPr>
+          <a:p>
+            <a:pPr defTabSz="914400">
+              <a:lnSpc>
+                <a:spcPct val="135000"/>
+              </a:lnSpc>
+              <a:tabLst>
+                <a:tab algn="l" pos="0"/>
+              </a:tabLst>
+            </a:pPr>
+            <a:r>
+              <a:rPr lang="en-US" sz="1500" b="1" u="none" strike="noStrike">
+                <a:solidFill>
+                  <a:srgbClr val="ffffff"/>
+                </a:solidFill>
+                <a:effectLst/>
+                <a:uFillTx/>
+                <a:latin typeface="Poppins"/>
+                <a:ea typeface="Poppins"/>
+              </a:rPr>
+              <a:t>O projeto cumpre os objetivos propostos, entregando uma aplicação funcional de gestão financeira pessoal, com espaço de crescimento bem definido para versões futuras.</a:t>
+            </a:r>
+            <a:endParaRPr lang="pt-PT" sz="1500" b="0" u="none" strike="noStrike">
+              <a:solidFill>
+                <a:srgbClr val="ffffff"/>
+              </a:solidFill>
+              <a:effectLst/>
+              <a:uFillTx/>
+              <a:latin typeface="Arial"/>
+            </a:endParaRPr>
+          </a:p>
+        </p:txBody>
+      </p:sp>
+      <p:sp>
+        <p:nvSpPr>
+          <p:cNvPr id="215" name="Text 6"/>
+          <p:cNvSpPr/>
+          <p:nvPr/>
+        </p:nvSpPr>
+        <p:spPr>
+          <a:xfrm>
+            <a:off x="457200" y="6537960"/>
+            <a:ext cx="5484960" cy="272880"/>
+          </a:xfrm>
+          <a:prstGeom prst="rect">
+            <a:avLst/>
+          </a:prstGeom>
+          <a:noFill/>
+          <a:ln w="0">
+            <a:noFill/>
+          </a:ln>
+        </p:spPr>
+        <p:style>
+          <a:lnRef idx="0"/>
+          <a:fillRef idx="0"/>
+          <a:effectRef idx="0"/>
+          <a:fontRef idx="minor"/>
+        </p:style>
+        <p:txBody>
+          <a:bodyPr lIns="90000" rIns="90000" tIns="45000" bIns="45000" anchor="ctr">
+            <a:noAutofit/>
+          </a:bodyPr>
+          <a:p>
+            <a:pPr defTabSz="914400">
+              <a:lnSpc>
+                <a:spcPct val="100000"/>
+              </a:lnSpc>
+              <a:tabLst>
+                <a:tab algn="l" pos="0"/>
+              </a:tabLst>
+            </a:pPr>
+            <a:r>
+              <a:rPr lang="en-US" sz="900" b="0" u="none" strike="noStrike">
+                <a:solidFill>
+                  <a:srgbClr val="5f6b6a"/>
+                </a:solidFill>
+                <a:effectLst/>
+                <a:uFillTx/>
+                <a:latin typeface="Inter"/>
+                <a:ea typeface="Inter"/>
+              </a:rPr>
+              <a:t>Personal Finance Manager</a:t>
+            </a:r>
+            <a:endParaRPr lang="pt-PT" sz="900" b="0" u="none" strike="noStrike">
+              <a:solidFill>
+                <a:srgbClr val="ffffff"/>
+              </a:solidFill>
+              <a:effectLst/>
+              <a:uFillTx/>
+              <a:latin typeface="Arial"/>
+            </a:endParaRPr>
+          </a:p>
+        </p:txBody>
+      </p:sp>
+      <p:sp>
+        <p:nvSpPr>
+          <p:cNvPr id="216" name="Text 7"/>
+          <p:cNvSpPr/>
+          <p:nvPr/>
+        </p:nvSpPr>
+        <p:spPr>
+          <a:xfrm>
+            <a:off x="11521440" y="6537960"/>
+            <a:ext cx="455760" cy="272880"/>
+          </a:xfrm>
+          <a:prstGeom prst="rect">
+            <a:avLst/>
+          </a:prstGeom>
+          <a:noFill/>
+          <a:ln w="0">
+            <a:noFill/>
+          </a:ln>
+        </p:spPr>
+        <p:style>
+          <a:lnRef idx="0"/>
+          <a:fillRef idx="0"/>
+          <a:effectRef idx="0"/>
+          <a:fontRef idx="minor"/>
+        </p:style>
+        <p:txBody>
+          <a:bodyPr lIns="90000" rIns="90000" tIns="45000" bIns="45000" anchor="ctr">
+            <a:noAutofit/>
+          </a:bodyPr>
+          <a:p>
+            <a:pPr algn="r" defTabSz="914400">
+              <a:lnSpc>
+                <a:spcPct val="100000"/>
+              </a:lnSpc>
+              <a:tabLst>
+                <a:tab algn="l" pos="0"/>
+              </a:tabLst>
+            </a:pPr>
+            <a:r>
+              <a:rPr lang="en-US" sz="900" b="0" u="none" strike="noStrike">
+                <a:solidFill>
+                  <a:srgbClr val="5f6b6a"/>
+                </a:solidFill>
+                <a:effectLst/>
+                <a:uFillTx/>
+                <a:latin typeface="Inter"/>
+                <a:ea typeface="Inter"/>
+              </a:rPr>
+              <a:t>9</a:t>
+            </a:r>
+            <a:endParaRPr lang="pt-PT" sz="900" b="0" u="none" strike="noStrike">
               <a:solidFill>
                 <a:srgbClr val="ffffff"/>
               </a:solidFill>
@@ -2706,7 +4407,7 @@
         <p:spPr>
           <a:xfrm>
             <a:off x="640080" y="457200"/>
-            <a:ext cx="7314840" cy="319680"/>
+            <a:ext cx="7313760" cy="318600"/>
           </a:xfrm>
           <a:prstGeom prst="rect">
             <a:avLst/>
@@ -2767,7 +4468,7 @@
         <p:spPr>
           <a:xfrm>
             <a:off x="640080" y="749880"/>
-            <a:ext cx="10058040" cy="685440"/>
+            <a:ext cx="10056960" cy="684360"/>
           </a:xfrm>
           <a:prstGeom prst="rect">
             <a:avLst/>
@@ -2828,7 +4529,7 @@
         <p:spPr>
           <a:xfrm>
             <a:off x="640080" y="1691640"/>
-            <a:ext cx="6400440" cy="1554120"/>
+            <a:ext cx="6399360" cy="1553040"/>
           </a:xfrm>
           <a:prstGeom prst="rect">
             <a:avLst/>
@@ -2889,7 +4590,7 @@
         <p:spPr>
           <a:xfrm>
             <a:off x="640080" y="3337560"/>
-            <a:ext cx="6400440" cy="1462680"/>
+            <a:ext cx="6399360" cy="1461600"/>
           </a:xfrm>
           <a:prstGeom prst="rect">
             <a:avLst/>
@@ -2919,7 +4620,7 @@
               </a:tabLst>
             </a:pPr>
             <a:r>
-              <a:rPr lang="en-US" sz="1400" b="0" u="none" strike="noStrike">
+              <a:rPr lang="pt-PT" sz="1400" b="0" u="none" strike="noStrike">
                 <a:solidFill>
                   <a:srgbClr val="5f6b6a"/>
                 </a:solidFill>
@@ -2928,7 +4629,7 @@
                 <a:latin typeface="Inter"/>
                 <a:ea typeface="Inter"/>
               </a:rPr>
-              <a:t>Este projeto insere-se no âmbito académico, sob orientação do Prof. Eng. Sebilson, com o objetivo de aplicar de forma prática conceitos de programação orientada a objetos, bases de dados e desenvolvimento de interfaces gráficas, através da criação de uma aplicação de gestão financeira pessoal.</a:t>
+              <a:t>Este projeto insere-se no âmbito académico, sob orientação do Prof. Eng. Sebilson Cristóvão, com o objetivo de aplicar de forma prática conceitos de programação orientada a objetos, bases de dados e desenvolvimento de interfaces gráficas, através da criação de uma aplicação de gestão financeira pessoal.</a:t>
             </a:r>
             <a:endParaRPr lang="pt-PT" sz="1400" b="0" u="none" strike="noStrike">
               <a:solidFill>
@@ -2950,7 +4651,7 @@
         <p:spPr>
           <a:xfrm>
             <a:off x="7589520" y="1691640"/>
-            <a:ext cx="3931560" cy="3748680"/>
+            <a:ext cx="3930480" cy="3747600"/>
           </a:xfrm>
           <a:prstGeom prst="roundRect">
             <a:avLst>
@@ -2975,6 +4676,11 @@
             <a:noAutofit/>
           </a:bodyPr>
           <a:p>
+            <a:pPr>
+              <a:lnSpc>
+                <a:spcPct val="100000"/>
+              </a:lnSpc>
+            </a:pPr>
             <a:endParaRPr lang="pt-PT" sz="1800" b="0" u="none" strike="noStrike">
               <a:solidFill>
                 <a:srgbClr val="000000"/>
@@ -2995,7 +4701,7 @@
         <p:spPr>
           <a:xfrm>
             <a:off x="7909560" y="1965960"/>
-            <a:ext cx="3291480" cy="365400"/>
+            <a:ext cx="3290400" cy="364320"/>
           </a:xfrm>
           <a:prstGeom prst="rect">
             <a:avLst/>
@@ -3056,7 +4762,7 @@
         <p:spPr>
           <a:xfrm>
             <a:off x="7955280" y="2633400"/>
-            <a:ext cx="91080" cy="91080"/>
+            <a:ext cx="90000" cy="90000"/>
           </a:xfrm>
           <a:solidFill>
             <a:srgbClr val="1f6f63"/>
@@ -3076,6 +4782,11 @@
             <a:noAutofit/>
           </a:bodyPr>
           <a:p>
+            <a:pPr>
+              <a:lnSpc>
+                <a:spcPct val="100000"/>
+              </a:lnSpc>
+            </a:pPr>
             <a:endParaRPr lang="pt-PT" sz="1800" b="0" u="none" strike="noStrike">
               <a:solidFill>
                 <a:srgbClr val="ffffff"/>
@@ -3096,7 +4807,7 @@
         <p:spPr>
           <a:xfrm>
             <a:off x="8183880" y="2487240"/>
-            <a:ext cx="3200040" cy="365400"/>
+            <a:ext cx="3198960" cy="364320"/>
           </a:xfrm>
           <a:prstGeom prst="rect">
             <a:avLst/>
@@ -3126,7 +4837,7 @@
               </a:tabLst>
             </a:pPr>
             <a:r>
-              <a:rPr lang="en-US" sz="1200" b="0" u="none" strike="noStrike">
+              <a:rPr lang="pt-PT" sz="1200" b="0" u="none" strike="noStrike">
                 <a:solidFill>
                   <a:srgbClr val="0d2b2e"/>
                 </a:solidFill>
@@ -3135,7 +4846,7 @@
                 <a:latin typeface="Inter"/>
                 <a:ea typeface="Inter"/>
               </a:rPr>
-              <a:t>Aplicação de secretária em Python</a:t>
+              <a:t>Aplicação desktop em Python</a:t>
             </a:r>
             <a:endParaRPr lang="pt-PT" sz="1200" b="0" u="none" strike="noStrike">
               <a:solidFill>
@@ -3157,7 +4868,7 @@
         <p:spPr>
           <a:xfrm>
             <a:off x="7955280" y="3182040"/>
-            <a:ext cx="91080" cy="91080"/>
+            <a:ext cx="90000" cy="90000"/>
           </a:xfrm>
           <a:solidFill>
             <a:srgbClr val="1f6f63"/>
@@ -3177,6 +4888,11 @@
             <a:noAutofit/>
           </a:bodyPr>
           <a:p>
+            <a:pPr>
+              <a:lnSpc>
+                <a:spcPct val="100000"/>
+              </a:lnSpc>
+            </a:pPr>
             <a:endParaRPr lang="pt-PT" sz="1800" b="0" u="none" strike="noStrike">
               <a:solidFill>
                 <a:srgbClr val="ffffff"/>
@@ -3197,7 +4913,7 @@
         <p:spPr>
           <a:xfrm>
             <a:off x="8183880" y="3035880"/>
-            <a:ext cx="3200040" cy="365400"/>
+            <a:ext cx="3198960" cy="364320"/>
           </a:xfrm>
           <a:prstGeom prst="rect">
             <a:avLst/>
@@ -3258,7 +4974,7 @@
         <p:spPr>
           <a:xfrm>
             <a:off x="7955280" y="3730680"/>
-            <a:ext cx="91080" cy="91080"/>
+            <a:ext cx="90000" cy="90000"/>
           </a:xfrm>
           <a:solidFill>
             <a:srgbClr val="1f6f63"/>
@@ -3278,6 +4994,11 @@
             <a:noAutofit/>
           </a:bodyPr>
           <a:p>
+            <a:pPr>
+              <a:lnSpc>
+                <a:spcPct val="100000"/>
+              </a:lnSpc>
+            </a:pPr>
             <a:endParaRPr lang="pt-PT" sz="1800" b="0" u="none" strike="noStrike">
               <a:solidFill>
                 <a:srgbClr val="ffffff"/>
@@ -3298,7 +5019,7 @@
         <p:spPr>
           <a:xfrm>
             <a:off x="8183880" y="3584520"/>
-            <a:ext cx="3200040" cy="365400"/>
+            <a:ext cx="3198960" cy="364320"/>
           </a:xfrm>
           <a:prstGeom prst="rect">
             <a:avLst/>
@@ -3359,7 +5080,7 @@
         <p:spPr>
           <a:xfrm>
             <a:off x="7955280" y="4279320"/>
-            <a:ext cx="91080" cy="91080"/>
+            <a:ext cx="90000" cy="90000"/>
           </a:xfrm>
           <a:solidFill>
             <a:srgbClr val="1f6f63"/>
@@ -3379,6 +5100,11 @@
             <a:noAutofit/>
           </a:bodyPr>
           <a:p>
+            <a:pPr>
+              <a:lnSpc>
+                <a:spcPct val="100000"/>
+              </a:lnSpc>
+            </a:pPr>
             <a:endParaRPr lang="pt-PT" sz="1800" b="0" u="none" strike="noStrike">
               <a:solidFill>
                 <a:srgbClr val="ffffff"/>
@@ -3399,7 +5125,7 @@
         <p:spPr>
           <a:xfrm>
             <a:off x="8183880" y="4133160"/>
-            <a:ext cx="3200040" cy="365400"/>
+            <a:ext cx="3198960" cy="364320"/>
           </a:xfrm>
           <a:prstGeom prst="rect">
             <a:avLst/>
@@ -3460,7 +5186,7 @@
         <p:spPr>
           <a:xfrm>
             <a:off x="457200" y="6537960"/>
-            <a:ext cx="5486040" cy="273960"/>
+            <a:ext cx="5484960" cy="272880"/>
           </a:xfrm>
           <a:prstGeom prst="rect">
             <a:avLst/>
@@ -3521,7 +5247,7 @@
         <p:spPr>
           <a:xfrm>
             <a:off x="11521440" y="6537960"/>
-            <a:ext cx="456840" cy="273960"/>
+            <a:ext cx="455760" cy="272880"/>
           </a:xfrm>
           <a:prstGeom prst="rect">
             <a:avLst/>
@@ -3619,7 +5345,7 @@
         <p:spPr>
           <a:xfrm>
             <a:off x="640080" y="457200"/>
-            <a:ext cx="7314840" cy="319680"/>
+            <a:ext cx="7313760" cy="318600"/>
           </a:xfrm>
           <a:prstGeom prst="rect">
             <a:avLst/>
@@ -3680,7 +5406,7 @@
         <p:spPr>
           <a:xfrm>
             <a:off x="640080" y="749880"/>
-            <a:ext cx="10058040" cy="685440"/>
+            <a:ext cx="10056960" cy="684360"/>
           </a:xfrm>
           <a:prstGeom prst="rect">
             <a:avLst/>
@@ -3741,7 +5467,7 @@
         <p:spPr>
           <a:xfrm>
             <a:off x="640080" y="1703160"/>
-            <a:ext cx="5257440" cy="1599840"/>
+            <a:ext cx="5256360" cy="1598760"/>
           </a:xfrm>
           <a:prstGeom prst="roundRect">
             <a:avLst>
@@ -3766,6 +5492,11 @@
             <a:noAutofit/>
           </a:bodyPr>
           <a:p>
+            <a:pPr>
+              <a:lnSpc>
+                <a:spcPct val="100000"/>
+              </a:lnSpc>
+            </a:pPr>
             <a:endParaRPr lang="pt-PT" sz="1800" b="0" u="none" strike="noStrike">
               <a:solidFill>
                 <a:srgbClr val="ffffff"/>
@@ -3786,7 +5517,7 @@
         <p:spPr>
           <a:xfrm>
             <a:off x="640080" y="1703160"/>
-            <a:ext cx="456840" cy="456840"/>
+            <a:ext cx="455760" cy="455760"/>
           </a:xfrm>
           <a:prstGeom prst="roundRect">
             <a:avLst>
@@ -3811,6 +5542,11 @@
             <a:noAutofit/>
           </a:bodyPr>
           <a:p>
+            <a:pPr>
+              <a:lnSpc>
+                <a:spcPct val="100000"/>
+              </a:lnSpc>
+            </a:pPr>
             <a:endParaRPr lang="pt-PT" sz="1800" b="0" u="none" strike="noStrike">
               <a:solidFill>
                 <a:srgbClr val="000000"/>
@@ -3831,7 +5567,7 @@
         <p:spPr>
           <a:xfrm>
             <a:off x="896040" y="1974960"/>
-            <a:ext cx="456840" cy="456840"/>
+            <a:ext cx="455760" cy="455760"/>
           </a:xfrm>
           <a:prstGeom prst="rect">
             <a:avLst/>
@@ -3880,7 +5616,7 @@
         <p:spPr>
           <a:xfrm>
             <a:off x="896040" y="2560320"/>
-            <a:ext cx="4754520" cy="365400"/>
+            <a:ext cx="4753440" cy="364320"/>
           </a:xfrm>
           <a:prstGeom prst="rect">
             <a:avLst/>
@@ -3929,7 +5665,7 @@
         <p:spPr>
           <a:xfrm>
             <a:off x="896040" y="2907720"/>
-            <a:ext cx="4754520" cy="941760"/>
+            <a:ext cx="4753440" cy="940680"/>
           </a:xfrm>
           <a:prstGeom prst="rect">
             <a:avLst/>
@@ -3978,7 +5714,7 @@
         <p:spPr>
           <a:xfrm>
             <a:off x="6203160" y="1737360"/>
-            <a:ext cx="5257440" cy="1599840"/>
+            <a:ext cx="5256360" cy="1598760"/>
           </a:xfrm>
           <a:prstGeom prst="roundRect">
             <a:avLst>
@@ -4003,6 +5739,11 @@
             <a:noAutofit/>
           </a:bodyPr>
           <a:p>
+            <a:pPr>
+              <a:lnSpc>
+                <a:spcPct val="100000"/>
+              </a:lnSpc>
+            </a:pPr>
             <a:endParaRPr lang="pt-PT" sz="1800" b="0" u="none" strike="noStrike">
               <a:solidFill>
                 <a:srgbClr val="ffffff"/>
@@ -4023,7 +5764,7 @@
         <p:spPr>
           <a:xfrm>
             <a:off x="6203160" y="1737360"/>
-            <a:ext cx="456840" cy="456840"/>
+            <a:ext cx="455760" cy="455760"/>
           </a:xfrm>
           <a:prstGeom prst="roundRect">
             <a:avLst>
@@ -4048,6 +5789,11 @@
             <a:noAutofit/>
           </a:bodyPr>
           <a:p>
+            <a:pPr>
+              <a:lnSpc>
+                <a:spcPct val="100000"/>
+              </a:lnSpc>
+            </a:pPr>
             <a:endParaRPr lang="pt-PT" sz="1800" b="0" u="none" strike="noStrike">
               <a:solidFill>
                 <a:srgbClr val="000000"/>
@@ -4068,7 +5814,7 @@
         <p:spPr>
           <a:xfrm>
             <a:off x="6428160" y="1974960"/>
-            <a:ext cx="456840" cy="456840"/>
+            <a:ext cx="455760" cy="455760"/>
           </a:xfrm>
           <a:prstGeom prst="rect">
             <a:avLst/>
@@ -4117,7 +5863,7 @@
         <p:spPr>
           <a:xfrm>
             <a:off x="6428160" y="2560320"/>
-            <a:ext cx="4754520" cy="365400"/>
+            <a:ext cx="4753440" cy="364320"/>
           </a:xfrm>
           <a:prstGeom prst="rect">
             <a:avLst/>
@@ -4166,7 +5912,7 @@
         <p:spPr>
           <a:xfrm>
             <a:off x="6428160" y="2547720"/>
-            <a:ext cx="4754520" cy="152280"/>
+            <a:ext cx="4753440" cy="151200"/>
           </a:xfrm>
           <a:prstGeom prst="rect">
             <a:avLst/>
@@ -4205,7 +5951,7 @@
                 <a:latin typeface="Inter"/>
                 <a:ea typeface="Inter"/>
               </a:rPr>
-              <a:t>Registos em papel ou folhas de cálculo dispersas, difíceis de manter atualizados.</a:t>
+              <a:t>Registos em papel, folhas de cálculo dispersas ou complexas, difíceis de manter atualizados.</a:t>
             </a:r>
             <a:endParaRPr lang="pt-PT" sz="1100" b="0" u="none" strike="noStrike">
               <a:solidFill>
@@ -4227,7 +5973,7 @@
         <p:spPr>
           <a:xfrm>
             <a:off x="640080" y="3611880"/>
-            <a:ext cx="5257440" cy="1599840"/>
+            <a:ext cx="5256360" cy="1598760"/>
           </a:xfrm>
           <a:prstGeom prst="roundRect">
             <a:avLst>
@@ -4252,6 +5998,11 @@
             <a:noAutofit/>
           </a:bodyPr>
           <a:p>
+            <a:pPr>
+              <a:lnSpc>
+                <a:spcPct val="100000"/>
+              </a:lnSpc>
+            </a:pPr>
             <a:endParaRPr lang="pt-PT" sz="1800" b="0" u="none" strike="noStrike">
               <a:solidFill>
                 <a:srgbClr val="ffffff"/>
@@ -4272,7 +6023,7 @@
         <p:spPr>
           <a:xfrm>
             <a:off x="640080" y="3611880"/>
-            <a:ext cx="456840" cy="456840"/>
+            <a:ext cx="455760" cy="455760"/>
           </a:xfrm>
           <a:prstGeom prst="roundRect">
             <a:avLst>
@@ -4337,7 +6088,7 @@
         <p:spPr>
           <a:xfrm>
             <a:off x="896040" y="3849480"/>
-            <a:ext cx="456840" cy="456840"/>
+            <a:ext cx="455760" cy="455760"/>
           </a:xfrm>
           <a:prstGeom prst="rect">
             <a:avLst/>
@@ -4386,7 +6137,7 @@
         <p:spPr>
           <a:xfrm>
             <a:off x="1096920" y="3703320"/>
-            <a:ext cx="4754520" cy="365400"/>
+            <a:ext cx="4753440" cy="364320"/>
           </a:xfrm>
           <a:prstGeom prst="rect">
             <a:avLst/>
@@ -4447,7 +6198,7 @@
         <p:spPr>
           <a:xfrm>
             <a:off x="896040" y="4782240"/>
-            <a:ext cx="4754520" cy="685440"/>
+            <a:ext cx="4753440" cy="684360"/>
           </a:xfrm>
           <a:prstGeom prst="rect">
             <a:avLst/>
@@ -4496,7 +6247,7 @@
         <p:spPr>
           <a:xfrm>
             <a:off x="6172200" y="3600000"/>
-            <a:ext cx="5257440" cy="1599840"/>
+            <a:ext cx="5256360" cy="1598760"/>
           </a:xfrm>
           <a:prstGeom prst="roundRect">
             <a:avLst>
@@ -4521,6 +6272,11 @@
             <a:noAutofit/>
           </a:bodyPr>
           <a:p>
+            <a:pPr>
+              <a:lnSpc>
+                <a:spcPct val="100000"/>
+              </a:lnSpc>
+            </a:pPr>
             <a:endParaRPr lang="pt-PT" sz="1800" b="0" u="none" strike="noStrike">
               <a:solidFill>
                 <a:srgbClr val="ffffff"/>
@@ -4541,7 +6297,7 @@
         <p:spPr>
           <a:xfrm>
             <a:off x="6172200" y="3625560"/>
-            <a:ext cx="456840" cy="456840"/>
+            <a:ext cx="455760" cy="455760"/>
           </a:xfrm>
           <a:prstGeom prst="roundRect">
             <a:avLst>
@@ -4606,7 +6362,7 @@
         <p:spPr>
           <a:xfrm>
             <a:off x="6428160" y="3849480"/>
-            <a:ext cx="456840" cy="456840"/>
+            <a:ext cx="455760" cy="455760"/>
           </a:xfrm>
           <a:prstGeom prst="rect">
             <a:avLst/>
@@ -4655,7 +6411,7 @@
         <p:spPr>
           <a:xfrm>
             <a:off x="6765480" y="3600000"/>
-            <a:ext cx="4754520" cy="365400"/>
+            <a:ext cx="4753440" cy="364320"/>
           </a:xfrm>
           <a:prstGeom prst="rect">
             <a:avLst/>
@@ -4716,7 +6472,7 @@
         <p:spPr>
           <a:xfrm>
             <a:off x="6428160" y="4782240"/>
-            <a:ext cx="4754520" cy="685440"/>
+            <a:ext cx="4753440" cy="684360"/>
           </a:xfrm>
           <a:prstGeom prst="rect">
             <a:avLst/>
@@ -4765,7 +6521,7 @@
         <p:spPr>
           <a:xfrm>
             <a:off x="457200" y="6537960"/>
-            <a:ext cx="5486040" cy="273960"/>
+            <a:ext cx="5484960" cy="272880"/>
           </a:xfrm>
           <a:prstGeom prst="rect">
             <a:avLst/>
@@ -4826,7 +6582,7 @@
         <p:spPr>
           <a:xfrm>
             <a:off x="11521440" y="6537960"/>
-            <a:ext cx="456840" cy="273960"/>
+            <a:ext cx="455760" cy="272880"/>
           </a:xfrm>
           <a:prstGeom prst="rect">
             <a:avLst/>
@@ -4881,27 +6637,38 @@
       <p:sp>
         <p:nvSpPr>
           <p:cNvPr id="57" name=""/>
-          <p:cNvSpPr txBox="1"/>
+          <p:cNvSpPr/>
           <p:nvPr/>
         </p:nvSpPr>
         <p:spPr>
           <a:xfrm>
             <a:off x="640080" y="1737360"/>
-            <a:ext cx="439920" cy="422640"/>
-          </a:xfrm>
-          <a:prstGeom prst="rect">
-            <a:avLst/>
-          </a:prstGeom>
-          <a:noFill/>
-          <a:ln w="0">
-            <a:noFill/>
-          </a:ln>
-        </p:spPr>
+            <a:ext cx="438840" cy="334080"/>
+          </a:xfrm>
+          <a:prstGeom prst="rect">
+            <a:avLst/>
+          </a:prstGeom>
+          <a:noFill/>
+          <a:ln w="0">
+            <a:noFill/>
+          </a:ln>
+        </p:spPr>
+        <p:style>
+          <a:lnRef idx="0"/>
+          <a:fillRef idx="0"/>
+          <a:effectRef idx="0"/>
+          <a:fontRef idx="minor"/>
+        </p:style>
         <p:txBody>
           <a:bodyPr lIns="90000" rIns="90000" tIns="45000" bIns="45000" anchor="t">
             <a:spAutoFit/>
           </a:bodyPr>
           <a:p>
+            <a:pPr>
+              <a:lnSpc>
+                <a:spcPct val="100000"/>
+              </a:lnSpc>
+            </a:pPr>
             <a:r>
               <a:rPr lang="en-US" sz="1600" b="1" u="none" strike="noStrike">
                 <a:solidFill>
@@ -4928,27 +6695,38 @@
       <p:sp>
         <p:nvSpPr>
           <p:cNvPr id="58" name=""/>
-          <p:cNvSpPr txBox="1"/>
+          <p:cNvSpPr/>
           <p:nvPr/>
         </p:nvSpPr>
         <p:spPr>
           <a:xfrm>
             <a:off x="6300000" y="1737360"/>
-            <a:ext cx="296640" cy="366480"/>
-          </a:xfrm>
-          <a:prstGeom prst="rect">
-            <a:avLst/>
-          </a:prstGeom>
-          <a:noFill/>
-          <a:ln w="0">
-            <a:noFill/>
-          </a:ln>
-        </p:spPr>
+            <a:ext cx="295560" cy="334080"/>
+          </a:xfrm>
+          <a:prstGeom prst="rect">
+            <a:avLst/>
+          </a:prstGeom>
+          <a:noFill/>
+          <a:ln w="0">
+            <a:noFill/>
+          </a:ln>
+        </p:spPr>
+        <p:style>
+          <a:lnRef idx="0"/>
+          <a:fillRef idx="0"/>
+          <a:effectRef idx="0"/>
+          <a:fontRef idx="minor"/>
+        </p:style>
         <p:txBody>
           <a:bodyPr lIns="90000" rIns="90000" tIns="45000" bIns="45000" anchor="t">
             <a:spAutoFit/>
           </a:bodyPr>
           <a:p>
+            <a:pPr>
+              <a:lnSpc>
+                <a:spcPct val="100000"/>
+              </a:lnSpc>
+            </a:pPr>
             <a:r>
               <a:rPr lang="en-US" sz="1600" b="1" u="none" strike="noStrike">
                 <a:solidFill>
@@ -4975,28 +6753,38 @@
       <p:sp>
         <p:nvSpPr>
           <p:cNvPr id="59" name=""/>
-          <p:cNvSpPr txBox="1"/>
+          <p:cNvSpPr/>
           <p:nvPr/>
         </p:nvSpPr>
         <p:spPr>
           <a:xfrm>
             <a:off x="1194120" y="1713960"/>
-            <a:ext cx="1685880" cy="333000"/>
-          </a:xfrm>
-          <a:prstGeom prst="rect">
-            <a:avLst/>
-          </a:prstGeom>
-          <a:noFill/>
-          <a:ln w="0">
-            <a:noFill/>
-          </a:ln>
-        </p:spPr>
+            <a:ext cx="1684800" cy="303840"/>
+          </a:xfrm>
+          <a:prstGeom prst="rect">
+            <a:avLst/>
+          </a:prstGeom>
+          <a:noFill/>
+          <a:ln w="0">
+            <a:noFill/>
+          </a:ln>
+        </p:spPr>
+        <p:style>
+          <a:lnRef idx="0"/>
+          <a:fillRef idx="0"/>
+          <a:effectRef idx="0"/>
+          <a:fontRef idx="minor"/>
+        </p:style>
         <p:txBody>
           <a:bodyPr lIns="90000" rIns="90000" tIns="45000" bIns="45000" anchor="t" anchorCtr="1">
             <a:spAutoFit/>
           </a:bodyPr>
           <a:p>
-            <a:pPr algn="ctr"/>
+            <a:pPr algn="ctr">
+              <a:lnSpc>
+                <a:spcPct val="100000"/>
+              </a:lnSpc>
+            </a:pPr>
             <a:r>
               <a:rPr lang="en-US" sz="1400" b="1" u="none" strike="noStrike">
                 <a:solidFill>
@@ -5023,27 +6811,38 @@
       <p:sp>
         <p:nvSpPr>
           <p:cNvPr id="60" name=""/>
-          <p:cNvSpPr txBox="1"/>
+          <p:cNvSpPr/>
           <p:nvPr/>
         </p:nvSpPr>
         <p:spPr>
           <a:xfrm>
             <a:off x="-6120000" y="4038840"/>
-            <a:ext cx="5900400" cy="281160"/>
-          </a:xfrm>
-          <a:prstGeom prst="rect">
-            <a:avLst/>
-          </a:prstGeom>
-          <a:noFill/>
-          <a:ln w="0">
-            <a:noFill/>
-          </a:ln>
-        </p:spPr>
+            <a:ext cx="5899320" cy="258120"/>
+          </a:xfrm>
+          <a:prstGeom prst="rect">
+            <a:avLst/>
+          </a:prstGeom>
+          <a:noFill/>
+          <a:ln w="0">
+            <a:noFill/>
+          </a:ln>
+        </p:spPr>
+        <p:style>
+          <a:lnRef idx="0"/>
+          <a:fillRef idx="0"/>
+          <a:effectRef idx="0"/>
+          <a:fontRef idx="minor"/>
+        </p:style>
         <p:txBody>
           <a:bodyPr lIns="90000" rIns="90000" tIns="45000" bIns="45000" anchor="t">
             <a:spAutoFit/>
           </a:bodyPr>
           <a:p>
+            <a:pPr>
+              <a:lnSpc>
+                <a:spcPct val="100000"/>
+              </a:lnSpc>
+            </a:pPr>
             <a:r>
               <a:rPr lang="en-US" sz="1100" b="0" u="none" strike="noStrike">
                 <a:solidFill>
@@ -5076,7 +6875,7 @@
         <p:spPr>
           <a:xfrm>
             <a:off x="640080" y="2443320"/>
-            <a:ext cx="5257440" cy="859680"/>
+            <a:ext cx="5256360" cy="858600"/>
           </a:xfrm>
           <a:prstGeom prst="rect">
             <a:avLst/>
@@ -5097,6 +6896,11 @@
             <a:noAutofit/>
           </a:bodyPr>
           <a:p>
+            <a:pPr>
+              <a:lnSpc>
+                <a:spcPct val="100000"/>
+              </a:lnSpc>
+            </a:pPr>
             <a:endParaRPr lang="pt-PT" sz="1800" b="0" u="none" strike="noStrike">
               <a:solidFill>
                 <a:srgbClr val="ffffff"/>
@@ -5117,7 +6921,7 @@
         <p:spPr>
           <a:xfrm>
             <a:off x="-1440000" y="2789640"/>
-            <a:ext cx="539640" cy="0"/>
+            <a:ext cx="539640" cy="360"/>
           </a:xfrm>
           <a:prstGeom prst="line">
             <a:avLst/>
@@ -5159,7 +6963,7 @@
         <p:spPr>
           <a:xfrm>
             <a:off x="3060000" y="-450000"/>
-            <a:ext cx="539640" cy="0"/>
+            <a:ext cx="539640" cy="360"/>
           </a:xfrm>
           <a:prstGeom prst="line">
             <a:avLst/>
@@ -5195,29 +6999,40 @@
       <p:sp>
         <p:nvSpPr>
           <p:cNvPr id="64" name=""/>
-          <p:cNvSpPr txBox="1"/>
+          <p:cNvSpPr/>
           <p:nvPr/>
         </p:nvSpPr>
         <p:spPr>
           <a:xfrm>
             <a:off x="640080" y="2418840"/>
-            <a:ext cx="5257440" cy="471240"/>
-          </a:xfrm>
-          <a:prstGeom prst="rect">
-            <a:avLst/>
-          </a:prstGeom>
-          <a:noFill/>
-          <a:ln w="0">
-            <a:noFill/>
-          </a:ln>
-        </p:spPr>
+            <a:ext cx="5256360" cy="425160"/>
+          </a:xfrm>
+          <a:prstGeom prst="rect">
+            <a:avLst/>
+          </a:prstGeom>
+          <a:noFill/>
+          <a:ln w="0">
+            <a:noFill/>
+          </a:ln>
+        </p:spPr>
+        <p:style>
+          <a:lnRef idx="0"/>
+          <a:fillRef idx="0"/>
+          <a:effectRef idx="0"/>
+          <a:fontRef idx="minor"/>
+        </p:style>
         <p:txBody>
           <a:bodyPr lIns="90000" rIns="90000" tIns="45000" bIns="45000" anchor="t">
             <a:spAutoFit/>
           </a:bodyPr>
           <a:p>
-            <a:r>
-              <a:rPr lang="en-US" sz="1100" b="0" u="none" strike="noStrike">
+            <a:pPr>
+              <a:lnSpc>
+                <a:spcPct val="100000"/>
+              </a:lnSpc>
+            </a:pPr>
+            <a:r>
+              <a:rPr lang="pt-PT" sz="1100" b="0" u="none" strike="noStrike">
                 <a:solidFill>
                   <a:srgbClr val="bfe3d1"/>
                 </a:solidFill>
@@ -5226,7 +7041,7 @@
                 <a:latin typeface="Inter"/>
                 <a:ea typeface="Inter"/>
               </a:rPr>
-              <a:t>Muitas pessoas não sabem, em tempo real, quanto ganham e quanto gastam por mês</a:t>
+              <a:t>Muitas quanto ou onde gastam o seu dinheiro todos os meses, e há casos onde não sabem sequer o quanto ganham.</a:t>
             </a:r>
             <a:endParaRPr lang="pt-PT" sz="1100" b="0" u="none" strike="noStrike">
               <a:solidFill>
@@ -5242,27 +7057,38 @@
       <p:sp>
         <p:nvSpPr>
           <p:cNvPr id="65" name=""/>
-          <p:cNvSpPr txBox="1"/>
+          <p:cNvSpPr/>
           <p:nvPr/>
         </p:nvSpPr>
         <p:spPr>
           <a:xfrm>
             <a:off x="6840000" y="1800000"/>
-            <a:ext cx="2309400" cy="333000"/>
-          </a:xfrm>
-          <a:prstGeom prst="rect">
-            <a:avLst/>
-          </a:prstGeom>
-          <a:noFill/>
-          <a:ln w="0">
-            <a:noFill/>
-          </a:ln>
-        </p:spPr>
+            <a:ext cx="2308320" cy="303840"/>
+          </a:xfrm>
+          <a:prstGeom prst="rect">
+            <a:avLst/>
+          </a:prstGeom>
+          <a:noFill/>
+          <a:ln w="0">
+            <a:noFill/>
+          </a:ln>
+        </p:spPr>
+        <p:style>
+          <a:lnRef idx="0"/>
+          <a:fillRef idx="0"/>
+          <a:effectRef idx="0"/>
+          <a:fontRef idx="minor"/>
+        </p:style>
         <p:txBody>
           <a:bodyPr lIns="90000" rIns="90000" tIns="45000" bIns="45000" anchor="t">
             <a:spAutoFit/>
           </a:bodyPr>
           <a:p>
+            <a:pPr>
+              <a:lnSpc>
+                <a:spcPct val="100000"/>
+              </a:lnSpc>
+            </a:pPr>
             <a:r>
               <a:rPr lang="en-US" sz="1400" b="1" u="none" strike="noStrike">
                 <a:solidFill>
@@ -5273,235 +7099,7 @@
                 <a:latin typeface="Poppins"/>
                 <a:ea typeface="Poppins"/>
               </a:rPr>
-              <a:t>M</a:t>
-            </a:r>
-            <a:r>
-              <a:rPr lang="en-US" sz="1400" b="1" u="none" strike="noStrike">
-                <a:solidFill>
-                  <a:srgbClr val="ffffff"/>
-                </a:solidFill>
-                <a:effectLst/>
-                <a:uFillTx/>
-                <a:latin typeface="Poppins"/>
-                <a:ea typeface="Poppins"/>
-              </a:rPr>
-              <a:t>é</a:t>
-            </a:r>
-            <a:r>
-              <a:rPr lang="en-US" sz="1400" b="1" u="none" strike="noStrike">
-                <a:solidFill>
-                  <a:srgbClr val="ffffff"/>
-                </a:solidFill>
-                <a:effectLst/>
-                <a:uFillTx/>
-                <a:latin typeface="Poppins"/>
-                <a:ea typeface="Poppins"/>
-              </a:rPr>
-              <a:t>t</a:t>
-            </a:r>
-            <a:r>
-              <a:rPr lang="en-US" sz="1400" b="1" u="none" strike="noStrike">
-                <a:solidFill>
-                  <a:srgbClr val="ffffff"/>
-                </a:solidFill>
-                <a:effectLst/>
-                <a:uFillTx/>
-                <a:latin typeface="Poppins"/>
-                <a:ea typeface="Poppins"/>
-              </a:rPr>
-              <a:t>o</a:t>
-            </a:r>
-            <a:r>
-              <a:rPr lang="en-US" sz="1400" b="1" u="none" strike="noStrike">
-                <a:solidFill>
-                  <a:srgbClr val="ffffff"/>
-                </a:solidFill>
-                <a:effectLst/>
-                <a:uFillTx/>
-                <a:latin typeface="Poppins"/>
-                <a:ea typeface="Poppins"/>
-              </a:rPr>
-              <a:t>d</a:t>
-            </a:r>
-            <a:r>
-              <a:rPr lang="en-US" sz="1400" b="1" u="none" strike="noStrike">
-                <a:solidFill>
-                  <a:srgbClr val="ffffff"/>
-                </a:solidFill>
-                <a:effectLst/>
-                <a:uFillTx/>
-                <a:latin typeface="Poppins"/>
-                <a:ea typeface="Poppins"/>
-              </a:rPr>
-              <a:t>o</a:t>
-            </a:r>
-            <a:r>
-              <a:rPr lang="en-US" sz="1400" b="1" u="none" strike="noStrike">
-                <a:solidFill>
-                  <a:srgbClr val="ffffff"/>
-                </a:solidFill>
-                <a:effectLst/>
-                <a:uFillTx/>
-                <a:latin typeface="Poppins"/>
-                <a:ea typeface="Poppins"/>
-              </a:rPr>
-              <a:t>s </a:t>
-            </a:r>
-            <a:r>
-              <a:rPr lang="en-US" sz="1400" b="1" u="none" strike="noStrike">
-                <a:solidFill>
-                  <a:srgbClr val="ffffff"/>
-                </a:solidFill>
-                <a:effectLst/>
-                <a:uFillTx/>
-                <a:latin typeface="Poppins"/>
-                <a:ea typeface="Poppins"/>
-              </a:rPr>
-              <a:t>p</a:t>
-            </a:r>
-            <a:r>
-              <a:rPr lang="en-US" sz="1400" b="1" u="none" strike="noStrike">
-                <a:solidFill>
-                  <a:srgbClr val="ffffff"/>
-                </a:solidFill>
-                <a:effectLst/>
-                <a:uFillTx/>
-                <a:latin typeface="Poppins"/>
-                <a:ea typeface="Poppins"/>
-              </a:rPr>
-              <a:t>o</a:t>
-            </a:r>
-            <a:r>
-              <a:rPr lang="en-US" sz="1400" b="1" u="none" strike="noStrike">
-                <a:solidFill>
-                  <a:srgbClr val="ffffff"/>
-                </a:solidFill>
-                <a:effectLst/>
-                <a:uFillTx/>
-                <a:latin typeface="Poppins"/>
-                <a:ea typeface="Poppins"/>
-              </a:rPr>
-              <a:t>u</a:t>
-            </a:r>
-            <a:r>
-              <a:rPr lang="en-US" sz="1400" b="1" u="none" strike="noStrike">
-                <a:solidFill>
-                  <a:srgbClr val="ffffff"/>
-                </a:solidFill>
-                <a:effectLst/>
-                <a:uFillTx/>
-                <a:latin typeface="Poppins"/>
-                <a:ea typeface="Poppins"/>
-              </a:rPr>
-              <a:t>c</a:t>
-            </a:r>
-            <a:r>
-              <a:rPr lang="en-US" sz="1400" b="1" u="none" strike="noStrike">
-                <a:solidFill>
-                  <a:srgbClr val="ffffff"/>
-                </a:solidFill>
-                <a:effectLst/>
-                <a:uFillTx/>
-                <a:latin typeface="Poppins"/>
-                <a:ea typeface="Poppins"/>
-              </a:rPr>
-              <a:t>o </a:t>
-            </a:r>
-            <a:r>
-              <a:rPr lang="en-US" sz="1400" b="1" u="none" strike="noStrike">
-                <a:solidFill>
-                  <a:srgbClr val="ffffff"/>
-                </a:solidFill>
-                <a:effectLst/>
-                <a:uFillTx/>
-                <a:latin typeface="Poppins"/>
-                <a:ea typeface="Poppins"/>
-              </a:rPr>
-              <a:t>p</a:t>
-            </a:r>
-            <a:r>
-              <a:rPr lang="en-US" sz="1400" b="1" u="none" strike="noStrike">
-                <a:solidFill>
-                  <a:srgbClr val="ffffff"/>
-                </a:solidFill>
-                <a:effectLst/>
-                <a:uFillTx/>
-                <a:latin typeface="Poppins"/>
-                <a:ea typeface="Poppins"/>
-              </a:rPr>
-              <a:t>r</a:t>
-            </a:r>
-            <a:r>
-              <a:rPr lang="en-US" sz="1400" b="1" u="none" strike="noStrike">
-                <a:solidFill>
-                  <a:srgbClr val="ffffff"/>
-                </a:solidFill>
-                <a:effectLst/>
-                <a:uFillTx/>
-                <a:latin typeface="Poppins"/>
-                <a:ea typeface="Poppins"/>
-              </a:rPr>
-              <a:t>á</a:t>
-            </a:r>
-            <a:r>
-              <a:rPr lang="en-US" sz="1400" b="1" u="none" strike="noStrike">
-                <a:solidFill>
-                  <a:srgbClr val="ffffff"/>
-                </a:solidFill>
-                <a:effectLst/>
-                <a:uFillTx/>
-                <a:latin typeface="Poppins"/>
-                <a:ea typeface="Poppins"/>
-              </a:rPr>
-              <a:t>t</a:t>
-            </a:r>
-            <a:r>
-              <a:rPr lang="en-US" sz="1400" b="1" u="none" strike="noStrike">
-                <a:solidFill>
-                  <a:srgbClr val="ffffff"/>
-                </a:solidFill>
-                <a:effectLst/>
-                <a:uFillTx/>
-                <a:latin typeface="Poppins"/>
-                <a:ea typeface="Poppins"/>
-              </a:rPr>
-              <a:t>i</a:t>
-            </a:r>
-            <a:r>
-              <a:rPr lang="en-US" sz="1400" b="1" u="none" strike="noStrike">
-                <a:solidFill>
-                  <a:srgbClr val="ffffff"/>
-                </a:solidFill>
-                <a:effectLst/>
-                <a:uFillTx/>
-                <a:latin typeface="Poppins"/>
-                <a:ea typeface="Poppins"/>
-              </a:rPr>
-              <a:t>c</a:t>
-            </a:r>
-            <a:r>
-              <a:rPr lang="en-US" sz="1400" b="1" u="none" strike="noStrike">
-                <a:solidFill>
-                  <a:srgbClr val="ffffff"/>
-                </a:solidFill>
-                <a:effectLst/>
-                <a:uFillTx/>
-                <a:latin typeface="Poppins"/>
-                <a:ea typeface="Poppins"/>
-              </a:rPr>
-              <a:t>o</a:t>
-            </a:r>
-            <a:r>
-              <a:rPr lang="en-US" sz="1400" b="1" u="none" strike="noStrike">
-                <a:solidFill>
-                  <a:srgbClr val="ffffff"/>
-                </a:solidFill>
-                <a:effectLst/>
-                <a:uFillTx/>
-                <a:latin typeface="Poppins"/>
-                <a:ea typeface="Poppins"/>
-              </a:rPr>
-              <a:t>s</a:t>
+              <a:t>Métodos pouco práticos</a:t>
             </a:r>
             <a:endParaRPr lang="pt-PT" sz="1400" b="0" u="none" strike="noStrike">
               <a:solidFill>
@@ -5517,27 +7115,38 @@
       <p:sp>
         <p:nvSpPr>
           <p:cNvPr id="66" name=""/>
-          <p:cNvSpPr txBox="1"/>
+          <p:cNvSpPr/>
           <p:nvPr/>
         </p:nvSpPr>
         <p:spPr>
           <a:xfrm>
             <a:off x="6234120" y="4500000"/>
-            <a:ext cx="5195520" cy="281160"/>
-          </a:xfrm>
-          <a:prstGeom prst="rect">
-            <a:avLst/>
-          </a:prstGeom>
-          <a:noFill/>
-          <a:ln w="0">
-            <a:noFill/>
-          </a:ln>
-        </p:spPr>
+            <a:ext cx="5194440" cy="258120"/>
+          </a:xfrm>
+          <a:prstGeom prst="rect">
+            <a:avLst/>
+          </a:prstGeom>
+          <a:noFill/>
+          <a:ln w="0">
+            <a:noFill/>
+          </a:ln>
+        </p:spPr>
+        <p:style>
+          <a:lnRef idx="0"/>
+          <a:fillRef idx="0"/>
+          <a:effectRef idx="0"/>
+          <a:fontRef idx="minor"/>
+        </p:style>
         <p:txBody>
           <a:bodyPr lIns="90000" rIns="90000" tIns="45000" bIns="45000" anchor="t">
             <a:spAutoFit/>
           </a:bodyPr>
           <a:p>
+            <a:pPr>
+              <a:lnSpc>
+                <a:spcPct val="100000"/>
+              </a:lnSpc>
+            </a:pPr>
             <a:r>
               <a:rPr lang="en-US" sz="1100" b="0" u="none" strike="noStrike">
                 <a:solidFill>
@@ -5564,27 +7173,38 @@
       <p:sp>
         <p:nvSpPr>
           <p:cNvPr id="67" name=""/>
-          <p:cNvSpPr txBox="1"/>
+          <p:cNvSpPr/>
           <p:nvPr/>
         </p:nvSpPr>
         <p:spPr>
           <a:xfrm>
             <a:off x="720000" y="4398840"/>
-            <a:ext cx="5195520" cy="281160"/>
-          </a:xfrm>
-          <a:prstGeom prst="rect">
-            <a:avLst/>
-          </a:prstGeom>
-          <a:noFill/>
-          <a:ln w="0">
-            <a:noFill/>
-          </a:ln>
-        </p:spPr>
+            <a:ext cx="5194440" cy="425160"/>
+          </a:xfrm>
+          <a:prstGeom prst="rect">
+            <a:avLst/>
+          </a:prstGeom>
+          <a:noFill/>
+          <a:ln w="0">
+            <a:noFill/>
+          </a:ln>
+        </p:spPr>
+        <p:style>
+          <a:lnRef idx="0"/>
+          <a:fillRef idx="0"/>
+          <a:effectRef idx="0"/>
+          <a:fontRef idx="minor"/>
+        </p:style>
         <p:txBody>
           <a:bodyPr lIns="90000" rIns="90000" tIns="45000" bIns="45000" anchor="t">
             <a:spAutoFit/>
           </a:bodyPr>
           <a:p>
+            <a:pPr>
+              <a:lnSpc>
+                <a:spcPct val="100000"/>
+              </a:lnSpc>
+            </a:pPr>
             <a:r>
               <a:rPr lang="en-US" sz="1100" b="0" u="none" strike="noStrike">
                 <a:solidFill>
@@ -5595,7 +7215,7 @@
                 <a:latin typeface="Inter"/>
                 <a:ea typeface="Inter"/>
               </a:rPr>
-              <a:t>Dificuldade em pesquisar ou filtrar movimentações antigas de forma rápida.</a:t>
+              <a:t>Dificuldade em pesquisar ou filtrar movimentações antigas de forma rápida ou ate mesmo de visualizar as transações de forma mais concreta.</a:t>
             </a:r>
             <a:endParaRPr lang="pt-PT" sz="1100" b="0" u="none" strike="noStrike">
               <a:solidFill>
@@ -5654,7 +7274,7 @@
         <p:spPr>
           <a:xfrm>
             <a:off x="640080" y="457200"/>
-            <a:ext cx="7314840" cy="319680"/>
+            <a:ext cx="7313760" cy="318600"/>
           </a:xfrm>
           <a:prstGeom prst="rect">
             <a:avLst/>
@@ -5715,7 +7335,7 @@
         <p:spPr>
           <a:xfrm>
             <a:off x="640080" y="749880"/>
-            <a:ext cx="10058040" cy="685440"/>
+            <a:ext cx="10056960" cy="684360"/>
           </a:xfrm>
           <a:prstGeom prst="rect">
             <a:avLst/>
@@ -5776,7 +7396,7 @@
         <p:spPr>
           <a:xfrm>
             <a:off x="1280160" y="2468880"/>
-            <a:ext cx="9600840" cy="2194200"/>
+            <a:ext cx="9599760" cy="2193120"/>
           </a:xfrm>
           <a:prstGeom prst="roundRect">
             <a:avLst>
@@ -5808,6 +7428,11 @@
             <a:noAutofit/>
           </a:bodyPr>
           <a:p>
+            <a:pPr>
+              <a:lnSpc>
+                <a:spcPct val="100000"/>
+              </a:lnSpc>
+            </a:pPr>
             <a:endParaRPr lang="pt-PT" sz="1800" b="0" u="none" strike="noStrike">
               <a:solidFill>
                 <a:srgbClr val="000000"/>
@@ -5828,7 +7453,7 @@
         <p:spPr>
           <a:xfrm>
             <a:off x="1737360" y="2697480"/>
-            <a:ext cx="8686440" cy="1737000"/>
+            <a:ext cx="8685360" cy="1735920"/>
           </a:xfrm>
           <a:prstGeom prst="rect">
             <a:avLst/>
@@ -5867,7 +7492,7 @@
                 <a:latin typeface="Poppins"/>
                 <a:ea typeface="Poppins"/>
               </a:rPr>
-              <a:t>Desenvolver uma aplicação de secretária em Python, com interface gráfica em Flet e base de dados local em SQLite, que permita a gestão simples e visual das finanças pessoais do utilizador.</a:t>
+              <a:t>Desenvolver uma aplicação desktop em Python, com interface gráfica em Flet e base de dados local em SQLite, que permita a gestão simples e visual das finanças pessoais do utilizador.</a:t>
             </a:r>
             <a:endParaRPr lang="pt-PT" sz="1900" b="0" u="none" strike="noStrike">
               <a:solidFill>
@@ -5889,7 +7514,7 @@
         <p:spPr>
           <a:xfrm>
             <a:off x="457200" y="6537960"/>
-            <a:ext cx="5486040" cy="273960"/>
+            <a:ext cx="5484960" cy="272880"/>
           </a:xfrm>
           <a:prstGeom prst="rect">
             <a:avLst/>
@@ -5919,11 +7544,14 @@
               </a:tabLst>
             </a:pPr>
             <a:r>
-              <a:rPr lang="en-US" sz="900" b="0" u="none" strike="noStrike">
+              <a:rPr lang="pt-PT" sz="900" b="0" u="none" strike="noStrike">
                 <a:solidFill>
                   <a:srgbClr val="5f6b6a"/>
                 </a:solidFill>
                 <a:effectLst/>
+                <a:highlight>
+                  <a:srgbClr val="5983b0"/>
+                </a:highlight>
                 <a:uFillTx/>
                 <a:latin typeface="Inter"/>
                 <a:ea typeface="Inter"/>
@@ -5935,6 +7563,9 @@
                 <a:srgbClr val="ffffff"/>
               </a:solidFill>
               <a:effectLst/>
+              <a:highlight>
+                <a:srgbClr val="5983b0"/>
+              </a:highlight>
               <a:uFillTx/>
               <a:latin typeface="Arial"/>
             </a:endParaRPr>
@@ -5950,7 +7581,7 @@
         <p:spPr>
           <a:xfrm>
             <a:off x="11521440" y="6537960"/>
-            <a:ext cx="456840" cy="273960"/>
+            <a:ext cx="455760" cy="272880"/>
           </a:xfrm>
           <a:prstGeom prst="rect">
             <a:avLst/>
@@ -6048,7 +7679,7 @@
         <p:spPr>
           <a:xfrm>
             <a:off x="640080" y="457200"/>
-            <a:ext cx="7314840" cy="319680"/>
+            <a:ext cx="7313760" cy="318600"/>
           </a:xfrm>
           <a:prstGeom prst="rect">
             <a:avLst/>
@@ -6109,7 +7740,7 @@
         <p:spPr>
           <a:xfrm>
             <a:off x="640080" y="749880"/>
-            <a:ext cx="10058040" cy="685440"/>
+            <a:ext cx="10056960" cy="684360"/>
           </a:xfrm>
           <a:prstGeom prst="rect">
             <a:avLst/>
@@ -6170,7 +7801,7 @@
         <p:spPr>
           <a:xfrm>
             <a:off x="640080" y="1691640"/>
-            <a:ext cx="3520080" cy="1965600"/>
+            <a:ext cx="3519000" cy="1964520"/>
           </a:xfrm>
           <a:prstGeom prst="roundRect">
             <a:avLst>
@@ -6195,6 +7826,11 @@
             <a:noAutofit/>
           </a:bodyPr>
           <a:p>
+            <a:pPr>
+              <a:lnSpc>
+                <a:spcPct val="100000"/>
+              </a:lnSpc>
+            </a:pPr>
             <a:endParaRPr lang="pt-PT" sz="1800" b="0" u="none" strike="noStrike">
               <a:solidFill>
                 <a:srgbClr val="000000"/>
@@ -6215,7 +7851,7 @@
         <p:spPr>
           <a:xfrm>
             <a:off x="868680" y="1920240"/>
-            <a:ext cx="365400" cy="365400"/>
+            <a:ext cx="364320" cy="364320"/>
           </a:xfrm>
           <a:prstGeom prst="roundRect">
             <a:avLst>
@@ -6240,6 +7876,11 @@
             <a:noAutofit/>
           </a:bodyPr>
           <a:p>
+            <a:pPr>
+              <a:lnSpc>
+                <a:spcPct val="100000"/>
+              </a:lnSpc>
+            </a:pPr>
             <a:endParaRPr lang="pt-PT" sz="1800" b="0" u="none" strike="noStrike">
               <a:solidFill>
                 <a:srgbClr val="ffffff"/>
@@ -6260,7 +7901,7 @@
         <p:spPr>
           <a:xfrm>
             <a:off x="868680" y="1920240"/>
-            <a:ext cx="365400" cy="365400"/>
+            <a:ext cx="364320" cy="364320"/>
           </a:xfrm>
           <a:prstGeom prst="rect">
             <a:avLst/>
@@ -6321,7 +7962,7 @@
         <p:spPr>
           <a:xfrm>
             <a:off x="868680" y="2404800"/>
-            <a:ext cx="3062880" cy="365400"/>
+            <a:ext cx="3061800" cy="364320"/>
           </a:xfrm>
           <a:prstGeom prst="rect">
             <a:avLst/>
@@ -6382,7 +8023,7 @@
         <p:spPr>
           <a:xfrm>
             <a:off x="868680" y="2743200"/>
-            <a:ext cx="3062880" cy="822600"/>
+            <a:ext cx="3061800" cy="821520"/>
           </a:xfrm>
           <a:prstGeom prst="rect">
             <a:avLst/>
@@ -6412,7 +8053,7 @@
               </a:tabLst>
             </a:pPr>
             <a:r>
-              <a:rPr lang="en-US" sz="1050" b="0" u="none" strike="noStrike">
+              <a:rPr lang="pt-PT" sz="1050" b="0" u="none" strike="noStrike">
                 <a:solidFill>
                   <a:srgbClr val="5f6b6a"/>
                 </a:solidFill>
@@ -6443,7 +8084,7 @@
         <p:spPr>
           <a:xfrm>
             <a:off x="4389120" y="1691640"/>
-            <a:ext cx="3520080" cy="1965600"/>
+            <a:ext cx="3519000" cy="1964520"/>
           </a:xfrm>
           <a:prstGeom prst="roundRect">
             <a:avLst>
@@ -6468,6 +8109,11 @@
             <a:noAutofit/>
           </a:bodyPr>
           <a:p>
+            <a:pPr>
+              <a:lnSpc>
+                <a:spcPct val="100000"/>
+              </a:lnSpc>
+            </a:pPr>
             <a:endParaRPr lang="pt-PT" sz="1800" b="0" u="none" strike="noStrike">
               <a:solidFill>
                 <a:srgbClr val="000000"/>
@@ -6488,7 +8134,7 @@
         <p:spPr>
           <a:xfrm>
             <a:off x="4617720" y="1920240"/>
-            <a:ext cx="365400" cy="365400"/>
+            <a:ext cx="364320" cy="364320"/>
           </a:xfrm>
           <a:prstGeom prst="roundRect">
             <a:avLst>
@@ -6513,6 +8159,11 @@
             <a:noAutofit/>
           </a:bodyPr>
           <a:p>
+            <a:pPr>
+              <a:lnSpc>
+                <a:spcPct val="100000"/>
+              </a:lnSpc>
+            </a:pPr>
             <a:endParaRPr lang="pt-PT" sz="1800" b="0" u="none" strike="noStrike">
               <a:solidFill>
                 <a:srgbClr val="ffffff"/>
@@ -6533,7 +8184,7 @@
         <p:spPr>
           <a:xfrm>
             <a:off x="4617720" y="1920240"/>
-            <a:ext cx="365400" cy="365400"/>
+            <a:ext cx="364320" cy="364320"/>
           </a:xfrm>
           <a:prstGeom prst="rect">
             <a:avLst/>
@@ -6594,7 +8245,7 @@
         <p:spPr>
           <a:xfrm>
             <a:off x="4617720" y="2404800"/>
-            <a:ext cx="3062880" cy="365400"/>
+            <a:ext cx="3061800" cy="364320"/>
           </a:xfrm>
           <a:prstGeom prst="rect">
             <a:avLst/>
@@ -6655,7 +8306,7 @@
         <p:spPr>
           <a:xfrm>
             <a:off x="4617720" y="2743200"/>
-            <a:ext cx="3062880" cy="822600"/>
+            <a:ext cx="3061800" cy="821520"/>
           </a:xfrm>
           <a:prstGeom prst="rect">
             <a:avLst/>
@@ -6716,7 +8367,7 @@
         <p:spPr>
           <a:xfrm>
             <a:off x="8138160" y="1691640"/>
-            <a:ext cx="3520080" cy="1965600"/>
+            <a:ext cx="3519000" cy="1964520"/>
           </a:xfrm>
           <a:prstGeom prst="roundRect">
             <a:avLst>
@@ -6741,6 +8392,11 @@
             <a:noAutofit/>
           </a:bodyPr>
           <a:p>
+            <a:pPr>
+              <a:lnSpc>
+                <a:spcPct val="100000"/>
+              </a:lnSpc>
+            </a:pPr>
             <a:endParaRPr lang="pt-PT" sz="1800" b="0" u="none" strike="noStrike">
               <a:solidFill>
                 <a:srgbClr val="000000"/>
@@ -6761,7 +8417,7 @@
         <p:spPr>
           <a:xfrm>
             <a:off x="8366760" y="1920240"/>
-            <a:ext cx="365400" cy="365400"/>
+            <a:ext cx="364320" cy="364320"/>
           </a:xfrm>
           <a:prstGeom prst="roundRect">
             <a:avLst>
@@ -6786,6 +8442,11 @@
             <a:noAutofit/>
           </a:bodyPr>
           <a:p>
+            <a:pPr>
+              <a:lnSpc>
+                <a:spcPct val="100000"/>
+              </a:lnSpc>
+            </a:pPr>
             <a:endParaRPr lang="pt-PT" sz="1800" b="0" u="none" strike="noStrike">
               <a:solidFill>
                 <a:srgbClr val="ffffff"/>
@@ -6806,7 +8467,7 @@
         <p:spPr>
           <a:xfrm>
             <a:off x="8366760" y="1920240"/>
-            <a:ext cx="365400" cy="365400"/>
+            <a:ext cx="364320" cy="364320"/>
           </a:xfrm>
           <a:prstGeom prst="rect">
             <a:avLst/>
@@ -6867,7 +8528,7 @@
         <p:spPr>
           <a:xfrm>
             <a:off x="8366760" y="2404800"/>
-            <a:ext cx="3062880" cy="365400"/>
+            <a:ext cx="3061800" cy="364320"/>
           </a:xfrm>
           <a:prstGeom prst="rect">
             <a:avLst/>
@@ -6928,7 +8589,7 @@
         <p:spPr>
           <a:xfrm>
             <a:off x="8366760" y="2743200"/>
-            <a:ext cx="3062880" cy="822600"/>
+            <a:ext cx="3061800" cy="821520"/>
           </a:xfrm>
           <a:prstGeom prst="rect">
             <a:avLst/>
@@ -6989,7 +8650,7 @@
         <p:spPr>
           <a:xfrm>
             <a:off x="640080" y="3886200"/>
-            <a:ext cx="3520080" cy="1965600"/>
+            <a:ext cx="3519000" cy="1964520"/>
           </a:xfrm>
           <a:prstGeom prst="roundRect">
             <a:avLst>
@@ -7014,6 +8675,11 @@
             <a:noAutofit/>
           </a:bodyPr>
           <a:p>
+            <a:pPr>
+              <a:lnSpc>
+                <a:spcPct val="100000"/>
+              </a:lnSpc>
+            </a:pPr>
             <a:endParaRPr lang="pt-PT" sz="1800" b="0" u="none" strike="noStrike">
               <a:solidFill>
                 <a:srgbClr val="000000"/>
@@ -7034,7 +8700,7 @@
         <p:spPr>
           <a:xfrm>
             <a:off x="868680" y="4114800"/>
-            <a:ext cx="365400" cy="365400"/>
+            <a:ext cx="364320" cy="364320"/>
           </a:xfrm>
           <a:prstGeom prst="roundRect">
             <a:avLst>
@@ -7059,6 +8725,11 @@
             <a:noAutofit/>
           </a:bodyPr>
           <a:p>
+            <a:pPr>
+              <a:lnSpc>
+                <a:spcPct val="100000"/>
+              </a:lnSpc>
+            </a:pPr>
             <a:endParaRPr lang="pt-PT" sz="1800" b="0" u="none" strike="noStrike">
               <a:solidFill>
                 <a:srgbClr val="ffffff"/>
@@ -7079,7 +8750,7 @@
         <p:spPr>
           <a:xfrm>
             <a:off x="868680" y="4114800"/>
-            <a:ext cx="365400" cy="365400"/>
+            <a:ext cx="364320" cy="364320"/>
           </a:xfrm>
           <a:prstGeom prst="rect">
             <a:avLst/>
@@ -7140,7 +8811,7 @@
         <p:spPr>
           <a:xfrm>
             <a:off x="868680" y="4599360"/>
-            <a:ext cx="3062880" cy="365400"/>
+            <a:ext cx="3061800" cy="364320"/>
           </a:xfrm>
           <a:prstGeom prst="rect">
             <a:avLst/>
@@ -7201,7 +8872,7 @@
         <p:spPr>
           <a:xfrm>
             <a:off x="868680" y="4937760"/>
-            <a:ext cx="3062880" cy="822600"/>
+            <a:ext cx="3061800" cy="821520"/>
           </a:xfrm>
           <a:prstGeom prst="rect">
             <a:avLst/>
@@ -7262,7 +8933,7 @@
         <p:spPr>
           <a:xfrm>
             <a:off x="4389120" y="3886200"/>
-            <a:ext cx="3520080" cy="1965600"/>
+            <a:ext cx="3519000" cy="1964520"/>
           </a:xfrm>
           <a:prstGeom prst="roundRect">
             <a:avLst>
@@ -7287,6 +8958,11 @@
             <a:noAutofit/>
           </a:bodyPr>
           <a:p>
+            <a:pPr>
+              <a:lnSpc>
+                <a:spcPct val="100000"/>
+              </a:lnSpc>
+            </a:pPr>
             <a:endParaRPr lang="pt-PT" sz="1800" b="0" u="none" strike="noStrike">
               <a:solidFill>
                 <a:srgbClr val="000000"/>
@@ -7307,7 +8983,7 @@
         <p:spPr>
           <a:xfrm>
             <a:off x="4617720" y="4114800"/>
-            <a:ext cx="365400" cy="365400"/>
+            <a:ext cx="364320" cy="364320"/>
           </a:xfrm>
           <a:prstGeom prst="roundRect">
             <a:avLst>
@@ -7332,6 +9008,11 @@
             <a:noAutofit/>
           </a:bodyPr>
           <a:p>
+            <a:pPr>
+              <a:lnSpc>
+                <a:spcPct val="100000"/>
+              </a:lnSpc>
+            </a:pPr>
             <a:endParaRPr lang="pt-PT" sz="1800" b="0" u="none" strike="noStrike">
               <a:solidFill>
                 <a:srgbClr val="ffffff"/>
@@ -7352,7 +9033,7 @@
         <p:spPr>
           <a:xfrm>
             <a:off x="4617720" y="4114800"/>
-            <a:ext cx="365400" cy="365400"/>
+            <a:ext cx="364320" cy="364320"/>
           </a:xfrm>
           <a:prstGeom prst="rect">
             <a:avLst/>
@@ -7413,7 +9094,7 @@
         <p:spPr>
           <a:xfrm>
             <a:off x="4617720" y="4599360"/>
-            <a:ext cx="3062880" cy="365400"/>
+            <a:ext cx="3061800" cy="364320"/>
           </a:xfrm>
           <a:prstGeom prst="rect">
             <a:avLst/>
@@ -7474,7 +9155,7 @@
         <p:spPr>
           <a:xfrm>
             <a:off x="4617720" y="4937760"/>
-            <a:ext cx="3062880" cy="822600"/>
+            <a:ext cx="3061800" cy="821520"/>
           </a:xfrm>
           <a:prstGeom prst="rect">
             <a:avLst/>
@@ -7535,7 +9216,7 @@
         <p:spPr>
           <a:xfrm>
             <a:off x="8138160" y="3886200"/>
-            <a:ext cx="3520080" cy="1965600"/>
+            <a:ext cx="3519000" cy="1964520"/>
           </a:xfrm>
           <a:prstGeom prst="roundRect">
             <a:avLst>
@@ -7560,6 +9241,11 @@
             <a:noAutofit/>
           </a:bodyPr>
           <a:p>
+            <a:pPr>
+              <a:lnSpc>
+                <a:spcPct val="100000"/>
+              </a:lnSpc>
+            </a:pPr>
             <a:endParaRPr lang="pt-PT" sz="1800" b="0" u="none" strike="noStrike">
               <a:solidFill>
                 <a:srgbClr val="000000"/>
@@ -7580,7 +9266,7 @@
         <p:spPr>
           <a:xfrm>
             <a:off x="8366760" y="4114800"/>
-            <a:ext cx="365400" cy="365400"/>
+            <a:ext cx="364320" cy="364320"/>
           </a:xfrm>
           <a:prstGeom prst="roundRect">
             <a:avLst>
@@ -7605,6 +9291,11 @@
             <a:noAutofit/>
           </a:bodyPr>
           <a:p>
+            <a:pPr>
+              <a:lnSpc>
+                <a:spcPct val="100000"/>
+              </a:lnSpc>
+            </a:pPr>
             <a:endParaRPr lang="pt-PT" sz="1800" b="0" u="none" strike="noStrike">
               <a:solidFill>
                 <a:srgbClr val="ffffff"/>
@@ -7625,7 +9316,7 @@
         <p:spPr>
           <a:xfrm>
             <a:off x="8366760" y="4114800"/>
-            <a:ext cx="365400" cy="365400"/>
+            <a:ext cx="364320" cy="364320"/>
           </a:xfrm>
           <a:prstGeom prst="rect">
             <a:avLst/>
@@ -7686,7 +9377,7 @@
         <p:spPr>
           <a:xfrm>
             <a:off x="8366760" y="4599360"/>
-            <a:ext cx="3062880" cy="365400"/>
+            <a:ext cx="3061800" cy="364320"/>
           </a:xfrm>
           <a:prstGeom prst="rect">
             <a:avLst/>
@@ -7725,7 +9416,7 @@
                 <a:latin typeface="Poppins"/>
                 <a:ea typeface="Poppins"/>
               </a:rPr>
-              <a:t>Exportar relatórios</a:t>
+              <a:t>Visualizar relatorio</a:t>
             </a:r>
             <a:endParaRPr lang="pt-PT" sz="1300" b="0" u="none" strike="noStrike">
               <a:solidFill>
@@ -7747,7 +9438,7 @@
         <p:spPr>
           <a:xfrm>
             <a:off x="8366760" y="4937760"/>
-            <a:ext cx="3062880" cy="822600"/>
+            <a:ext cx="3061800" cy="821520"/>
           </a:xfrm>
           <a:prstGeom prst="rect">
             <a:avLst/>
@@ -7786,7 +9477,7 @@
                 <a:latin typeface="Inter"/>
                 <a:ea typeface="Inter"/>
               </a:rPr>
-              <a:t>Guardar o relatório mensal em ficheiro de texto para consulta posterior.</a:t>
+              <a:t>Visualização do relatorio mensal em um texto de facil compreensão</a:t>
             </a:r>
             <a:endParaRPr lang="pt-PT" sz="1050" b="0" u="none" strike="noStrike">
               <a:solidFill>
@@ -7808,7 +9499,7 @@
         <p:spPr>
           <a:xfrm>
             <a:off x="457200" y="6537960"/>
-            <a:ext cx="5486040" cy="273960"/>
+            <a:ext cx="5484960" cy="272880"/>
           </a:xfrm>
           <a:prstGeom prst="rect">
             <a:avLst/>
@@ -7869,7 +9560,7 @@
         <p:spPr>
           <a:xfrm>
             <a:off x="11521440" y="6537960"/>
-            <a:ext cx="456840" cy="273960"/>
+            <a:ext cx="455760" cy="272880"/>
           </a:xfrm>
           <a:prstGeom prst="rect">
             <a:avLst/>
@@ -7967,7 +9658,7 @@
         <p:spPr>
           <a:xfrm>
             <a:off x="640080" y="457200"/>
-            <a:ext cx="7314840" cy="319680"/>
+            <a:ext cx="7313760" cy="318600"/>
           </a:xfrm>
           <a:prstGeom prst="rect">
             <a:avLst/>
@@ -8028,7 +9719,7 @@
         <p:spPr>
           <a:xfrm>
             <a:off x="640080" y="749880"/>
-            <a:ext cx="10058040" cy="685440"/>
+            <a:ext cx="10056960" cy="684360"/>
           </a:xfrm>
           <a:prstGeom prst="rect">
             <a:avLst/>
@@ -8089,7 +9780,7 @@
         <p:spPr>
           <a:xfrm>
             <a:off x="640080" y="1417320"/>
-            <a:ext cx="7314840" cy="365400"/>
+            <a:ext cx="7313760" cy="364320"/>
           </a:xfrm>
           <a:prstGeom prst="rect">
             <a:avLst/>
@@ -8150,7 +9841,7 @@
         <p:spPr>
           <a:xfrm>
             <a:off x="640080" y="1965960"/>
-            <a:ext cx="6309000" cy="658080"/>
+            <a:ext cx="6307920" cy="657000"/>
           </a:xfrm>
           <a:prstGeom prst="roundRect">
             <a:avLst>
@@ -8175,6 +9866,11 @@
             <a:noAutofit/>
           </a:bodyPr>
           <a:p>
+            <a:pPr>
+              <a:lnSpc>
+                <a:spcPct val="100000"/>
+              </a:lnSpc>
+            </a:pPr>
             <a:endParaRPr lang="pt-PT" sz="1800" b="0" u="none" strike="noStrike">
               <a:solidFill>
                 <a:srgbClr val="ffffff"/>
@@ -8195,7 +9891,7 @@
         <p:spPr>
           <a:xfrm>
             <a:off x="868680" y="1965960"/>
-            <a:ext cx="1737000" cy="658080"/>
+            <a:ext cx="1735920" cy="657000"/>
           </a:xfrm>
           <a:prstGeom prst="rect">
             <a:avLst/>
@@ -8256,7 +9952,7 @@
         <p:spPr>
           <a:xfrm>
             <a:off x="2606040" y="1965960"/>
-            <a:ext cx="4205880" cy="658080"/>
+            <a:ext cx="4204800" cy="657000"/>
           </a:xfrm>
           <a:prstGeom prst="rect">
             <a:avLst/>
@@ -8317,7 +10013,7 @@
         <p:spPr>
           <a:xfrm>
             <a:off x="640080" y="2752200"/>
-            <a:ext cx="6309000" cy="658080"/>
+            <a:ext cx="6307920" cy="657000"/>
           </a:xfrm>
           <a:prstGeom prst="roundRect">
             <a:avLst>
@@ -8342,6 +10038,11 @@
             <a:noAutofit/>
           </a:bodyPr>
           <a:p>
+            <a:pPr>
+              <a:lnSpc>
+                <a:spcPct val="100000"/>
+              </a:lnSpc>
+            </a:pPr>
             <a:endParaRPr lang="pt-PT" sz="1800" b="0" u="none" strike="noStrike">
               <a:solidFill>
                 <a:srgbClr val="ffffff"/>
@@ -8362,7 +10063,7 @@
         <p:spPr>
           <a:xfrm>
             <a:off x="868680" y="2752200"/>
-            <a:ext cx="1737000" cy="658080"/>
+            <a:ext cx="1735920" cy="657000"/>
           </a:xfrm>
           <a:prstGeom prst="rect">
             <a:avLst/>
@@ -8423,7 +10124,7 @@
         <p:spPr>
           <a:xfrm>
             <a:off x="2606040" y="2752200"/>
-            <a:ext cx="4205880" cy="658080"/>
+            <a:ext cx="4204800" cy="657000"/>
           </a:xfrm>
           <a:prstGeom prst="rect">
             <a:avLst/>
@@ -8484,7 +10185,7 @@
         <p:spPr>
           <a:xfrm>
             <a:off x="640080" y="3538800"/>
-            <a:ext cx="6309000" cy="658080"/>
+            <a:ext cx="6307920" cy="657000"/>
           </a:xfrm>
           <a:prstGeom prst="roundRect">
             <a:avLst>
@@ -8509,6 +10210,11 @@
             <a:noAutofit/>
           </a:bodyPr>
           <a:p>
+            <a:pPr>
+              <a:lnSpc>
+                <a:spcPct val="100000"/>
+              </a:lnSpc>
+            </a:pPr>
             <a:endParaRPr lang="pt-PT" sz="1800" b="0" u="none" strike="noStrike">
               <a:solidFill>
                 <a:srgbClr val="ffffff"/>
@@ -8529,7 +10235,7 @@
         <p:spPr>
           <a:xfrm>
             <a:off x="868680" y="3538800"/>
-            <a:ext cx="1737000" cy="658080"/>
+            <a:ext cx="1735920" cy="657000"/>
           </a:xfrm>
           <a:prstGeom prst="rect">
             <a:avLst/>
@@ -8590,7 +10296,7 @@
         <p:spPr>
           <a:xfrm>
             <a:off x="2606040" y="3538800"/>
-            <a:ext cx="4205880" cy="658080"/>
+            <a:ext cx="4204800" cy="657000"/>
           </a:xfrm>
           <a:prstGeom prst="rect">
             <a:avLst/>
@@ -8651,7 +10357,7 @@
         <p:spPr>
           <a:xfrm>
             <a:off x="640080" y="4325040"/>
-            <a:ext cx="6309000" cy="658080"/>
+            <a:ext cx="6307920" cy="657000"/>
           </a:xfrm>
           <a:prstGeom prst="roundRect">
             <a:avLst>
@@ -8676,6 +10382,11 @@
             <a:noAutofit/>
           </a:bodyPr>
           <a:p>
+            <a:pPr>
+              <a:lnSpc>
+                <a:spcPct val="100000"/>
+              </a:lnSpc>
+            </a:pPr>
             <a:endParaRPr lang="pt-PT" sz="1800" b="0" u="none" strike="noStrike">
               <a:solidFill>
                 <a:srgbClr val="000000"/>
@@ -8696,7 +10407,7 @@
         <p:spPr>
           <a:xfrm>
             <a:off x="868680" y="4325040"/>
-            <a:ext cx="1737000" cy="658080"/>
+            <a:ext cx="1735920" cy="657000"/>
           </a:xfrm>
           <a:prstGeom prst="rect">
             <a:avLst/>
@@ -8757,7 +10468,7 @@
         <p:spPr>
           <a:xfrm>
             <a:off x="2606040" y="4325040"/>
-            <a:ext cx="4205880" cy="658080"/>
+            <a:ext cx="4204800" cy="657000"/>
           </a:xfrm>
           <a:prstGeom prst="rect">
             <a:avLst/>
@@ -8818,7 +10529,7 @@
         <p:spPr>
           <a:xfrm>
             <a:off x="640080" y="5111640"/>
-            <a:ext cx="6309000" cy="658080"/>
+            <a:ext cx="6307920" cy="657000"/>
           </a:xfrm>
           <a:prstGeom prst="roundRect">
             <a:avLst>
@@ -8843,6 +10554,11 @@
             <a:noAutofit/>
           </a:bodyPr>
           <a:p>
+            <a:pPr>
+              <a:lnSpc>
+                <a:spcPct val="100000"/>
+              </a:lnSpc>
+            </a:pPr>
             <a:endParaRPr lang="pt-PT" sz="1800" b="0" u="none" strike="noStrike">
               <a:solidFill>
                 <a:srgbClr val="000000"/>
@@ -8863,7 +10579,7 @@
         <p:spPr>
           <a:xfrm>
             <a:off x="868680" y="5111640"/>
-            <a:ext cx="1737000" cy="658080"/>
+            <a:ext cx="1735920" cy="657000"/>
           </a:xfrm>
           <a:prstGeom prst="rect">
             <a:avLst/>
@@ -8924,7 +10640,7 @@
         <p:spPr>
           <a:xfrm>
             <a:off x="2606040" y="5111640"/>
-            <a:ext cx="4205880" cy="658080"/>
+            <a:ext cx="4204800" cy="657000"/>
           </a:xfrm>
           <a:prstGeom prst="rect">
             <a:avLst/>
@@ -8985,7 +10701,7 @@
         <p:spPr>
           <a:xfrm>
             <a:off x="7315200" y="1965960"/>
-            <a:ext cx="4205880" cy="4205880"/>
+            <a:ext cx="4204800" cy="4204800"/>
           </a:xfrm>
           <a:prstGeom prst="roundRect">
             <a:avLst>
@@ -9017,6 +10733,11 @@
             <a:noAutofit/>
           </a:bodyPr>
           <a:p>
+            <a:pPr>
+              <a:lnSpc>
+                <a:spcPct val="100000"/>
+              </a:lnSpc>
+            </a:pPr>
             <a:endParaRPr lang="pt-PT" sz="1800" b="0" u="none" strike="noStrike">
               <a:solidFill>
                 <a:srgbClr val="000000"/>
@@ -9037,7 +10758,7 @@
         <p:spPr>
           <a:xfrm>
             <a:off x="7589520" y="2212920"/>
-            <a:ext cx="3657240" cy="365400"/>
+            <a:ext cx="3656160" cy="364320"/>
           </a:xfrm>
           <a:prstGeom prst="rect">
             <a:avLst/>
@@ -9098,7 +10819,7 @@
         <p:spPr>
           <a:xfrm>
             <a:off x="7635240" y="2807280"/>
-            <a:ext cx="82080" cy="82080"/>
+            <a:ext cx="81000" cy="81000"/>
           </a:xfrm>
           <a:solidFill>
             <a:srgbClr val="1f6f63"/>
@@ -9118,6 +10839,11 @@
             <a:noAutofit/>
           </a:bodyPr>
           <a:p>
+            <a:pPr>
+              <a:lnSpc>
+                <a:spcPct val="100000"/>
+              </a:lnSpc>
+            </a:pPr>
             <a:endParaRPr lang="pt-PT" sz="1800" b="0" u="none" strike="noStrike">
               <a:solidFill>
                 <a:srgbClr val="ffffff"/>
@@ -9138,7 +10864,7 @@
         <p:spPr>
           <a:xfrm>
             <a:off x="7845480" y="2651760"/>
-            <a:ext cx="3565800" cy="456840"/>
+            <a:ext cx="3564720" cy="455760"/>
           </a:xfrm>
           <a:prstGeom prst="rect">
             <a:avLst/>
@@ -9199,7 +10925,7 @@
         <p:spPr>
           <a:xfrm>
             <a:off x="7635240" y="3310200"/>
-            <a:ext cx="82080" cy="82080"/>
+            <a:ext cx="81000" cy="81000"/>
           </a:xfrm>
           <a:solidFill>
             <a:srgbClr val="1f6f63"/>
@@ -9219,6 +10945,11 @@
             <a:noAutofit/>
           </a:bodyPr>
           <a:p>
+            <a:pPr>
+              <a:lnSpc>
+                <a:spcPct val="100000"/>
+              </a:lnSpc>
+            </a:pPr>
             <a:endParaRPr lang="pt-PT" sz="1800" b="0" u="none" strike="noStrike">
               <a:solidFill>
                 <a:srgbClr val="ffffff"/>
@@ -9239,7 +10970,7 @@
         <p:spPr>
           <a:xfrm>
             <a:off x="7845480" y="3154680"/>
-            <a:ext cx="3565800" cy="456840"/>
+            <a:ext cx="3564720" cy="455760"/>
           </a:xfrm>
           <a:prstGeom prst="rect">
             <a:avLst/>
@@ -9300,7 +11031,7 @@
         <p:spPr>
           <a:xfrm>
             <a:off x="7635240" y="3813120"/>
-            <a:ext cx="82080" cy="82080"/>
+            <a:ext cx="81000" cy="81000"/>
           </a:xfrm>
           <a:solidFill>
             <a:srgbClr val="1f6f63"/>
@@ -9320,6 +11051,11 @@
             <a:noAutofit/>
           </a:bodyPr>
           <a:p>
+            <a:pPr>
+              <a:lnSpc>
+                <a:spcPct val="100000"/>
+              </a:lnSpc>
+            </a:pPr>
             <a:endParaRPr lang="pt-PT" sz="1800" b="0" u="none" strike="noStrike">
               <a:solidFill>
                 <a:srgbClr val="ffffff"/>
@@ -9340,7 +11076,7 @@
         <p:spPr>
           <a:xfrm>
             <a:off x="7845480" y="3657600"/>
-            <a:ext cx="3565800" cy="456840"/>
+            <a:ext cx="3564720" cy="455760"/>
           </a:xfrm>
           <a:prstGeom prst="rect">
             <a:avLst/>
@@ -9401,7 +11137,7 @@
         <p:spPr>
           <a:xfrm>
             <a:off x="7635240" y="4316040"/>
-            <a:ext cx="82080" cy="82080"/>
+            <a:ext cx="81000" cy="81000"/>
           </a:xfrm>
           <a:solidFill>
             <a:srgbClr val="1f6f63"/>
@@ -9421,6 +11157,11 @@
             <a:noAutofit/>
           </a:bodyPr>
           <a:p>
+            <a:pPr>
+              <a:lnSpc>
+                <a:spcPct val="100000"/>
+              </a:lnSpc>
+            </a:pPr>
             <a:endParaRPr lang="pt-PT" sz="1800" b="0" u="none" strike="noStrike">
               <a:solidFill>
                 <a:srgbClr val="ffffff"/>
@@ -9441,7 +11182,7 @@
         <p:spPr>
           <a:xfrm>
             <a:off x="7845480" y="4160520"/>
-            <a:ext cx="3565800" cy="456840"/>
+            <a:ext cx="3564720" cy="455760"/>
           </a:xfrm>
           <a:prstGeom prst="rect">
             <a:avLst/>
@@ -9471,7 +11212,7 @@
               </a:tabLst>
             </a:pPr>
             <a:r>
-              <a:rPr lang="en-US" sz="1150" b="0" u="none" strike="noStrike">
+              <a:rPr lang="pt-PT" sz="1150" b="0" u="none" strike="noStrike">
                 <a:solidFill>
                   <a:srgbClr val="0d2b2e"/>
                 </a:solidFill>
@@ -9480,7 +11221,7 @@
                 <a:latin typeface="Inter"/>
                 <a:ea typeface="Inter"/>
               </a:rPr>
-              <a:t>Gráficos de receitas, despesas e categorias</a:t>
+              <a:t>Gráficos de receitas e despesas </a:t>
             </a:r>
             <a:endParaRPr lang="pt-PT" sz="1150" b="0" u="none" strike="noStrike">
               <a:solidFill>
@@ -9502,7 +11243,7 @@
         <p:spPr>
           <a:xfrm>
             <a:off x="7635240" y="4818960"/>
-            <a:ext cx="82080" cy="82080"/>
+            <a:ext cx="81000" cy="81000"/>
           </a:xfrm>
           <a:solidFill>
             <a:srgbClr val="1f6f63"/>
@@ -9522,6 +11263,11 @@
             <a:noAutofit/>
           </a:bodyPr>
           <a:p>
+            <a:pPr>
+              <a:lnSpc>
+                <a:spcPct val="100000"/>
+              </a:lnSpc>
+            </a:pPr>
             <a:endParaRPr lang="pt-PT" sz="1800" b="0" u="none" strike="noStrike">
               <a:solidFill>
                 <a:srgbClr val="ffffff"/>
@@ -9542,7 +11288,7 @@
         <p:spPr>
           <a:xfrm>
             <a:off x="7845480" y="4663440"/>
-            <a:ext cx="3565800" cy="456840"/>
+            <a:ext cx="3564720" cy="455760"/>
           </a:xfrm>
           <a:prstGeom prst="rect">
             <a:avLst/>
@@ -9572,7 +11318,7 @@
               </a:tabLst>
             </a:pPr>
             <a:r>
-              <a:rPr lang="en-US" sz="1150" b="0" u="none" strike="noStrike">
+              <a:rPr lang="pt-PT" sz="1150" b="0" u="none" strike="noStrike">
                 <a:solidFill>
                   <a:srgbClr val="0d2b2e"/>
                 </a:solidFill>
@@ -9581,7 +11327,7 @@
                 <a:latin typeface="Inter"/>
                 <a:ea typeface="Inter"/>
               </a:rPr>
-              <a:t>Pesquisa e filtros por tipo, categoria e período</a:t>
+              <a:t>Pesquisa por descrição</a:t>
             </a:r>
             <a:endParaRPr lang="pt-PT" sz="1150" b="0" u="none" strike="noStrike">
               <a:solidFill>
@@ -9603,7 +11349,7 @@
         <p:spPr>
           <a:xfrm>
             <a:off x="7635240" y="5321880"/>
-            <a:ext cx="82080" cy="82080"/>
+            <a:ext cx="81000" cy="81000"/>
           </a:xfrm>
           <a:solidFill>
             <a:srgbClr val="1f6f63"/>
@@ -9623,6 +11369,11 @@
             <a:noAutofit/>
           </a:bodyPr>
           <a:p>
+            <a:pPr>
+              <a:lnSpc>
+                <a:spcPct val="100000"/>
+              </a:lnSpc>
+            </a:pPr>
             <a:endParaRPr lang="pt-PT" sz="1800" b="0" u="none" strike="noStrike">
               <a:solidFill>
                 <a:srgbClr val="ffffff"/>
@@ -9643,7 +11394,7 @@
         <p:spPr>
           <a:xfrm>
             <a:off x="7845480" y="5166360"/>
-            <a:ext cx="3565800" cy="456840"/>
+            <a:ext cx="3564720" cy="455760"/>
           </a:xfrm>
           <a:prstGeom prst="rect">
             <a:avLst/>
@@ -9672,77 +11423,65 @@
                 <a:tab algn="l" pos="0"/>
               </a:tabLst>
             </a:pPr>
-            <a:r>
-              <a:rPr lang="en-US" sz="1150" b="0" u="none" strike="noStrike">
-                <a:solidFill>
-                  <a:srgbClr val="0d2b2e"/>
+            <a:endParaRPr lang="pt-PT" sz="1800" b="0" u="none" strike="noStrike">
+              <a:solidFill>
+                <a:srgbClr val="000000"/>
+              </a:solidFill>
+              <a:effectLst/>
+              <a:uFillTx/>
+              <a:latin typeface="Arial"/>
+            </a:endParaRPr>
+          </a:p>
+        </p:txBody>
+      </p:sp>
+      <p:sp>
+        <p:nvSpPr>
+          <p:cNvPr id="140" name="Text 32"/>
+          <p:cNvSpPr/>
+          <p:nvPr/>
+        </p:nvSpPr>
+        <p:spPr>
+          <a:xfrm>
+            <a:off x="457200" y="6537960"/>
+            <a:ext cx="5484960" cy="272880"/>
+          </a:xfrm>
+          <a:prstGeom prst="rect">
+            <a:avLst/>
+          </a:prstGeom>
+          <a:noFill/>
+          <a:ln w="0">
+            <a:noFill/>
+          </a:ln>
+        </p:spPr>
+        <p:style>
+          <a:lnRef idx="0"/>
+          <a:fillRef idx="0"/>
+          <a:effectRef idx="0"/>
+          <a:fontRef idx="minor"/>
+        </p:style>
+        <p:txBody>
+          <a:bodyPr lIns="90000" rIns="90000" tIns="45000" bIns="45000" anchor="ctr">
+            <a:noAutofit/>
+          </a:bodyPr>
+          <a:p>
+            <a:pPr defTabSz="914400">
+              <a:lnSpc>
+                <a:spcPct val="100000"/>
+              </a:lnSpc>
+              <a:tabLst>
+                <a:tab algn="l" pos="0"/>
+              </a:tabLst>
+            </a:pPr>
+            <a:r>
+              <a:rPr lang="en-US" sz="900" b="0" u="none" strike="noStrike">
+                <a:solidFill>
+                  <a:srgbClr val="5f6b6a"/>
                 </a:solidFill>
                 <a:effectLst/>
                 <a:uFillTx/>
                 <a:latin typeface="Inter"/>
                 <a:ea typeface="Inter"/>
               </a:rPr>
-              <a:t>Exportação do relatório em .txt</a:t>
-            </a:r>
-            <a:endParaRPr lang="pt-PT" sz="1150" b="0" u="none" strike="noStrike">
-              <a:solidFill>
-                <a:srgbClr val="000000"/>
-              </a:solidFill>
-              <a:effectLst/>
-              <a:uFillTx/>
-              <a:latin typeface="Arial"/>
-            </a:endParaRPr>
-          </a:p>
-        </p:txBody>
-      </p:sp>
-      <p:sp>
-        <p:nvSpPr>
-          <p:cNvPr id="140" name="Text 32"/>
-          <p:cNvSpPr/>
-          <p:nvPr/>
-        </p:nvSpPr>
-        <p:spPr>
-          <a:xfrm>
-            <a:off x="457200" y="6537960"/>
-            <a:ext cx="5486040" cy="273960"/>
-          </a:xfrm>
-          <a:prstGeom prst="rect">
-            <a:avLst/>
-          </a:prstGeom>
-          <a:noFill/>
-          <a:ln w="0">
-            <a:noFill/>
-          </a:ln>
-        </p:spPr>
-        <p:style>
-          <a:lnRef idx="0"/>
-          <a:fillRef idx="0"/>
-          <a:effectRef idx="0"/>
-          <a:fontRef idx="minor"/>
-        </p:style>
-        <p:txBody>
-          <a:bodyPr lIns="90000" rIns="90000" tIns="45000" bIns="45000" anchor="ctr">
-            <a:noAutofit/>
-          </a:bodyPr>
-          <a:p>
-            <a:pPr defTabSz="914400">
-              <a:lnSpc>
-                <a:spcPct val="100000"/>
-              </a:lnSpc>
-              <a:tabLst>
-                <a:tab algn="l" pos="0"/>
-              </a:tabLst>
-            </a:pPr>
-            <a:r>
-              <a:rPr lang="en-US" sz="900" b="0" u="none" strike="noStrike">
-                <a:solidFill>
-                  <a:srgbClr val="5f6b6a"/>
-                </a:solidFill>
-                <a:effectLst/>
-                <a:uFillTx/>
-                <a:latin typeface="Inter"/>
-                <a:ea typeface="Inter"/>
-              </a:rPr>
               <a:t>Personal Finance Manager</a:t>
             </a:r>
             <a:endParaRPr lang="pt-PT" sz="900" b="0" u="none" strike="noStrike">
@@ -9765,7 +11504,7 @@
         <p:spPr>
           <a:xfrm>
             <a:off x="11521440" y="6537960"/>
-            <a:ext cx="456840" cy="273960"/>
+            <a:ext cx="455760" cy="272880"/>
           </a:xfrm>
           <a:prstGeom prst="rect">
             <a:avLst/>
@@ -9863,7 +11602,7 @@
         <p:spPr>
           <a:xfrm>
             <a:off x="640080" y="457200"/>
-            <a:ext cx="7314840" cy="319680"/>
+            <a:ext cx="7313760" cy="318600"/>
           </a:xfrm>
           <a:prstGeom prst="rect">
             <a:avLst/>
@@ -9924,7 +11663,7 @@
         <p:spPr>
           <a:xfrm>
             <a:off x="640080" y="749880"/>
-            <a:ext cx="10058040" cy="685440"/>
+            <a:ext cx="10056960" cy="684360"/>
           </a:xfrm>
           <a:prstGeom prst="rect">
             <a:avLst/>
@@ -9985,7 +11724,7 @@
         <p:spPr>
           <a:xfrm>
             <a:off x="640080" y="1737360"/>
-            <a:ext cx="2605680" cy="2925720"/>
+            <a:ext cx="2604600" cy="2924640"/>
           </a:xfrm>
           <a:prstGeom prst="roundRect">
             <a:avLst>
@@ -10010,6 +11749,11 @@
             <a:noAutofit/>
           </a:bodyPr>
           <a:p>
+            <a:pPr>
+              <a:lnSpc>
+                <a:spcPct val="100000"/>
+              </a:lnSpc>
+            </a:pPr>
             <a:endParaRPr lang="pt-PT" sz="1800" b="0" u="none" strike="noStrike">
               <a:solidFill>
                 <a:srgbClr val="000000"/>
@@ -10030,7 +11774,7 @@
         <p:spPr>
           <a:xfrm>
             <a:off x="960120" y="2057400"/>
-            <a:ext cx="639720" cy="639720"/>
+            <a:ext cx="638640" cy="638640"/>
           </a:xfrm>
           <a:prstGeom prst="roundRect">
             <a:avLst>
@@ -10055,6 +11799,11 @@
             <a:noAutofit/>
           </a:bodyPr>
           <a:p>
+            <a:pPr>
+              <a:lnSpc>
+                <a:spcPct val="100000"/>
+              </a:lnSpc>
+            </a:pPr>
             <a:endParaRPr lang="pt-PT" sz="1800" b="0" u="none" strike="noStrike">
               <a:solidFill>
                 <a:srgbClr val="ffffff"/>
@@ -10075,7 +11824,7 @@
         <p:spPr>
           <a:xfrm>
             <a:off x="914400" y="2926080"/>
-            <a:ext cx="2057040" cy="365400"/>
+            <a:ext cx="2055960" cy="364320"/>
           </a:xfrm>
           <a:prstGeom prst="rect">
             <a:avLst/>
@@ -10136,7 +11885,7 @@
         <p:spPr>
           <a:xfrm>
             <a:off x="914400" y="3291840"/>
-            <a:ext cx="2057040" cy="1279800"/>
+            <a:ext cx="2055960" cy="1278720"/>
           </a:xfrm>
           <a:prstGeom prst="rect">
             <a:avLst/>
@@ -10197,7 +11946,7 @@
         <p:spPr>
           <a:xfrm>
             <a:off x="3474720" y="1737360"/>
-            <a:ext cx="2605680" cy="2925720"/>
+            <a:ext cx="2604600" cy="2924640"/>
           </a:xfrm>
           <a:prstGeom prst="roundRect">
             <a:avLst>
@@ -10222,6 +11971,11 @@
             <a:noAutofit/>
           </a:bodyPr>
           <a:p>
+            <a:pPr>
+              <a:lnSpc>
+                <a:spcPct val="100000"/>
+              </a:lnSpc>
+            </a:pPr>
             <a:endParaRPr lang="pt-PT" sz="1800" b="0" u="none" strike="noStrike">
               <a:solidFill>
                 <a:srgbClr val="000000"/>
@@ -10242,7 +11996,7 @@
         <p:spPr>
           <a:xfrm>
             <a:off x="3794760" y="2057400"/>
-            <a:ext cx="639720" cy="639720"/>
+            <a:ext cx="638640" cy="638640"/>
           </a:xfrm>
           <a:prstGeom prst="roundRect">
             <a:avLst>
@@ -10267,6 +12021,11 @@
             <a:noAutofit/>
           </a:bodyPr>
           <a:p>
+            <a:pPr>
+              <a:lnSpc>
+                <a:spcPct val="100000"/>
+              </a:lnSpc>
+            </a:pPr>
             <a:endParaRPr lang="pt-PT" sz="1800" b="0" u="none" strike="noStrike">
               <a:solidFill>
                 <a:srgbClr val="ffffff"/>
@@ -10287,7 +12046,7 @@
         <p:spPr>
           <a:xfrm>
             <a:off x="3749040" y="2926080"/>
-            <a:ext cx="2057040" cy="365400"/>
+            <a:ext cx="2055960" cy="364320"/>
           </a:xfrm>
           <a:prstGeom prst="rect">
             <a:avLst/>
@@ -10348,7 +12107,7 @@
         <p:spPr>
           <a:xfrm>
             <a:off x="3749040" y="3291840"/>
-            <a:ext cx="2057040" cy="1279800"/>
+            <a:ext cx="2055960" cy="1278720"/>
           </a:xfrm>
           <a:prstGeom prst="rect">
             <a:avLst/>
@@ -10409,7 +12168,7 @@
         <p:spPr>
           <a:xfrm>
             <a:off x="6309360" y="1737360"/>
-            <a:ext cx="2605680" cy="2925720"/>
+            <a:ext cx="2604600" cy="2924640"/>
           </a:xfrm>
           <a:prstGeom prst="roundRect">
             <a:avLst>
@@ -10434,6 +12193,11 @@
             <a:noAutofit/>
           </a:bodyPr>
           <a:p>
+            <a:pPr>
+              <a:lnSpc>
+                <a:spcPct val="100000"/>
+              </a:lnSpc>
+            </a:pPr>
             <a:endParaRPr lang="pt-PT" sz="1800" b="0" u="none" strike="noStrike">
               <a:solidFill>
                 <a:srgbClr val="000000"/>
@@ -10454,7 +12218,7 @@
         <p:spPr>
           <a:xfrm>
             <a:off x="6629400" y="2057400"/>
-            <a:ext cx="639720" cy="639720"/>
+            <a:ext cx="638640" cy="638640"/>
           </a:xfrm>
           <a:prstGeom prst="roundRect">
             <a:avLst>
@@ -10479,6 +12243,11 @@
             <a:noAutofit/>
           </a:bodyPr>
           <a:p>
+            <a:pPr>
+              <a:lnSpc>
+                <a:spcPct val="100000"/>
+              </a:lnSpc>
+            </a:pPr>
             <a:endParaRPr lang="pt-PT" sz="1800" b="0" u="none" strike="noStrike">
               <a:solidFill>
                 <a:srgbClr val="000000"/>
@@ -10499,7 +12268,7 @@
         <p:spPr>
           <a:xfrm>
             <a:off x="6583680" y="2926080"/>
-            <a:ext cx="2057040" cy="365400"/>
+            <a:ext cx="2055960" cy="364320"/>
           </a:xfrm>
           <a:prstGeom prst="rect">
             <a:avLst/>
@@ -10560,7 +12329,7 @@
         <p:spPr>
           <a:xfrm>
             <a:off x="6583680" y="3291840"/>
-            <a:ext cx="2057040" cy="1279800"/>
+            <a:ext cx="2055960" cy="1278720"/>
           </a:xfrm>
           <a:prstGeom prst="rect">
             <a:avLst/>
@@ -10621,7 +12390,7 @@
         <p:spPr>
           <a:xfrm>
             <a:off x="9144000" y="1737360"/>
-            <a:ext cx="2605680" cy="2925720"/>
+            <a:ext cx="2604600" cy="2924640"/>
           </a:xfrm>
           <a:prstGeom prst="roundRect">
             <a:avLst>
@@ -10646,6 +12415,11 @@
             <a:noAutofit/>
           </a:bodyPr>
           <a:p>
+            <a:pPr>
+              <a:lnSpc>
+                <a:spcPct val="100000"/>
+              </a:lnSpc>
+            </a:pPr>
             <a:endParaRPr lang="pt-PT" sz="1800" b="0" u="none" strike="noStrike">
               <a:solidFill>
                 <a:srgbClr val="000000"/>
@@ -10666,7 +12440,7 @@
         <p:spPr>
           <a:xfrm>
             <a:off x="9464040" y="2057400"/>
-            <a:ext cx="639720" cy="639720"/>
+            <a:ext cx="638640" cy="638640"/>
           </a:xfrm>
           <a:prstGeom prst="roundRect">
             <a:avLst>
@@ -10691,6 +12465,11 @@
             <a:noAutofit/>
           </a:bodyPr>
           <a:p>
+            <a:pPr>
+              <a:lnSpc>
+                <a:spcPct val="100000"/>
+              </a:lnSpc>
+            </a:pPr>
             <a:endParaRPr lang="pt-PT" sz="1800" b="0" u="none" strike="noStrike">
               <a:solidFill>
                 <a:srgbClr val="ffffff"/>
@@ -10711,7 +12490,7 @@
         <p:spPr>
           <a:xfrm>
             <a:off x="9418320" y="2926080"/>
-            <a:ext cx="2057040" cy="365400"/>
+            <a:ext cx="2055960" cy="364320"/>
           </a:xfrm>
           <a:prstGeom prst="rect">
             <a:avLst/>
@@ -10772,7 +12551,7 @@
         <p:spPr>
           <a:xfrm>
             <a:off x="9418320" y="3291840"/>
-            <a:ext cx="2057040" cy="1279800"/>
+            <a:ext cx="2055960" cy="1278720"/>
           </a:xfrm>
           <a:prstGeom prst="rect">
             <a:avLst/>
@@ -10833,7 +12612,7 @@
         <p:spPr>
           <a:xfrm>
             <a:off x="457200" y="6537960"/>
-            <a:ext cx="5486040" cy="273960"/>
+            <a:ext cx="5484960" cy="272880"/>
           </a:xfrm>
           <a:prstGeom prst="rect">
             <a:avLst/>
@@ -10894,7 +12673,7 @@
         <p:spPr>
           <a:xfrm>
             <a:off x="11521440" y="6537960"/>
-            <a:ext cx="456840" cy="273960"/>
+            <a:ext cx="455760" cy="272880"/>
           </a:xfrm>
           <a:prstGeom prst="rect">
             <a:avLst/>
@@ -10985,14 +12764,14 @@
       </p:grpSpPr>
       <p:sp>
         <p:nvSpPr>
-          <p:cNvPr id="162" name="Text 0"/>
+          <p:cNvPr id="162" name="Text 28"/>
           <p:cNvSpPr/>
           <p:nvPr/>
         </p:nvSpPr>
         <p:spPr>
           <a:xfrm>
             <a:off x="640080" y="457200"/>
-            <a:ext cx="7314840" cy="319680"/>
+            <a:ext cx="7313760" cy="318600"/>
           </a:xfrm>
           <a:prstGeom prst="rect">
             <a:avLst/>
@@ -11022,7 +12801,7 @@
               </a:tabLst>
             </a:pPr>
             <a:r>
-              <a:rPr lang="en-US" sz="1200" b="1" u="none" spc="99" strike="noStrike">
+              <a:rPr lang="pt-PT" sz="1200" b="1" u="none" spc="99" strike="noStrike">
                 <a:solidFill>
                   <a:srgbClr val="1f6f63"/>
                 </a:solidFill>
@@ -11046,14 +12825,14 @@
       </p:sp>
       <p:sp>
         <p:nvSpPr>
-          <p:cNvPr id="163" name="Text 1"/>
+          <p:cNvPr id="163" name="Text 54"/>
           <p:cNvSpPr/>
           <p:nvPr/>
         </p:nvSpPr>
         <p:spPr>
           <a:xfrm>
             <a:off x="640080" y="749880"/>
-            <a:ext cx="10058040" cy="685440"/>
+            <a:ext cx="10056960" cy="684360"/>
           </a:xfrm>
           <a:prstGeom prst="rect">
             <a:avLst/>
@@ -11083,7 +12862,7 @@
               </a:tabLst>
             </a:pPr>
             <a:r>
-              <a:rPr lang="en-US" sz="2800" b="1" u="none" strike="noStrike">
+              <a:rPr lang="pt-PT" sz="2800" b="1" u="none" strike="noStrike">
                 <a:solidFill>
                   <a:srgbClr val="0d2b2e"/>
                 </a:solidFill>
@@ -11107,14 +12886,14 @@
       </p:sp>
       <p:sp>
         <p:nvSpPr>
-          <p:cNvPr id="164" name="Text 2"/>
+          <p:cNvPr id="164" name="Text 55"/>
           <p:cNvSpPr/>
           <p:nvPr/>
         </p:nvSpPr>
         <p:spPr>
           <a:xfrm>
             <a:off x="640080" y="1417320"/>
-            <a:ext cx="7314840" cy="365400"/>
+            <a:ext cx="7313760" cy="364320"/>
           </a:xfrm>
           <a:prstGeom prst="rect">
             <a:avLst/>
@@ -11144,7 +12923,7 @@
               </a:tabLst>
             </a:pPr>
             <a:r>
-              <a:rPr lang="en-US" sz="1250" b="0" u="none" strike="noStrike">
+              <a:rPr lang="pt-PT" sz="1250" b="0" u="none" strike="noStrike">
                 <a:solidFill>
                   <a:srgbClr val="5f6b6a"/>
                 </a:solidFill>
@@ -11168,14 +12947,14 @@
       </p:sp>
       <p:sp>
         <p:nvSpPr>
-          <p:cNvPr id="165" name="Shape 3"/>
+          <p:cNvPr id="165" name="Shape 31"/>
           <p:cNvSpPr/>
           <p:nvPr/>
         </p:nvSpPr>
         <p:spPr>
           <a:xfrm>
             <a:off x="640080" y="1965960"/>
-            <a:ext cx="2605680" cy="3245760"/>
+            <a:ext cx="2604600" cy="3244680"/>
           </a:xfrm>
           <a:prstGeom prst="roundRect">
             <a:avLst>
@@ -11207,6 +12986,11 @@
             <a:noAutofit/>
           </a:bodyPr>
           <a:p>
+            <a:pPr>
+              <a:lnSpc>
+                <a:spcPct val="100000"/>
+              </a:lnSpc>
+            </a:pPr>
             <a:endParaRPr lang="pt-PT" sz="1800" b="0" u="none" strike="noStrike">
               <a:solidFill>
                 <a:srgbClr val="000000"/>
@@ -11220,14 +13004,14 @@
       </p:sp>
       <p:sp>
         <p:nvSpPr>
-          <p:cNvPr id="166" name="Text 4"/>
+          <p:cNvPr id="166" name="Text 56"/>
           <p:cNvSpPr/>
           <p:nvPr/>
         </p:nvSpPr>
         <p:spPr>
           <a:xfrm>
             <a:off x="868680" y="2148840"/>
-            <a:ext cx="1371240" cy="548280"/>
+            <a:ext cx="1370160" cy="547200"/>
           </a:xfrm>
           <a:prstGeom prst="rect">
             <a:avLst/>
@@ -11257,7 +13041,7 @@
               </a:tabLst>
             </a:pPr>
             <a:r>
-              <a:rPr lang="en-US" sz="2400" b="1" u="none" strike="noStrike">
+              <a:rPr lang="pt-PT" sz="2400" b="1" u="none" strike="noStrike">
                 <a:solidFill>
                   <a:srgbClr val="bfe3d1"/>
                 </a:solidFill>
@@ -11281,14 +13065,14 @@
       </p:sp>
       <p:sp>
         <p:nvSpPr>
-          <p:cNvPr id="167" name="Text 5"/>
+          <p:cNvPr id="167" name="Text 57"/>
           <p:cNvSpPr/>
           <p:nvPr/>
         </p:nvSpPr>
         <p:spPr>
           <a:xfrm>
             <a:off x="868680" y="2697480"/>
-            <a:ext cx="2148480" cy="456840"/>
+            <a:ext cx="2147400" cy="455760"/>
           </a:xfrm>
           <a:prstGeom prst="rect">
             <a:avLst/>
@@ -11318,7 +13102,7 @@
               </a:tabLst>
             </a:pPr>
             <a:r>
-              <a:rPr lang="en-US" sz="1300" b="1" u="none" strike="noStrike">
+              <a:rPr lang="pt-PT" sz="1300" b="1" u="none" strike="noStrike">
                 <a:solidFill>
                   <a:srgbClr val="0d2b2e"/>
                 </a:solidFill>
@@ -11342,14 +13126,14 @@
       </p:sp>
       <p:sp>
         <p:nvSpPr>
-          <p:cNvPr id="168" name="Text 6"/>
+          <p:cNvPr id="168" name="Text 58"/>
           <p:cNvSpPr/>
           <p:nvPr/>
         </p:nvSpPr>
         <p:spPr>
           <a:xfrm>
             <a:off x="868680" y="3154680"/>
-            <a:ext cx="2148480" cy="1737000"/>
+            <a:ext cx="2147400" cy="1735920"/>
           </a:xfrm>
           <a:prstGeom prst="rect">
             <a:avLst/>
@@ -11379,7 +13163,7 @@
               </a:tabLst>
             </a:pPr>
             <a:r>
-              <a:rPr lang="en-US" sz="1050" b="0" u="none" strike="noStrike">
+              <a:rPr lang="pt-PT" sz="1050" b="0" u="none" strike="noStrike">
                 <a:solidFill>
                   <a:srgbClr val="5f6b6a"/>
                 </a:solidFill>
@@ -11403,14 +13187,14 @@
       </p:sp>
       <p:sp>
         <p:nvSpPr>
-          <p:cNvPr id="169" name="Shape 7"/>
+          <p:cNvPr id="169" name="Shape 32"/>
           <p:cNvSpPr/>
           <p:nvPr/>
         </p:nvSpPr>
         <p:spPr>
           <a:xfrm>
             <a:off x="3474720" y="1965960"/>
-            <a:ext cx="2605680" cy="3245760"/>
+            <a:ext cx="2604600" cy="3244680"/>
           </a:xfrm>
           <a:prstGeom prst="roundRect">
             <a:avLst>
@@ -11442,6 +13226,11 @@
             <a:noAutofit/>
           </a:bodyPr>
           <a:p>
+            <a:pPr>
+              <a:lnSpc>
+                <a:spcPct val="100000"/>
+              </a:lnSpc>
+            </a:pPr>
             <a:endParaRPr lang="pt-PT" sz="1800" b="0" u="none" strike="noStrike">
               <a:solidFill>
                 <a:srgbClr val="000000"/>
@@ -11455,14 +13244,14 @@
       </p:sp>
       <p:sp>
         <p:nvSpPr>
-          <p:cNvPr id="170" name="Text 8"/>
+          <p:cNvPr id="170" name="Text 59"/>
           <p:cNvSpPr/>
           <p:nvPr/>
         </p:nvSpPr>
         <p:spPr>
           <a:xfrm>
             <a:off x="3703320" y="2148840"/>
-            <a:ext cx="1371240" cy="548280"/>
+            <a:ext cx="1370160" cy="547200"/>
           </a:xfrm>
           <a:prstGeom prst="rect">
             <a:avLst/>
@@ -11492,7 +13281,7 @@
               </a:tabLst>
             </a:pPr>
             <a:r>
-              <a:rPr lang="en-US" sz="2400" b="1" u="none" strike="noStrike">
+              <a:rPr lang="pt-PT" sz="2400" b="1" u="none" strike="noStrike">
                 <a:solidFill>
                   <a:srgbClr val="bfe3d1"/>
                 </a:solidFill>
@@ -11516,14 +13305,14 @@
       </p:sp>
       <p:sp>
         <p:nvSpPr>
-          <p:cNvPr id="171" name="Text 9"/>
+          <p:cNvPr id="171" name="Text 60"/>
           <p:cNvSpPr/>
           <p:nvPr/>
         </p:nvSpPr>
         <p:spPr>
           <a:xfrm>
             <a:off x="3703320" y="2697480"/>
-            <a:ext cx="2148480" cy="456840"/>
+            <a:ext cx="2147400" cy="455760"/>
           </a:xfrm>
           <a:prstGeom prst="rect">
             <a:avLst/>
@@ -11553,7 +13342,7 @@
               </a:tabLst>
             </a:pPr>
             <a:r>
-              <a:rPr lang="en-US" sz="1300" b="1" u="none" strike="noStrike">
+              <a:rPr lang="pt-PT" sz="1300" b="1" u="none" strike="noStrike">
                 <a:solidFill>
                   <a:srgbClr val="0d2b2e"/>
                 </a:solidFill>
@@ -11577,14 +13366,14 @@
       </p:sp>
       <p:sp>
         <p:nvSpPr>
-          <p:cNvPr id="172" name="Text 10"/>
+          <p:cNvPr id="172" name="Text 61"/>
           <p:cNvSpPr/>
           <p:nvPr/>
         </p:nvSpPr>
         <p:spPr>
           <a:xfrm>
             <a:off x="3703320" y="3154680"/>
-            <a:ext cx="2148480" cy="1737000"/>
+            <a:ext cx="2147400" cy="1735920"/>
           </a:xfrm>
           <a:prstGeom prst="rect">
             <a:avLst/>
@@ -11614,7 +13403,7 @@
               </a:tabLst>
             </a:pPr>
             <a:r>
-              <a:rPr lang="en-US" sz="1050" b="0" u="none" strike="noStrike">
+              <a:rPr lang="pt-PT" sz="1050" b="0" u="none" strike="noStrike">
                 <a:solidFill>
                   <a:srgbClr val="5f6b6a"/>
                 </a:solidFill>
@@ -11638,14 +13427,14 @@
       </p:sp>
       <p:sp>
         <p:nvSpPr>
-          <p:cNvPr id="173" name="Shape 11"/>
+          <p:cNvPr id="173" name="Shape 33"/>
           <p:cNvSpPr/>
           <p:nvPr/>
         </p:nvSpPr>
         <p:spPr>
           <a:xfrm>
             <a:off x="6309360" y="1965960"/>
-            <a:ext cx="2605680" cy="3245760"/>
+            <a:ext cx="2604600" cy="3244680"/>
           </a:xfrm>
           <a:prstGeom prst="roundRect">
             <a:avLst>
@@ -11677,6 +13466,11 @@
             <a:noAutofit/>
           </a:bodyPr>
           <a:p>
+            <a:pPr>
+              <a:lnSpc>
+                <a:spcPct val="100000"/>
+              </a:lnSpc>
+            </a:pPr>
             <a:endParaRPr lang="pt-PT" sz="1800" b="0" u="none" strike="noStrike">
               <a:solidFill>
                 <a:srgbClr val="000000"/>
@@ -11690,14 +13484,14 @@
       </p:sp>
       <p:sp>
         <p:nvSpPr>
-          <p:cNvPr id="174" name="Text 12"/>
+          <p:cNvPr id="174" name="Text 62"/>
           <p:cNvSpPr/>
           <p:nvPr/>
         </p:nvSpPr>
         <p:spPr>
           <a:xfrm>
             <a:off x="6537960" y="2148840"/>
-            <a:ext cx="1371240" cy="548280"/>
+            <a:ext cx="1370160" cy="547200"/>
           </a:xfrm>
           <a:prstGeom prst="rect">
             <a:avLst/>
@@ -11727,7 +13521,7 @@
               </a:tabLst>
             </a:pPr>
             <a:r>
-              <a:rPr lang="en-US" sz="2400" b="1" u="none" strike="noStrike">
+              <a:rPr lang="pt-PT" sz="2400" b="1" u="none" strike="noStrike">
                 <a:solidFill>
                   <a:srgbClr val="bfe3d1"/>
                 </a:solidFill>
@@ -11751,14 +13545,14 @@
       </p:sp>
       <p:sp>
         <p:nvSpPr>
-          <p:cNvPr id="175" name="Text 13"/>
+          <p:cNvPr id="175" name="Text 63"/>
           <p:cNvSpPr/>
           <p:nvPr/>
         </p:nvSpPr>
         <p:spPr>
           <a:xfrm>
             <a:off x="6537960" y="2697480"/>
-            <a:ext cx="2148480" cy="456840"/>
+            <a:ext cx="2147400" cy="455760"/>
           </a:xfrm>
           <a:prstGeom prst="rect">
             <a:avLst/>
@@ -11788,7 +13582,7 @@
               </a:tabLst>
             </a:pPr>
             <a:r>
-              <a:rPr lang="en-US" sz="1300" b="1" u="none" strike="noStrike">
+              <a:rPr lang="pt-PT" sz="1300" b="1" u="none" strike="noStrike">
                 <a:solidFill>
                   <a:srgbClr val="0d2b2e"/>
                 </a:solidFill>
@@ -11812,14 +13606,14 @@
       </p:sp>
       <p:sp>
         <p:nvSpPr>
-          <p:cNvPr id="176" name="Text 14"/>
+          <p:cNvPr id="176" name="Text 64"/>
           <p:cNvSpPr/>
           <p:nvPr/>
         </p:nvSpPr>
         <p:spPr>
           <a:xfrm>
             <a:off x="6537960" y="3154680"/>
-            <a:ext cx="2148480" cy="1737000"/>
+            <a:ext cx="2147400" cy="1735920"/>
           </a:xfrm>
           <a:prstGeom prst="rect">
             <a:avLst/>
@@ -11849,7 +13643,7 @@
               </a:tabLst>
             </a:pPr>
             <a:r>
-              <a:rPr lang="en-US" sz="1050" b="0" u="none" strike="noStrike">
+              <a:rPr lang="pt-PT" sz="1050" b="0" u="none" strike="noStrike">
                 <a:solidFill>
                   <a:srgbClr val="5f6b6a"/>
                 </a:solidFill>
@@ -11873,14 +13667,14 @@
       </p:sp>
       <p:sp>
         <p:nvSpPr>
-          <p:cNvPr id="177" name="Shape 15"/>
+          <p:cNvPr id="177" name="Shape 34"/>
           <p:cNvSpPr/>
           <p:nvPr/>
         </p:nvSpPr>
         <p:spPr>
           <a:xfrm>
             <a:off x="9144000" y="1965960"/>
-            <a:ext cx="2605680" cy="3245760"/>
+            <a:ext cx="2604600" cy="3244680"/>
           </a:xfrm>
           <a:prstGeom prst="roundRect">
             <a:avLst>
@@ -11912,6 +13706,11 @@
             <a:noAutofit/>
           </a:bodyPr>
           <a:p>
+            <a:pPr>
+              <a:lnSpc>
+                <a:spcPct val="100000"/>
+              </a:lnSpc>
+            </a:pPr>
             <a:endParaRPr lang="pt-PT" sz="1800" b="0" u="none" strike="noStrike">
               <a:solidFill>
                 <a:srgbClr val="000000"/>
@@ -11925,14 +13724,14 @@
       </p:sp>
       <p:sp>
         <p:nvSpPr>
-          <p:cNvPr id="178" name="Text 16"/>
+          <p:cNvPr id="178" name="Text 65"/>
           <p:cNvSpPr/>
           <p:nvPr/>
         </p:nvSpPr>
         <p:spPr>
           <a:xfrm>
             <a:off x="9372600" y="2148840"/>
-            <a:ext cx="1371240" cy="548280"/>
+            <a:ext cx="1370160" cy="547200"/>
           </a:xfrm>
           <a:prstGeom prst="rect">
             <a:avLst/>
@@ -11962,7 +13761,7 @@
               </a:tabLst>
             </a:pPr>
             <a:r>
-              <a:rPr lang="en-US" sz="2400" b="1" u="none" strike="noStrike">
+              <a:rPr lang="pt-PT" sz="2400" b="1" u="none" strike="noStrike">
                 <a:solidFill>
                   <a:srgbClr val="bfe3d1"/>
                 </a:solidFill>
@@ -11986,14 +13785,14 @@
       </p:sp>
       <p:sp>
         <p:nvSpPr>
-          <p:cNvPr id="179" name="Text 17"/>
+          <p:cNvPr id="179" name="Text 66"/>
           <p:cNvSpPr/>
           <p:nvPr/>
         </p:nvSpPr>
         <p:spPr>
           <a:xfrm>
             <a:off x="9372600" y="2697480"/>
-            <a:ext cx="2148480" cy="456840"/>
+            <a:ext cx="2147400" cy="455760"/>
           </a:xfrm>
           <a:prstGeom prst="rect">
             <a:avLst/>
@@ -12023,7 +13822,7 @@
               </a:tabLst>
             </a:pPr>
             <a:r>
-              <a:rPr lang="en-US" sz="1300" b="1" u="none" strike="noStrike">
+              <a:rPr lang="pt-PT" sz="1300" b="1" u="none" strike="noStrike">
                 <a:solidFill>
                   <a:srgbClr val="0d2b2e"/>
                 </a:solidFill>
@@ -12032,7 +13831,7 @@
                 <a:latin typeface="Poppins"/>
                 <a:ea typeface="Poppins"/>
               </a:rPr>
-              <a:t>Testes e Publicação</a:t>
+              <a:t>Configurações</a:t>
             </a:r>
             <a:endParaRPr lang="pt-PT" sz="1300" b="0" u="none" strike="noStrike">
               <a:solidFill>
@@ -12047,14 +13846,14 @@
       </p:sp>
       <p:sp>
         <p:nvSpPr>
-          <p:cNvPr id="180" name="Text 18"/>
+          <p:cNvPr id="180" name="Text 67"/>
           <p:cNvSpPr/>
           <p:nvPr/>
         </p:nvSpPr>
         <p:spPr>
           <a:xfrm>
             <a:off x="9372600" y="3154680"/>
-            <a:ext cx="2148480" cy="1737000"/>
+            <a:ext cx="2147400" cy="1735920"/>
           </a:xfrm>
           <a:prstGeom prst="rect">
             <a:avLst/>
@@ -12084,7 +13883,7 @@
               </a:tabLst>
             </a:pPr>
             <a:r>
-              <a:rPr lang="en-US" sz="1050" b="0" u="none" strike="noStrike">
+              <a:rPr lang="pt-PT" sz="1050" b="0" u="none" strike="noStrike">
                 <a:solidFill>
                   <a:srgbClr val="5f6b6a"/>
                 </a:solidFill>
@@ -12093,7 +13892,7 @@
                 <a:latin typeface="Inter"/>
                 <a:ea typeface="Inter"/>
               </a:rPr>
-              <a:t>Testes finais e entrega no GitHub privado da disciplina.</a:t>
+              <a:t>Adicionar um menu configurações que permite fazer alterações na estrutura visual e na apresentação dos dados.</a:t>
             </a:r>
             <a:endParaRPr lang="pt-PT" sz="1050" b="0" u="none" strike="noStrike">
               <a:solidFill>
@@ -12108,14 +13907,14 @@
       </p:sp>
       <p:sp>
         <p:nvSpPr>
-          <p:cNvPr id="181" name="Text 19"/>
+          <p:cNvPr id="181" name="Text 68"/>
           <p:cNvSpPr/>
           <p:nvPr/>
         </p:nvSpPr>
         <p:spPr>
           <a:xfrm>
             <a:off x="457200" y="6537960"/>
-            <a:ext cx="5486040" cy="273960"/>
+            <a:ext cx="5484960" cy="272880"/>
           </a:xfrm>
           <a:prstGeom prst="rect">
             <a:avLst/>
@@ -12145,7 +13944,7 @@
               </a:tabLst>
             </a:pPr>
             <a:r>
-              <a:rPr lang="en-US" sz="900" b="0" u="none" strike="noStrike">
+              <a:rPr lang="pt-PT" sz="900" b="0" u="none" strike="noStrike">
                 <a:solidFill>
                   <a:srgbClr val="5f6b6a"/>
                 </a:solidFill>
@@ -12169,14 +13968,14 @@
       </p:sp>
       <p:sp>
         <p:nvSpPr>
-          <p:cNvPr id="182" name="Text 20"/>
+          <p:cNvPr id="182" name="Text 69"/>
           <p:cNvSpPr/>
           <p:nvPr/>
         </p:nvSpPr>
         <p:spPr>
           <a:xfrm>
             <a:off x="11521440" y="6537960"/>
-            <a:ext cx="456840" cy="273960"/>
+            <a:ext cx="455760" cy="272880"/>
           </a:xfrm>
           <a:prstGeom prst="rect">
             <a:avLst/>
@@ -12206,7 +14005,7 @@
               </a:tabLst>
             </a:pPr>
             <a:r>
-              <a:rPr lang="en-US" sz="900" b="0" u="none" strike="noStrike">
+              <a:rPr lang="pt-PT" sz="900" b="0" u="none" strike="noStrike">
                 <a:solidFill>
                   <a:srgbClr val="5f6b6a"/>
                 </a:solidFill>
@@ -12247,7 +14046,7 @@
     <p:bg>
       <p:bgPr>
         <a:solidFill>
-          <a:srgbClr val="0d2b2e"/>
+          <a:srgbClr val="f2f4f7"/>
         </a:solidFill>
       </p:bgPr>
     </p:bg>
@@ -12267,14 +14066,14 @@
       </p:grpSpPr>
       <p:sp>
         <p:nvSpPr>
-          <p:cNvPr id="183" name="Text 0"/>
+          <p:cNvPr id="183" name="Text 34"/>
           <p:cNvSpPr/>
           <p:nvPr/>
         </p:nvSpPr>
         <p:spPr>
           <a:xfrm>
             <a:off x="640080" y="457200"/>
-            <a:ext cx="7314840" cy="319680"/>
+            <a:ext cx="7313760" cy="318600"/>
           </a:xfrm>
           <a:prstGeom prst="rect">
             <a:avLst/>
@@ -12304,38 +14103,38 @@
               </a:tabLst>
             </a:pPr>
             <a:r>
-              <a:rPr lang="en-US" sz="1200" b="1" u="none" spc="99" strike="noStrike">
-                <a:solidFill>
-                  <a:srgbClr val="4caf87"/>
+              <a:rPr lang="pt-PT" sz="1200" b="1" u="none" spc="99" strike="noStrike">
+                <a:solidFill>
+                  <a:srgbClr val="1f6f63"/>
                 </a:solidFill>
                 <a:effectLst/>
                 <a:uFillTx/>
                 <a:latin typeface="Inter"/>
                 <a:ea typeface="Inter"/>
               </a:rPr>
-              <a:t>08</a:t>
+              <a:t>07</a:t>
             </a:r>
             <a:endParaRPr lang="pt-PT" sz="1200" b="0" u="none" strike="noStrike">
               <a:solidFill>
-                <a:srgbClr val="ffffff"/>
-              </a:solidFill>
-              <a:effectLst/>
-              <a:uFillTx/>
-              <a:latin typeface="Arial"/>
-            </a:endParaRPr>
-          </a:p>
-        </p:txBody>
-      </p:sp>
-      <p:sp>
-        <p:nvSpPr>
-          <p:cNvPr id="184" name="Text 1"/>
+                <a:srgbClr val="000000"/>
+              </a:solidFill>
+              <a:effectLst/>
+              <a:uFillTx/>
+              <a:latin typeface="Arial"/>
+            </a:endParaRPr>
+          </a:p>
+        </p:txBody>
+      </p:sp>
+      <p:sp>
+        <p:nvSpPr>
+          <p:cNvPr id="184" name="Text 35"/>
           <p:cNvSpPr/>
           <p:nvPr/>
         </p:nvSpPr>
         <p:spPr>
           <a:xfrm>
             <a:off x="640080" y="749880"/>
-            <a:ext cx="10058040" cy="685440"/>
+            <a:ext cx="10056960" cy="684360"/>
           </a:xfrm>
           <a:prstGeom prst="rect">
             <a:avLst/>
@@ -12365,38 +14164,90 @@
               </a:tabLst>
             </a:pPr>
             <a:r>
-              <a:rPr lang="en-US" sz="2800" b="1" u="none" strike="noStrike">
-                <a:solidFill>
-                  <a:srgbClr val="ffffff"/>
+              <a:rPr lang="pt-PT" sz="2800" b="1" u="none" strike="noStrike">
+                <a:solidFill>
+                  <a:srgbClr val="0d2b2e"/>
                 </a:solidFill>
                 <a:effectLst/>
                 <a:uFillTx/>
                 <a:latin typeface="Poppins"/>
                 <a:ea typeface="Poppins"/>
               </a:rPr>
-              <a:t>Conclusão</a:t>
+              <a:t>Demonstração</a:t>
             </a:r>
             <a:endParaRPr lang="pt-PT" sz="2800" b="0" u="none" strike="noStrike">
               <a:solidFill>
-                <a:srgbClr val="ffffff"/>
-              </a:solidFill>
-              <a:effectLst/>
-              <a:uFillTx/>
-              <a:latin typeface="Arial"/>
-            </a:endParaRPr>
-          </a:p>
-        </p:txBody>
-      </p:sp>
-      <p:sp>
-        <p:nvSpPr>
-          <p:cNvPr id="185" name="Text 2"/>
-          <p:cNvSpPr/>
-          <p:nvPr/>
-        </p:nvSpPr>
-        <p:spPr>
-          <a:xfrm>
-            <a:off x="640080" y="1737360"/>
-            <a:ext cx="10240920" cy="914040"/>
+                <a:srgbClr val="000000"/>
+              </a:solidFill>
+              <a:effectLst/>
+              <a:uFillTx/>
+              <a:latin typeface="Arial"/>
+            </a:endParaRPr>
+          </a:p>
+        </p:txBody>
+      </p:sp>
+      <p:sp>
+        <p:nvSpPr>
+          <p:cNvPr id="185" name="Shape 5"/>
+          <p:cNvSpPr/>
+          <p:nvPr/>
+        </p:nvSpPr>
+        <p:spPr>
+          <a:xfrm rot="5429400">
+            <a:off x="883800" y="1900080"/>
+            <a:ext cx="2674440" cy="3664800"/>
+          </a:xfrm>
+          <a:prstGeom prst="roundRect">
+            <a:avLst>
+              <a:gd name="adj" fmla="val 3509"/>
+            </a:avLst>
+          </a:prstGeom>
+          <a:solidFill>
+            <a:srgbClr val="ffffff"/>
+          </a:solidFill>
+          <a:ln w="0">
+            <a:noFill/>
+          </a:ln>
+          <a:effectLst>
+            <a:outerShdw algn="bl" blurRad="76320" dir="5400000" dist="25560" kx="0" ky="0" rotWithShape="0" sx="100000" sy="100000">
+              <a:srgbClr val="000000">
+                <a:alpha val="10000"/>
+              </a:srgbClr>
+            </a:outerShdw>
+          </a:effectLst>
+        </p:spPr>
+        <p:style>
+          <a:lnRef idx="0"/>
+          <a:fillRef idx="0"/>
+          <a:effectRef idx="0"/>
+          <a:fontRef idx="minor"/>
+        </p:style>
+        <p:txBody>
+          <a:bodyPr lIns="90000" rIns="90000" tIns="45000" bIns="45000" anchor="t">
+            <a:noAutofit/>
+          </a:bodyPr>
+          <a:p>
+            <a:endParaRPr lang="pt-PT" sz="1800" b="0" u="none" strike="noStrike">
+              <a:solidFill>
+                <a:srgbClr val="000000"/>
+              </a:solidFill>
+              <a:effectLst/>
+              <a:uFillTx/>
+              <a:latin typeface="Arial"/>
+            </a:endParaRPr>
+          </a:p>
+        </p:txBody>
+      </p:sp>
+      <p:sp>
+        <p:nvSpPr>
+          <p:cNvPr id="186" name="Text 37"/>
+          <p:cNvSpPr/>
+          <p:nvPr/>
+        </p:nvSpPr>
+        <p:spPr>
+          <a:xfrm>
+            <a:off x="597600" y="2563560"/>
+            <a:ext cx="2205360" cy="468000"/>
           </a:xfrm>
           <a:prstGeom prst="rect">
             <a:avLst/>
@@ -12419,45 +14270,106 @@
           <a:p>
             <a:pPr defTabSz="914400">
               <a:lnSpc>
-                <a:spcPct val="140000"/>
-              </a:lnSpc>
-              <a:tabLst>
-                <a:tab algn="l" pos="0"/>
-              </a:tabLst>
-            </a:pPr>
-            <a:r>
-              <a:rPr lang="en-US" sz="1400" b="0" u="none" strike="noStrike">
-                <a:solidFill>
-                  <a:srgbClr val="bfe3d1"/>
+                <a:spcPct val="100000"/>
+              </a:lnSpc>
+              <a:tabLst>
+                <a:tab algn="l" pos="0"/>
+              </a:tabLst>
+            </a:pPr>
+            <a:r>
+              <a:rPr lang="pt-PT" sz="1300" b="1" u="none" strike="noStrike">
+                <a:solidFill>
+                  <a:srgbClr val="0d2b2e"/>
+                </a:solidFill>
+                <a:effectLst/>
+                <a:uFillTx/>
+                <a:latin typeface="Poppins"/>
+                <a:ea typeface="Poppins"/>
+              </a:rPr>
+              <a:t>Dashboard</a:t>
+            </a:r>
+            <a:endParaRPr lang="pt-PT" sz="1300" b="0" u="none" strike="noStrike">
+              <a:solidFill>
+                <a:srgbClr val="000000"/>
+              </a:solidFill>
+              <a:effectLst/>
+              <a:uFillTx/>
+              <a:latin typeface="Arial"/>
+            </a:endParaRPr>
+          </a:p>
+        </p:txBody>
+      </p:sp>
+      <p:sp>
+        <p:nvSpPr>
+          <p:cNvPr id="187" name="Text 48"/>
+          <p:cNvSpPr/>
+          <p:nvPr/>
+        </p:nvSpPr>
+        <p:spPr>
+          <a:xfrm>
+            <a:off x="457200" y="6537960"/>
+            <a:ext cx="5484960" cy="272880"/>
+          </a:xfrm>
+          <a:prstGeom prst="rect">
+            <a:avLst/>
+          </a:prstGeom>
+          <a:noFill/>
+          <a:ln w="0">
+            <a:noFill/>
+          </a:ln>
+        </p:spPr>
+        <p:style>
+          <a:lnRef idx="0"/>
+          <a:fillRef idx="0"/>
+          <a:effectRef idx="0"/>
+          <a:fontRef idx="minor"/>
+        </p:style>
+        <p:txBody>
+          <a:bodyPr lIns="90000" rIns="90000" tIns="45000" bIns="45000" anchor="ctr">
+            <a:noAutofit/>
+          </a:bodyPr>
+          <a:p>
+            <a:pPr defTabSz="914400">
+              <a:lnSpc>
+                <a:spcPct val="100000"/>
+              </a:lnSpc>
+              <a:tabLst>
+                <a:tab algn="l" pos="0"/>
+              </a:tabLst>
+            </a:pPr>
+            <a:r>
+              <a:rPr lang="pt-PT" sz="900" b="0" u="none" strike="noStrike">
+                <a:solidFill>
+                  <a:srgbClr val="5f6b6a"/>
                 </a:solidFill>
                 <a:effectLst/>
                 <a:uFillTx/>
                 <a:latin typeface="Inter"/>
                 <a:ea typeface="Inter"/>
               </a:rPr>
-              <a:t>O desenvolvimento do Personal Finance Manager permitiu aplicar, de forma prática, conceitos fundamentais de programação orientada a objetos, modelação de bases de dados e construção de interfaces gráficas em Python.</a:t>
-            </a:r>
-            <a:endParaRPr lang="pt-PT" sz="1400" b="0" u="none" strike="noStrike">
-              <a:solidFill>
-                <a:srgbClr val="ffffff"/>
-              </a:solidFill>
-              <a:effectLst/>
-              <a:uFillTx/>
-              <a:latin typeface="Arial"/>
-            </a:endParaRPr>
-          </a:p>
-        </p:txBody>
-      </p:sp>
-      <p:sp>
-        <p:nvSpPr>
-          <p:cNvPr id="186" name="Text 3"/>
-          <p:cNvSpPr/>
-          <p:nvPr/>
-        </p:nvSpPr>
-        <p:spPr>
-          <a:xfrm>
-            <a:off x="640080" y="2606040"/>
-            <a:ext cx="10240920" cy="1005480"/>
+              <a:t>Personal Finance Manager</a:t>
+            </a:r>
+            <a:endParaRPr lang="pt-PT" sz="900" b="0" u="none" strike="noStrike">
+              <a:solidFill>
+                <a:srgbClr val="000000"/>
+              </a:solidFill>
+              <a:effectLst/>
+              <a:uFillTx/>
+              <a:latin typeface="Arial"/>
+            </a:endParaRPr>
+          </a:p>
+        </p:txBody>
+      </p:sp>
+      <p:sp>
+        <p:nvSpPr>
+          <p:cNvPr id="188" name="Text 49"/>
+          <p:cNvSpPr/>
+          <p:nvPr/>
+        </p:nvSpPr>
+        <p:spPr>
+          <a:xfrm>
+            <a:off x="11521440" y="6537960"/>
+            <a:ext cx="455760" cy="272880"/>
           </a:xfrm>
           <a:prstGeom prst="rect">
             <a:avLst/>
@@ -12478,59 +14390,90 @@
             <a:noAutofit/>
           </a:bodyPr>
           <a:p>
-            <a:pPr defTabSz="914400">
-              <a:lnSpc>
-                <a:spcPct val="140000"/>
-              </a:lnSpc>
-              <a:tabLst>
-                <a:tab algn="l" pos="0"/>
-              </a:tabLst>
-            </a:pPr>
-            <a:r>
-              <a:rPr lang="en-US" sz="1400" b="0" u="none" strike="noStrike">
-                <a:solidFill>
-                  <a:srgbClr val="bfe3d1"/>
+            <a:pPr algn="r" defTabSz="914400">
+              <a:lnSpc>
+                <a:spcPct val="100000"/>
+              </a:lnSpc>
+              <a:tabLst>
+                <a:tab algn="l" pos="0"/>
+              </a:tabLst>
+            </a:pPr>
+            <a:r>
+              <a:rPr lang="pt-PT" sz="900" b="0" u="none" strike="noStrike">
+                <a:solidFill>
+                  <a:srgbClr val="5f6b6a"/>
                 </a:solidFill>
                 <a:effectLst/>
                 <a:uFillTx/>
                 <a:latin typeface="Inter"/>
                 <a:ea typeface="Inter"/>
               </a:rPr>
-              <a:t>A arquitetura em camadas construída garantiu um desenvolvimento organizado e sustentável e deixou claramente documentadas as decisões tomadas e as melhorias a realizar no futuro.</a:t>
-            </a:r>
-            <a:endParaRPr lang="pt-PT" sz="1400" b="0" u="none" strike="noStrike">
-              <a:solidFill>
-                <a:srgbClr val="ffffff"/>
-              </a:solidFill>
-              <a:effectLst/>
-              <a:uFillTx/>
-              <a:latin typeface="Arial"/>
-            </a:endParaRPr>
-          </a:p>
-        </p:txBody>
-      </p:sp>
-      <p:sp>
-        <p:nvSpPr>
-          <p:cNvPr id="187" name="Shape 4"/>
-          <p:cNvSpPr/>
-          <p:nvPr/>
-        </p:nvSpPr>
-        <p:spPr>
-          <a:xfrm>
-            <a:off x="640080" y="3977640"/>
-            <a:ext cx="10240920" cy="1416960"/>
+              <a:t>8</a:t>
+            </a:r>
+            <a:endParaRPr lang="pt-PT" sz="900" b="0" u="none" strike="noStrike">
+              <a:solidFill>
+                <a:srgbClr val="000000"/>
+              </a:solidFill>
+              <a:effectLst/>
+              <a:uFillTx/>
+              <a:latin typeface="Arial"/>
+            </a:endParaRPr>
+          </a:p>
+        </p:txBody>
+      </p:sp>
+      <p:pic>
+        <p:nvPicPr>
+          <p:cNvPr id="189" name=""/>
+          <p:cNvPicPr/>
+          <p:nvPr/>
+        </p:nvPicPr>
+        <p:blipFill>
+          <a:blip r:embed="rId1"/>
+          <a:stretch/>
+        </p:blipFill>
+        <p:spPr>
+          <a:xfrm>
+            <a:off x="586440" y="3144600"/>
+            <a:ext cx="3257640" cy="1761840"/>
+          </a:xfrm>
+          <a:prstGeom prst="rect">
+            <a:avLst/>
+          </a:prstGeom>
+          <a:noFill/>
+          <a:ln w="0">
+            <a:noFill/>
+          </a:ln>
+        </p:spPr>
+      </p:pic>
+      <p:sp>
+        <p:nvSpPr>
+          <p:cNvPr id="190" name="Shape 16"/>
+          <p:cNvSpPr/>
+          <p:nvPr/>
+        </p:nvSpPr>
+        <p:spPr>
+          <a:xfrm rot="5427600">
+            <a:off x="4651200" y="1988280"/>
+            <a:ext cx="2674440" cy="3503880"/>
           </a:xfrm>
           <a:prstGeom prst="roundRect">
             <a:avLst>
-              <a:gd name="adj" fmla="val 7742"/>
+              <a:gd name="adj" fmla="val 3509"/>
             </a:avLst>
           </a:prstGeom>
           <a:solidFill>
-            <a:srgbClr val="133b3d"/>
+            <a:srgbClr val="ffffff"/>
           </a:solidFill>
           <a:ln w="0">
             <a:noFill/>
           </a:ln>
+          <a:effectLst>
+            <a:outerShdw algn="bl" blurRad="76320" dir="5400000" dist="25560" kx="0" ky="0" rotWithShape="0" sx="100000" sy="100000">
+              <a:srgbClr val="000000">
+                <a:alpha val="10000"/>
+              </a:srgbClr>
+            </a:outerShdw>
+          </a:effectLst>
         </p:spPr>
         <p:style>
           <a:lnRef idx="0"/>
@@ -12545,25 +14488,77 @@
           <a:p>
             <a:endParaRPr lang="pt-PT" sz="1800" b="0" u="none" strike="noStrike">
               <a:solidFill>
-                <a:srgbClr val="ffffff"/>
-              </a:solidFill>
-              <a:effectLst/>
-              <a:uFillTx/>
-              <a:latin typeface="Arial"/>
-            </a:endParaRPr>
-          </a:p>
-        </p:txBody>
-      </p:sp>
-      <p:sp>
-        <p:nvSpPr>
-          <p:cNvPr id="188" name="Text 5"/>
-          <p:cNvSpPr/>
-          <p:nvPr/>
-        </p:nvSpPr>
-        <p:spPr>
-          <a:xfrm>
-            <a:off x="960120" y="4160520"/>
-            <a:ext cx="9600840" cy="1096920"/>
+                <a:srgbClr val="000000"/>
+              </a:solidFill>
+              <a:effectLst/>
+              <a:uFillTx/>
+              <a:latin typeface="Arial"/>
+            </a:endParaRPr>
+          </a:p>
+        </p:txBody>
+      </p:sp>
+      <p:sp>
+        <p:nvSpPr>
+          <p:cNvPr id="191" name="Shape 19"/>
+          <p:cNvSpPr/>
+          <p:nvPr/>
+        </p:nvSpPr>
+        <p:spPr>
+          <a:xfrm rot="5428800">
+            <a:off x="8393760" y="2021760"/>
+            <a:ext cx="2674800" cy="3535200"/>
+          </a:xfrm>
+          <a:prstGeom prst="roundRect">
+            <a:avLst>
+              <a:gd name="adj" fmla="val 3509"/>
+            </a:avLst>
+          </a:prstGeom>
+          <a:solidFill>
+            <a:srgbClr val="ffffff"/>
+          </a:solidFill>
+          <a:ln w="0">
+            <a:noFill/>
+          </a:ln>
+          <a:effectLst>
+            <a:outerShdw algn="bl" blurRad="76320" dir="5400000" dist="25560" kx="0" ky="0" rotWithShape="0" sx="100000" sy="100000">
+              <a:srgbClr val="000000">
+                <a:alpha val="10000"/>
+              </a:srgbClr>
+            </a:outerShdw>
+          </a:effectLst>
+        </p:spPr>
+        <p:style>
+          <a:lnRef idx="0"/>
+          <a:fillRef idx="0"/>
+          <a:effectRef idx="0"/>
+          <a:fontRef idx="minor"/>
+        </p:style>
+        <p:txBody>
+          <a:bodyPr lIns="90000" rIns="90000" tIns="45000" bIns="45000" anchor="t">
+            <a:noAutofit/>
+          </a:bodyPr>
+          <a:p>
+            <a:endParaRPr lang="pt-PT" sz="1800" b="0" u="none" strike="noStrike">
+              <a:solidFill>
+                <a:srgbClr val="000000"/>
+              </a:solidFill>
+              <a:effectLst/>
+              <a:uFillTx/>
+              <a:latin typeface="Arial"/>
+            </a:endParaRPr>
+          </a:p>
+        </p:txBody>
+      </p:sp>
+      <p:sp>
+        <p:nvSpPr>
+          <p:cNvPr id="192" name="Text 50"/>
+          <p:cNvSpPr/>
+          <p:nvPr/>
+        </p:nvSpPr>
+        <p:spPr>
+          <a:xfrm>
+            <a:off x="4406040" y="2608920"/>
+            <a:ext cx="2205000" cy="468000"/>
           </a:xfrm>
           <a:prstGeom prst="rect">
             <a:avLst/>
@@ -12586,45 +14581,45 @@
           <a:p>
             <a:pPr defTabSz="914400">
               <a:lnSpc>
-                <a:spcPct val="135000"/>
-              </a:lnSpc>
-              <a:tabLst>
-                <a:tab algn="l" pos="0"/>
-              </a:tabLst>
-            </a:pPr>
-            <a:r>
-              <a:rPr lang="en-US" sz="1500" b="1" u="none" strike="noStrike">
-                <a:solidFill>
-                  <a:srgbClr val="ffffff"/>
+                <a:spcPct val="100000"/>
+              </a:lnSpc>
+              <a:tabLst>
+                <a:tab algn="l" pos="0"/>
+              </a:tabLst>
+            </a:pPr>
+            <a:r>
+              <a:rPr lang="pt-PT" sz="1300" b="1" u="none" strike="noStrike">
+                <a:solidFill>
+                  <a:srgbClr val="0d2b2e"/>
                 </a:solidFill>
                 <a:effectLst/>
                 <a:uFillTx/>
                 <a:latin typeface="Poppins"/>
                 <a:ea typeface="Poppins"/>
               </a:rPr>
-              <a:t>O projeto cumpre os objetivos propostos, entregando uma aplicação funcional de gestão financeira pessoal, com espaço de crescimento bem definido para versões futuras.</a:t>
-            </a:r>
-            <a:endParaRPr lang="pt-PT" sz="1500" b="0" u="none" strike="noStrike">
-              <a:solidFill>
-                <a:srgbClr val="ffffff"/>
-              </a:solidFill>
-              <a:effectLst/>
-              <a:uFillTx/>
-              <a:latin typeface="Arial"/>
-            </a:endParaRPr>
-          </a:p>
-        </p:txBody>
-      </p:sp>
-      <p:sp>
-        <p:nvSpPr>
-          <p:cNvPr id="189" name="Text 6"/>
-          <p:cNvSpPr/>
-          <p:nvPr/>
-        </p:nvSpPr>
-        <p:spPr>
-          <a:xfrm>
-            <a:off x="457200" y="6537960"/>
-            <a:ext cx="5486040" cy="273960"/>
+              <a:t> Adicionar movimentos</a:t>
+            </a:r>
+            <a:endParaRPr lang="pt-PT" sz="1300" b="0" u="none" strike="noStrike">
+              <a:solidFill>
+                <a:srgbClr val="000000"/>
+              </a:solidFill>
+              <a:effectLst/>
+              <a:uFillTx/>
+              <a:latin typeface="Arial"/>
+            </a:endParaRPr>
+          </a:p>
+        </p:txBody>
+      </p:sp>
+      <p:sp>
+        <p:nvSpPr>
+          <p:cNvPr id="193" name="Text 51"/>
+          <p:cNvSpPr/>
+          <p:nvPr/>
+        </p:nvSpPr>
+        <p:spPr>
+          <a:xfrm>
+            <a:off x="8132040" y="2608560"/>
+            <a:ext cx="2205000" cy="468000"/>
           </a:xfrm>
           <a:prstGeom prst="rect">
             <a:avLst/>
@@ -12654,89 +14649,76 @@
               </a:tabLst>
             </a:pPr>
             <a:r>
-              <a:rPr lang="en-US" sz="900" b="0" u="none" strike="noStrike">
-                <a:solidFill>
-                  <a:srgbClr val="5f6b6a"/>
-                </a:solidFill>
-                <a:effectLst/>
-                <a:uFillTx/>
-                <a:latin typeface="Inter"/>
-                <a:ea typeface="Inter"/>
-              </a:rPr>
-              <a:t>Personal Finance Manager</a:t>
-            </a:r>
-            <a:endParaRPr lang="pt-PT" sz="900" b="0" u="none" strike="noStrike">
-              <a:solidFill>
-                <a:srgbClr val="ffffff"/>
-              </a:solidFill>
-              <a:effectLst/>
-              <a:uFillTx/>
-              <a:latin typeface="Arial"/>
-            </a:endParaRPr>
-          </a:p>
-        </p:txBody>
-      </p:sp>
-      <p:sp>
-        <p:nvSpPr>
-          <p:cNvPr id="190" name="Text 7"/>
-          <p:cNvSpPr/>
-          <p:nvPr/>
-        </p:nvSpPr>
-        <p:spPr>
-          <a:xfrm>
-            <a:off x="11521440" y="6537960"/>
-            <a:ext cx="456840" cy="273960"/>
-          </a:xfrm>
-          <a:prstGeom prst="rect">
-            <a:avLst/>
-          </a:prstGeom>
-          <a:noFill/>
-          <a:ln w="0">
-            <a:noFill/>
-          </a:ln>
-        </p:spPr>
-        <p:style>
-          <a:lnRef idx="0"/>
-          <a:fillRef idx="0"/>
-          <a:effectRef idx="0"/>
-          <a:fontRef idx="minor"/>
-        </p:style>
-        <p:txBody>
-          <a:bodyPr lIns="90000" rIns="90000" tIns="45000" bIns="45000" anchor="ctr">
-            <a:noAutofit/>
-          </a:bodyPr>
-          <a:p>
-            <a:pPr algn="r" defTabSz="914400">
-              <a:lnSpc>
-                <a:spcPct val="100000"/>
-              </a:lnSpc>
-              <a:tabLst>
-                <a:tab algn="l" pos="0"/>
-              </a:tabLst>
-            </a:pPr>
-            <a:r>
-              <a:rPr lang="en-US" sz="900" b="0" u="none" strike="noStrike">
-                <a:solidFill>
-                  <a:srgbClr val="5f6b6a"/>
-                </a:solidFill>
-                <a:effectLst/>
-                <a:uFillTx/>
-                <a:latin typeface="Inter"/>
-                <a:ea typeface="Inter"/>
-              </a:rPr>
-              <a:t>9</a:t>
-            </a:r>
-            <a:endParaRPr lang="pt-PT" sz="900" b="0" u="none" strike="noStrike">
-              <a:solidFill>
-                <a:srgbClr val="ffffff"/>
-              </a:solidFill>
-              <a:effectLst/>
-              <a:uFillTx/>
-              <a:latin typeface="Arial"/>
-            </a:endParaRPr>
-          </a:p>
-        </p:txBody>
-      </p:sp>
+              <a:rPr lang="pt-PT" sz="1300" b="1" u="none" strike="noStrike">
+                <a:solidFill>
+                  <a:srgbClr val="0d2b2e"/>
+                </a:solidFill>
+                <a:effectLst/>
+                <a:uFillTx/>
+                <a:latin typeface="Poppins"/>
+                <a:ea typeface="Poppins"/>
+              </a:rPr>
+              <a:t>Categorias</a:t>
+            </a:r>
+            <a:endParaRPr lang="pt-PT" sz="1300" b="0" u="none" strike="noStrike">
+              <a:solidFill>
+                <a:srgbClr val="000000"/>
+              </a:solidFill>
+              <a:effectLst/>
+              <a:uFillTx/>
+              <a:latin typeface="Arial"/>
+            </a:endParaRPr>
+          </a:p>
+        </p:txBody>
+      </p:sp>
+      <p:pic>
+        <p:nvPicPr>
+          <p:cNvPr id="194" name=""/>
+          <p:cNvPicPr/>
+          <p:nvPr/>
+        </p:nvPicPr>
+        <p:blipFill>
+          <a:blip r:embed="rId2"/>
+          <a:stretch/>
+        </p:blipFill>
+        <p:spPr>
+          <a:xfrm>
+            <a:off x="4409280" y="3115440"/>
+            <a:ext cx="3136680" cy="1784880"/>
+          </a:xfrm>
+          <a:prstGeom prst="rect">
+            <a:avLst/>
+          </a:prstGeom>
+          <a:noFill/>
+          <a:ln w="0">
+            <a:noFill/>
+          </a:ln>
+        </p:spPr>
+      </p:pic>
+      <p:pic>
+        <p:nvPicPr>
+          <p:cNvPr id="195" name=""/>
+          <p:cNvPicPr/>
+          <p:nvPr/>
+        </p:nvPicPr>
+        <p:blipFill>
+          <a:blip r:embed="rId3"/>
+          <a:stretch/>
+        </p:blipFill>
+        <p:spPr>
+          <a:xfrm>
+            <a:off x="8131680" y="3128040"/>
+            <a:ext cx="3181320" cy="1810440"/>
+          </a:xfrm>
+          <a:prstGeom prst="rect">
+            <a:avLst/>
+          </a:prstGeom>
+          <a:noFill/>
+          <a:ln w="0">
+            <a:noFill/>
+          </a:ln>
+        </p:spPr>
+      </p:pic>
     </p:spTree>
   </p:cSld>
   <mc:AlternateContent>

--- a/src/assets/PersonalFinanceManager_Apresentacao .pptx
+++ b/src/assets/PersonalFinanceManager_Apresentacao .pptx
@@ -19,6 +19,9 @@
     <p:sldId id="264" r:id="rId12"/>
     <p:sldId id="265" r:id="rId13"/>
     <p:sldId id="266" r:id="rId14"/>
+    <p:sldId id="267" r:id="rId15"/>
+    <p:sldId id="268" r:id="rId16"/>
+    <p:sldId id="269" r:id="rId17"/>
   </p:sldIdLst>
   <p:sldSz cx="12192000" cy="6858000"/>
   <p:notesSz cx="6858000" cy="12192000"/>
@@ -80,62 +83,7 @@
                 <a:uFillTx/>
                 <a:latin typeface="Arial"/>
               </a:rPr>
-              <a:t>Clique </a:t>
-            </a:r>
-            <a:r>
-              <a:rPr lang="pt-PT" sz="4400" b="0" u="none" strike="noStrike">
-                <a:solidFill>
-                  <a:srgbClr val="000000"/>
-                </a:solidFill>
-                <a:effectLst/>
-                <a:uFillTx/>
-                <a:latin typeface="Arial"/>
-              </a:rPr>
-              <a:t>para </a:t>
-            </a:r>
-            <a:r>
-              <a:rPr lang="pt-PT" sz="4400" b="0" u="none" strike="noStrike">
-                <a:solidFill>
-                  <a:srgbClr val="000000"/>
-                </a:solidFill>
-                <a:effectLst/>
-                <a:uFillTx/>
-                <a:latin typeface="Arial"/>
-              </a:rPr>
-              <a:t>mover </a:t>
-            </a:r>
-            <a:r>
-              <a:rPr lang="pt-PT" sz="4400" b="0" u="none" strike="noStrike">
-                <a:solidFill>
-                  <a:srgbClr val="000000"/>
-                </a:solidFill>
-                <a:effectLst/>
-                <a:uFillTx/>
-                <a:latin typeface="Arial"/>
-              </a:rPr>
-              <a:t>o </a:t>
-            </a:r>
-            <a:r>
-              <a:rPr lang="pt-PT" sz="4400" b="0" u="none" strike="noStrike">
-                <a:solidFill>
-                  <a:srgbClr val="000000"/>
-                </a:solidFill>
-                <a:effectLst/>
-                <a:uFillTx/>
-                <a:latin typeface="Arial"/>
-              </a:rPr>
-              <a:t>diaposit</a:t>
-            </a:r>
-            <a:r>
-              <a:rPr lang="pt-PT" sz="4400" b="0" u="none" strike="noStrike">
-                <a:solidFill>
-                  <a:srgbClr val="000000"/>
-                </a:solidFill>
-                <a:effectLst/>
-                <a:uFillTx/>
-                <a:latin typeface="Arial"/>
-              </a:rPr>
-              <a:t>ivo</a:t>
+              <a:t>Clique para mover o diapositivo</a:t>
             </a:r>
             <a:endParaRPr lang="pt-PT" sz="4400" b="0" u="none" strike="noStrike">
               <a:solidFill>
@@ -188,29 +136,7 @@
                 <a:uFillTx/>
                 <a:latin typeface="Arial"/>
               </a:rPr>
-              <a:t>Clique para </a:t>
-            </a:r>
-            <a:r>
-              <a:rPr lang="pt-PT" sz="2000" b="0" u="none" strike="noStrike">
-                <a:solidFill>
-                  <a:srgbClr val="000000"/>
-                </a:solidFill>
-                <a:effectLst/>
-                <a:uFillTx/>
-                <a:latin typeface="Arial"/>
-              </a:rPr>
-              <a:t>editar o formato </a:t>
-            </a:r>
-            <a:r>
-              <a:rPr lang="pt-PT" sz="2000" b="0" u="none" strike="noStrike">
-                <a:solidFill>
-                  <a:srgbClr val="000000"/>
-                </a:solidFill>
-                <a:effectLst/>
-                <a:uFillTx/>
-                <a:latin typeface="Arial"/>
-              </a:rPr>
-              <a:t>das notas</a:t>
+              <a:t>Clique para editar o formato das notas</a:t>
             </a:r>
             <a:endParaRPr lang="pt-PT" sz="2000" b="0" u="none" strike="noStrike">
               <a:solidFill>
@@ -452,7 +378,7 @@
             <a:pPr indent="0" algn="r">
               <a:buNone/>
             </a:pPr>
-            <a:fld id="{32DA2B6E-6140-4115-B121-24F75F25A69E}" type="slidenum">
+            <a:fld id="{FF1B82E7-E0CC-47D4-ADB2-1682E89EDE05}" type="slidenum">
               <a:rPr lang="pt-PT" sz="1400" b="0" u="none" strike="noStrike">
                 <a:solidFill>
                   <a:srgbClr val="000000"/>
@@ -499,7 +425,7 @@
       </p:grpSpPr>
       <p:sp>
         <p:nvSpPr>
-          <p:cNvPr id="217" name="PlaceHolder 1"/>
+          <p:cNvPr id="246" name="PlaceHolder 1"/>
           <p:cNvSpPr>
             <a:spLocks noGrp="1"/>
           </p:cNvSpPr>
@@ -510,19 +436,19 @@
         <p:spPr>
           <a:xfrm>
             <a:off x="685800" y="1143000"/>
-            <a:ext cx="5484960" cy="3084840"/>
-          </a:xfrm>
-          <a:prstGeom prst="rect">
-            <a:avLst/>
-          </a:prstGeom>
-          <a:ln w="0">
-            <a:noFill/>
-          </a:ln>
-        </p:spPr>
-      </p:sp>
-      <p:sp>
-        <p:nvSpPr>
-          <p:cNvPr id="218" name="PlaceHolder 2"/>
+            <a:ext cx="5484600" cy="3084480"/>
+          </a:xfrm>
+          <a:prstGeom prst="rect">
+            <a:avLst/>
+          </a:prstGeom>
+          <a:ln w="0">
+            <a:noFill/>
+          </a:ln>
+        </p:spPr>
+      </p:sp>
+      <p:sp>
+        <p:nvSpPr>
+          <p:cNvPr id="247" name="PlaceHolder 2"/>
           <p:cNvSpPr>
             <a:spLocks noGrp="1"/>
           </p:cNvSpPr>
@@ -533,7 +459,7 @@
         <p:spPr>
           <a:xfrm>
             <a:off x="685800" y="4400640"/>
-            <a:ext cx="5484960" cy="3598920"/>
+            <a:ext cx="5484600" cy="3598560"/>
           </a:xfrm>
           <a:prstGeom prst="rect">
             <a:avLst/>
@@ -564,7 +490,7 @@
       </p:sp>
       <p:sp>
         <p:nvSpPr>
-          <p:cNvPr id="219" name="PlaceHolder 3"/>
+          <p:cNvPr id="248" name="PlaceHolder 3"/>
           <p:cNvSpPr>
             <a:spLocks noGrp="1"/>
           </p:cNvSpPr>
@@ -575,7 +501,7 @@
         <p:spPr>
           <a:xfrm>
             <a:off x="3884760" y="8685360"/>
-            <a:ext cx="2970360" cy="457200"/>
+            <a:ext cx="2970000" cy="456840"/>
           </a:xfrm>
           <a:prstGeom prst="rect">
             <a:avLst/>
@@ -619,7 +545,7 @@
                 <a:tab algn="l" pos="0"/>
               </a:tabLst>
             </a:pPr>
-            <a:fld id="{D8131AF4-F4D0-4ECC-AAB0-EAD12C37A54F}" type="slidenum">
+            <a:fld id="{9F47BD0E-5272-4763-BD19-71AB5C543CDC}" type="slidenum">
               <a:rPr lang="pt-PT" sz="1200" b="0" u="none" strike="noStrike">
                 <a:solidFill>
                   <a:schemeClr val="dk1"/>
@@ -666,7 +592,7 @@
       </p:grpSpPr>
       <p:sp>
         <p:nvSpPr>
-          <p:cNvPr id="244" name="PlaceHolder 1"/>
+          <p:cNvPr id="273" name="PlaceHolder 1"/>
           <p:cNvSpPr>
             <a:spLocks noGrp="1"/>
           </p:cNvSpPr>
@@ -677,19 +603,19 @@
         <p:spPr>
           <a:xfrm>
             <a:off x="685800" y="1143000"/>
-            <a:ext cx="5484960" cy="3084840"/>
-          </a:xfrm>
-          <a:prstGeom prst="rect">
-            <a:avLst/>
-          </a:prstGeom>
-          <a:ln w="0">
-            <a:noFill/>
-          </a:ln>
-        </p:spPr>
-      </p:sp>
-      <p:sp>
-        <p:nvSpPr>
-          <p:cNvPr id="245" name="PlaceHolder 2"/>
+            <a:ext cx="5484600" cy="3084480"/>
+          </a:xfrm>
+          <a:prstGeom prst="rect">
+            <a:avLst/>
+          </a:prstGeom>
+          <a:ln w="0">
+            <a:noFill/>
+          </a:ln>
+        </p:spPr>
+      </p:sp>
+      <p:sp>
+        <p:nvSpPr>
+          <p:cNvPr id="274" name="PlaceHolder 2"/>
           <p:cNvSpPr>
             <a:spLocks noGrp="1"/>
           </p:cNvSpPr>
@@ -700,7 +626,7 @@
         <p:spPr>
           <a:xfrm>
             <a:off x="685800" y="4400640"/>
-            <a:ext cx="5484960" cy="3598920"/>
+            <a:ext cx="5484600" cy="3598560"/>
           </a:xfrm>
           <a:prstGeom prst="rect">
             <a:avLst/>
@@ -731,7 +657,7 @@
       </p:sp>
       <p:sp>
         <p:nvSpPr>
-          <p:cNvPr id="246" name="PlaceHolder 3"/>
+          <p:cNvPr id="275" name="PlaceHolder 3"/>
           <p:cNvSpPr>
             <a:spLocks noGrp="1"/>
           </p:cNvSpPr>
@@ -742,7 +668,7 @@
         <p:spPr>
           <a:xfrm>
             <a:off x="3884760" y="8685360"/>
-            <a:ext cx="2970360" cy="457200"/>
+            <a:ext cx="2970000" cy="456840"/>
           </a:xfrm>
           <a:prstGeom prst="rect">
             <a:avLst/>
@@ -786,7 +712,7 @@
                 <a:tab algn="l" pos="0"/>
               </a:tabLst>
             </a:pPr>
-            <a:fld id="{B3FAE561-3E8B-47C7-9206-E4DE4CC3651E}" type="slidenum">
+            <a:fld id="{088B73D8-32EB-4D34-9027-9CD30DEBA409}" type="slidenum">
               <a:rPr lang="pt-PT" sz="1200" b="0" u="none" strike="noStrike">
                 <a:solidFill>
                   <a:schemeClr val="dk1"/>
@@ -833,7 +759,7 @@
       </p:grpSpPr>
       <p:sp>
         <p:nvSpPr>
-          <p:cNvPr id="247" name="PlaceHolder 1"/>
+          <p:cNvPr id="276" name="PlaceHolder 1"/>
           <p:cNvSpPr>
             <a:spLocks noGrp="1"/>
           </p:cNvSpPr>
@@ -844,19 +770,19 @@
         <p:spPr>
           <a:xfrm>
             <a:off x="685800" y="1143000"/>
-            <a:ext cx="5484960" cy="3084840"/>
-          </a:xfrm>
-          <a:prstGeom prst="rect">
-            <a:avLst/>
-          </a:prstGeom>
-          <a:ln w="0">
-            <a:noFill/>
-          </a:ln>
-        </p:spPr>
-      </p:sp>
-      <p:sp>
-        <p:nvSpPr>
-          <p:cNvPr id="248" name="PlaceHolder 2"/>
+            <a:ext cx="5484600" cy="3084480"/>
+          </a:xfrm>
+          <a:prstGeom prst="rect">
+            <a:avLst/>
+          </a:prstGeom>
+          <a:ln w="0">
+            <a:noFill/>
+          </a:ln>
+        </p:spPr>
+      </p:sp>
+      <p:sp>
+        <p:nvSpPr>
+          <p:cNvPr id="277" name="PlaceHolder 2"/>
           <p:cNvSpPr>
             <a:spLocks noGrp="1"/>
           </p:cNvSpPr>
@@ -867,7 +793,7 @@
         <p:spPr>
           <a:xfrm>
             <a:off x="685800" y="4400640"/>
-            <a:ext cx="5484960" cy="3598920"/>
+            <a:ext cx="5484600" cy="3598560"/>
           </a:xfrm>
           <a:prstGeom prst="rect">
             <a:avLst/>
@@ -898,7 +824,7 @@
       </p:sp>
       <p:sp>
         <p:nvSpPr>
-          <p:cNvPr id="249" name="PlaceHolder 3"/>
+          <p:cNvPr id="278" name="PlaceHolder 3"/>
           <p:cNvSpPr>
             <a:spLocks noGrp="1"/>
           </p:cNvSpPr>
@@ -909,7 +835,7 @@
         <p:spPr>
           <a:xfrm>
             <a:off x="3884760" y="8685360"/>
-            <a:ext cx="2970360" cy="457200"/>
+            <a:ext cx="2970000" cy="456840"/>
           </a:xfrm>
           <a:prstGeom prst="rect">
             <a:avLst/>
@@ -953,7 +879,508 @@
                 <a:tab algn="l" pos="0"/>
               </a:tabLst>
             </a:pPr>
-            <a:fld id="{EFD28D19-E466-4C92-B834-6198A655DAFA}" type="slidenum">
+            <a:fld id="{9EA9B2AC-FC81-4304-9E71-ED4A15D4A0A3}" type="slidenum">
+              <a:rPr lang="pt-PT" sz="1200" b="0" u="none" strike="noStrike">
+                <a:solidFill>
+                  <a:schemeClr val="dk1"/>
+                </a:solidFill>
+                <a:effectLst/>
+                <a:uFillTx/>
+                <a:latin typeface="+mn-lt"/>
+                <a:ea typeface="+mn-ea"/>
+              </a:rPr>
+              <a:t>&lt;número&gt;</a:t>
+            </a:fld>
+            <a:endParaRPr lang="pt-PT" sz="1200" b="0" u="none" strike="noStrike">
+              <a:solidFill>
+                <a:srgbClr val="000000"/>
+              </a:solidFill>
+              <a:effectLst/>
+              <a:uFillTx/>
+              <a:latin typeface="Times New Roman"/>
+            </a:endParaRPr>
+          </a:p>
+        </p:txBody>
+      </p:sp>
+    </p:spTree>
+  </p:cSld>
+</p:notes>
+</file>
+
+<file path=ppt/notesSlides/notesSlide12.xml><?xml version="1.0" encoding="utf-8"?>
+<p:notes xmlns:a="http://schemas.openxmlformats.org/drawingml/2006/main" xmlns:p="http://schemas.openxmlformats.org/presentationml/2006/main" xmlns:r="http://schemas.openxmlformats.org/officeDocument/2006/relationships" xmlns:p14="http://schemas.microsoft.com/office/powerpoint/2010/main" xmlns:p15="http://schemas.microsoft.com/office/powerpoint/2012/main" xmlns:mc="http://schemas.openxmlformats.org/markup-compatibility/2006">
+  <p:cSld>
+    <p:spTree>
+      <p:nvGrpSpPr>
+        <p:cNvPr id="1" name=""/>
+        <p:cNvGrpSpPr/>
+        <p:nvPr/>
+      </p:nvGrpSpPr>
+      <p:grpSpPr>
+        <a:xfrm>
+          <a:off x="0" y="0"/>
+          <a:ext cx="0" cy="0"/>
+          <a:chOff x="0" y="0"/>
+          <a:chExt cx="0" cy="0"/>
+        </a:xfrm>
+      </p:grpSpPr>
+      <p:sp>
+        <p:nvSpPr>
+          <p:cNvPr id="279" name="PlaceHolder 1"/>
+          <p:cNvSpPr>
+            <a:spLocks noGrp="1"/>
+          </p:cNvSpPr>
+          <p:nvPr>
+            <p:ph type="sldImg"/>
+          </p:nvPr>
+        </p:nvSpPr>
+        <p:spPr>
+          <a:xfrm>
+            <a:off x="685800" y="1143000"/>
+            <a:ext cx="5484600" cy="3084480"/>
+          </a:xfrm>
+          <a:prstGeom prst="rect">
+            <a:avLst/>
+          </a:prstGeom>
+          <a:ln w="0">
+            <a:noFill/>
+          </a:ln>
+        </p:spPr>
+      </p:sp>
+      <p:sp>
+        <p:nvSpPr>
+          <p:cNvPr id="280" name="PlaceHolder 2"/>
+          <p:cNvSpPr>
+            <a:spLocks noGrp="1"/>
+          </p:cNvSpPr>
+          <p:nvPr>
+            <p:ph type="body"/>
+          </p:nvPr>
+        </p:nvSpPr>
+        <p:spPr>
+          <a:xfrm>
+            <a:off x="685800" y="4400640"/>
+            <a:ext cx="5484600" cy="3598560"/>
+          </a:xfrm>
+          <a:prstGeom prst="rect">
+            <a:avLst/>
+          </a:prstGeom>
+          <a:noFill/>
+          <a:ln w="0">
+            <a:noFill/>
+          </a:ln>
+        </p:spPr>
+        <p:txBody>
+          <a:bodyPr lIns="91440" rIns="91440" tIns="45720" bIns="45720" anchor="t">
+            <a:noAutofit/>
+          </a:bodyPr>
+          <a:p>
+            <a:pPr indent="0">
+              <a:buNone/>
+            </a:pPr>
+            <a:endParaRPr lang="pt-PT" sz="1800" b="0" u="none" strike="noStrike">
+              <a:solidFill>
+                <a:srgbClr val="000000"/>
+              </a:solidFill>
+              <a:effectLst/>
+              <a:uFillTx/>
+              <a:latin typeface="Arial"/>
+            </a:endParaRPr>
+          </a:p>
+        </p:txBody>
+      </p:sp>
+      <p:sp>
+        <p:nvSpPr>
+          <p:cNvPr id="281" name="PlaceHolder 3"/>
+          <p:cNvSpPr>
+            <a:spLocks noGrp="1"/>
+          </p:cNvSpPr>
+          <p:nvPr>
+            <p:ph type="sldNum" idx="15"/>
+          </p:nvPr>
+        </p:nvSpPr>
+        <p:spPr>
+          <a:xfrm>
+            <a:off x="3884760" y="8685360"/>
+            <a:ext cx="2970000" cy="456840"/>
+          </a:xfrm>
+          <a:prstGeom prst="rect">
+            <a:avLst/>
+          </a:prstGeom>
+          <a:noFill/>
+          <a:ln w="0">
+            <a:noFill/>
+          </a:ln>
+        </p:spPr>
+        <p:txBody>
+          <a:bodyPr lIns="91440" rIns="91440" tIns="45720" bIns="45720" anchor="b">
+            <a:noAutofit/>
+          </a:bodyPr>
+          <a:lstStyle>
+            <a:lvl1pPr indent="0" algn="r" defTabSz="914400">
+              <a:lnSpc>
+                <a:spcPct val="100000"/>
+              </a:lnSpc>
+              <a:buNone/>
+              <a:tabLst>
+                <a:tab algn="l" pos="0"/>
+              </a:tabLst>
+              <a:defRPr lang="pt-PT" sz="1200" b="0" u="none" strike="noStrike">
+                <a:solidFill>
+                  <a:schemeClr val="dk1"/>
+                </a:solidFill>
+                <a:effectLst/>
+                <a:uFillTx/>
+                <a:latin typeface="+mn-lt"/>
+                <a:ea typeface="+mn-ea"/>
+              </a:defRPr>
+            </a:lvl1pPr>
+          </a:lstStyle>
+          <a:p>
+            <a:pPr indent="0" algn="r" defTabSz="914400">
+              <a:lnSpc>
+                <a:spcPct val="100000"/>
+              </a:lnSpc>
+              <a:buNone/>
+              <a:tabLst>
+                <a:tab algn="l" pos="0"/>
+              </a:tabLst>
+            </a:pPr>
+            <a:fld id="{60EC6FFC-27B0-4BE7-AAC9-31C4399CF16B}" type="slidenum">
+              <a:rPr lang="pt-PT" sz="1200" b="0" u="none" strike="noStrike">
+                <a:solidFill>
+                  <a:schemeClr val="dk1"/>
+                </a:solidFill>
+                <a:effectLst/>
+                <a:uFillTx/>
+                <a:latin typeface="+mn-lt"/>
+                <a:ea typeface="+mn-ea"/>
+              </a:rPr>
+              <a:t>&lt;número&gt;</a:t>
+            </a:fld>
+            <a:endParaRPr lang="pt-PT" sz="1200" b="0" u="none" strike="noStrike">
+              <a:solidFill>
+                <a:srgbClr val="000000"/>
+              </a:solidFill>
+              <a:effectLst/>
+              <a:uFillTx/>
+              <a:latin typeface="Times New Roman"/>
+            </a:endParaRPr>
+          </a:p>
+        </p:txBody>
+      </p:sp>
+    </p:spTree>
+  </p:cSld>
+</p:notes>
+</file>
+
+<file path=ppt/notesSlides/notesSlide13.xml><?xml version="1.0" encoding="utf-8"?>
+<p:notes xmlns:a="http://schemas.openxmlformats.org/drawingml/2006/main" xmlns:p="http://schemas.openxmlformats.org/presentationml/2006/main" xmlns:r="http://schemas.openxmlformats.org/officeDocument/2006/relationships" xmlns:p14="http://schemas.microsoft.com/office/powerpoint/2010/main" xmlns:p15="http://schemas.microsoft.com/office/powerpoint/2012/main" xmlns:mc="http://schemas.openxmlformats.org/markup-compatibility/2006">
+  <p:cSld>
+    <p:spTree>
+      <p:nvGrpSpPr>
+        <p:cNvPr id="1" name=""/>
+        <p:cNvGrpSpPr/>
+        <p:nvPr/>
+      </p:nvGrpSpPr>
+      <p:grpSpPr>
+        <a:xfrm>
+          <a:off x="0" y="0"/>
+          <a:ext cx="0" cy="0"/>
+          <a:chOff x="0" y="0"/>
+          <a:chExt cx="0" cy="0"/>
+        </a:xfrm>
+      </p:grpSpPr>
+      <p:sp>
+        <p:nvSpPr>
+          <p:cNvPr id="282" name="PlaceHolder 1"/>
+          <p:cNvSpPr>
+            <a:spLocks noGrp="1"/>
+          </p:cNvSpPr>
+          <p:nvPr>
+            <p:ph type="sldImg"/>
+          </p:nvPr>
+        </p:nvSpPr>
+        <p:spPr>
+          <a:xfrm>
+            <a:off x="685800" y="1143000"/>
+            <a:ext cx="5484600" cy="3084480"/>
+          </a:xfrm>
+          <a:prstGeom prst="rect">
+            <a:avLst/>
+          </a:prstGeom>
+          <a:ln w="0">
+            <a:noFill/>
+          </a:ln>
+        </p:spPr>
+      </p:sp>
+      <p:sp>
+        <p:nvSpPr>
+          <p:cNvPr id="283" name="PlaceHolder 2"/>
+          <p:cNvSpPr>
+            <a:spLocks noGrp="1"/>
+          </p:cNvSpPr>
+          <p:nvPr>
+            <p:ph type="body"/>
+          </p:nvPr>
+        </p:nvSpPr>
+        <p:spPr>
+          <a:xfrm>
+            <a:off x="685800" y="4400640"/>
+            <a:ext cx="5484600" cy="3598560"/>
+          </a:xfrm>
+          <a:prstGeom prst="rect">
+            <a:avLst/>
+          </a:prstGeom>
+          <a:noFill/>
+          <a:ln w="0">
+            <a:noFill/>
+          </a:ln>
+        </p:spPr>
+        <p:txBody>
+          <a:bodyPr lIns="91440" rIns="91440" tIns="45720" bIns="45720" anchor="t">
+            <a:noAutofit/>
+          </a:bodyPr>
+          <a:p>
+            <a:pPr indent="0">
+              <a:buNone/>
+            </a:pPr>
+            <a:endParaRPr lang="pt-PT" sz="1800" b="0" u="none" strike="noStrike">
+              <a:solidFill>
+                <a:srgbClr val="000000"/>
+              </a:solidFill>
+              <a:effectLst/>
+              <a:uFillTx/>
+              <a:latin typeface="Arial"/>
+            </a:endParaRPr>
+          </a:p>
+        </p:txBody>
+      </p:sp>
+      <p:sp>
+        <p:nvSpPr>
+          <p:cNvPr id="284" name="PlaceHolder 3"/>
+          <p:cNvSpPr>
+            <a:spLocks noGrp="1"/>
+          </p:cNvSpPr>
+          <p:nvPr>
+            <p:ph type="sldNum" idx="16"/>
+          </p:nvPr>
+        </p:nvSpPr>
+        <p:spPr>
+          <a:xfrm>
+            <a:off x="3884760" y="8685360"/>
+            <a:ext cx="2970000" cy="456840"/>
+          </a:xfrm>
+          <a:prstGeom prst="rect">
+            <a:avLst/>
+          </a:prstGeom>
+          <a:noFill/>
+          <a:ln w="0">
+            <a:noFill/>
+          </a:ln>
+        </p:spPr>
+        <p:txBody>
+          <a:bodyPr lIns="91440" rIns="91440" tIns="45720" bIns="45720" anchor="b">
+            <a:noAutofit/>
+          </a:bodyPr>
+          <a:lstStyle>
+            <a:lvl1pPr indent="0" algn="r" defTabSz="914400">
+              <a:lnSpc>
+                <a:spcPct val="100000"/>
+              </a:lnSpc>
+              <a:buNone/>
+              <a:tabLst>
+                <a:tab algn="l" pos="0"/>
+              </a:tabLst>
+              <a:defRPr lang="pt-PT" sz="1200" b="0" u="none" strike="noStrike">
+                <a:solidFill>
+                  <a:schemeClr val="dk1"/>
+                </a:solidFill>
+                <a:effectLst/>
+                <a:uFillTx/>
+                <a:latin typeface="+mn-lt"/>
+                <a:ea typeface="+mn-ea"/>
+              </a:defRPr>
+            </a:lvl1pPr>
+          </a:lstStyle>
+          <a:p>
+            <a:pPr indent="0" algn="r" defTabSz="914400">
+              <a:lnSpc>
+                <a:spcPct val="100000"/>
+              </a:lnSpc>
+              <a:buNone/>
+              <a:tabLst>
+                <a:tab algn="l" pos="0"/>
+              </a:tabLst>
+            </a:pPr>
+            <a:fld id="{E2F2FBAD-30A1-4090-999B-CFC4788F1E7E}" type="slidenum">
+              <a:rPr lang="pt-PT" sz="1200" b="0" u="none" strike="noStrike">
+                <a:solidFill>
+                  <a:schemeClr val="dk1"/>
+                </a:solidFill>
+                <a:effectLst/>
+                <a:uFillTx/>
+                <a:latin typeface="+mn-lt"/>
+                <a:ea typeface="+mn-ea"/>
+              </a:rPr>
+              <a:t>&lt;número&gt;</a:t>
+            </a:fld>
+            <a:endParaRPr lang="pt-PT" sz="1200" b="0" u="none" strike="noStrike">
+              <a:solidFill>
+                <a:srgbClr val="000000"/>
+              </a:solidFill>
+              <a:effectLst/>
+              <a:uFillTx/>
+              <a:latin typeface="Times New Roman"/>
+            </a:endParaRPr>
+          </a:p>
+        </p:txBody>
+      </p:sp>
+    </p:spTree>
+  </p:cSld>
+</p:notes>
+</file>
+
+<file path=ppt/notesSlides/notesSlide14.xml><?xml version="1.0" encoding="utf-8"?>
+<p:notes xmlns:a="http://schemas.openxmlformats.org/drawingml/2006/main" xmlns:p="http://schemas.openxmlformats.org/presentationml/2006/main" xmlns:r="http://schemas.openxmlformats.org/officeDocument/2006/relationships" xmlns:p14="http://schemas.microsoft.com/office/powerpoint/2010/main" xmlns:p15="http://schemas.microsoft.com/office/powerpoint/2012/main" xmlns:mc="http://schemas.openxmlformats.org/markup-compatibility/2006">
+  <p:cSld>
+    <p:spTree>
+      <p:nvGrpSpPr>
+        <p:cNvPr id="1" name=""/>
+        <p:cNvGrpSpPr/>
+        <p:nvPr/>
+      </p:nvGrpSpPr>
+      <p:grpSpPr>
+        <a:xfrm>
+          <a:off x="0" y="0"/>
+          <a:ext cx="0" cy="0"/>
+          <a:chOff x="0" y="0"/>
+          <a:chExt cx="0" cy="0"/>
+        </a:xfrm>
+      </p:grpSpPr>
+      <p:sp>
+        <p:nvSpPr>
+          <p:cNvPr id="285" name="PlaceHolder 1"/>
+          <p:cNvSpPr>
+            <a:spLocks noGrp="1"/>
+          </p:cNvSpPr>
+          <p:nvPr>
+            <p:ph type="sldImg"/>
+          </p:nvPr>
+        </p:nvSpPr>
+        <p:spPr>
+          <a:xfrm>
+            <a:off x="685800" y="1143000"/>
+            <a:ext cx="5484600" cy="3084480"/>
+          </a:xfrm>
+          <a:prstGeom prst="rect">
+            <a:avLst/>
+          </a:prstGeom>
+          <a:ln w="0">
+            <a:noFill/>
+          </a:ln>
+        </p:spPr>
+      </p:sp>
+      <p:sp>
+        <p:nvSpPr>
+          <p:cNvPr id="286" name="PlaceHolder 2"/>
+          <p:cNvSpPr>
+            <a:spLocks noGrp="1"/>
+          </p:cNvSpPr>
+          <p:nvPr>
+            <p:ph type="body"/>
+          </p:nvPr>
+        </p:nvSpPr>
+        <p:spPr>
+          <a:xfrm>
+            <a:off x="685800" y="4400640"/>
+            <a:ext cx="5484600" cy="3598560"/>
+          </a:xfrm>
+          <a:prstGeom prst="rect">
+            <a:avLst/>
+          </a:prstGeom>
+          <a:noFill/>
+          <a:ln w="0">
+            <a:noFill/>
+          </a:ln>
+        </p:spPr>
+        <p:txBody>
+          <a:bodyPr lIns="91440" rIns="91440" tIns="45720" bIns="45720" anchor="t">
+            <a:noAutofit/>
+          </a:bodyPr>
+          <a:p>
+            <a:pPr indent="0">
+              <a:buNone/>
+            </a:pPr>
+            <a:endParaRPr lang="pt-PT" sz="1800" b="0" u="none" strike="noStrike">
+              <a:solidFill>
+                <a:srgbClr val="000000"/>
+              </a:solidFill>
+              <a:effectLst/>
+              <a:uFillTx/>
+              <a:latin typeface="Arial"/>
+            </a:endParaRPr>
+          </a:p>
+        </p:txBody>
+      </p:sp>
+      <p:sp>
+        <p:nvSpPr>
+          <p:cNvPr id="287" name="PlaceHolder 3"/>
+          <p:cNvSpPr>
+            <a:spLocks noGrp="1"/>
+          </p:cNvSpPr>
+          <p:nvPr>
+            <p:ph type="sldNum" idx="17"/>
+          </p:nvPr>
+        </p:nvSpPr>
+        <p:spPr>
+          <a:xfrm>
+            <a:off x="3884760" y="8685360"/>
+            <a:ext cx="2970000" cy="456840"/>
+          </a:xfrm>
+          <a:prstGeom prst="rect">
+            <a:avLst/>
+          </a:prstGeom>
+          <a:noFill/>
+          <a:ln w="0">
+            <a:noFill/>
+          </a:ln>
+        </p:spPr>
+        <p:txBody>
+          <a:bodyPr lIns="91440" rIns="91440" tIns="45720" bIns="45720" anchor="b">
+            <a:noAutofit/>
+          </a:bodyPr>
+          <a:lstStyle>
+            <a:lvl1pPr indent="0" algn="r" defTabSz="914400">
+              <a:lnSpc>
+                <a:spcPct val="100000"/>
+              </a:lnSpc>
+              <a:buNone/>
+              <a:tabLst>
+                <a:tab algn="l" pos="0"/>
+              </a:tabLst>
+              <a:defRPr lang="pt-PT" sz="1200" b="0" u="none" strike="noStrike">
+                <a:solidFill>
+                  <a:schemeClr val="dk1"/>
+                </a:solidFill>
+                <a:effectLst/>
+                <a:uFillTx/>
+                <a:latin typeface="+mn-lt"/>
+                <a:ea typeface="+mn-ea"/>
+              </a:defRPr>
+            </a:lvl1pPr>
+          </a:lstStyle>
+          <a:p>
+            <a:pPr indent="0" algn="r" defTabSz="914400">
+              <a:lnSpc>
+                <a:spcPct val="100000"/>
+              </a:lnSpc>
+              <a:buNone/>
+              <a:tabLst>
+                <a:tab algn="l" pos="0"/>
+              </a:tabLst>
+            </a:pPr>
+            <a:fld id="{901C0076-98BC-4163-8389-3CC2AC8008FD}" type="slidenum">
               <a:rPr lang="pt-PT" sz="1200" b="0" u="none" strike="noStrike">
                 <a:solidFill>
                   <a:schemeClr val="dk1"/>
@@ -1000,7 +1427,7 @@
       </p:grpSpPr>
       <p:sp>
         <p:nvSpPr>
-          <p:cNvPr id="220" name="PlaceHolder 1"/>
+          <p:cNvPr id="249" name="PlaceHolder 1"/>
           <p:cNvSpPr>
             <a:spLocks noGrp="1"/>
           </p:cNvSpPr>
@@ -1011,19 +1438,19 @@
         <p:spPr>
           <a:xfrm>
             <a:off x="685800" y="1143000"/>
-            <a:ext cx="5484960" cy="3084840"/>
-          </a:xfrm>
-          <a:prstGeom prst="rect">
-            <a:avLst/>
-          </a:prstGeom>
-          <a:ln w="0">
-            <a:noFill/>
-          </a:ln>
-        </p:spPr>
-      </p:sp>
-      <p:sp>
-        <p:nvSpPr>
-          <p:cNvPr id="221" name="PlaceHolder 2"/>
+            <a:ext cx="5484600" cy="3084480"/>
+          </a:xfrm>
+          <a:prstGeom prst="rect">
+            <a:avLst/>
+          </a:prstGeom>
+          <a:ln w="0">
+            <a:noFill/>
+          </a:ln>
+        </p:spPr>
+      </p:sp>
+      <p:sp>
+        <p:nvSpPr>
+          <p:cNvPr id="250" name="PlaceHolder 2"/>
           <p:cNvSpPr>
             <a:spLocks noGrp="1"/>
           </p:cNvSpPr>
@@ -1034,7 +1461,7 @@
         <p:spPr>
           <a:xfrm>
             <a:off x="685800" y="4400640"/>
-            <a:ext cx="5484960" cy="3598920"/>
+            <a:ext cx="5484600" cy="3598560"/>
           </a:xfrm>
           <a:prstGeom prst="rect">
             <a:avLst/>
@@ -1065,7 +1492,7 @@
       </p:sp>
       <p:sp>
         <p:nvSpPr>
-          <p:cNvPr id="222" name="PlaceHolder 3"/>
+          <p:cNvPr id="251" name="PlaceHolder 3"/>
           <p:cNvSpPr>
             <a:spLocks noGrp="1"/>
           </p:cNvSpPr>
@@ -1076,7 +1503,7 @@
         <p:spPr>
           <a:xfrm>
             <a:off x="3884760" y="8685360"/>
-            <a:ext cx="2970360" cy="457200"/>
+            <a:ext cx="2970000" cy="456840"/>
           </a:xfrm>
           <a:prstGeom prst="rect">
             <a:avLst/>
@@ -1120,7 +1547,7 @@
                 <a:tab algn="l" pos="0"/>
               </a:tabLst>
             </a:pPr>
-            <a:fld id="{B9E390C7-6D8B-43A2-9A6C-424909A20E8B}" type="slidenum">
+            <a:fld id="{D01AC585-D2CA-41DD-B7F0-278E248DBB6A}" type="slidenum">
               <a:rPr lang="pt-PT" sz="1200" b="0" u="none" strike="noStrike">
                 <a:solidFill>
                   <a:schemeClr val="dk1"/>
@@ -1167,7 +1594,7 @@
       </p:grpSpPr>
       <p:sp>
         <p:nvSpPr>
-          <p:cNvPr id="223" name="PlaceHolder 1"/>
+          <p:cNvPr id="252" name="PlaceHolder 1"/>
           <p:cNvSpPr>
             <a:spLocks noGrp="1"/>
           </p:cNvSpPr>
@@ -1178,19 +1605,19 @@
         <p:spPr>
           <a:xfrm>
             <a:off x="685800" y="1143000"/>
-            <a:ext cx="5484960" cy="3084840"/>
-          </a:xfrm>
-          <a:prstGeom prst="rect">
-            <a:avLst/>
-          </a:prstGeom>
-          <a:ln w="0">
-            <a:noFill/>
-          </a:ln>
-        </p:spPr>
-      </p:sp>
-      <p:sp>
-        <p:nvSpPr>
-          <p:cNvPr id="224" name="PlaceHolder 2"/>
+            <a:ext cx="5484600" cy="3084480"/>
+          </a:xfrm>
+          <a:prstGeom prst="rect">
+            <a:avLst/>
+          </a:prstGeom>
+          <a:ln w="0">
+            <a:noFill/>
+          </a:ln>
+        </p:spPr>
+      </p:sp>
+      <p:sp>
+        <p:nvSpPr>
+          <p:cNvPr id="253" name="PlaceHolder 2"/>
           <p:cNvSpPr>
             <a:spLocks noGrp="1"/>
           </p:cNvSpPr>
@@ -1201,7 +1628,7 @@
         <p:spPr>
           <a:xfrm>
             <a:off x="685800" y="4400640"/>
-            <a:ext cx="5484960" cy="3598920"/>
+            <a:ext cx="5484600" cy="3598560"/>
           </a:xfrm>
           <a:prstGeom prst="rect">
             <a:avLst/>
@@ -1232,7 +1659,7 @@
       </p:sp>
       <p:sp>
         <p:nvSpPr>
-          <p:cNvPr id="225" name="PlaceHolder 3"/>
+          <p:cNvPr id="254" name="PlaceHolder 3"/>
           <p:cNvSpPr>
             <a:spLocks noGrp="1"/>
           </p:cNvSpPr>
@@ -1243,7 +1670,7 @@
         <p:spPr>
           <a:xfrm>
             <a:off x="3884760" y="8685360"/>
-            <a:ext cx="2970360" cy="457200"/>
+            <a:ext cx="2970000" cy="456840"/>
           </a:xfrm>
           <a:prstGeom prst="rect">
             <a:avLst/>
@@ -1287,7 +1714,7 @@
                 <a:tab algn="l" pos="0"/>
               </a:tabLst>
             </a:pPr>
-            <a:fld id="{B1EC6872-1DD1-43A9-8FB0-793C82083943}" type="slidenum">
+            <a:fld id="{EDB348AD-818C-4AAC-A566-ECF0A0163151}" type="slidenum">
               <a:rPr lang="pt-PT" sz="1200" b="0" u="none" strike="noStrike">
                 <a:solidFill>
                   <a:schemeClr val="dk1"/>
@@ -1297,7 +1724,7 @@
                 <a:latin typeface="+mn-lt"/>
                 <a:ea typeface="+mn-ea"/>
               </a:rPr>
-              <a:t>1</a:t>
+              <a:t>&lt;número&gt;</a:t>
             </a:fld>
             <a:endParaRPr lang="pt-PT" sz="1200" b="0" u="none" strike="noStrike">
               <a:solidFill>
@@ -1334,7 +1761,7 @@
       </p:grpSpPr>
       <p:sp>
         <p:nvSpPr>
-          <p:cNvPr id="226" name="PlaceHolder 1"/>
+          <p:cNvPr id="255" name="PlaceHolder 1"/>
           <p:cNvSpPr>
             <a:spLocks noGrp="1"/>
           </p:cNvSpPr>
@@ -1345,19 +1772,19 @@
         <p:spPr>
           <a:xfrm>
             <a:off x="685800" y="1143000"/>
-            <a:ext cx="5484960" cy="3084840"/>
-          </a:xfrm>
-          <a:prstGeom prst="rect">
-            <a:avLst/>
-          </a:prstGeom>
-          <a:ln w="0">
-            <a:noFill/>
-          </a:ln>
-        </p:spPr>
-      </p:sp>
-      <p:sp>
-        <p:nvSpPr>
-          <p:cNvPr id="227" name="PlaceHolder 2"/>
+            <a:ext cx="5484600" cy="3084480"/>
+          </a:xfrm>
+          <a:prstGeom prst="rect">
+            <a:avLst/>
+          </a:prstGeom>
+          <a:ln w="0">
+            <a:noFill/>
+          </a:ln>
+        </p:spPr>
+      </p:sp>
+      <p:sp>
+        <p:nvSpPr>
+          <p:cNvPr id="256" name="PlaceHolder 2"/>
           <p:cNvSpPr>
             <a:spLocks noGrp="1"/>
           </p:cNvSpPr>
@@ -1368,7 +1795,7 @@
         <p:spPr>
           <a:xfrm>
             <a:off x="685800" y="4400640"/>
-            <a:ext cx="5484960" cy="3598920"/>
+            <a:ext cx="5484600" cy="3598560"/>
           </a:xfrm>
           <a:prstGeom prst="rect">
             <a:avLst/>
@@ -1399,7 +1826,7 @@
       </p:sp>
       <p:sp>
         <p:nvSpPr>
-          <p:cNvPr id="228" name="PlaceHolder 3"/>
+          <p:cNvPr id="257" name="PlaceHolder 3"/>
           <p:cNvSpPr>
             <a:spLocks noGrp="1"/>
           </p:cNvSpPr>
@@ -1410,7 +1837,7 @@
         <p:spPr>
           <a:xfrm>
             <a:off x="3884760" y="8685360"/>
-            <a:ext cx="2970360" cy="457200"/>
+            <a:ext cx="2970000" cy="456840"/>
           </a:xfrm>
           <a:prstGeom prst="rect">
             <a:avLst/>
@@ -1454,7 +1881,7 @@
                 <a:tab algn="l" pos="0"/>
               </a:tabLst>
             </a:pPr>
-            <a:fld id="{7BA71C1C-2BF1-476D-97A2-F6E07BFECE47}" type="slidenum">
+            <a:fld id="{41F98AD1-1195-465B-B502-25B000A2F6BB}" type="slidenum">
               <a:rPr lang="pt-PT" sz="1200" b="0" u="none" strike="noStrike">
                 <a:solidFill>
                   <a:schemeClr val="dk1"/>
@@ -1464,7 +1891,7 @@
                 <a:latin typeface="+mn-lt"/>
                 <a:ea typeface="+mn-ea"/>
               </a:rPr>
-              <a:t>1</a:t>
+              <a:t>&lt;número&gt;</a:t>
             </a:fld>
             <a:endParaRPr lang="pt-PT" sz="1200" b="0" u="none" strike="noStrike">
               <a:solidFill>
@@ -1501,7 +1928,7 @@
       </p:grpSpPr>
       <p:sp>
         <p:nvSpPr>
-          <p:cNvPr id="229" name="PlaceHolder 1"/>
+          <p:cNvPr id="258" name="PlaceHolder 1"/>
           <p:cNvSpPr>
             <a:spLocks noGrp="1"/>
           </p:cNvSpPr>
@@ -1512,19 +1939,19 @@
         <p:spPr>
           <a:xfrm>
             <a:off x="685800" y="1143000"/>
-            <a:ext cx="5484960" cy="3084840"/>
-          </a:xfrm>
-          <a:prstGeom prst="rect">
-            <a:avLst/>
-          </a:prstGeom>
-          <a:ln w="0">
-            <a:noFill/>
-          </a:ln>
-        </p:spPr>
-      </p:sp>
-      <p:sp>
-        <p:nvSpPr>
-          <p:cNvPr id="230" name="PlaceHolder 2"/>
+            <a:ext cx="5484600" cy="3084480"/>
+          </a:xfrm>
+          <a:prstGeom prst="rect">
+            <a:avLst/>
+          </a:prstGeom>
+          <a:ln w="0">
+            <a:noFill/>
+          </a:ln>
+        </p:spPr>
+      </p:sp>
+      <p:sp>
+        <p:nvSpPr>
+          <p:cNvPr id="259" name="PlaceHolder 2"/>
           <p:cNvSpPr>
             <a:spLocks noGrp="1"/>
           </p:cNvSpPr>
@@ -1535,7 +1962,7 @@
         <p:spPr>
           <a:xfrm>
             <a:off x="685800" y="4400640"/>
-            <a:ext cx="5484960" cy="3598920"/>
+            <a:ext cx="5484600" cy="3598560"/>
           </a:xfrm>
           <a:prstGeom prst="rect">
             <a:avLst/>
@@ -1566,7 +1993,7 @@
       </p:sp>
       <p:sp>
         <p:nvSpPr>
-          <p:cNvPr id="231" name="PlaceHolder 3"/>
+          <p:cNvPr id="260" name="PlaceHolder 3"/>
           <p:cNvSpPr>
             <a:spLocks noGrp="1"/>
           </p:cNvSpPr>
@@ -1577,7 +2004,7 @@
         <p:spPr>
           <a:xfrm>
             <a:off x="3884760" y="8685360"/>
-            <a:ext cx="2970360" cy="457200"/>
+            <a:ext cx="2970000" cy="456840"/>
           </a:xfrm>
           <a:prstGeom prst="rect">
             <a:avLst/>
@@ -1621,7 +2048,7 @@
                 <a:tab algn="l" pos="0"/>
               </a:tabLst>
             </a:pPr>
-            <a:fld id="{7890DEC8-F478-4897-8F48-51D7399159C8}" type="slidenum">
+            <a:fld id="{6EE47796-0C9B-42C3-9BCE-E7CC935FE65E}" type="slidenum">
               <a:rPr lang="pt-PT" sz="1200" b="0" u="none" strike="noStrike">
                 <a:solidFill>
                   <a:schemeClr val="dk1"/>
@@ -1631,7 +2058,7 @@
                 <a:latin typeface="+mn-lt"/>
                 <a:ea typeface="+mn-ea"/>
               </a:rPr>
-              <a:t>1</a:t>
+              <a:t>&lt;número&gt;</a:t>
             </a:fld>
             <a:endParaRPr lang="pt-PT" sz="1200" b="0" u="none" strike="noStrike">
               <a:solidFill>
@@ -1668,7 +2095,7 @@
       </p:grpSpPr>
       <p:sp>
         <p:nvSpPr>
-          <p:cNvPr id="232" name="PlaceHolder 1"/>
+          <p:cNvPr id="261" name="PlaceHolder 1"/>
           <p:cNvSpPr>
             <a:spLocks noGrp="1"/>
           </p:cNvSpPr>
@@ -1679,19 +2106,19 @@
         <p:spPr>
           <a:xfrm>
             <a:off x="685800" y="1143000"/>
-            <a:ext cx="5484960" cy="3084840"/>
-          </a:xfrm>
-          <a:prstGeom prst="rect">
-            <a:avLst/>
-          </a:prstGeom>
-          <a:ln w="0">
-            <a:noFill/>
-          </a:ln>
-        </p:spPr>
-      </p:sp>
-      <p:sp>
-        <p:nvSpPr>
-          <p:cNvPr id="233" name="PlaceHolder 2"/>
+            <a:ext cx="5484600" cy="3084480"/>
+          </a:xfrm>
+          <a:prstGeom prst="rect">
+            <a:avLst/>
+          </a:prstGeom>
+          <a:ln w="0">
+            <a:noFill/>
+          </a:ln>
+        </p:spPr>
+      </p:sp>
+      <p:sp>
+        <p:nvSpPr>
+          <p:cNvPr id="262" name="PlaceHolder 2"/>
           <p:cNvSpPr>
             <a:spLocks noGrp="1"/>
           </p:cNvSpPr>
@@ -1702,7 +2129,7 @@
         <p:spPr>
           <a:xfrm>
             <a:off x="685800" y="4400640"/>
-            <a:ext cx="5484960" cy="3598920"/>
+            <a:ext cx="5484600" cy="3598560"/>
           </a:xfrm>
           <a:prstGeom prst="rect">
             <a:avLst/>
@@ -1733,7 +2160,7 @@
       </p:sp>
       <p:sp>
         <p:nvSpPr>
-          <p:cNvPr id="234" name="PlaceHolder 3"/>
+          <p:cNvPr id="263" name="PlaceHolder 3"/>
           <p:cNvSpPr>
             <a:spLocks noGrp="1"/>
           </p:cNvSpPr>
@@ -1744,7 +2171,7 @@
         <p:spPr>
           <a:xfrm>
             <a:off x="3884760" y="8685360"/>
-            <a:ext cx="2970360" cy="457200"/>
+            <a:ext cx="2970000" cy="456840"/>
           </a:xfrm>
           <a:prstGeom prst="rect">
             <a:avLst/>
@@ -1788,7 +2215,7 @@
                 <a:tab algn="l" pos="0"/>
               </a:tabLst>
             </a:pPr>
-            <a:fld id="{ADF7EC21-FA6A-4593-A00E-F7CA719407B9}" type="slidenum">
+            <a:fld id="{856F17DB-1211-44AC-B019-F2C9F0C30CA9}" type="slidenum">
               <a:rPr lang="pt-PT" sz="1200" b="0" u="none" strike="noStrike">
                 <a:solidFill>
                   <a:schemeClr val="dk1"/>
@@ -1798,7 +2225,7 @@
                 <a:latin typeface="+mn-lt"/>
                 <a:ea typeface="+mn-ea"/>
               </a:rPr>
-              <a:t>1</a:t>
+              <a:t>&lt;número&gt;</a:t>
             </a:fld>
             <a:endParaRPr lang="pt-PT" sz="1200" b="0" u="none" strike="noStrike">
               <a:solidFill>
@@ -1835,7 +2262,7 @@
       </p:grpSpPr>
       <p:sp>
         <p:nvSpPr>
-          <p:cNvPr id="235" name="PlaceHolder 1"/>
+          <p:cNvPr id="264" name="PlaceHolder 1"/>
           <p:cNvSpPr>
             <a:spLocks noGrp="1"/>
           </p:cNvSpPr>
@@ -1846,19 +2273,19 @@
         <p:spPr>
           <a:xfrm>
             <a:off x="685800" y="1143000"/>
-            <a:ext cx="5484960" cy="3084840"/>
-          </a:xfrm>
-          <a:prstGeom prst="rect">
-            <a:avLst/>
-          </a:prstGeom>
-          <a:ln w="0">
-            <a:noFill/>
-          </a:ln>
-        </p:spPr>
-      </p:sp>
-      <p:sp>
-        <p:nvSpPr>
-          <p:cNvPr id="236" name="PlaceHolder 2"/>
+            <a:ext cx="5484600" cy="3084480"/>
+          </a:xfrm>
+          <a:prstGeom prst="rect">
+            <a:avLst/>
+          </a:prstGeom>
+          <a:ln w="0">
+            <a:noFill/>
+          </a:ln>
+        </p:spPr>
+      </p:sp>
+      <p:sp>
+        <p:nvSpPr>
+          <p:cNvPr id="265" name="PlaceHolder 2"/>
           <p:cNvSpPr>
             <a:spLocks noGrp="1"/>
           </p:cNvSpPr>
@@ -1869,7 +2296,7 @@
         <p:spPr>
           <a:xfrm>
             <a:off x="685800" y="4400640"/>
-            <a:ext cx="5484960" cy="3598920"/>
+            <a:ext cx="5484600" cy="3598560"/>
           </a:xfrm>
           <a:prstGeom prst="rect">
             <a:avLst/>
@@ -1900,7 +2327,7 @@
       </p:sp>
       <p:sp>
         <p:nvSpPr>
-          <p:cNvPr id="237" name="PlaceHolder 3"/>
+          <p:cNvPr id="266" name="PlaceHolder 3"/>
           <p:cNvSpPr>
             <a:spLocks noGrp="1"/>
           </p:cNvSpPr>
@@ -1911,7 +2338,7 @@
         <p:spPr>
           <a:xfrm>
             <a:off x="3884760" y="8685360"/>
-            <a:ext cx="2970360" cy="457200"/>
+            <a:ext cx="2970000" cy="456840"/>
           </a:xfrm>
           <a:prstGeom prst="rect">
             <a:avLst/>
@@ -1955,7 +2382,7 @@
                 <a:tab algn="l" pos="0"/>
               </a:tabLst>
             </a:pPr>
-            <a:fld id="{B5B6CD51-178C-44E3-A19D-4950ED69BD45}" type="slidenum">
+            <a:fld id="{3574D59A-35CA-4A31-A951-0FCF3660150D}" type="slidenum">
               <a:rPr lang="pt-PT" sz="1200" b="0" u="none" strike="noStrike">
                 <a:solidFill>
                   <a:schemeClr val="dk1"/>
@@ -1965,7 +2392,7 @@
                 <a:latin typeface="+mn-lt"/>
                 <a:ea typeface="+mn-ea"/>
               </a:rPr>
-              <a:t>1</a:t>
+              <a:t>&lt;número&gt;</a:t>
             </a:fld>
             <a:endParaRPr lang="pt-PT" sz="1200" b="0" u="none" strike="noStrike">
               <a:solidFill>
@@ -2002,7 +2429,7 @@
       </p:grpSpPr>
       <p:sp>
         <p:nvSpPr>
-          <p:cNvPr id="238" name="PlaceHolder 1"/>
+          <p:cNvPr id="267" name="PlaceHolder 1"/>
           <p:cNvSpPr>
             <a:spLocks noGrp="1"/>
           </p:cNvSpPr>
@@ -2013,19 +2440,19 @@
         <p:spPr>
           <a:xfrm>
             <a:off x="685800" y="1143000"/>
-            <a:ext cx="5484960" cy="3084840"/>
-          </a:xfrm>
-          <a:prstGeom prst="rect">
-            <a:avLst/>
-          </a:prstGeom>
-          <a:ln w="0">
-            <a:noFill/>
-          </a:ln>
-        </p:spPr>
-      </p:sp>
-      <p:sp>
-        <p:nvSpPr>
-          <p:cNvPr id="239" name="PlaceHolder 2"/>
+            <a:ext cx="5484600" cy="3084480"/>
+          </a:xfrm>
+          <a:prstGeom prst="rect">
+            <a:avLst/>
+          </a:prstGeom>
+          <a:ln w="0">
+            <a:noFill/>
+          </a:ln>
+        </p:spPr>
+      </p:sp>
+      <p:sp>
+        <p:nvSpPr>
+          <p:cNvPr id="268" name="PlaceHolder 2"/>
           <p:cNvSpPr>
             <a:spLocks noGrp="1"/>
           </p:cNvSpPr>
@@ -2036,7 +2463,7 @@
         <p:spPr>
           <a:xfrm>
             <a:off x="685800" y="4400640"/>
-            <a:ext cx="5484960" cy="3598920"/>
+            <a:ext cx="5484600" cy="3598560"/>
           </a:xfrm>
           <a:prstGeom prst="rect">
             <a:avLst/>
@@ -2067,7 +2494,7 @@
       </p:sp>
       <p:sp>
         <p:nvSpPr>
-          <p:cNvPr id="240" name="PlaceHolder 3"/>
+          <p:cNvPr id="269" name="PlaceHolder 3"/>
           <p:cNvSpPr>
             <a:spLocks noGrp="1"/>
           </p:cNvSpPr>
@@ -2078,7 +2505,7 @@
         <p:spPr>
           <a:xfrm>
             <a:off x="3884760" y="8685360"/>
-            <a:ext cx="2970360" cy="457200"/>
+            <a:ext cx="2970000" cy="456840"/>
           </a:xfrm>
           <a:prstGeom prst="rect">
             <a:avLst/>
@@ -2122,7 +2549,7 @@
                 <a:tab algn="l" pos="0"/>
               </a:tabLst>
             </a:pPr>
-            <a:fld id="{AA0B5F14-0820-4B45-88A6-3E78504E913C}" type="slidenum">
+            <a:fld id="{246CFAD1-1990-4C12-9FFD-A0572BCE72E8}" type="slidenum">
               <a:rPr lang="pt-PT" sz="1200" b="0" u="none" strike="noStrike">
                 <a:solidFill>
                   <a:schemeClr val="dk1"/>
@@ -2169,7 +2596,7 @@
       </p:grpSpPr>
       <p:sp>
         <p:nvSpPr>
-          <p:cNvPr id="241" name="PlaceHolder 1"/>
+          <p:cNvPr id="270" name="PlaceHolder 1"/>
           <p:cNvSpPr>
             <a:spLocks noGrp="1"/>
           </p:cNvSpPr>
@@ -2180,19 +2607,19 @@
         <p:spPr>
           <a:xfrm>
             <a:off x="685800" y="1143000"/>
-            <a:ext cx="5484960" cy="3084840"/>
-          </a:xfrm>
-          <a:prstGeom prst="rect">
-            <a:avLst/>
-          </a:prstGeom>
-          <a:ln w="0">
-            <a:noFill/>
-          </a:ln>
-        </p:spPr>
-      </p:sp>
-      <p:sp>
-        <p:nvSpPr>
-          <p:cNvPr id="242" name="PlaceHolder 2"/>
+            <a:ext cx="5484600" cy="3084480"/>
+          </a:xfrm>
+          <a:prstGeom prst="rect">
+            <a:avLst/>
+          </a:prstGeom>
+          <a:ln w="0">
+            <a:noFill/>
+          </a:ln>
+        </p:spPr>
+      </p:sp>
+      <p:sp>
+        <p:nvSpPr>
+          <p:cNvPr id="271" name="PlaceHolder 2"/>
           <p:cNvSpPr>
             <a:spLocks noGrp="1"/>
           </p:cNvSpPr>
@@ -2203,7 +2630,7 @@
         <p:spPr>
           <a:xfrm>
             <a:off x="685800" y="4400640"/>
-            <a:ext cx="5484960" cy="3598920"/>
+            <a:ext cx="5484600" cy="3598560"/>
           </a:xfrm>
           <a:prstGeom prst="rect">
             <a:avLst/>
@@ -2234,7 +2661,7 @@
       </p:sp>
       <p:sp>
         <p:nvSpPr>
-          <p:cNvPr id="243" name="PlaceHolder 3"/>
+          <p:cNvPr id="272" name="PlaceHolder 3"/>
           <p:cNvSpPr>
             <a:spLocks noGrp="1"/>
           </p:cNvSpPr>
@@ -2245,7 +2672,7 @@
         <p:spPr>
           <a:xfrm>
             <a:off x="3884760" y="8685360"/>
-            <a:ext cx="2970360" cy="457200"/>
+            <a:ext cx="2970000" cy="456840"/>
           </a:xfrm>
           <a:prstGeom prst="rect">
             <a:avLst/>
@@ -2289,7 +2716,7 @@
                 <a:tab algn="l" pos="0"/>
               </a:tabLst>
             </a:pPr>
-            <a:fld id="{5E9B02F3-F6D4-4EF1-AFA0-CE176635D7CD}" type="slidenum">
+            <a:fld id="{DBE63A48-2157-43EA-A6D3-2CBA43D56135}" type="slidenum">
               <a:rPr lang="pt-PT" sz="1200" b="0" u="none" strike="noStrike">
                 <a:solidFill>
                   <a:schemeClr val="dk1"/>
@@ -2403,62 +2830,7 @@
                 <a:uFillTx/>
                 <a:latin typeface="Arial"/>
               </a:rPr>
-              <a:t>Clique </a:t>
-            </a:r>
-            <a:r>
-              <a:rPr lang="pt-PT" sz="4400" b="0" u="none" strike="noStrike">
-                <a:solidFill>
-                  <a:srgbClr val="000000"/>
-                </a:solidFill>
-                <a:effectLst/>
-                <a:uFillTx/>
-                <a:latin typeface="Arial"/>
-              </a:rPr>
-              <a:t>para </a:t>
-            </a:r>
-            <a:r>
-              <a:rPr lang="pt-PT" sz="4400" b="0" u="none" strike="noStrike">
-                <a:solidFill>
-                  <a:srgbClr val="000000"/>
-                </a:solidFill>
-                <a:effectLst/>
-                <a:uFillTx/>
-                <a:latin typeface="Arial"/>
-              </a:rPr>
-              <a:t>editar o </a:t>
-            </a:r>
-            <a:r>
-              <a:rPr lang="pt-PT" sz="4400" b="0" u="none" strike="noStrike">
-                <a:solidFill>
-                  <a:srgbClr val="000000"/>
-                </a:solidFill>
-                <a:effectLst/>
-                <a:uFillTx/>
-                <a:latin typeface="Arial"/>
-              </a:rPr>
-              <a:t>formato </a:t>
-            </a:r>
-            <a:r>
-              <a:rPr lang="pt-PT" sz="4400" b="0" u="none" strike="noStrike">
-                <a:solidFill>
-                  <a:srgbClr val="000000"/>
-                </a:solidFill>
-                <a:effectLst/>
-                <a:uFillTx/>
-                <a:latin typeface="Arial"/>
-              </a:rPr>
-              <a:t>do </a:t>
-            </a:r>
-            <a:r>
-              <a:rPr lang="pt-PT" sz="4400" b="0" u="none" strike="noStrike">
-                <a:solidFill>
-                  <a:srgbClr val="000000"/>
-                </a:solidFill>
-                <a:effectLst/>
-                <a:uFillTx/>
-                <a:latin typeface="Arial"/>
-              </a:rPr>
-              <a:t>título</a:t>
+              <a:t>Clique para editar o formato do título</a:t>
             </a:r>
             <a:endParaRPr lang="pt-PT" sz="4400" b="0" u="none" strike="noStrike">
               <a:solidFill>
@@ -2766,7 +3138,7 @@
         <p:spPr>
           <a:xfrm>
             <a:off x="822960" y="822960"/>
-            <a:ext cx="1004400" cy="1004400"/>
+            <a:ext cx="1004040" cy="1004040"/>
           </a:xfrm>
           <a:prstGeom prst="roundRect">
             <a:avLst>
@@ -2816,7 +3188,7 @@
         <p:spPr>
           <a:xfrm>
             <a:off x="822960" y="822960"/>
-            <a:ext cx="1004400" cy="1004400"/>
+            <a:ext cx="1004040" cy="1004040"/>
           </a:xfrm>
           <a:prstGeom prst="rect">
             <a:avLst/>
@@ -2877,7 +3249,7 @@
         <p:spPr>
           <a:xfrm>
             <a:off x="822960" y="2651760"/>
-            <a:ext cx="10514160" cy="1004400"/>
+            <a:ext cx="10513800" cy="1004040"/>
           </a:xfrm>
           <a:prstGeom prst="rect">
             <a:avLst/>
@@ -2938,7 +3310,7 @@
         <p:spPr>
           <a:xfrm>
             <a:off x="822960" y="3493080"/>
-            <a:ext cx="10514160" cy="547200"/>
+            <a:ext cx="10513800" cy="546840"/>
           </a:xfrm>
           <a:prstGeom prst="rect">
             <a:avLst/>
@@ -3042,7 +3414,7 @@
         <p:spPr>
           <a:xfrm>
             <a:off x="822960" y="5486400"/>
-            <a:ext cx="5484960" cy="364320"/>
+            <a:ext cx="5484600" cy="363960"/>
           </a:xfrm>
           <a:prstGeom prst="rect">
             <a:avLst/>
@@ -3103,7 +3475,7 @@
         <p:spPr>
           <a:xfrm>
             <a:off x="822960" y="5852160"/>
-            <a:ext cx="5484960" cy="364320"/>
+            <a:ext cx="5484600" cy="363960"/>
           </a:xfrm>
           <a:prstGeom prst="rect">
             <a:avLst/>
@@ -3201,7 +3573,7 @@
         <p:spPr>
           <a:xfrm>
             <a:off x="640080" y="457200"/>
-            <a:ext cx="7313760" cy="318600"/>
+            <a:ext cx="7313400" cy="318240"/>
           </a:xfrm>
           <a:prstGeom prst="rect">
             <a:avLst/>
@@ -3240,7 +3612,7 @@
                 <a:latin typeface="Inter"/>
                 <a:ea typeface="Inter"/>
               </a:rPr>
-              <a:t>07</a:t>
+              <a:t>09</a:t>
             </a:r>
             <a:endParaRPr lang="pt-PT" sz="1200" b="0" u="none" strike="noStrike">
               <a:solidFill>
@@ -3255,75 +3627,14 @@
       </p:sp>
       <p:sp>
         <p:nvSpPr>
-          <p:cNvPr id="197" name="Text 38"/>
-          <p:cNvSpPr/>
-          <p:nvPr/>
-        </p:nvSpPr>
-        <p:spPr>
-          <a:xfrm>
-            <a:off x="640080" y="749880"/>
-            <a:ext cx="10056960" cy="684360"/>
-          </a:xfrm>
-          <a:prstGeom prst="rect">
-            <a:avLst/>
-          </a:prstGeom>
-          <a:noFill/>
-          <a:ln w="0">
-            <a:noFill/>
-          </a:ln>
-        </p:spPr>
-        <p:style>
-          <a:lnRef idx="0"/>
-          <a:fillRef idx="0"/>
-          <a:effectRef idx="0"/>
-          <a:fontRef idx="minor"/>
-        </p:style>
-        <p:txBody>
-          <a:bodyPr lIns="90000" rIns="90000" tIns="45000" bIns="45000" anchor="ctr">
-            <a:noAutofit/>
-          </a:bodyPr>
-          <a:p>
-            <a:pPr defTabSz="914400">
-              <a:lnSpc>
-                <a:spcPct val="100000"/>
-              </a:lnSpc>
-              <a:tabLst>
-                <a:tab algn="l" pos="0"/>
-              </a:tabLst>
-            </a:pPr>
-            <a:r>
-              <a:rPr lang="pt-PT" sz="2800" b="1" u="none" strike="noStrike">
-                <a:solidFill>
-                  <a:srgbClr val="0d2b2e"/>
-                </a:solidFill>
-                <a:effectLst/>
-                <a:uFillTx/>
-                <a:latin typeface="Poppins"/>
-                <a:ea typeface="Poppins"/>
-              </a:rPr>
-              <a:t>Demonstração</a:t>
-            </a:r>
-            <a:endParaRPr lang="pt-PT" sz="2800" b="0" u="none" strike="noStrike">
-              <a:solidFill>
-                <a:srgbClr val="000000"/>
-              </a:solidFill>
-              <a:effectLst/>
-              <a:uFillTx/>
-              <a:latin typeface="Arial"/>
-            </a:endParaRPr>
-          </a:p>
-        </p:txBody>
-      </p:sp>
-      <p:sp>
-        <p:nvSpPr>
-          <p:cNvPr id="198" name="Shape 21"/>
+          <p:cNvPr id="197" name="Shape 21"/>
           <p:cNvSpPr/>
           <p:nvPr/>
         </p:nvSpPr>
         <p:spPr>
           <a:xfrm rot="5429400">
-            <a:off x="886680" y="1900440"/>
-            <a:ext cx="2673000" cy="3663000"/>
+            <a:off x="887040" y="1900440"/>
+            <a:ext cx="2672640" cy="3662640"/>
           </a:xfrm>
           <a:prstGeom prst="roundRect">
             <a:avLst>
@@ -3355,6 +3666,11 @@
             <a:noAutofit/>
           </a:bodyPr>
           <a:p>
+            <a:pPr>
+              <a:lnSpc>
+                <a:spcPct val="100000"/>
+              </a:lnSpc>
+            </a:pPr>
             <a:endParaRPr lang="pt-PT" sz="1800" b="0" u="none" strike="noStrike">
               <a:solidFill>
                 <a:srgbClr val="000000"/>
@@ -3368,14 +3684,14 @@
       </p:sp>
       <p:sp>
         <p:nvSpPr>
-          <p:cNvPr id="199" name="Text 39"/>
+          <p:cNvPr id="198" name="Text 39"/>
           <p:cNvSpPr/>
           <p:nvPr/>
         </p:nvSpPr>
         <p:spPr>
           <a:xfrm>
             <a:off x="600480" y="2563560"/>
-            <a:ext cx="2204280" cy="467640"/>
+            <a:ext cx="2203920" cy="467280"/>
           </a:xfrm>
           <a:prstGeom prst="rect">
             <a:avLst/>
@@ -3429,14 +3745,14 @@
       </p:sp>
       <p:sp>
         <p:nvSpPr>
-          <p:cNvPr id="200" name="Text 40"/>
+          <p:cNvPr id="199" name="Text 40"/>
           <p:cNvSpPr/>
           <p:nvPr/>
         </p:nvSpPr>
         <p:spPr>
           <a:xfrm>
             <a:off x="457200" y="6537960"/>
-            <a:ext cx="5484960" cy="272880"/>
+            <a:ext cx="5484600" cy="272520"/>
           </a:xfrm>
           <a:prstGeom prst="rect">
             <a:avLst/>
@@ -3490,14 +3806,14 @@
       </p:sp>
       <p:sp>
         <p:nvSpPr>
-          <p:cNvPr id="201" name="Text 41"/>
+          <p:cNvPr id="200" name="Text 41"/>
           <p:cNvSpPr/>
           <p:nvPr/>
         </p:nvSpPr>
         <p:spPr>
           <a:xfrm>
             <a:off x="11521440" y="6537960"/>
-            <a:ext cx="455760" cy="272880"/>
+            <a:ext cx="455400" cy="272520"/>
           </a:xfrm>
           <a:prstGeom prst="rect">
             <a:avLst/>
@@ -3551,14 +3867,14 @@
       </p:sp>
       <p:sp>
         <p:nvSpPr>
-          <p:cNvPr id="202" name="Shape 25"/>
+          <p:cNvPr id="201" name="Shape 25"/>
           <p:cNvSpPr/>
           <p:nvPr/>
         </p:nvSpPr>
         <p:spPr>
           <a:xfrm rot="5427600">
             <a:off x="4651560" y="1988640"/>
-            <a:ext cx="2673000" cy="3502080"/>
+            <a:ext cx="2672640" cy="3501720"/>
           </a:xfrm>
           <a:prstGeom prst="roundRect">
             <a:avLst>
@@ -3590,6 +3906,11 @@
             <a:noAutofit/>
           </a:bodyPr>
           <a:p>
+            <a:pPr>
+              <a:lnSpc>
+                <a:spcPct val="100000"/>
+              </a:lnSpc>
+            </a:pPr>
             <a:endParaRPr lang="pt-PT" sz="1800" b="0" u="none" strike="noStrike">
               <a:solidFill>
                 <a:srgbClr val="000000"/>
@@ -3603,14 +3924,14 @@
       </p:sp>
       <p:sp>
         <p:nvSpPr>
-          <p:cNvPr id="203" name="Shape 29"/>
+          <p:cNvPr id="202" name="Shape 29"/>
           <p:cNvSpPr/>
           <p:nvPr/>
         </p:nvSpPr>
         <p:spPr>
           <a:xfrm rot="5428800">
             <a:off x="8392680" y="2022120"/>
-            <a:ext cx="2673360" cy="3533400"/>
+            <a:ext cx="2673000" cy="3533040"/>
           </a:xfrm>
           <a:prstGeom prst="roundRect">
             <a:avLst>
@@ -3642,6 +3963,11 @@
             <a:noAutofit/>
           </a:bodyPr>
           <a:p>
+            <a:pPr>
+              <a:lnSpc>
+                <a:spcPct val="100000"/>
+              </a:lnSpc>
+            </a:pPr>
             <a:endParaRPr lang="pt-PT" sz="1800" b="0" u="none" strike="noStrike">
               <a:solidFill>
                 <a:srgbClr val="000000"/>
@@ -3655,14 +3981,14 @@
       </p:sp>
       <p:sp>
         <p:nvSpPr>
-          <p:cNvPr id="204" name="Text 42"/>
+          <p:cNvPr id="203" name="Text 42"/>
           <p:cNvSpPr/>
           <p:nvPr/>
         </p:nvSpPr>
         <p:spPr>
           <a:xfrm>
             <a:off x="4406760" y="2608920"/>
-            <a:ext cx="2203920" cy="467640"/>
+            <a:ext cx="2203560" cy="467280"/>
           </a:xfrm>
           <a:prstGeom prst="rect">
             <a:avLst/>
@@ -3716,14 +4042,14 @@
       </p:sp>
       <p:sp>
         <p:nvSpPr>
-          <p:cNvPr id="205" name="Text 43"/>
+          <p:cNvPr id="204" name="Text 43"/>
           <p:cNvSpPr/>
           <p:nvPr/>
         </p:nvSpPr>
         <p:spPr>
           <a:xfrm>
             <a:off x="8130960" y="2608560"/>
-            <a:ext cx="2203920" cy="467640"/>
+            <a:ext cx="2203560" cy="467280"/>
           </a:xfrm>
           <a:prstGeom prst="rect">
             <a:avLst/>
@@ -3777,7 +4103,7 @@
       </p:sp>
       <p:pic>
         <p:nvPicPr>
-          <p:cNvPr id="206" name=""/>
+          <p:cNvPr id="205" name=""/>
           <p:cNvPicPr/>
           <p:nvPr/>
         </p:nvPicPr>
@@ -3788,7 +4114,31 @@
         <p:spPr>
           <a:xfrm>
             <a:off x="529920" y="3116880"/>
-            <a:ext cx="3257640" cy="1799640"/>
+            <a:ext cx="3257280" cy="1799280"/>
+          </a:xfrm>
+          <a:prstGeom prst="rect">
+            <a:avLst/>
+          </a:prstGeom>
+          <a:noFill/>
+          <a:ln w="0">
+            <a:noFill/>
+          </a:ln>
+        </p:spPr>
+      </p:pic>
+      <p:pic>
+        <p:nvPicPr>
+          <p:cNvPr id="206" name=""/>
+          <p:cNvPicPr/>
+          <p:nvPr/>
+        </p:nvPicPr>
+        <p:blipFill>
+          <a:blip r:embed="rId2"/>
+          <a:stretch/>
+        </p:blipFill>
+        <p:spPr>
+          <a:xfrm>
+            <a:off x="4337640" y="3118320"/>
+            <a:ext cx="3256200" cy="1805760"/>
           </a:xfrm>
           <a:prstGeom prst="rect">
             <a:avLst/>
@@ -3806,13 +4156,742 @@
           <p:nvPr/>
         </p:nvPicPr>
         <p:blipFill>
+          <a:blip r:embed="rId3"/>
+          <a:stretch/>
+        </p:blipFill>
+        <p:spPr>
+          <a:xfrm>
+            <a:off x="8083440" y="3210840"/>
+            <a:ext cx="3249360" cy="1746360"/>
+          </a:xfrm>
+          <a:prstGeom prst="rect">
+            <a:avLst/>
+          </a:prstGeom>
+          <a:noFill/>
+          <a:ln w="0">
+            <a:noFill/>
+          </a:ln>
+        </p:spPr>
+      </p:pic>
+      <p:sp>
+        <p:nvSpPr>
+          <p:cNvPr id="208" name="Text 38"/>
+          <p:cNvSpPr/>
+          <p:nvPr/>
+        </p:nvSpPr>
+        <p:spPr>
+          <a:xfrm>
+            <a:off x="640440" y="749880"/>
+            <a:ext cx="10056600" cy="684000"/>
+          </a:xfrm>
+          <a:prstGeom prst="rect">
+            <a:avLst/>
+          </a:prstGeom>
+          <a:noFill/>
+          <a:ln w="0">
+            <a:noFill/>
+          </a:ln>
+        </p:spPr>
+        <p:style>
+          <a:lnRef idx="0"/>
+          <a:fillRef idx="0"/>
+          <a:effectRef idx="0"/>
+          <a:fontRef idx="minor"/>
+        </p:style>
+        <p:txBody>
+          <a:bodyPr lIns="90000" rIns="90000" tIns="45000" bIns="45000" anchor="ctr">
+            <a:noAutofit/>
+          </a:bodyPr>
+          <a:p>
+            <a:pPr defTabSz="914400">
+              <a:lnSpc>
+                <a:spcPct val="100000"/>
+              </a:lnSpc>
+              <a:tabLst>
+                <a:tab algn="l" pos="0"/>
+              </a:tabLst>
+            </a:pPr>
+            <a:r>
+              <a:rPr lang="pt-PT" sz="2800" b="1" u="none" strike="noStrike">
+                <a:solidFill>
+                  <a:srgbClr val="0d2b2e"/>
+                </a:solidFill>
+                <a:effectLst/>
+                <a:uFillTx/>
+                <a:latin typeface="Poppins"/>
+                <a:ea typeface="Poppins"/>
+              </a:rPr>
+              <a:t>Demonstração da user view</a:t>
+            </a:r>
+            <a:endParaRPr lang="pt-PT" sz="2800" b="0" u="none" strike="noStrike">
+              <a:solidFill>
+                <a:srgbClr val="000000"/>
+              </a:solidFill>
+              <a:effectLst/>
+              <a:uFillTx/>
+              <a:latin typeface="Arial"/>
+            </a:endParaRPr>
+          </a:p>
+        </p:txBody>
+      </p:sp>
+    </p:spTree>
+  </p:cSld>
+  <mc:AlternateContent>
+    <mc:Choice Requires="p14">
+      <p:transition spd="slow" p14:dur="2000"/>
+    </mc:Choice>
+    <mc:Fallback>
+      <p:transition spd="slow"/>
+    </mc:Fallback>
+  </mc:AlternateContent>
+</p:sld>
+</file>
+
+<file path=ppt/slides/slide11.xml><?xml version="1.0" encoding="utf-8"?>
+<p:sld xmlns:a="http://schemas.openxmlformats.org/drawingml/2006/main" xmlns:p="http://schemas.openxmlformats.org/presentationml/2006/main" xmlns:r="http://schemas.openxmlformats.org/officeDocument/2006/relationships" xmlns:p14="http://schemas.microsoft.com/office/powerpoint/2010/main" xmlns:p15="http://schemas.microsoft.com/office/powerpoint/2012/main" xmlns:mc="http://schemas.openxmlformats.org/markup-compatibility/2006">
+  <p:cSld>
+    <p:bg>
+      <p:bgPr>
+        <a:solidFill>
+          <a:srgbClr val="f2f4f7"/>
+        </a:solidFill>
+      </p:bgPr>
+    </p:bg>
+    <p:spTree>
+      <p:nvGrpSpPr>
+        <p:cNvPr id="1" name=""/>
+        <p:cNvGrpSpPr/>
+        <p:nvPr/>
+      </p:nvGrpSpPr>
+      <p:grpSpPr>
+        <a:xfrm>
+          <a:off x="0" y="0"/>
+          <a:ext cx="0" cy="0"/>
+          <a:chOff x="0" y="0"/>
+          <a:chExt cx="0" cy="0"/>
+        </a:xfrm>
+      </p:grpSpPr>
+      <p:sp>
+        <p:nvSpPr>
+          <p:cNvPr id="209" name="Text 53"/>
+          <p:cNvSpPr/>
+          <p:nvPr/>
+        </p:nvSpPr>
+        <p:spPr>
+          <a:xfrm>
+            <a:off x="640080" y="457200"/>
+            <a:ext cx="7313400" cy="318240"/>
+          </a:xfrm>
+          <a:prstGeom prst="rect">
+            <a:avLst/>
+          </a:prstGeom>
+          <a:noFill/>
+          <a:ln w="0">
+            <a:noFill/>
+          </a:ln>
+        </p:spPr>
+        <p:style>
+          <a:lnRef idx="0"/>
+          <a:fillRef idx="0"/>
+          <a:effectRef idx="0"/>
+          <a:fontRef idx="minor"/>
+        </p:style>
+        <p:txBody>
+          <a:bodyPr lIns="90000" rIns="90000" tIns="45000" bIns="45000" anchor="ctr">
+            <a:noAutofit/>
+          </a:bodyPr>
+          <a:p>
+            <a:pPr defTabSz="914400">
+              <a:lnSpc>
+                <a:spcPct val="100000"/>
+              </a:lnSpc>
+              <a:tabLst>
+                <a:tab algn="l" pos="0"/>
+              </a:tabLst>
+            </a:pPr>
+            <a:r>
+              <a:rPr lang="pt-PT" sz="1200" b="1" u="none" spc="99" strike="noStrike">
+                <a:solidFill>
+                  <a:srgbClr val="1f6f63"/>
+                </a:solidFill>
+                <a:effectLst/>
+                <a:uFillTx/>
+                <a:latin typeface="Inter"/>
+                <a:ea typeface="Inter"/>
+              </a:rPr>
+              <a:t>07</a:t>
+            </a:r>
+            <a:endParaRPr lang="pt-PT" sz="1200" b="0" u="none" strike="noStrike">
+              <a:solidFill>
+                <a:srgbClr val="000000"/>
+              </a:solidFill>
+              <a:effectLst/>
+              <a:uFillTx/>
+              <a:latin typeface="Arial"/>
+            </a:endParaRPr>
+          </a:p>
+        </p:txBody>
+      </p:sp>
+      <p:sp>
+        <p:nvSpPr>
+          <p:cNvPr id="210" name="Text 70"/>
+          <p:cNvSpPr/>
+          <p:nvPr/>
+        </p:nvSpPr>
+        <p:spPr>
+          <a:xfrm>
+            <a:off x="640080" y="749880"/>
+            <a:ext cx="10056600" cy="684000"/>
+          </a:xfrm>
+          <a:prstGeom prst="rect">
+            <a:avLst/>
+          </a:prstGeom>
+          <a:noFill/>
+          <a:ln w="0">
+            <a:noFill/>
+          </a:ln>
+        </p:spPr>
+        <p:style>
+          <a:lnRef idx="0"/>
+          <a:fillRef idx="0"/>
+          <a:effectRef idx="0"/>
+          <a:fontRef idx="minor"/>
+        </p:style>
+        <p:txBody>
+          <a:bodyPr lIns="90000" rIns="90000" tIns="45000" bIns="45000" anchor="ctr">
+            <a:noAutofit/>
+          </a:bodyPr>
+          <a:p>
+            <a:pPr defTabSz="914400">
+              <a:lnSpc>
+                <a:spcPct val="100000"/>
+              </a:lnSpc>
+              <a:tabLst>
+                <a:tab algn="l" pos="0"/>
+              </a:tabLst>
+            </a:pPr>
+            <a:r>
+              <a:rPr lang="pt-PT" sz="2800" b="1" u="none" strike="noStrike">
+                <a:solidFill>
+                  <a:srgbClr val="0d2b2e"/>
+                </a:solidFill>
+                <a:effectLst/>
+                <a:uFillTx/>
+                <a:latin typeface="Poppins"/>
+                <a:ea typeface="Poppins"/>
+              </a:rPr>
+              <a:t>Demonstração da admin view</a:t>
+            </a:r>
+            <a:endParaRPr lang="pt-PT" sz="2800" b="0" u="none" strike="noStrike">
+              <a:solidFill>
+                <a:srgbClr val="000000"/>
+              </a:solidFill>
+              <a:effectLst/>
+              <a:uFillTx/>
+              <a:latin typeface="Arial"/>
+            </a:endParaRPr>
+          </a:p>
+        </p:txBody>
+      </p:sp>
+      <p:sp>
+        <p:nvSpPr>
+          <p:cNvPr id="211" name="Shape 36"/>
+          <p:cNvSpPr/>
+          <p:nvPr/>
+        </p:nvSpPr>
+        <p:spPr>
+          <a:xfrm rot="5429400">
+            <a:off x="883800" y="1899720"/>
+            <a:ext cx="2674080" cy="3664440"/>
+          </a:xfrm>
+          <a:prstGeom prst="roundRect">
+            <a:avLst>
+              <a:gd name="adj" fmla="val 3509"/>
+            </a:avLst>
+          </a:prstGeom>
+          <a:solidFill>
+            <a:srgbClr val="ffffff"/>
+          </a:solidFill>
+          <a:ln w="0">
+            <a:noFill/>
+          </a:ln>
+          <a:effectLst>
+            <a:outerShdw algn="bl" blurRad="76320" dir="5400000" dist="25560" kx="0" ky="0" rotWithShape="0" sx="100000" sy="100000">
+              <a:srgbClr val="000000">
+                <a:alpha val="10000"/>
+              </a:srgbClr>
+            </a:outerShdw>
+          </a:effectLst>
+        </p:spPr>
+        <p:style>
+          <a:lnRef idx="0"/>
+          <a:fillRef idx="0"/>
+          <a:effectRef idx="0"/>
+          <a:fontRef idx="minor"/>
+        </p:style>
+        <p:txBody>
+          <a:bodyPr lIns="90000" rIns="90000" tIns="45000" bIns="45000" anchor="t">
+            <a:noAutofit/>
+          </a:bodyPr>
+          <a:p>
+            <a:endParaRPr lang="pt-PT" sz="1800" b="0" u="none" strike="noStrike">
+              <a:solidFill>
+                <a:srgbClr val="000000"/>
+              </a:solidFill>
+              <a:effectLst/>
+              <a:uFillTx/>
+              <a:latin typeface="Arial"/>
+            </a:endParaRPr>
+          </a:p>
+        </p:txBody>
+      </p:sp>
+      <p:sp>
+        <p:nvSpPr>
+          <p:cNvPr id="212" name="Text 71"/>
+          <p:cNvSpPr/>
+          <p:nvPr/>
+        </p:nvSpPr>
+        <p:spPr>
+          <a:xfrm>
+            <a:off x="597600" y="2563560"/>
+            <a:ext cx="2205000" cy="467640"/>
+          </a:xfrm>
+          <a:prstGeom prst="rect">
+            <a:avLst/>
+          </a:prstGeom>
+          <a:noFill/>
+          <a:ln w="0">
+            <a:noFill/>
+          </a:ln>
+        </p:spPr>
+        <p:style>
+          <a:lnRef idx="0"/>
+          <a:fillRef idx="0"/>
+          <a:effectRef idx="0"/>
+          <a:fontRef idx="minor"/>
+        </p:style>
+        <p:txBody>
+          <a:bodyPr lIns="90000" rIns="90000" tIns="45000" bIns="45000" anchor="ctr">
+            <a:noAutofit/>
+          </a:bodyPr>
+          <a:p>
+            <a:pPr defTabSz="914400">
+              <a:lnSpc>
+                <a:spcPct val="100000"/>
+              </a:lnSpc>
+              <a:tabLst>
+                <a:tab algn="l" pos="0"/>
+              </a:tabLst>
+            </a:pPr>
+            <a:r>
+              <a:rPr lang="pt-PT" sz="1300" b="1" u="none" strike="noStrike">
+                <a:solidFill>
+                  <a:srgbClr val="0d2b2e"/>
+                </a:solidFill>
+                <a:effectLst/>
+                <a:uFillTx/>
+                <a:latin typeface="Poppins"/>
+                <a:ea typeface="Poppins"/>
+              </a:rPr>
+              <a:t>Dashboard</a:t>
+            </a:r>
+            <a:endParaRPr lang="pt-PT" sz="1300" b="0" u="none" strike="noStrike">
+              <a:solidFill>
+                <a:srgbClr val="000000"/>
+              </a:solidFill>
+              <a:effectLst/>
+              <a:uFillTx/>
+              <a:latin typeface="Arial"/>
+            </a:endParaRPr>
+          </a:p>
+        </p:txBody>
+      </p:sp>
+      <p:sp>
+        <p:nvSpPr>
+          <p:cNvPr id="213" name="Text 72"/>
+          <p:cNvSpPr/>
+          <p:nvPr/>
+        </p:nvSpPr>
+        <p:spPr>
+          <a:xfrm>
+            <a:off x="457200" y="6537960"/>
+            <a:ext cx="5484600" cy="272520"/>
+          </a:xfrm>
+          <a:prstGeom prst="rect">
+            <a:avLst/>
+          </a:prstGeom>
+          <a:noFill/>
+          <a:ln w="0">
+            <a:noFill/>
+          </a:ln>
+        </p:spPr>
+        <p:style>
+          <a:lnRef idx="0"/>
+          <a:fillRef idx="0"/>
+          <a:effectRef idx="0"/>
+          <a:fontRef idx="minor"/>
+        </p:style>
+        <p:txBody>
+          <a:bodyPr lIns="90000" rIns="90000" tIns="45000" bIns="45000" anchor="ctr">
+            <a:noAutofit/>
+          </a:bodyPr>
+          <a:p>
+            <a:pPr defTabSz="914400">
+              <a:lnSpc>
+                <a:spcPct val="100000"/>
+              </a:lnSpc>
+              <a:tabLst>
+                <a:tab algn="l" pos="0"/>
+              </a:tabLst>
+            </a:pPr>
+            <a:r>
+              <a:rPr lang="pt-PT" sz="900" b="0" u="none" strike="noStrike">
+                <a:solidFill>
+                  <a:srgbClr val="5f6b6a"/>
+                </a:solidFill>
+                <a:effectLst/>
+                <a:uFillTx/>
+                <a:latin typeface="Inter"/>
+                <a:ea typeface="Inter"/>
+              </a:rPr>
+              <a:t>Personal Finance Manager</a:t>
+            </a:r>
+            <a:endParaRPr lang="pt-PT" sz="900" b="0" u="none" strike="noStrike">
+              <a:solidFill>
+                <a:srgbClr val="000000"/>
+              </a:solidFill>
+              <a:effectLst/>
+              <a:uFillTx/>
+              <a:latin typeface="Arial"/>
+            </a:endParaRPr>
+          </a:p>
+        </p:txBody>
+      </p:sp>
+      <p:sp>
+        <p:nvSpPr>
+          <p:cNvPr id="214" name="Text 73"/>
+          <p:cNvSpPr/>
+          <p:nvPr/>
+        </p:nvSpPr>
+        <p:spPr>
+          <a:xfrm>
+            <a:off x="11521440" y="6537960"/>
+            <a:ext cx="455400" cy="272520"/>
+          </a:xfrm>
+          <a:prstGeom prst="rect">
+            <a:avLst/>
+          </a:prstGeom>
+          <a:noFill/>
+          <a:ln w="0">
+            <a:noFill/>
+          </a:ln>
+        </p:spPr>
+        <p:style>
+          <a:lnRef idx="0"/>
+          <a:fillRef idx="0"/>
+          <a:effectRef idx="0"/>
+          <a:fontRef idx="minor"/>
+        </p:style>
+        <p:txBody>
+          <a:bodyPr lIns="90000" rIns="90000" tIns="45000" bIns="45000" anchor="ctr">
+            <a:noAutofit/>
+          </a:bodyPr>
+          <a:p>
+            <a:pPr algn="r" defTabSz="914400">
+              <a:lnSpc>
+                <a:spcPct val="100000"/>
+              </a:lnSpc>
+              <a:tabLst>
+                <a:tab algn="l" pos="0"/>
+              </a:tabLst>
+            </a:pPr>
+            <a:r>
+              <a:rPr lang="pt-PT" sz="900" b="0" u="none" strike="noStrike">
+                <a:solidFill>
+                  <a:srgbClr val="5f6b6a"/>
+                </a:solidFill>
+                <a:effectLst/>
+                <a:uFillTx/>
+                <a:latin typeface="Inter"/>
+                <a:ea typeface="Inter"/>
+              </a:rPr>
+              <a:t>8</a:t>
+            </a:r>
+            <a:endParaRPr lang="pt-PT" sz="900" b="0" u="none" strike="noStrike">
+              <a:solidFill>
+                <a:srgbClr val="000000"/>
+              </a:solidFill>
+              <a:effectLst/>
+              <a:uFillTx/>
+              <a:latin typeface="Arial"/>
+            </a:endParaRPr>
+          </a:p>
+        </p:txBody>
+      </p:sp>
+      <p:sp>
+        <p:nvSpPr>
+          <p:cNvPr id="215" name="Shape 37"/>
+          <p:cNvSpPr/>
+          <p:nvPr/>
+        </p:nvSpPr>
+        <p:spPr>
+          <a:xfrm rot="5427600">
+            <a:off x="4651560" y="1987920"/>
+            <a:ext cx="2674080" cy="3503520"/>
+          </a:xfrm>
+          <a:prstGeom prst="roundRect">
+            <a:avLst>
+              <a:gd name="adj" fmla="val 3509"/>
+            </a:avLst>
+          </a:prstGeom>
+          <a:solidFill>
+            <a:srgbClr val="ffffff"/>
+          </a:solidFill>
+          <a:ln w="0">
+            <a:noFill/>
+          </a:ln>
+          <a:effectLst>
+            <a:outerShdw algn="bl" blurRad="76320" dir="5400000" dist="25560" kx="0" ky="0" rotWithShape="0" sx="100000" sy="100000">
+              <a:srgbClr val="000000">
+                <a:alpha val="10000"/>
+              </a:srgbClr>
+            </a:outerShdw>
+          </a:effectLst>
+        </p:spPr>
+        <p:style>
+          <a:lnRef idx="0"/>
+          <a:fillRef idx="0"/>
+          <a:effectRef idx="0"/>
+          <a:fontRef idx="minor"/>
+        </p:style>
+        <p:txBody>
+          <a:bodyPr lIns="90000" rIns="90000" tIns="45000" bIns="45000" anchor="t">
+            <a:noAutofit/>
+          </a:bodyPr>
+          <a:p>
+            <a:endParaRPr lang="pt-PT" sz="1800" b="0" u="none" strike="noStrike">
+              <a:solidFill>
+                <a:srgbClr val="000000"/>
+              </a:solidFill>
+              <a:effectLst/>
+              <a:uFillTx/>
+              <a:latin typeface="Arial"/>
+            </a:endParaRPr>
+          </a:p>
+        </p:txBody>
+      </p:sp>
+      <p:sp>
+        <p:nvSpPr>
+          <p:cNvPr id="216" name="Shape 38"/>
+          <p:cNvSpPr/>
+          <p:nvPr/>
+        </p:nvSpPr>
+        <p:spPr>
+          <a:xfrm rot="5428800">
+            <a:off x="8394120" y="2021400"/>
+            <a:ext cx="2674440" cy="3534840"/>
+          </a:xfrm>
+          <a:prstGeom prst="roundRect">
+            <a:avLst>
+              <a:gd name="adj" fmla="val 3509"/>
+            </a:avLst>
+          </a:prstGeom>
+          <a:solidFill>
+            <a:srgbClr val="ffffff"/>
+          </a:solidFill>
+          <a:ln w="0">
+            <a:noFill/>
+          </a:ln>
+          <a:effectLst>
+            <a:outerShdw algn="bl" blurRad="76320" dir="5400000" dist="25560" kx="0" ky="0" rotWithShape="0" sx="100000" sy="100000">
+              <a:srgbClr val="000000">
+                <a:alpha val="10000"/>
+              </a:srgbClr>
+            </a:outerShdw>
+          </a:effectLst>
+        </p:spPr>
+        <p:style>
+          <a:lnRef idx="0"/>
+          <a:fillRef idx="0"/>
+          <a:effectRef idx="0"/>
+          <a:fontRef idx="minor"/>
+        </p:style>
+        <p:txBody>
+          <a:bodyPr lIns="90000" rIns="90000" tIns="45000" bIns="45000" anchor="t">
+            <a:noAutofit/>
+          </a:bodyPr>
+          <a:p>
+            <a:endParaRPr lang="pt-PT" sz="1800" b="0" u="none" strike="noStrike">
+              <a:solidFill>
+                <a:srgbClr val="000000"/>
+              </a:solidFill>
+              <a:effectLst/>
+              <a:uFillTx/>
+              <a:latin typeface="Arial"/>
+            </a:endParaRPr>
+          </a:p>
+        </p:txBody>
+      </p:sp>
+      <p:sp>
+        <p:nvSpPr>
+          <p:cNvPr id="217" name="Text 74"/>
+          <p:cNvSpPr/>
+          <p:nvPr/>
+        </p:nvSpPr>
+        <p:spPr>
+          <a:xfrm>
+            <a:off x="4406040" y="2608920"/>
+            <a:ext cx="3190320" cy="467640"/>
+          </a:xfrm>
+          <a:prstGeom prst="rect">
+            <a:avLst/>
+          </a:prstGeom>
+          <a:noFill/>
+          <a:ln w="0">
+            <a:noFill/>
+          </a:ln>
+        </p:spPr>
+        <p:style>
+          <a:lnRef idx="0"/>
+          <a:fillRef idx="0"/>
+          <a:effectRef idx="0"/>
+          <a:fontRef idx="minor"/>
+        </p:style>
+        <p:txBody>
+          <a:bodyPr lIns="90000" rIns="90000" tIns="45000" bIns="45000" anchor="ctr">
+            <a:noAutofit/>
+          </a:bodyPr>
+          <a:p>
+            <a:pPr defTabSz="914400">
+              <a:lnSpc>
+                <a:spcPct val="100000"/>
+              </a:lnSpc>
+              <a:tabLst>
+                <a:tab algn="l" pos="0"/>
+              </a:tabLst>
+            </a:pPr>
+            <a:r>
+              <a:rPr lang="pt-PT" sz="1300" b="1" u="none" strike="noStrike">
+                <a:solidFill>
+                  <a:srgbClr val="0d2b2e"/>
+                </a:solidFill>
+                <a:effectLst/>
+                <a:uFillTx/>
+                <a:latin typeface="Poppins"/>
+                <a:ea typeface="Poppins"/>
+              </a:rPr>
+              <a:t>Movimento do utilizadores</a:t>
+            </a:r>
+            <a:endParaRPr lang="pt-PT" sz="1300" b="0" u="none" strike="noStrike">
+              <a:solidFill>
+                <a:srgbClr val="000000"/>
+              </a:solidFill>
+              <a:effectLst/>
+              <a:uFillTx/>
+              <a:latin typeface="Arial"/>
+            </a:endParaRPr>
+          </a:p>
+        </p:txBody>
+      </p:sp>
+      <p:sp>
+        <p:nvSpPr>
+          <p:cNvPr id="218" name="Text 75"/>
+          <p:cNvSpPr/>
+          <p:nvPr/>
+        </p:nvSpPr>
+        <p:spPr>
+          <a:xfrm>
+            <a:off x="8132040" y="2608560"/>
+            <a:ext cx="2204640" cy="467640"/>
+          </a:xfrm>
+          <a:prstGeom prst="rect">
+            <a:avLst/>
+          </a:prstGeom>
+          <a:noFill/>
+          <a:ln w="0">
+            <a:noFill/>
+          </a:ln>
+        </p:spPr>
+        <p:style>
+          <a:lnRef idx="0"/>
+          <a:fillRef idx="0"/>
+          <a:effectRef idx="0"/>
+          <a:fontRef idx="minor"/>
+        </p:style>
+        <p:txBody>
+          <a:bodyPr lIns="90000" rIns="90000" tIns="45000" bIns="45000" anchor="ctr">
+            <a:noAutofit/>
+          </a:bodyPr>
+          <a:p>
+            <a:pPr defTabSz="914400">
+              <a:lnSpc>
+                <a:spcPct val="100000"/>
+              </a:lnSpc>
+              <a:tabLst>
+                <a:tab algn="l" pos="0"/>
+              </a:tabLst>
+            </a:pPr>
+            <a:r>
+              <a:rPr lang="pt-PT" sz="1300" b="1" u="none" strike="noStrike">
+                <a:solidFill>
+                  <a:srgbClr val="0d2b2e"/>
+                </a:solidFill>
+                <a:effectLst/>
+                <a:uFillTx/>
+                <a:latin typeface="Poppins"/>
+                <a:ea typeface="Poppins"/>
+              </a:rPr>
+              <a:t>Graficos</a:t>
+            </a:r>
+            <a:endParaRPr lang="pt-PT" sz="1300" b="0" u="none" strike="noStrike">
+              <a:solidFill>
+                <a:srgbClr val="000000"/>
+              </a:solidFill>
+              <a:effectLst/>
+              <a:uFillTx/>
+              <a:latin typeface="Arial"/>
+            </a:endParaRPr>
+          </a:p>
+        </p:txBody>
+      </p:sp>
+      <p:pic>
+        <p:nvPicPr>
+          <p:cNvPr id="219" name=""/>
+          <p:cNvPicPr/>
+          <p:nvPr/>
+        </p:nvPicPr>
+        <p:blipFill>
+          <a:blip r:embed="rId1"/>
+          <a:stretch/>
+        </p:blipFill>
+        <p:spPr>
+          <a:xfrm>
+            <a:off x="646560" y="3082680"/>
+            <a:ext cx="3136320" cy="1793520"/>
+          </a:xfrm>
+          <a:prstGeom prst="rect">
+            <a:avLst/>
+          </a:prstGeom>
+          <a:noFill/>
+          <a:ln w="0">
+            <a:noFill/>
+          </a:ln>
+        </p:spPr>
+      </p:pic>
+      <p:pic>
+        <p:nvPicPr>
+          <p:cNvPr id="220" name=""/>
+          <p:cNvPicPr/>
+          <p:nvPr/>
+        </p:nvPicPr>
+        <p:blipFill>
           <a:blip r:embed="rId2"/>
           <a:stretch/>
         </p:blipFill>
         <p:spPr>
           <a:xfrm>
-            <a:off x="4337640" y="3118320"/>
-            <a:ext cx="3256560" cy="1806120"/>
+            <a:off x="4406040" y="3076560"/>
+            <a:ext cx="3136320" cy="1793520"/>
           </a:xfrm>
           <a:prstGeom prst="rect">
             <a:avLst/>
@@ -3825,7 +4904,7 @@
       </p:pic>
       <p:pic>
         <p:nvPicPr>
-          <p:cNvPr id="208" name=""/>
+          <p:cNvPr id="221" name=""/>
           <p:cNvPicPr/>
           <p:nvPr/>
         </p:nvPicPr>
@@ -3835,8 +4914,8 @@
         </p:blipFill>
         <p:spPr>
           <a:xfrm>
-            <a:off x="8083440" y="3210840"/>
-            <a:ext cx="3249720" cy="1746720"/>
+            <a:off x="8187840" y="3076200"/>
+            <a:ext cx="3136320" cy="1782720"/>
           </a:xfrm>
           <a:prstGeom prst="rect">
             <a:avLst/>
@@ -3860,7 +4939,562 @@
 </p:sld>
 </file>
 
-<file path=ppt/slides/slide11.xml><?xml version="1.0" encoding="utf-8"?>
+<file path=ppt/slides/slide12.xml><?xml version="1.0" encoding="utf-8"?>
+<p:sld xmlns:a="http://schemas.openxmlformats.org/drawingml/2006/main" xmlns:p="http://schemas.openxmlformats.org/presentationml/2006/main" xmlns:r="http://schemas.openxmlformats.org/officeDocument/2006/relationships" xmlns:p14="http://schemas.microsoft.com/office/powerpoint/2010/main" xmlns:p15="http://schemas.microsoft.com/office/powerpoint/2012/main" xmlns:mc="http://schemas.openxmlformats.org/markup-compatibility/2006">
+  <p:cSld>
+    <p:bg>
+      <p:bgPr>
+        <a:solidFill>
+          <a:srgbClr val="f2f4f7"/>
+        </a:solidFill>
+      </p:bgPr>
+    </p:bg>
+    <p:spTree>
+      <p:nvGrpSpPr>
+        <p:cNvPr id="1" name=""/>
+        <p:cNvGrpSpPr/>
+        <p:nvPr/>
+      </p:nvGrpSpPr>
+      <p:grpSpPr>
+        <a:xfrm>
+          <a:off x="0" y="0"/>
+          <a:ext cx="0" cy="0"/>
+          <a:chOff x="0" y="0"/>
+          <a:chExt cx="0" cy="0"/>
+        </a:xfrm>
+      </p:grpSpPr>
+      <p:sp>
+        <p:nvSpPr>
+          <p:cNvPr id="222" name="Text 76"/>
+          <p:cNvSpPr/>
+          <p:nvPr/>
+        </p:nvSpPr>
+        <p:spPr>
+          <a:xfrm>
+            <a:off x="640080" y="457200"/>
+            <a:ext cx="7313400" cy="318240"/>
+          </a:xfrm>
+          <a:prstGeom prst="rect">
+            <a:avLst/>
+          </a:prstGeom>
+          <a:noFill/>
+          <a:ln w="0">
+            <a:noFill/>
+          </a:ln>
+        </p:spPr>
+        <p:style>
+          <a:lnRef idx="0"/>
+          <a:fillRef idx="0"/>
+          <a:effectRef idx="0"/>
+          <a:fontRef idx="minor"/>
+        </p:style>
+        <p:txBody>
+          <a:bodyPr lIns="90000" rIns="90000" tIns="45000" bIns="45000" anchor="ctr">
+            <a:noAutofit/>
+          </a:bodyPr>
+          <a:p>
+            <a:pPr defTabSz="914400">
+              <a:lnSpc>
+                <a:spcPct val="100000"/>
+              </a:lnSpc>
+              <a:tabLst>
+                <a:tab algn="l" pos="0"/>
+              </a:tabLst>
+            </a:pPr>
+            <a:r>
+              <a:rPr lang="pt-PT" sz="1200" b="1" u="none" spc="99" strike="noStrike">
+                <a:solidFill>
+                  <a:srgbClr val="1f6f63"/>
+                </a:solidFill>
+                <a:effectLst/>
+                <a:uFillTx/>
+                <a:latin typeface="Inter"/>
+                <a:ea typeface="Inter"/>
+              </a:rPr>
+              <a:t>07</a:t>
+            </a:r>
+            <a:endParaRPr lang="pt-PT" sz="1200" b="0" u="none" strike="noStrike">
+              <a:solidFill>
+                <a:srgbClr val="000000"/>
+              </a:solidFill>
+              <a:effectLst/>
+              <a:uFillTx/>
+              <a:latin typeface="Arial"/>
+            </a:endParaRPr>
+          </a:p>
+        </p:txBody>
+      </p:sp>
+      <p:sp>
+        <p:nvSpPr>
+          <p:cNvPr id="223" name="Text 77"/>
+          <p:cNvSpPr/>
+          <p:nvPr/>
+        </p:nvSpPr>
+        <p:spPr>
+          <a:xfrm>
+            <a:off x="640080" y="749880"/>
+            <a:ext cx="10056600" cy="684000"/>
+          </a:xfrm>
+          <a:prstGeom prst="rect">
+            <a:avLst/>
+          </a:prstGeom>
+          <a:noFill/>
+          <a:ln w="0">
+            <a:noFill/>
+          </a:ln>
+        </p:spPr>
+        <p:style>
+          <a:lnRef idx="0"/>
+          <a:fillRef idx="0"/>
+          <a:effectRef idx="0"/>
+          <a:fontRef idx="minor"/>
+        </p:style>
+        <p:txBody>
+          <a:bodyPr lIns="90000" rIns="90000" tIns="45000" bIns="45000" anchor="ctr">
+            <a:noAutofit/>
+          </a:bodyPr>
+          <a:p>
+            <a:pPr defTabSz="914400">
+              <a:lnSpc>
+                <a:spcPct val="100000"/>
+              </a:lnSpc>
+              <a:tabLst>
+                <a:tab algn="l" pos="0"/>
+              </a:tabLst>
+            </a:pPr>
+            <a:r>
+              <a:rPr lang="pt-PT" sz="2800" b="1" u="none" strike="noStrike">
+                <a:solidFill>
+                  <a:srgbClr val="0d2b2e"/>
+                </a:solidFill>
+                <a:effectLst/>
+                <a:uFillTx/>
+                <a:latin typeface="Poppins"/>
+                <a:ea typeface="Poppins"/>
+              </a:rPr>
+              <a:t>Demonstração da admin view</a:t>
+            </a:r>
+            <a:endParaRPr lang="pt-PT" sz="2800" b="0" u="none" strike="noStrike">
+              <a:solidFill>
+                <a:srgbClr val="000000"/>
+              </a:solidFill>
+              <a:effectLst/>
+              <a:uFillTx/>
+              <a:latin typeface="Arial"/>
+            </a:endParaRPr>
+          </a:p>
+        </p:txBody>
+      </p:sp>
+      <p:sp>
+        <p:nvSpPr>
+          <p:cNvPr id="224" name="Shape 39"/>
+          <p:cNvSpPr/>
+          <p:nvPr/>
+        </p:nvSpPr>
+        <p:spPr>
+          <a:xfrm rot="5429400">
+            <a:off x="1450080" y="1588680"/>
+            <a:ext cx="3177360" cy="4353840"/>
+          </a:xfrm>
+          <a:prstGeom prst="roundRect">
+            <a:avLst>
+              <a:gd name="adj" fmla="val 3509"/>
+            </a:avLst>
+          </a:prstGeom>
+          <a:solidFill>
+            <a:srgbClr val="ffffff"/>
+          </a:solidFill>
+          <a:ln w="0">
+            <a:noFill/>
+          </a:ln>
+          <a:effectLst>
+            <a:outerShdw algn="bl" blurRad="76320" dir="5400000" dist="25560" kx="0" ky="0" rotWithShape="0" sx="100000" sy="100000">
+              <a:srgbClr val="000000">
+                <a:alpha val="10000"/>
+              </a:srgbClr>
+            </a:outerShdw>
+          </a:effectLst>
+        </p:spPr>
+        <p:style>
+          <a:lnRef idx="0"/>
+          <a:fillRef idx="0"/>
+          <a:effectRef idx="0"/>
+          <a:fontRef idx="minor"/>
+        </p:style>
+        <p:txBody>
+          <a:bodyPr lIns="90000" rIns="90000" tIns="45000" bIns="45000" anchor="t">
+            <a:noAutofit/>
+          </a:bodyPr>
+          <a:p>
+            <a:endParaRPr lang="pt-PT" sz="1800" b="0" u="none" strike="noStrike">
+              <a:solidFill>
+                <a:srgbClr val="000000"/>
+              </a:solidFill>
+              <a:effectLst/>
+              <a:uFillTx/>
+              <a:latin typeface="Arial"/>
+            </a:endParaRPr>
+          </a:p>
+        </p:txBody>
+      </p:sp>
+      <p:sp>
+        <p:nvSpPr>
+          <p:cNvPr id="225" name="Text 78"/>
+          <p:cNvSpPr/>
+          <p:nvPr/>
+        </p:nvSpPr>
+        <p:spPr>
+          <a:xfrm>
+            <a:off x="1054800" y="2322000"/>
+            <a:ext cx="2619720" cy="555480"/>
+          </a:xfrm>
+          <a:prstGeom prst="rect">
+            <a:avLst/>
+          </a:prstGeom>
+          <a:noFill/>
+          <a:ln w="0">
+            <a:noFill/>
+          </a:ln>
+        </p:spPr>
+        <p:style>
+          <a:lnRef idx="0"/>
+          <a:fillRef idx="0"/>
+          <a:effectRef idx="0"/>
+          <a:fontRef idx="minor"/>
+        </p:style>
+        <p:txBody>
+          <a:bodyPr lIns="90000" rIns="90000" tIns="45000" bIns="45000" anchor="ctr">
+            <a:noAutofit/>
+          </a:bodyPr>
+          <a:p>
+            <a:pPr defTabSz="914400">
+              <a:lnSpc>
+                <a:spcPct val="100000"/>
+              </a:lnSpc>
+              <a:tabLst>
+                <a:tab algn="l" pos="0"/>
+              </a:tabLst>
+            </a:pPr>
+            <a:r>
+              <a:rPr lang="pt-PT" sz="1300" b="1" u="none" strike="noStrike">
+                <a:solidFill>
+                  <a:srgbClr val="0d2b2e"/>
+                </a:solidFill>
+                <a:effectLst/>
+                <a:uFillTx/>
+                <a:latin typeface="Poppins"/>
+                <a:ea typeface="Poppins"/>
+              </a:rPr>
+              <a:t>Gerir utilizadores</a:t>
+            </a:r>
+            <a:endParaRPr lang="pt-PT" sz="1300" b="0" u="none" strike="noStrike">
+              <a:solidFill>
+                <a:srgbClr val="000000"/>
+              </a:solidFill>
+              <a:effectLst/>
+              <a:uFillTx/>
+              <a:latin typeface="Arial"/>
+            </a:endParaRPr>
+          </a:p>
+        </p:txBody>
+      </p:sp>
+      <p:sp>
+        <p:nvSpPr>
+          <p:cNvPr id="226" name="Text 79"/>
+          <p:cNvSpPr/>
+          <p:nvPr/>
+        </p:nvSpPr>
+        <p:spPr>
+          <a:xfrm>
+            <a:off x="457200" y="6537960"/>
+            <a:ext cx="5484600" cy="272520"/>
+          </a:xfrm>
+          <a:prstGeom prst="rect">
+            <a:avLst/>
+          </a:prstGeom>
+          <a:noFill/>
+          <a:ln w="0">
+            <a:noFill/>
+          </a:ln>
+        </p:spPr>
+        <p:style>
+          <a:lnRef idx="0"/>
+          <a:fillRef idx="0"/>
+          <a:effectRef idx="0"/>
+          <a:fontRef idx="minor"/>
+        </p:style>
+        <p:txBody>
+          <a:bodyPr lIns="90000" rIns="90000" tIns="45000" bIns="45000" anchor="ctr">
+            <a:noAutofit/>
+          </a:bodyPr>
+          <a:p>
+            <a:pPr defTabSz="914400">
+              <a:lnSpc>
+                <a:spcPct val="100000"/>
+              </a:lnSpc>
+              <a:tabLst>
+                <a:tab algn="l" pos="0"/>
+              </a:tabLst>
+            </a:pPr>
+            <a:r>
+              <a:rPr lang="pt-PT" sz="900" b="0" u="none" strike="noStrike">
+                <a:solidFill>
+                  <a:srgbClr val="5f6b6a"/>
+                </a:solidFill>
+                <a:effectLst/>
+                <a:uFillTx/>
+                <a:latin typeface="Inter"/>
+                <a:ea typeface="Inter"/>
+              </a:rPr>
+              <a:t>Personal Finance Manager</a:t>
+            </a:r>
+            <a:endParaRPr lang="pt-PT" sz="900" b="0" u="none" strike="noStrike">
+              <a:solidFill>
+                <a:srgbClr val="000000"/>
+              </a:solidFill>
+              <a:effectLst/>
+              <a:uFillTx/>
+              <a:latin typeface="Arial"/>
+            </a:endParaRPr>
+          </a:p>
+        </p:txBody>
+      </p:sp>
+      <p:sp>
+        <p:nvSpPr>
+          <p:cNvPr id="227" name="Text 80"/>
+          <p:cNvSpPr/>
+          <p:nvPr/>
+        </p:nvSpPr>
+        <p:spPr>
+          <a:xfrm>
+            <a:off x="11521440" y="6537960"/>
+            <a:ext cx="455400" cy="272520"/>
+          </a:xfrm>
+          <a:prstGeom prst="rect">
+            <a:avLst/>
+          </a:prstGeom>
+          <a:noFill/>
+          <a:ln w="0">
+            <a:noFill/>
+          </a:ln>
+        </p:spPr>
+        <p:style>
+          <a:lnRef idx="0"/>
+          <a:fillRef idx="0"/>
+          <a:effectRef idx="0"/>
+          <a:fontRef idx="minor"/>
+        </p:style>
+        <p:txBody>
+          <a:bodyPr lIns="90000" rIns="90000" tIns="45000" bIns="45000" anchor="ctr">
+            <a:noAutofit/>
+          </a:bodyPr>
+          <a:p>
+            <a:pPr algn="r" defTabSz="914400">
+              <a:lnSpc>
+                <a:spcPct val="100000"/>
+              </a:lnSpc>
+              <a:tabLst>
+                <a:tab algn="l" pos="0"/>
+              </a:tabLst>
+            </a:pPr>
+            <a:r>
+              <a:rPr lang="pt-PT" sz="900" b="0" u="none" strike="noStrike">
+                <a:solidFill>
+                  <a:srgbClr val="5f6b6a"/>
+                </a:solidFill>
+                <a:effectLst/>
+                <a:uFillTx/>
+                <a:latin typeface="Inter"/>
+                <a:ea typeface="Inter"/>
+              </a:rPr>
+              <a:t>8</a:t>
+            </a:r>
+            <a:endParaRPr lang="pt-PT" sz="900" b="0" u="none" strike="noStrike">
+              <a:solidFill>
+                <a:srgbClr val="000000"/>
+              </a:solidFill>
+              <a:effectLst/>
+              <a:uFillTx/>
+              <a:latin typeface="Arial"/>
+            </a:endParaRPr>
+          </a:p>
+        </p:txBody>
+      </p:sp>
+      <p:sp>
+        <p:nvSpPr>
+          <p:cNvPr id="228" name="Shape 40"/>
+          <p:cNvSpPr/>
+          <p:nvPr/>
+        </p:nvSpPr>
+        <p:spPr>
+          <a:xfrm rot="5428800">
+            <a:off x="6988680" y="1671480"/>
+            <a:ext cx="3177000" cy="4162680"/>
+          </a:xfrm>
+          <a:prstGeom prst="roundRect">
+            <a:avLst>
+              <a:gd name="adj" fmla="val 3509"/>
+            </a:avLst>
+          </a:prstGeom>
+          <a:solidFill>
+            <a:srgbClr val="ffffff"/>
+          </a:solidFill>
+          <a:ln w="0">
+            <a:noFill/>
+          </a:ln>
+          <a:effectLst>
+            <a:outerShdw algn="bl" blurRad="76320" dir="5400000" dist="25560" kx="0" ky="0" rotWithShape="0" sx="100000" sy="100000">
+              <a:srgbClr val="000000">
+                <a:alpha val="10000"/>
+              </a:srgbClr>
+            </a:outerShdw>
+          </a:effectLst>
+        </p:spPr>
+        <p:style>
+          <a:lnRef idx="0"/>
+          <a:fillRef idx="0"/>
+          <a:effectRef idx="0"/>
+          <a:fontRef idx="minor"/>
+        </p:style>
+        <p:txBody>
+          <a:bodyPr lIns="90000" rIns="90000" tIns="45000" bIns="45000" anchor="t">
+            <a:noAutofit/>
+          </a:bodyPr>
+          <a:p>
+            <a:endParaRPr lang="pt-PT" sz="1800" b="0" u="none" strike="noStrike">
+              <a:solidFill>
+                <a:srgbClr val="000000"/>
+              </a:solidFill>
+              <a:effectLst/>
+              <a:uFillTx/>
+              <a:latin typeface="Arial"/>
+            </a:endParaRPr>
+          </a:p>
+        </p:txBody>
+      </p:sp>
+      <p:sp>
+        <p:nvSpPr>
+          <p:cNvPr id="229" name="Text 81"/>
+          <p:cNvSpPr/>
+          <p:nvPr/>
+        </p:nvSpPr>
+        <p:spPr>
+          <a:xfrm>
+            <a:off x="6695280" y="2328480"/>
+            <a:ext cx="2619360" cy="555840"/>
+          </a:xfrm>
+          <a:prstGeom prst="rect">
+            <a:avLst/>
+          </a:prstGeom>
+          <a:noFill/>
+          <a:ln w="0">
+            <a:noFill/>
+          </a:ln>
+        </p:spPr>
+        <p:style>
+          <a:lnRef idx="0"/>
+          <a:fillRef idx="0"/>
+          <a:effectRef idx="0"/>
+          <a:fontRef idx="minor"/>
+        </p:style>
+        <p:txBody>
+          <a:bodyPr lIns="90000" rIns="90000" tIns="45000" bIns="45000" anchor="ctr">
+            <a:noAutofit/>
+          </a:bodyPr>
+          <a:p>
+            <a:pPr defTabSz="914400">
+              <a:lnSpc>
+                <a:spcPct val="100000"/>
+              </a:lnSpc>
+              <a:tabLst>
+                <a:tab algn="l" pos="0"/>
+              </a:tabLst>
+            </a:pPr>
+            <a:r>
+              <a:rPr lang="pt-PT" sz="1300" b="1" u="none" strike="noStrike">
+                <a:solidFill>
+                  <a:srgbClr val="0d2b2e"/>
+                </a:solidFill>
+                <a:effectLst/>
+                <a:uFillTx/>
+                <a:latin typeface="Poppins"/>
+                <a:ea typeface="Poppins"/>
+              </a:rPr>
+              <a:t> Adicionar movimentos</a:t>
+            </a:r>
+            <a:endParaRPr lang="pt-PT" sz="1300" b="0" u="none" strike="noStrike">
+              <a:solidFill>
+                <a:srgbClr val="000000"/>
+              </a:solidFill>
+              <a:effectLst/>
+              <a:uFillTx/>
+              <a:latin typeface="Arial"/>
+            </a:endParaRPr>
+          </a:p>
+        </p:txBody>
+      </p:sp>
+      <p:pic>
+        <p:nvPicPr>
+          <p:cNvPr id="230" name=""/>
+          <p:cNvPicPr/>
+          <p:nvPr/>
+        </p:nvPicPr>
+        <p:blipFill>
+          <a:blip r:embed="rId1"/>
+          <a:stretch/>
+        </p:blipFill>
+        <p:spPr>
+          <a:xfrm>
+            <a:off x="1072440" y="3067560"/>
+            <a:ext cx="3869640" cy="2092680"/>
+          </a:xfrm>
+          <a:prstGeom prst="rect">
+            <a:avLst/>
+          </a:prstGeom>
+          <a:noFill/>
+          <a:ln w="0">
+            <a:noFill/>
+          </a:ln>
+        </p:spPr>
+      </p:pic>
+      <p:pic>
+        <p:nvPicPr>
+          <p:cNvPr id="231" name=""/>
+          <p:cNvPicPr/>
+          <p:nvPr/>
+        </p:nvPicPr>
+        <p:blipFill>
+          <a:blip r:embed="rId2"/>
+          <a:stretch/>
+        </p:blipFill>
+        <p:spPr>
+          <a:xfrm>
+            <a:off x="6702120" y="3033360"/>
+            <a:ext cx="3726360" cy="2120400"/>
+          </a:xfrm>
+          <a:prstGeom prst="rect">
+            <a:avLst/>
+          </a:prstGeom>
+          <a:noFill/>
+          <a:ln w="0">
+            <a:noFill/>
+          </a:ln>
+        </p:spPr>
+      </p:pic>
+    </p:spTree>
+  </p:cSld>
+  <mc:AlternateContent>
+    <mc:Choice Requires="p14">
+      <p:transition spd="slow" p14:dur="2000"/>
+    </mc:Choice>
+    <mc:Fallback>
+      <p:transition spd="slow"/>
+    </mc:Fallback>
+  </mc:AlternateContent>
+</p:sld>
+</file>
+
+<file path=ppt/slides/slide13.xml><?xml version="1.0" encoding="utf-8"?>
 <p:sld xmlns:a="http://schemas.openxmlformats.org/drawingml/2006/main" xmlns:p="http://schemas.openxmlformats.org/presentationml/2006/main" xmlns:r="http://schemas.openxmlformats.org/officeDocument/2006/relationships" xmlns:p14="http://schemas.microsoft.com/office/powerpoint/2010/main" xmlns:p15="http://schemas.microsoft.com/office/powerpoint/2012/main" xmlns:mc="http://schemas.openxmlformats.org/markup-compatibility/2006">
   <p:cSld>
     <p:bg>
@@ -3886,14 +5520,14 @@
       </p:grpSpPr>
       <p:sp>
         <p:nvSpPr>
-          <p:cNvPr id="209" name="Text 0"/>
+          <p:cNvPr id="232" name="Text 0"/>
           <p:cNvSpPr/>
           <p:nvPr/>
         </p:nvSpPr>
         <p:spPr>
           <a:xfrm>
             <a:off x="640080" y="457200"/>
-            <a:ext cx="7313760" cy="318600"/>
+            <a:ext cx="7313400" cy="318240"/>
           </a:xfrm>
           <a:prstGeom prst="rect">
             <a:avLst/>
@@ -3932,7 +5566,7 @@
                 <a:latin typeface="Inter"/>
                 <a:ea typeface="Inter"/>
               </a:rPr>
-              <a:t>08</a:t>
+              <a:t>10</a:t>
             </a:r>
             <a:endParaRPr lang="pt-PT" sz="1200" b="0" u="none" strike="noStrike">
               <a:solidFill>
@@ -3947,14 +5581,14 @@
       </p:sp>
       <p:sp>
         <p:nvSpPr>
-          <p:cNvPr id="210" name="Text 1"/>
+          <p:cNvPr id="233" name="Text 1"/>
           <p:cNvSpPr/>
           <p:nvPr/>
         </p:nvSpPr>
         <p:spPr>
           <a:xfrm>
             <a:off x="640080" y="749880"/>
-            <a:ext cx="10056960" cy="684360"/>
+            <a:ext cx="10056600" cy="684000"/>
           </a:xfrm>
           <a:prstGeom prst="rect">
             <a:avLst/>
@@ -4008,14 +5642,14 @@
       </p:sp>
       <p:sp>
         <p:nvSpPr>
-          <p:cNvPr id="211" name="Text 2"/>
+          <p:cNvPr id="234" name="Text 2"/>
           <p:cNvSpPr/>
           <p:nvPr/>
         </p:nvSpPr>
         <p:spPr>
           <a:xfrm>
             <a:off x="640080" y="1737360"/>
-            <a:ext cx="10239840" cy="912960"/>
+            <a:ext cx="10239480" cy="912600"/>
           </a:xfrm>
           <a:prstGeom prst="rect">
             <a:avLst/>
@@ -4069,14 +5703,14 @@
       </p:sp>
       <p:sp>
         <p:nvSpPr>
-          <p:cNvPr id="212" name="Text 3"/>
+          <p:cNvPr id="235" name="Text 3"/>
           <p:cNvSpPr/>
           <p:nvPr/>
         </p:nvSpPr>
         <p:spPr>
           <a:xfrm>
             <a:off x="640080" y="2606040"/>
-            <a:ext cx="10239840" cy="1004400"/>
+            <a:ext cx="10239480" cy="1004040"/>
           </a:xfrm>
           <a:prstGeom prst="rect">
             <a:avLst/>
@@ -4130,14 +5764,14 @@
       </p:sp>
       <p:sp>
         <p:nvSpPr>
-          <p:cNvPr id="213" name="Shape 4"/>
+          <p:cNvPr id="236" name="Shape 4"/>
           <p:cNvSpPr/>
           <p:nvPr/>
         </p:nvSpPr>
         <p:spPr>
           <a:xfrm>
             <a:off x="640080" y="3977640"/>
-            <a:ext cx="10239840" cy="1415880"/>
+            <a:ext cx="10239480" cy="1415520"/>
           </a:xfrm>
           <a:prstGeom prst="roundRect">
             <a:avLst>
@@ -4180,14 +5814,14 @@
       </p:sp>
       <p:sp>
         <p:nvSpPr>
-          <p:cNvPr id="214" name="Text 5"/>
+          <p:cNvPr id="237" name="Text 5"/>
           <p:cNvSpPr/>
           <p:nvPr/>
         </p:nvSpPr>
         <p:spPr>
           <a:xfrm>
             <a:off x="960120" y="4160520"/>
-            <a:ext cx="9599760" cy="1095840"/>
+            <a:ext cx="9599400" cy="1095480"/>
           </a:xfrm>
           <a:prstGeom prst="rect">
             <a:avLst/>
@@ -4241,14 +5875,14 @@
       </p:sp>
       <p:sp>
         <p:nvSpPr>
-          <p:cNvPr id="215" name="Text 6"/>
+          <p:cNvPr id="238" name="Text 6"/>
           <p:cNvSpPr/>
           <p:nvPr/>
         </p:nvSpPr>
         <p:spPr>
           <a:xfrm>
             <a:off x="457200" y="6537960"/>
-            <a:ext cx="5484960" cy="272880"/>
+            <a:ext cx="5484600" cy="272520"/>
           </a:xfrm>
           <a:prstGeom prst="rect">
             <a:avLst/>
@@ -4302,14 +5936,14 @@
       </p:sp>
       <p:sp>
         <p:nvSpPr>
-          <p:cNvPr id="216" name="Text 7"/>
+          <p:cNvPr id="239" name="Text 7"/>
           <p:cNvSpPr/>
           <p:nvPr/>
         </p:nvSpPr>
         <p:spPr>
           <a:xfrm>
             <a:off x="11521440" y="6537960"/>
-            <a:ext cx="455760" cy="272880"/>
+            <a:ext cx="455400" cy="272520"/>
           </a:xfrm>
           <a:prstGeom prst="rect">
             <a:avLst/>
@@ -4349,6 +5983,433 @@
                 <a:ea typeface="Inter"/>
               </a:rPr>
               <a:t>9</a:t>
+            </a:r>
+            <a:endParaRPr lang="pt-PT" sz="900" b="0" u="none" strike="noStrike">
+              <a:solidFill>
+                <a:srgbClr val="ffffff"/>
+              </a:solidFill>
+              <a:effectLst/>
+              <a:uFillTx/>
+              <a:latin typeface="Arial"/>
+            </a:endParaRPr>
+          </a:p>
+        </p:txBody>
+      </p:sp>
+    </p:spTree>
+  </p:cSld>
+  <mc:AlternateContent>
+    <mc:Choice Requires="p14">
+      <p:transition spd="slow" p14:dur="2000"/>
+    </mc:Choice>
+    <mc:Fallback>
+      <p:transition spd="slow"/>
+    </mc:Fallback>
+  </mc:AlternateContent>
+</p:sld>
+</file>
+
+<file path=ppt/slides/slide14.xml><?xml version="1.0" encoding="utf-8"?>
+<p:sld xmlns:a="http://schemas.openxmlformats.org/drawingml/2006/main" xmlns:p="http://schemas.openxmlformats.org/presentationml/2006/main" xmlns:r="http://schemas.openxmlformats.org/officeDocument/2006/relationships" xmlns:p14="http://schemas.microsoft.com/office/powerpoint/2010/main" xmlns:p15="http://schemas.microsoft.com/office/powerpoint/2012/main" xmlns:mc="http://schemas.openxmlformats.org/markup-compatibility/2006">
+  <p:cSld>
+    <p:bg>
+      <p:bgPr>
+        <a:solidFill>
+          <a:srgbClr val="1f6f63"/>
+        </a:solidFill>
+      </p:bgPr>
+    </p:bg>
+    <p:spTree>
+      <p:nvGrpSpPr>
+        <p:cNvPr id="1" name=""/>
+        <p:cNvGrpSpPr/>
+        <p:nvPr/>
+      </p:nvGrpSpPr>
+      <p:grpSpPr>
+        <a:xfrm>
+          <a:off x="0" y="0"/>
+          <a:ext cx="0" cy="0"/>
+          <a:chOff x="0" y="0"/>
+          <a:chExt cx="0" cy="0"/>
+        </a:xfrm>
+      </p:grpSpPr>
+      <p:sp>
+        <p:nvSpPr>
+          <p:cNvPr id="240" name="Text 44"/>
+          <p:cNvSpPr/>
+          <p:nvPr/>
+        </p:nvSpPr>
+        <p:spPr>
+          <a:xfrm>
+            <a:off x="640080" y="457200"/>
+            <a:ext cx="7313400" cy="318240"/>
+          </a:xfrm>
+          <a:prstGeom prst="rect">
+            <a:avLst/>
+          </a:prstGeom>
+          <a:noFill/>
+          <a:ln w="0">
+            <a:noFill/>
+          </a:ln>
+        </p:spPr>
+        <p:style>
+          <a:lnRef idx="0"/>
+          <a:fillRef idx="0"/>
+          <a:effectRef idx="0"/>
+          <a:fontRef idx="minor"/>
+        </p:style>
+        <p:txBody>
+          <a:bodyPr lIns="90000" rIns="90000" tIns="45000" bIns="45000" anchor="ctr">
+            <a:noAutofit/>
+          </a:bodyPr>
+          <a:p>
+            <a:pPr defTabSz="914400">
+              <a:lnSpc>
+                <a:spcPct val="100000"/>
+              </a:lnSpc>
+              <a:tabLst>
+                <a:tab algn="l" pos="0"/>
+              </a:tabLst>
+            </a:pPr>
+            <a:r>
+              <a:rPr lang="en-US" sz="1200" b="1" u="none" spc="99" strike="noStrike">
+                <a:solidFill>
+                  <a:srgbClr val="bfe3d1"/>
+                </a:solidFill>
+                <a:effectLst/>
+                <a:uFillTx/>
+                <a:latin typeface="Inter"/>
+                <a:ea typeface="Inter"/>
+              </a:rPr>
+              <a:t>11</a:t>
+            </a:r>
+            <a:endParaRPr lang="pt-PT" sz="1200" b="0" u="none" strike="noStrike">
+              <a:solidFill>
+                <a:srgbClr val="ffffff"/>
+              </a:solidFill>
+              <a:effectLst/>
+              <a:uFillTx/>
+              <a:latin typeface="Arial"/>
+            </a:endParaRPr>
+          </a:p>
+        </p:txBody>
+      </p:sp>
+      <p:sp>
+        <p:nvSpPr>
+          <p:cNvPr id="241" name="Text 45"/>
+          <p:cNvSpPr/>
+          <p:nvPr/>
+        </p:nvSpPr>
+        <p:spPr>
+          <a:xfrm>
+            <a:off x="640080" y="749880"/>
+            <a:ext cx="10056600" cy="684000"/>
+          </a:xfrm>
+          <a:prstGeom prst="rect">
+            <a:avLst/>
+          </a:prstGeom>
+          <a:noFill/>
+          <a:ln w="0">
+            <a:noFill/>
+          </a:ln>
+        </p:spPr>
+        <p:style>
+          <a:lnRef idx="0"/>
+          <a:fillRef idx="0"/>
+          <a:effectRef idx="0"/>
+          <a:fontRef idx="minor"/>
+        </p:style>
+        <p:txBody>
+          <a:bodyPr lIns="90000" rIns="90000" tIns="45000" bIns="45000" anchor="ctr">
+            <a:noAutofit/>
+          </a:bodyPr>
+          <a:p>
+            <a:pPr defTabSz="914400">
+              <a:lnSpc>
+                <a:spcPct val="100000"/>
+              </a:lnSpc>
+              <a:tabLst>
+                <a:tab algn="l" pos="0"/>
+              </a:tabLst>
+            </a:pPr>
+            <a:r>
+              <a:rPr lang="en-US" sz="2800" b="1" u="none" strike="noStrike">
+                <a:solidFill>
+                  <a:srgbClr val="ffffff"/>
+                </a:solidFill>
+                <a:effectLst/>
+                <a:uFillTx/>
+                <a:latin typeface="Poppins"/>
+                <a:ea typeface="Poppins"/>
+              </a:rPr>
+              <a:t>Final</a:t>
+            </a:r>
+            <a:endParaRPr lang="pt-PT" sz="2800" b="0" u="none" strike="noStrike">
+              <a:solidFill>
+                <a:srgbClr val="ffffff"/>
+              </a:solidFill>
+              <a:effectLst/>
+              <a:uFillTx/>
+              <a:latin typeface="Arial"/>
+            </a:endParaRPr>
+          </a:p>
+        </p:txBody>
+      </p:sp>
+      <p:sp>
+        <p:nvSpPr>
+          <p:cNvPr id="242" name="Shape 35"/>
+          <p:cNvSpPr/>
+          <p:nvPr/>
+        </p:nvSpPr>
+        <p:spPr>
+          <a:xfrm>
+            <a:off x="1280160" y="2468880"/>
+            <a:ext cx="9599400" cy="2192760"/>
+          </a:xfrm>
+          <a:prstGeom prst="roundRect">
+            <a:avLst>
+              <a:gd name="adj" fmla="val 5833"/>
+            </a:avLst>
+          </a:prstGeom>
+          <a:solidFill>
+            <a:srgbClr val="ffffff"/>
+          </a:solidFill>
+          <a:ln w="0">
+            <a:noFill/>
+          </a:ln>
+          <a:effectLst>
+            <a:outerShdw algn="bl" blurRad="127080" dir="5400000" dist="38160" kx="0" ky="0" rotWithShape="0" sx="100000" sy="100000">
+              <a:srgbClr val="000000">
+                <a:alpha val="15000"/>
+              </a:srgbClr>
+            </a:outerShdw>
+          </a:effectLst>
+        </p:spPr>
+        <p:style>
+          <a:lnRef idx="0"/>
+          <a:fillRef idx="0"/>
+          <a:effectRef idx="0"/>
+          <a:fontRef idx="minor"/>
+        </p:style>
+        <p:txBody>
+          <a:bodyPr lIns="90000" rIns="90000" tIns="45000" bIns="45000" anchor="t">
+            <a:noAutofit/>
+          </a:bodyPr>
+          <a:p>
+            <a:endParaRPr lang="pt-PT" sz="1800" b="0" u="none" strike="noStrike">
+              <a:solidFill>
+                <a:srgbClr val="000000"/>
+              </a:solidFill>
+              <a:effectLst/>
+              <a:uFillTx/>
+              <a:latin typeface="Arial"/>
+            </a:endParaRPr>
+          </a:p>
+        </p:txBody>
+      </p:sp>
+      <p:sp>
+        <p:nvSpPr>
+          <p:cNvPr id="243" name="Text 46"/>
+          <p:cNvSpPr/>
+          <p:nvPr/>
+        </p:nvSpPr>
+        <p:spPr>
+          <a:xfrm>
+            <a:off x="1737360" y="2697480"/>
+            <a:ext cx="8685000" cy="1735560"/>
+          </a:xfrm>
+          <a:prstGeom prst="rect">
+            <a:avLst/>
+          </a:prstGeom>
+          <a:noFill/>
+          <a:ln w="0">
+            <a:noFill/>
+          </a:ln>
+        </p:spPr>
+        <p:style>
+          <a:lnRef idx="0"/>
+          <a:fillRef idx="0"/>
+          <a:effectRef idx="0"/>
+          <a:fontRef idx="minor"/>
+        </p:style>
+        <p:txBody>
+          <a:bodyPr lIns="90000" rIns="90000" tIns="45000" bIns="45000" anchor="ctr">
+            <a:noAutofit/>
+          </a:bodyPr>
+          <a:p>
+            <a:pPr defTabSz="914400">
+              <a:lnSpc>
+                <a:spcPct val="135000"/>
+              </a:lnSpc>
+              <a:tabLst>
+                <a:tab algn="l" pos="0"/>
+              </a:tabLst>
+            </a:pPr>
+            <a:r>
+              <a:rPr lang="en-US" sz="1900" b="1" u="none" strike="noStrike">
+                <a:solidFill>
+                  <a:srgbClr val="0d2b2e"/>
+                </a:solidFill>
+                <a:effectLst/>
+                <a:uFillTx/>
+                <a:latin typeface="Poppins"/>
+                <a:ea typeface="Poppins"/>
+              </a:rPr>
+              <a:t>Obrigada pela atenção.</a:t>
+            </a:r>
+            <a:endParaRPr lang="pt-PT" sz="1900" b="0" u="none" strike="noStrike">
+              <a:solidFill>
+                <a:srgbClr val="ffffff"/>
+              </a:solidFill>
+              <a:effectLst/>
+              <a:uFillTx/>
+              <a:latin typeface="Arial"/>
+            </a:endParaRPr>
+          </a:p>
+          <a:p>
+            <a:pPr defTabSz="914400">
+              <a:lnSpc>
+                <a:spcPct val="135000"/>
+              </a:lnSpc>
+              <a:tabLst>
+                <a:tab algn="l" pos="0"/>
+              </a:tabLst>
+            </a:pPr>
+            <a:r>
+              <a:rPr lang="en-US" sz="1900" b="1" u="none" strike="noStrike">
+                <a:solidFill>
+                  <a:srgbClr val="0d2b2e"/>
+                </a:solidFill>
+                <a:effectLst/>
+                <a:uFillTx/>
+                <a:latin typeface="Poppins"/>
+                <a:ea typeface="Poppins"/>
+              </a:rPr>
+              <a:t>Sintam-se a vontade para fazerem perguntas.</a:t>
+            </a:r>
+            <a:endParaRPr lang="pt-PT" sz="1900" b="0" u="none" strike="noStrike">
+              <a:solidFill>
+                <a:srgbClr val="ffffff"/>
+              </a:solidFill>
+              <a:effectLst/>
+              <a:uFillTx/>
+              <a:latin typeface="Arial"/>
+            </a:endParaRPr>
+          </a:p>
+        </p:txBody>
+      </p:sp>
+      <p:sp>
+        <p:nvSpPr>
+          <p:cNvPr id="244" name="Text 47"/>
+          <p:cNvSpPr/>
+          <p:nvPr/>
+        </p:nvSpPr>
+        <p:spPr>
+          <a:xfrm>
+            <a:off x="457200" y="6537960"/>
+            <a:ext cx="5484600" cy="272520"/>
+          </a:xfrm>
+          <a:prstGeom prst="rect">
+            <a:avLst/>
+          </a:prstGeom>
+          <a:noFill/>
+          <a:ln w="0">
+            <a:noFill/>
+          </a:ln>
+        </p:spPr>
+        <p:style>
+          <a:lnRef idx="0"/>
+          <a:fillRef idx="0"/>
+          <a:effectRef idx="0"/>
+          <a:fontRef idx="minor"/>
+        </p:style>
+        <p:txBody>
+          <a:bodyPr lIns="90000" rIns="90000" tIns="45000" bIns="45000" anchor="ctr">
+            <a:noAutofit/>
+          </a:bodyPr>
+          <a:p>
+            <a:pPr defTabSz="914400">
+              <a:lnSpc>
+                <a:spcPct val="100000"/>
+              </a:lnSpc>
+              <a:tabLst>
+                <a:tab algn="l" pos="0"/>
+              </a:tabLst>
+            </a:pPr>
+            <a:r>
+              <a:rPr lang="pt-PT" sz="900" b="0" u="none" strike="noStrike">
+                <a:solidFill>
+                  <a:srgbClr val="5f6b6a"/>
+                </a:solidFill>
+                <a:effectLst/>
+                <a:highlight>
+                  <a:srgbClr val="5983b0"/>
+                </a:highlight>
+                <a:uFillTx/>
+                <a:latin typeface="Inter"/>
+                <a:ea typeface="Inter"/>
+              </a:rPr>
+              <a:t>Personal Finance Manager</a:t>
+            </a:r>
+            <a:endParaRPr lang="pt-PT" sz="900" b="0" u="none" strike="noStrike">
+              <a:solidFill>
+                <a:srgbClr val="ffffff"/>
+              </a:solidFill>
+              <a:effectLst/>
+              <a:uFillTx/>
+              <a:latin typeface="Arial"/>
+            </a:endParaRPr>
+          </a:p>
+        </p:txBody>
+      </p:sp>
+      <p:sp>
+        <p:nvSpPr>
+          <p:cNvPr id="245" name="Text 52"/>
+          <p:cNvSpPr/>
+          <p:nvPr/>
+        </p:nvSpPr>
+        <p:spPr>
+          <a:xfrm>
+            <a:off x="11521440" y="6537960"/>
+            <a:ext cx="455400" cy="272520"/>
+          </a:xfrm>
+          <a:prstGeom prst="rect">
+            <a:avLst/>
+          </a:prstGeom>
+          <a:noFill/>
+          <a:ln w="0">
+            <a:noFill/>
+          </a:ln>
+        </p:spPr>
+        <p:style>
+          <a:lnRef idx="0"/>
+          <a:fillRef idx="0"/>
+          <a:effectRef idx="0"/>
+          <a:fontRef idx="minor"/>
+        </p:style>
+        <p:txBody>
+          <a:bodyPr lIns="90000" rIns="90000" tIns="45000" bIns="45000" anchor="ctr">
+            <a:noAutofit/>
+          </a:bodyPr>
+          <a:p>
+            <a:pPr algn="r" defTabSz="914400">
+              <a:lnSpc>
+                <a:spcPct val="100000"/>
+              </a:lnSpc>
+              <a:tabLst>
+                <a:tab algn="l" pos="0"/>
+              </a:tabLst>
+            </a:pPr>
+            <a:r>
+              <a:rPr lang="en-US" sz="900" b="0" u="none" strike="noStrike">
+                <a:solidFill>
+                  <a:srgbClr val="5f6b6a"/>
+                </a:solidFill>
+                <a:effectLst/>
+                <a:uFillTx/>
+                <a:latin typeface="Inter"/>
+                <a:ea typeface="Inter"/>
+              </a:rPr>
+              <a:t>4</a:t>
             </a:r>
             <a:endParaRPr lang="pt-PT" sz="900" b="0" u="none" strike="noStrike">
               <a:solidFill>
@@ -4407,7 +6468,7 @@
         <p:spPr>
           <a:xfrm>
             <a:off x="640080" y="457200"/>
-            <a:ext cx="7313760" cy="318600"/>
+            <a:ext cx="7313400" cy="318240"/>
           </a:xfrm>
           <a:prstGeom prst="rect">
             <a:avLst/>
@@ -4468,7 +6529,7 @@
         <p:spPr>
           <a:xfrm>
             <a:off x="640080" y="749880"/>
-            <a:ext cx="10056960" cy="684360"/>
+            <a:ext cx="10056600" cy="684000"/>
           </a:xfrm>
           <a:prstGeom prst="rect">
             <a:avLst/>
@@ -4529,7 +6590,7 @@
         <p:spPr>
           <a:xfrm>
             <a:off x="640080" y="1691640"/>
-            <a:ext cx="6399360" cy="1553040"/>
+            <a:ext cx="6399000" cy="1552680"/>
           </a:xfrm>
           <a:prstGeom prst="rect">
             <a:avLst/>
@@ -4590,7 +6651,7 @@
         <p:spPr>
           <a:xfrm>
             <a:off x="640080" y="3337560"/>
-            <a:ext cx="6399360" cy="1461600"/>
+            <a:ext cx="6399000" cy="1461240"/>
           </a:xfrm>
           <a:prstGeom prst="rect">
             <a:avLst/>
@@ -4651,7 +6712,7 @@
         <p:spPr>
           <a:xfrm>
             <a:off x="7589520" y="1691640"/>
-            <a:ext cx="3930480" cy="3747600"/>
+            <a:ext cx="3930120" cy="3747240"/>
           </a:xfrm>
           <a:prstGeom prst="roundRect">
             <a:avLst>
@@ -4701,7 +6762,7 @@
         <p:spPr>
           <a:xfrm>
             <a:off x="7909560" y="1965960"/>
-            <a:ext cx="3290400" cy="364320"/>
+            <a:ext cx="3290040" cy="363960"/>
           </a:xfrm>
           <a:prstGeom prst="rect">
             <a:avLst/>
@@ -4762,7 +6823,7 @@
         <p:spPr>
           <a:xfrm>
             <a:off x="7955280" y="2633400"/>
-            <a:ext cx="90000" cy="90000"/>
+            <a:ext cx="89640" cy="89640"/>
           </a:xfrm>
           <a:solidFill>
             <a:srgbClr val="1f6f63"/>
@@ -4778,7 +6839,7 @@
           <a:fontRef idx="minor"/>
         </p:style>
         <p:txBody>
-          <a:bodyPr lIns="90000" rIns="90000" tIns="45000" bIns="45000" anchor="t">
+          <a:bodyPr lIns="90000" rIns="90000" tIns="44640" bIns="44640" anchor="t">
             <a:noAutofit/>
           </a:bodyPr>
           <a:p>
@@ -4807,7 +6868,7 @@
         <p:spPr>
           <a:xfrm>
             <a:off x="8183880" y="2487240"/>
-            <a:ext cx="3198960" cy="364320"/>
+            <a:ext cx="3198600" cy="363960"/>
           </a:xfrm>
           <a:prstGeom prst="rect">
             <a:avLst/>
@@ -4868,7 +6929,7 @@
         <p:spPr>
           <a:xfrm>
             <a:off x="7955280" y="3182040"/>
-            <a:ext cx="90000" cy="90000"/>
+            <a:ext cx="89640" cy="89640"/>
           </a:xfrm>
           <a:solidFill>
             <a:srgbClr val="1f6f63"/>
@@ -4884,7 +6945,7 @@
           <a:fontRef idx="minor"/>
         </p:style>
         <p:txBody>
-          <a:bodyPr lIns="90000" rIns="90000" tIns="45000" bIns="45000" anchor="t">
+          <a:bodyPr lIns="90000" rIns="90000" tIns="44640" bIns="44640" anchor="t">
             <a:noAutofit/>
           </a:bodyPr>
           <a:p>
@@ -4913,7 +6974,7 @@
         <p:spPr>
           <a:xfrm>
             <a:off x="8183880" y="3035880"/>
-            <a:ext cx="3198960" cy="364320"/>
+            <a:ext cx="3198600" cy="363960"/>
           </a:xfrm>
           <a:prstGeom prst="rect">
             <a:avLst/>
@@ -4974,7 +7035,7 @@
         <p:spPr>
           <a:xfrm>
             <a:off x="7955280" y="3730680"/>
-            <a:ext cx="90000" cy="90000"/>
+            <a:ext cx="89640" cy="89640"/>
           </a:xfrm>
           <a:solidFill>
             <a:srgbClr val="1f6f63"/>
@@ -4990,7 +7051,7 @@
           <a:fontRef idx="minor"/>
         </p:style>
         <p:txBody>
-          <a:bodyPr lIns="90000" rIns="90000" tIns="45000" bIns="45000" anchor="t">
+          <a:bodyPr lIns="90000" rIns="90000" tIns="44640" bIns="44640" anchor="t">
             <a:noAutofit/>
           </a:bodyPr>
           <a:p>
@@ -5019,7 +7080,7 @@
         <p:spPr>
           <a:xfrm>
             <a:off x="8183880" y="3584520"/>
-            <a:ext cx="3198960" cy="364320"/>
+            <a:ext cx="3198600" cy="363960"/>
           </a:xfrm>
           <a:prstGeom prst="rect">
             <a:avLst/>
@@ -5080,7 +7141,7 @@
         <p:spPr>
           <a:xfrm>
             <a:off x="7955280" y="4279320"/>
-            <a:ext cx="90000" cy="90000"/>
+            <a:ext cx="89640" cy="89640"/>
           </a:xfrm>
           <a:solidFill>
             <a:srgbClr val="1f6f63"/>
@@ -5096,7 +7157,7 @@
           <a:fontRef idx="minor"/>
         </p:style>
         <p:txBody>
-          <a:bodyPr lIns="90000" rIns="90000" tIns="45000" bIns="45000" anchor="t">
+          <a:bodyPr lIns="90000" rIns="90000" tIns="44640" bIns="44640" anchor="t">
             <a:noAutofit/>
           </a:bodyPr>
           <a:p>
@@ -5125,7 +7186,7 @@
         <p:spPr>
           <a:xfrm>
             <a:off x="8183880" y="4133160"/>
-            <a:ext cx="3198960" cy="364320"/>
+            <a:ext cx="3198600" cy="363960"/>
           </a:xfrm>
           <a:prstGeom prst="rect">
             <a:avLst/>
@@ -5186,7 +7247,7 @@
         <p:spPr>
           <a:xfrm>
             <a:off x="457200" y="6537960"/>
-            <a:ext cx="5484960" cy="272880"/>
+            <a:ext cx="5484600" cy="272520"/>
           </a:xfrm>
           <a:prstGeom prst="rect">
             <a:avLst/>
@@ -5247,7 +7308,7 @@
         <p:spPr>
           <a:xfrm>
             <a:off x="11521440" y="6537960"/>
-            <a:ext cx="455760" cy="272880"/>
+            <a:ext cx="455400" cy="272520"/>
           </a:xfrm>
           <a:prstGeom prst="rect">
             <a:avLst/>
@@ -5345,7 +7406,7 @@
         <p:spPr>
           <a:xfrm>
             <a:off x="640080" y="457200"/>
-            <a:ext cx="7313760" cy="318600"/>
+            <a:ext cx="7313400" cy="318240"/>
           </a:xfrm>
           <a:prstGeom prst="rect">
             <a:avLst/>
@@ -5406,7 +7467,7 @@
         <p:spPr>
           <a:xfrm>
             <a:off x="640080" y="749880"/>
-            <a:ext cx="10056960" cy="684360"/>
+            <a:ext cx="10056600" cy="684000"/>
           </a:xfrm>
           <a:prstGeom prst="rect">
             <a:avLst/>
@@ -5467,7 +7528,7 @@
         <p:spPr>
           <a:xfrm>
             <a:off x="640080" y="1703160"/>
-            <a:ext cx="5256360" cy="1598760"/>
+            <a:ext cx="5256000" cy="1598400"/>
           </a:xfrm>
           <a:prstGeom prst="roundRect">
             <a:avLst>
@@ -5517,7 +7578,7 @@
         <p:spPr>
           <a:xfrm>
             <a:off x="640080" y="1703160"/>
-            <a:ext cx="455760" cy="455760"/>
+            <a:ext cx="455400" cy="455400"/>
           </a:xfrm>
           <a:prstGeom prst="roundRect">
             <a:avLst>
@@ -5567,7 +7628,7 @@
         <p:spPr>
           <a:xfrm>
             <a:off x="896040" y="1974960"/>
-            <a:ext cx="455760" cy="455760"/>
+            <a:ext cx="455400" cy="455400"/>
           </a:xfrm>
           <a:prstGeom prst="rect">
             <a:avLst/>
@@ -5616,7 +7677,7 @@
         <p:spPr>
           <a:xfrm>
             <a:off x="896040" y="2560320"/>
-            <a:ext cx="4753440" cy="364320"/>
+            <a:ext cx="4753080" cy="363960"/>
           </a:xfrm>
           <a:prstGeom prst="rect">
             <a:avLst/>
@@ -5665,7 +7726,7 @@
         <p:spPr>
           <a:xfrm>
             <a:off x="896040" y="2907720"/>
-            <a:ext cx="4753440" cy="940680"/>
+            <a:ext cx="4753080" cy="940320"/>
           </a:xfrm>
           <a:prstGeom prst="rect">
             <a:avLst/>
@@ -5714,7 +7775,7 @@
         <p:spPr>
           <a:xfrm>
             <a:off x="6203160" y="1737360"/>
-            <a:ext cx="5256360" cy="1598760"/>
+            <a:ext cx="5256000" cy="1598400"/>
           </a:xfrm>
           <a:prstGeom prst="roundRect">
             <a:avLst>
@@ -5764,7 +7825,7 @@
         <p:spPr>
           <a:xfrm>
             <a:off x="6203160" y="1737360"/>
-            <a:ext cx="455760" cy="455760"/>
+            <a:ext cx="455400" cy="455400"/>
           </a:xfrm>
           <a:prstGeom prst="roundRect">
             <a:avLst>
@@ -5814,7 +7875,7 @@
         <p:spPr>
           <a:xfrm>
             <a:off x="6428160" y="1974960"/>
-            <a:ext cx="455760" cy="455760"/>
+            <a:ext cx="455400" cy="455400"/>
           </a:xfrm>
           <a:prstGeom prst="rect">
             <a:avLst/>
@@ -5863,7 +7924,7 @@
         <p:spPr>
           <a:xfrm>
             <a:off x="6428160" y="2560320"/>
-            <a:ext cx="4753440" cy="364320"/>
+            <a:ext cx="4753080" cy="363960"/>
           </a:xfrm>
           <a:prstGeom prst="rect">
             <a:avLst/>
@@ -5912,7 +7973,7 @@
         <p:spPr>
           <a:xfrm>
             <a:off x="6428160" y="2547720"/>
-            <a:ext cx="4753440" cy="151200"/>
+            <a:ext cx="4753080" cy="150840"/>
           </a:xfrm>
           <a:prstGeom prst="rect">
             <a:avLst/>
@@ -5973,7 +8034,7 @@
         <p:spPr>
           <a:xfrm>
             <a:off x="640080" y="3611880"/>
-            <a:ext cx="5256360" cy="1598760"/>
+            <a:ext cx="5256000" cy="1598400"/>
           </a:xfrm>
           <a:prstGeom prst="roundRect">
             <a:avLst>
@@ -6023,7 +8084,7 @@
         <p:spPr>
           <a:xfrm>
             <a:off x="640080" y="3611880"/>
-            <a:ext cx="455760" cy="455760"/>
+            <a:ext cx="455400" cy="455400"/>
           </a:xfrm>
           <a:prstGeom prst="roundRect">
             <a:avLst>
@@ -6088,7 +8149,7 @@
         <p:spPr>
           <a:xfrm>
             <a:off x="896040" y="3849480"/>
-            <a:ext cx="455760" cy="455760"/>
+            <a:ext cx="455400" cy="455400"/>
           </a:xfrm>
           <a:prstGeom prst="rect">
             <a:avLst/>
@@ -6137,7 +8198,7 @@
         <p:spPr>
           <a:xfrm>
             <a:off x="1096920" y="3703320"/>
-            <a:ext cx="4753440" cy="364320"/>
+            <a:ext cx="4753080" cy="363960"/>
           </a:xfrm>
           <a:prstGeom prst="rect">
             <a:avLst/>
@@ -6198,7 +8259,7 @@
         <p:spPr>
           <a:xfrm>
             <a:off x="896040" y="4782240"/>
-            <a:ext cx="4753440" cy="684360"/>
+            <a:ext cx="4753080" cy="684000"/>
           </a:xfrm>
           <a:prstGeom prst="rect">
             <a:avLst/>
@@ -6247,7 +8308,7 @@
         <p:spPr>
           <a:xfrm>
             <a:off x="6172200" y="3600000"/>
-            <a:ext cx="5256360" cy="1598760"/>
+            <a:ext cx="5256000" cy="1598400"/>
           </a:xfrm>
           <a:prstGeom prst="roundRect">
             <a:avLst>
@@ -6297,7 +8358,7 @@
         <p:spPr>
           <a:xfrm>
             <a:off x="6172200" y="3625560"/>
-            <a:ext cx="455760" cy="455760"/>
+            <a:ext cx="455400" cy="455400"/>
           </a:xfrm>
           <a:prstGeom prst="roundRect">
             <a:avLst>
@@ -6362,7 +8423,7 @@
         <p:spPr>
           <a:xfrm>
             <a:off x="6428160" y="3849480"/>
-            <a:ext cx="455760" cy="455760"/>
+            <a:ext cx="455400" cy="455400"/>
           </a:xfrm>
           <a:prstGeom prst="rect">
             <a:avLst/>
@@ -6411,7 +8472,7 @@
         <p:spPr>
           <a:xfrm>
             <a:off x="6765480" y="3600000"/>
-            <a:ext cx="4753440" cy="364320"/>
+            <a:ext cx="4753080" cy="363960"/>
           </a:xfrm>
           <a:prstGeom prst="rect">
             <a:avLst/>
@@ -6472,7 +8533,7 @@
         <p:spPr>
           <a:xfrm>
             <a:off x="6428160" y="4782240"/>
-            <a:ext cx="4753440" cy="684360"/>
+            <a:ext cx="4753080" cy="684000"/>
           </a:xfrm>
           <a:prstGeom prst="rect">
             <a:avLst/>
@@ -6521,7 +8582,7 @@
         <p:spPr>
           <a:xfrm>
             <a:off x="457200" y="6537960"/>
-            <a:ext cx="5484960" cy="272880"/>
+            <a:ext cx="5484600" cy="272520"/>
           </a:xfrm>
           <a:prstGeom prst="rect">
             <a:avLst/>
@@ -6582,7 +8643,7 @@
         <p:spPr>
           <a:xfrm>
             <a:off x="11521440" y="6537960"/>
-            <a:ext cx="455760" cy="272880"/>
+            <a:ext cx="455400" cy="272520"/>
           </a:xfrm>
           <a:prstGeom prst="rect">
             <a:avLst/>
@@ -6643,7 +8704,7 @@
         <p:spPr>
           <a:xfrm>
             <a:off x="640080" y="1737360"/>
-            <a:ext cx="438840" cy="334080"/>
+            <a:ext cx="438480" cy="333360"/>
           </a:xfrm>
           <a:prstGeom prst="rect">
             <a:avLst/>
@@ -6701,7 +8762,7 @@
         <p:spPr>
           <a:xfrm>
             <a:off x="6300000" y="1737360"/>
-            <a:ext cx="295560" cy="334080"/>
+            <a:ext cx="295200" cy="333360"/>
           </a:xfrm>
           <a:prstGeom prst="rect">
             <a:avLst/>
@@ -6759,7 +8820,7 @@
         <p:spPr>
           <a:xfrm>
             <a:off x="1194120" y="1713960"/>
-            <a:ext cx="1684800" cy="303840"/>
+            <a:ext cx="1684440" cy="303480"/>
           </a:xfrm>
           <a:prstGeom prst="rect">
             <a:avLst/>
@@ -6817,7 +8878,7 @@
         <p:spPr>
           <a:xfrm>
             <a:off x="-6120000" y="4038840"/>
-            <a:ext cx="5899320" cy="258120"/>
+            <a:ext cx="5898960" cy="257400"/>
           </a:xfrm>
           <a:prstGeom prst="rect">
             <a:avLst/>
@@ -6875,7 +8936,7 @@
         <p:spPr>
           <a:xfrm>
             <a:off x="640080" y="2443320"/>
-            <a:ext cx="5256360" cy="858600"/>
+            <a:ext cx="5256000" cy="858240"/>
           </a:xfrm>
           <a:prstGeom prst="rect">
             <a:avLst/>
@@ -7005,7 +9066,7 @@
         <p:spPr>
           <a:xfrm>
             <a:off x="640080" y="2418840"/>
-            <a:ext cx="5256360" cy="425160"/>
+            <a:ext cx="5256000" cy="425160"/>
           </a:xfrm>
           <a:prstGeom prst="rect">
             <a:avLst/>
@@ -7063,7 +9124,7 @@
         <p:spPr>
           <a:xfrm>
             <a:off x="6840000" y="1800000"/>
-            <a:ext cx="2308320" cy="303840"/>
+            <a:ext cx="2307960" cy="303480"/>
           </a:xfrm>
           <a:prstGeom prst="rect">
             <a:avLst/>
@@ -7121,7 +9182,7 @@
         <p:spPr>
           <a:xfrm>
             <a:off x="6234120" y="4500000"/>
-            <a:ext cx="5194440" cy="258120"/>
+            <a:ext cx="5194080" cy="257400"/>
           </a:xfrm>
           <a:prstGeom prst="rect">
             <a:avLst/>
@@ -7179,7 +9240,7 @@
         <p:spPr>
           <a:xfrm>
             <a:off x="720000" y="4398840"/>
-            <a:ext cx="5194440" cy="425160"/>
+            <a:ext cx="5194080" cy="425160"/>
           </a:xfrm>
           <a:prstGeom prst="rect">
             <a:avLst/>
@@ -7274,7 +9335,7 @@
         <p:spPr>
           <a:xfrm>
             <a:off x="640080" y="457200"/>
-            <a:ext cx="7313760" cy="318600"/>
+            <a:ext cx="7313400" cy="318240"/>
           </a:xfrm>
           <a:prstGeom prst="rect">
             <a:avLst/>
@@ -7335,7 +9396,7 @@
         <p:spPr>
           <a:xfrm>
             <a:off x="640080" y="749880"/>
-            <a:ext cx="10056960" cy="684360"/>
+            <a:ext cx="10056600" cy="684000"/>
           </a:xfrm>
           <a:prstGeom prst="rect">
             <a:avLst/>
@@ -7396,7 +9457,7 @@
         <p:spPr>
           <a:xfrm>
             <a:off x="1280160" y="2468880"/>
-            <a:ext cx="9599760" cy="2193120"/>
+            <a:ext cx="9599400" cy="2192760"/>
           </a:xfrm>
           <a:prstGeom prst="roundRect">
             <a:avLst>
@@ -7453,7 +9514,7 @@
         <p:spPr>
           <a:xfrm>
             <a:off x="1737360" y="2697480"/>
-            <a:ext cx="8685360" cy="1735920"/>
+            <a:ext cx="8685000" cy="1735560"/>
           </a:xfrm>
           <a:prstGeom prst="rect">
             <a:avLst/>
@@ -7514,7 +9575,7 @@
         <p:spPr>
           <a:xfrm>
             <a:off x="457200" y="6537960"/>
-            <a:ext cx="5484960" cy="272880"/>
+            <a:ext cx="5484600" cy="272520"/>
           </a:xfrm>
           <a:prstGeom prst="rect">
             <a:avLst/>
@@ -7563,9 +9624,6 @@
                 <a:srgbClr val="ffffff"/>
               </a:solidFill>
               <a:effectLst/>
-              <a:highlight>
-                <a:srgbClr val="5983b0"/>
-              </a:highlight>
               <a:uFillTx/>
               <a:latin typeface="Arial"/>
             </a:endParaRPr>
@@ -7581,7 +9639,7 @@
         <p:spPr>
           <a:xfrm>
             <a:off x="11521440" y="6537960"/>
-            <a:ext cx="455760" cy="272880"/>
+            <a:ext cx="455400" cy="272520"/>
           </a:xfrm>
           <a:prstGeom prst="rect">
             <a:avLst/>
@@ -7679,7 +9737,7 @@
         <p:spPr>
           <a:xfrm>
             <a:off x="640080" y="457200"/>
-            <a:ext cx="7313760" cy="318600"/>
+            <a:ext cx="7313400" cy="318240"/>
           </a:xfrm>
           <a:prstGeom prst="rect">
             <a:avLst/>
@@ -7740,7 +9798,7 @@
         <p:spPr>
           <a:xfrm>
             <a:off x="640080" y="749880"/>
-            <a:ext cx="10056960" cy="684360"/>
+            <a:ext cx="10056600" cy="684000"/>
           </a:xfrm>
           <a:prstGeom prst="rect">
             <a:avLst/>
@@ -7801,7 +9859,7 @@
         <p:spPr>
           <a:xfrm>
             <a:off x="640080" y="1691640"/>
-            <a:ext cx="3519000" cy="1964520"/>
+            <a:ext cx="3518640" cy="1964160"/>
           </a:xfrm>
           <a:prstGeom prst="roundRect">
             <a:avLst>
@@ -7851,7 +9909,7 @@
         <p:spPr>
           <a:xfrm>
             <a:off x="868680" y="1920240"/>
-            <a:ext cx="364320" cy="364320"/>
+            <a:ext cx="363960" cy="363960"/>
           </a:xfrm>
           <a:prstGeom prst="roundRect">
             <a:avLst>
@@ -7901,7 +9959,7 @@
         <p:spPr>
           <a:xfrm>
             <a:off x="868680" y="1920240"/>
-            <a:ext cx="364320" cy="364320"/>
+            <a:ext cx="363960" cy="363960"/>
           </a:xfrm>
           <a:prstGeom prst="rect">
             <a:avLst/>
@@ -7962,7 +10020,7 @@
         <p:spPr>
           <a:xfrm>
             <a:off x="868680" y="2404800"/>
-            <a:ext cx="3061800" cy="364320"/>
+            <a:ext cx="3061440" cy="363960"/>
           </a:xfrm>
           <a:prstGeom prst="rect">
             <a:avLst/>
@@ -8023,7 +10081,7 @@
         <p:spPr>
           <a:xfrm>
             <a:off x="868680" y="2743200"/>
-            <a:ext cx="3061800" cy="821520"/>
+            <a:ext cx="3061440" cy="821160"/>
           </a:xfrm>
           <a:prstGeom prst="rect">
             <a:avLst/>
@@ -8084,7 +10142,7 @@
         <p:spPr>
           <a:xfrm>
             <a:off x="4389120" y="1691640"/>
-            <a:ext cx="3519000" cy="1964520"/>
+            <a:ext cx="3518640" cy="1964160"/>
           </a:xfrm>
           <a:prstGeom prst="roundRect">
             <a:avLst>
@@ -8134,7 +10192,7 @@
         <p:spPr>
           <a:xfrm>
             <a:off x="4617720" y="1920240"/>
-            <a:ext cx="364320" cy="364320"/>
+            <a:ext cx="363960" cy="363960"/>
           </a:xfrm>
           <a:prstGeom prst="roundRect">
             <a:avLst>
@@ -8184,7 +10242,7 @@
         <p:spPr>
           <a:xfrm>
             <a:off x="4617720" y="1920240"/>
-            <a:ext cx="364320" cy="364320"/>
+            <a:ext cx="363960" cy="363960"/>
           </a:xfrm>
           <a:prstGeom prst="rect">
             <a:avLst/>
@@ -8245,7 +10303,7 @@
         <p:spPr>
           <a:xfrm>
             <a:off x="4617720" y="2404800"/>
-            <a:ext cx="3061800" cy="364320"/>
+            <a:ext cx="3061440" cy="363960"/>
           </a:xfrm>
           <a:prstGeom prst="rect">
             <a:avLst/>
@@ -8306,7 +10364,7 @@
         <p:spPr>
           <a:xfrm>
             <a:off x="4617720" y="2743200"/>
-            <a:ext cx="3061800" cy="821520"/>
+            <a:ext cx="3061440" cy="821160"/>
           </a:xfrm>
           <a:prstGeom prst="rect">
             <a:avLst/>
@@ -8367,7 +10425,7 @@
         <p:spPr>
           <a:xfrm>
             <a:off x="8138160" y="1691640"/>
-            <a:ext cx="3519000" cy="1964520"/>
+            <a:ext cx="3518640" cy="1964160"/>
           </a:xfrm>
           <a:prstGeom prst="roundRect">
             <a:avLst>
@@ -8417,7 +10475,7 @@
         <p:spPr>
           <a:xfrm>
             <a:off x="8366760" y="1920240"/>
-            <a:ext cx="364320" cy="364320"/>
+            <a:ext cx="363960" cy="363960"/>
           </a:xfrm>
           <a:prstGeom prst="roundRect">
             <a:avLst>
@@ -8467,7 +10525,7 @@
         <p:spPr>
           <a:xfrm>
             <a:off x="8366760" y="1920240"/>
-            <a:ext cx="364320" cy="364320"/>
+            <a:ext cx="363960" cy="363960"/>
           </a:xfrm>
           <a:prstGeom prst="rect">
             <a:avLst/>
@@ -8528,7 +10586,7 @@
         <p:spPr>
           <a:xfrm>
             <a:off x="8366760" y="2404800"/>
-            <a:ext cx="3061800" cy="364320"/>
+            <a:ext cx="3061440" cy="363960"/>
           </a:xfrm>
           <a:prstGeom prst="rect">
             <a:avLst/>
@@ -8589,7 +10647,7 @@
         <p:spPr>
           <a:xfrm>
             <a:off x="8366760" y="2743200"/>
-            <a:ext cx="3061800" cy="821520"/>
+            <a:ext cx="3061440" cy="821160"/>
           </a:xfrm>
           <a:prstGeom prst="rect">
             <a:avLst/>
@@ -8650,7 +10708,7 @@
         <p:spPr>
           <a:xfrm>
             <a:off x="640080" y="3886200"/>
-            <a:ext cx="3519000" cy="1964520"/>
+            <a:ext cx="3518640" cy="1964160"/>
           </a:xfrm>
           <a:prstGeom prst="roundRect">
             <a:avLst>
@@ -8700,7 +10758,7 @@
         <p:spPr>
           <a:xfrm>
             <a:off x="868680" y="4114800"/>
-            <a:ext cx="364320" cy="364320"/>
+            <a:ext cx="363960" cy="363960"/>
           </a:xfrm>
           <a:prstGeom prst="roundRect">
             <a:avLst>
@@ -8750,7 +10808,7 @@
         <p:spPr>
           <a:xfrm>
             <a:off x="868680" y="4114800"/>
-            <a:ext cx="364320" cy="364320"/>
+            <a:ext cx="363960" cy="363960"/>
           </a:xfrm>
           <a:prstGeom prst="rect">
             <a:avLst/>
@@ -8811,7 +10869,7 @@
         <p:spPr>
           <a:xfrm>
             <a:off x="868680" y="4599360"/>
-            <a:ext cx="3061800" cy="364320"/>
+            <a:ext cx="3061440" cy="363960"/>
           </a:xfrm>
           <a:prstGeom prst="rect">
             <a:avLst/>
@@ -8872,7 +10930,7 @@
         <p:spPr>
           <a:xfrm>
             <a:off x="868680" y="4937760"/>
-            <a:ext cx="3061800" cy="821520"/>
+            <a:ext cx="3061440" cy="821160"/>
           </a:xfrm>
           <a:prstGeom prst="rect">
             <a:avLst/>
@@ -8933,7 +10991,7 @@
         <p:spPr>
           <a:xfrm>
             <a:off x="4389120" y="3886200"/>
-            <a:ext cx="3519000" cy="1964520"/>
+            <a:ext cx="3518640" cy="1964160"/>
           </a:xfrm>
           <a:prstGeom prst="roundRect">
             <a:avLst>
@@ -8983,7 +11041,7 @@
         <p:spPr>
           <a:xfrm>
             <a:off x="4617720" y="4114800"/>
-            <a:ext cx="364320" cy="364320"/>
+            <a:ext cx="363960" cy="363960"/>
           </a:xfrm>
           <a:prstGeom prst="roundRect">
             <a:avLst>
@@ -9033,7 +11091,7 @@
         <p:spPr>
           <a:xfrm>
             <a:off x="4617720" y="4114800"/>
-            <a:ext cx="364320" cy="364320"/>
+            <a:ext cx="363960" cy="363960"/>
           </a:xfrm>
           <a:prstGeom prst="rect">
             <a:avLst/>
@@ -9094,7 +11152,7 @@
         <p:spPr>
           <a:xfrm>
             <a:off x="4617720" y="4599360"/>
-            <a:ext cx="3061800" cy="364320"/>
+            <a:ext cx="3061440" cy="363960"/>
           </a:xfrm>
           <a:prstGeom prst="rect">
             <a:avLst/>
@@ -9155,7 +11213,7 @@
         <p:spPr>
           <a:xfrm>
             <a:off x="4617720" y="4937760"/>
-            <a:ext cx="3061800" cy="821520"/>
+            <a:ext cx="3061440" cy="821160"/>
           </a:xfrm>
           <a:prstGeom prst="rect">
             <a:avLst/>
@@ -9216,7 +11274,7 @@
         <p:spPr>
           <a:xfrm>
             <a:off x="8138160" y="3886200"/>
-            <a:ext cx="3519000" cy="1964520"/>
+            <a:ext cx="3518640" cy="1964160"/>
           </a:xfrm>
           <a:prstGeom prst="roundRect">
             <a:avLst>
@@ -9266,7 +11324,7 @@
         <p:spPr>
           <a:xfrm>
             <a:off x="8366760" y="4114800"/>
-            <a:ext cx="364320" cy="364320"/>
+            <a:ext cx="363960" cy="363960"/>
           </a:xfrm>
           <a:prstGeom prst="roundRect">
             <a:avLst>
@@ -9316,7 +11374,7 @@
         <p:spPr>
           <a:xfrm>
             <a:off x="8366760" y="4114800"/>
-            <a:ext cx="364320" cy="364320"/>
+            <a:ext cx="363960" cy="363960"/>
           </a:xfrm>
           <a:prstGeom prst="rect">
             <a:avLst/>
@@ -9377,7 +11435,7 @@
         <p:spPr>
           <a:xfrm>
             <a:off x="8366760" y="4599360"/>
-            <a:ext cx="3061800" cy="364320"/>
+            <a:ext cx="3061440" cy="363960"/>
           </a:xfrm>
           <a:prstGeom prst="rect">
             <a:avLst/>
@@ -9438,7 +11496,7 @@
         <p:spPr>
           <a:xfrm>
             <a:off x="8366760" y="4937760"/>
-            <a:ext cx="3061800" cy="821520"/>
+            <a:ext cx="3061440" cy="821160"/>
           </a:xfrm>
           <a:prstGeom prst="rect">
             <a:avLst/>
@@ -9499,7 +11557,7 @@
         <p:spPr>
           <a:xfrm>
             <a:off x="457200" y="6537960"/>
-            <a:ext cx="5484960" cy="272880"/>
+            <a:ext cx="5484600" cy="272520"/>
           </a:xfrm>
           <a:prstGeom prst="rect">
             <a:avLst/>
@@ -9560,7 +11618,7 @@
         <p:spPr>
           <a:xfrm>
             <a:off x="11521440" y="6537960"/>
-            <a:ext cx="455760" cy="272880"/>
+            <a:ext cx="455400" cy="272520"/>
           </a:xfrm>
           <a:prstGeom prst="rect">
             <a:avLst/>
@@ -9658,7 +11716,7 @@
         <p:spPr>
           <a:xfrm>
             <a:off x="640080" y="457200"/>
-            <a:ext cx="7313760" cy="318600"/>
+            <a:ext cx="7313400" cy="318240"/>
           </a:xfrm>
           <a:prstGeom prst="rect">
             <a:avLst/>
@@ -9719,7 +11777,7 @@
         <p:spPr>
           <a:xfrm>
             <a:off x="640080" y="749880"/>
-            <a:ext cx="10056960" cy="684360"/>
+            <a:ext cx="10056600" cy="684000"/>
           </a:xfrm>
           <a:prstGeom prst="rect">
             <a:avLst/>
@@ -9780,7 +11838,7 @@
         <p:spPr>
           <a:xfrm>
             <a:off x="640080" y="1417320"/>
-            <a:ext cx="7313760" cy="364320"/>
+            <a:ext cx="7313400" cy="363960"/>
           </a:xfrm>
           <a:prstGeom prst="rect">
             <a:avLst/>
@@ -9841,7 +11899,7 @@
         <p:spPr>
           <a:xfrm>
             <a:off x="640080" y="1965960"/>
-            <a:ext cx="6307920" cy="657000"/>
+            <a:ext cx="6307560" cy="656640"/>
           </a:xfrm>
           <a:prstGeom prst="roundRect">
             <a:avLst>
@@ -9891,7 +11949,7 @@
         <p:spPr>
           <a:xfrm>
             <a:off x="868680" y="1965960"/>
-            <a:ext cx="1735920" cy="657000"/>
+            <a:ext cx="1735560" cy="656640"/>
           </a:xfrm>
           <a:prstGeom prst="rect">
             <a:avLst/>
@@ -9952,7 +12010,7 @@
         <p:spPr>
           <a:xfrm>
             <a:off x="2606040" y="1965960"/>
-            <a:ext cx="4204800" cy="657000"/>
+            <a:ext cx="4204440" cy="656640"/>
           </a:xfrm>
           <a:prstGeom prst="rect">
             <a:avLst/>
@@ -10013,7 +12071,7 @@
         <p:spPr>
           <a:xfrm>
             <a:off x="640080" y="2752200"/>
-            <a:ext cx="6307920" cy="657000"/>
+            <a:ext cx="6307560" cy="656640"/>
           </a:xfrm>
           <a:prstGeom prst="roundRect">
             <a:avLst>
@@ -10063,7 +12121,7 @@
         <p:spPr>
           <a:xfrm>
             <a:off x="868680" y="2752200"/>
-            <a:ext cx="1735920" cy="657000"/>
+            <a:ext cx="1735560" cy="656640"/>
           </a:xfrm>
           <a:prstGeom prst="rect">
             <a:avLst/>
@@ -10124,7 +12182,7 @@
         <p:spPr>
           <a:xfrm>
             <a:off x="2606040" y="2752200"/>
-            <a:ext cx="4204800" cy="657000"/>
+            <a:ext cx="4204440" cy="656640"/>
           </a:xfrm>
           <a:prstGeom prst="rect">
             <a:avLst/>
@@ -10185,7 +12243,7 @@
         <p:spPr>
           <a:xfrm>
             <a:off x="640080" y="3538800"/>
-            <a:ext cx="6307920" cy="657000"/>
+            <a:ext cx="6307560" cy="656640"/>
           </a:xfrm>
           <a:prstGeom prst="roundRect">
             <a:avLst>
@@ -10235,7 +12293,7 @@
         <p:spPr>
           <a:xfrm>
             <a:off x="868680" y="3538800"/>
-            <a:ext cx="1735920" cy="657000"/>
+            <a:ext cx="1735560" cy="656640"/>
           </a:xfrm>
           <a:prstGeom prst="rect">
             <a:avLst/>
@@ -10296,7 +12354,7 @@
         <p:spPr>
           <a:xfrm>
             <a:off x="2606040" y="3538800"/>
-            <a:ext cx="4204800" cy="657000"/>
+            <a:ext cx="4204440" cy="656640"/>
           </a:xfrm>
           <a:prstGeom prst="rect">
             <a:avLst/>
@@ -10357,7 +12415,7 @@
         <p:spPr>
           <a:xfrm>
             <a:off x="640080" y="4325040"/>
-            <a:ext cx="6307920" cy="657000"/>
+            <a:ext cx="6307560" cy="656640"/>
           </a:xfrm>
           <a:prstGeom prst="roundRect">
             <a:avLst>
@@ -10407,7 +12465,7 @@
         <p:spPr>
           <a:xfrm>
             <a:off x="868680" y="4325040"/>
-            <a:ext cx="1735920" cy="657000"/>
+            <a:ext cx="1735560" cy="656640"/>
           </a:xfrm>
           <a:prstGeom prst="rect">
             <a:avLst/>
@@ -10468,7 +12526,7 @@
         <p:spPr>
           <a:xfrm>
             <a:off x="2606040" y="4325040"/>
-            <a:ext cx="4204800" cy="657000"/>
+            <a:ext cx="4204440" cy="656640"/>
           </a:xfrm>
           <a:prstGeom prst="rect">
             <a:avLst/>
@@ -10529,7 +12587,7 @@
         <p:spPr>
           <a:xfrm>
             <a:off x="640080" y="5111640"/>
-            <a:ext cx="6307920" cy="657000"/>
+            <a:ext cx="6307560" cy="656640"/>
           </a:xfrm>
           <a:prstGeom prst="roundRect">
             <a:avLst>
@@ -10579,7 +12637,7 @@
         <p:spPr>
           <a:xfrm>
             <a:off x="868680" y="5111640"/>
-            <a:ext cx="1735920" cy="657000"/>
+            <a:ext cx="1735560" cy="656640"/>
           </a:xfrm>
           <a:prstGeom prst="rect">
             <a:avLst/>
@@ -10640,7 +12698,7 @@
         <p:spPr>
           <a:xfrm>
             <a:off x="2606040" y="5111640"/>
-            <a:ext cx="4204800" cy="657000"/>
+            <a:ext cx="4204440" cy="656640"/>
           </a:xfrm>
           <a:prstGeom prst="rect">
             <a:avLst/>
@@ -10701,7 +12759,7 @@
         <p:spPr>
           <a:xfrm>
             <a:off x="7315200" y="1965960"/>
-            <a:ext cx="4204800" cy="4204800"/>
+            <a:ext cx="4204440" cy="4204440"/>
           </a:xfrm>
           <a:prstGeom prst="roundRect">
             <a:avLst>
@@ -10758,7 +12816,7 @@
         <p:spPr>
           <a:xfrm>
             <a:off x="7589520" y="2212920"/>
-            <a:ext cx="3656160" cy="364320"/>
+            <a:ext cx="3655800" cy="363960"/>
           </a:xfrm>
           <a:prstGeom prst="rect">
             <a:avLst/>
@@ -10819,7 +12877,7 @@
         <p:spPr>
           <a:xfrm>
             <a:off x="7635240" y="2807280"/>
-            <a:ext cx="81000" cy="81000"/>
+            <a:ext cx="80640" cy="80640"/>
           </a:xfrm>
           <a:solidFill>
             <a:srgbClr val="1f6f63"/>
@@ -10864,7 +12922,7 @@
         <p:spPr>
           <a:xfrm>
             <a:off x="7845480" y="2651760"/>
-            <a:ext cx="3564720" cy="455760"/>
+            <a:ext cx="3564360" cy="455400"/>
           </a:xfrm>
           <a:prstGeom prst="rect">
             <a:avLst/>
@@ -10925,7 +12983,7 @@
         <p:spPr>
           <a:xfrm>
             <a:off x="7635240" y="3310200"/>
-            <a:ext cx="81000" cy="81000"/>
+            <a:ext cx="80640" cy="80640"/>
           </a:xfrm>
           <a:solidFill>
             <a:srgbClr val="1f6f63"/>
@@ -10970,7 +13028,7 @@
         <p:spPr>
           <a:xfrm>
             <a:off x="7845480" y="3154680"/>
-            <a:ext cx="3564720" cy="455760"/>
+            <a:ext cx="3564360" cy="455400"/>
           </a:xfrm>
           <a:prstGeom prst="rect">
             <a:avLst/>
@@ -11031,7 +13089,7 @@
         <p:spPr>
           <a:xfrm>
             <a:off x="7635240" y="3813120"/>
-            <a:ext cx="81000" cy="81000"/>
+            <a:ext cx="80640" cy="80640"/>
           </a:xfrm>
           <a:solidFill>
             <a:srgbClr val="1f6f63"/>
@@ -11076,7 +13134,7 @@
         <p:spPr>
           <a:xfrm>
             <a:off x="7845480" y="3657600"/>
-            <a:ext cx="3564720" cy="455760"/>
+            <a:ext cx="3564360" cy="455400"/>
           </a:xfrm>
           <a:prstGeom prst="rect">
             <a:avLst/>
@@ -11137,7 +13195,7 @@
         <p:spPr>
           <a:xfrm>
             <a:off x="7635240" y="4316040"/>
-            <a:ext cx="81000" cy="81000"/>
+            <a:ext cx="80640" cy="80640"/>
           </a:xfrm>
           <a:solidFill>
             <a:srgbClr val="1f6f63"/>
@@ -11182,7 +13240,7 @@
         <p:spPr>
           <a:xfrm>
             <a:off x="7845480" y="4160520"/>
-            <a:ext cx="3564720" cy="455760"/>
+            <a:ext cx="3564360" cy="455400"/>
           </a:xfrm>
           <a:prstGeom prst="rect">
             <a:avLst/>
@@ -11243,7 +13301,7 @@
         <p:spPr>
           <a:xfrm>
             <a:off x="7635240" y="4818960"/>
-            <a:ext cx="81000" cy="81000"/>
+            <a:ext cx="80640" cy="80640"/>
           </a:xfrm>
           <a:solidFill>
             <a:srgbClr val="1f6f63"/>
@@ -11288,7 +13346,7 @@
         <p:spPr>
           <a:xfrm>
             <a:off x="7845480" y="4663440"/>
-            <a:ext cx="3564720" cy="455760"/>
+            <a:ext cx="3564360" cy="455400"/>
           </a:xfrm>
           <a:prstGeom prst="rect">
             <a:avLst/>
@@ -11349,7 +13407,7 @@
         <p:spPr>
           <a:xfrm>
             <a:off x="7635240" y="5321880"/>
-            <a:ext cx="81000" cy="81000"/>
+            <a:ext cx="80640" cy="80640"/>
           </a:xfrm>
           <a:solidFill>
             <a:srgbClr val="1f6f63"/>
@@ -11394,7 +13452,7 @@
         <p:spPr>
           <a:xfrm>
             <a:off x="7845480" y="5166360"/>
-            <a:ext cx="3564720" cy="455760"/>
+            <a:ext cx="3564360" cy="455400"/>
           </a:xfrm>
           <a:prstGeom prst="rect">
             <a:avLst/>
@@ -11443,7 +13501,7 @@
         <p:spPr>
           <a:xfrm>
             <a:off x="457200" y="6537960"/>
-            <a:ext cx="5484960" cy="272880"/>
+            <a:ext cx="5484600" cy="272520"/>
           </a:xfrm>
           <a:prstGeom prst="rect">
             <a:avLst/>
@@ -11504,7 +13562,7 @@
         <p:spPr>
           <a:xfrm>
             <a:off x="11521440" y="6537960"/>
-            <a:ext cx="455760" cy="272880"/>
+            <a:ext cx="455400" cy="272520"/>
           </a:xfrm>
           <a:prstGeom prst="rect">
             <a:avLst/>
@@ -11602,7 +13660,7 @@
         <p:spPr>
           <a:xfrm>
             <a:off x="640080" y="457200"/>
-            <a:ext cx="7313760" cy="318600"/>
+            <a:ext cx="7313400" cy="318240"/>
           </a:xfrm>
           <a:prstGeom prst="rect">
             <a:avLst/>
@@ -11663,7 +13721,7 @@
         <p:spPr>
           <a:xfrm>
             <a:off x="640080" y="749880"/>
-            <a:ext cx="10056960" cy="684360"/>
+            <a:ext cx="10056600" cy="684000"/>
           </a:xfrm>
           <a:prstGeom prst="rect">
             <a:avLst/>
@@ -11724,7 +13782,7 @@
         <p:spPr>
           <a:xfrm>
             <a:off x="640080" y="1737360"/>
-            <a:ext cx="2604600" cy="2924640"/>
+            <a:ext cx="2604240" cy="2924280"/>
           </a:xfrm>
           <a:prstGeom prst="roundRect">
             <a:avLst>
@@ -11774,7 +13832,7 @@
         <p:spPr>
           <a:xfrm>
             <a:off x="960120" y="2057400"/>
-            <a:ext cx="638640" cy="638640"/>
+            <a:ext cx="638280" cy="638280"/>
           </a:xfrm>
           <a:prstGeom prst="roundRect">
             <a:avLst>
@@ -11824,7 +13882,7 @@
         <p:spPr>
           <a:xfrm>
             <a:off x="914400" y="2926080"/>
-            <a:ext cx="2055960" cy="364320"/>
+            <a:ext cx="2055600" cy="363960"/>
           </a:xfrm>
           <a:prstGeom prst="rect">
             <a:avLst/>
@@ -11885,7 +13943,7 @@
         <p:spPr>
           <a:xfrm>
             <a:off x="914400" y="3291840"/>
-            <a:ext cx="2055960" cy="1278720"/>
+            <a:ext cx="2055600" cy="1278360"/>
           </a:xfrm>
           <a:prstGeom prst="rect">
             <a:avLst/>
@@ -11946,7 +14004,7 @@
         <p:spPr>
           <a:xfrm>
             <a:off x="3474720" y="1737360"/>
-            <a:ext cx="2604600" cy="2924640"/>
+            <a:ext cx="2604240" cy="2924280"/>
           </a:xfrm>
           <a:prstGeom prst="roundRect">
             <a:avLst>
@@ -11996,7 +14054,7 @@
         <p:spPr>
           <a:xfrm>
             <a:off x="3794760" y="2057400"/>
-            <a:ext cx="638640" cy="638640"/>
+            <a:ext cx="638280" cy="638280"/>
           </a:xfrm>
           <a:prstGeom prst="roundRect">
             <a:avLst>
@@ -12046,7 +14104,7 @@
         <p:spPr>
           <a:xfrm>
             <a:off x="3749040" y="2926080"/>
-            <a:ext cx="2055960" cy="364320"/>
+            <a:ext cx="2055600" cy="363960"/>
           </a:xfrm>
           <a:prstGeom prst="rect">
             <a:avLst/>
@@ -12107,7 +14165,7 @@
         <p:spPr>
           <a:xfrm>
             <a:off x="3749040" y="3291840"/>
-            <a:ext cx="2055960" cy="1278720"/>
+            <a:ext cx="2055600" cy="1278360"/>
           </a:xfrm>
           <a:prstGeom prst="rect">
             <a:avLst/>
@@ -12168,7 +14226,7 @@
         <p:spPr>
           <a:xfrm>
             <a:off x="6309360" y="1737360"/>
-            <a:ext cx="2604600" cy="2924640"/>
+            <a:ext cx="2604240" cy="2924280"/>
           </a:xfrm>
           <a:prstGeom prst="roundRect">
             <a:avLst>
@@ -12218,7 +14276,7 @@
         <p:spPr>
           <a:xfrm>
             <a:off x="6629400" y="2057400"/>
-            <a:ext cx="638640" cy="638640"/>
+            <a:ext cx="638280" cy="638280"/>
           </a:xfrm>
           <a:prstGeom prst="roundRect">
             <a:avLst>
@@ -12268,7 +14326,7 @@
         <p:spPr>
           <a:xfrm>
             <a:off x="6583680" y="2926080"/>
-            <a:ext cx="2055960" cy="364320"/>
+            <a:ext cx="2055600" cy="363960"/>
           </a:xfrm>
           <a:prstGeom prst="rect">
             <a:avLst/>
@@ -12329,7 +14387,7 @@
         <p:spPr>
           <a:xfrm>
             <a:off x="6583680" y="3291840"/>
-            <a:ext cx="2055960" cy="1278720"/>
+            <a:ext cx="2055600" cy="1278360"/>
           </a:xfrm>
           <a:prstGeom prst="rect">
             <a:avLst/>
@@ -12390,7 +14448,7 @@
         <p:spPr>
           <a:xfrm>
             <a:off x="9144000" y="1737360"/>
-            <a:ext cx="2604600" cy="2924640"/>
+            <a:ext cx="2604240" cy="2924280"/>
           </a:xfrm>
           <a:prstGeom prst="roundRect">
             <a:avLst>
@@ -12440,7 +14498,7 @@
         <p:spPr>
           <a:xfrm>
             <a:off x="9464040" y="2057400"/>
-            <a:ext cx="638640" cy="638640"/>
+            <a:ext cx="638280" cy="638280"/>
           </a:xfrm>
           <a:prstGeom prst="roundRect">
             <a:avLst>
@@ -12490,7 +14548,7 @@
         <p:spPr>
           <a:xfrm>
             <a:off x="9418320" y="2926080"/>
-            <a:ext cx="2055960" cy="364320"/>
+            <a:ext cx="2055600" cy="363960"/>
           </a:xfrm>
           <a:prstGeom prst="rect">
             <a:avLst/>
@@ -12551,7 +14609,7 @@
         <p:spPr>
           <a:xfrm>
             <a:off x="9418320" y="3291840"/>
-            <a:ext cx="2055960" cy="1278720"/>
+            <a:ext cx="2055600" cy="1278360"/>
           </a:xfrm>
           <a:prstGeom prst="rect">
             <a:avLst/>
@@ -12612,7 +14670,7 @@
         <p:spPr>
           <a:xfrm>
             <a:off x="457200" y="6537960"/>
-            <a:ext cx="5484960" cy="272880"/>
+            <a:ext cx="5484600" cy="272520"/>
           </a:xfrm>
           <a:prstGeom prst="rect">
             <a:avLst/>
@@ -12673,7 +14731,7 @@
         <p:spPr>
           <a:xfrm>
             <a:off x="11521440" y="6537960"/>
-            <a:ext cx="455760" cy="272880"/>
+            <a:ext cx="455400" cy="272520"/>
           </a:xfrm>
           <a:prstGeom prst="rect">
             <a:avLst/>
@@ -12771,7 +14829,7 @@
         <p:spPr>
           <a:xfrm>
             <a:off x="640080" y="457200"/>
-            <a:ext cx="7313760" cy="318600"/>
+            <a:ext cx="7313400" cy="318240"/>
           </a:xfrm>
           <a:prstGeom prst="rect">
             <a:avLst/>
@@ -12832,7 +14890,7 @@
         <p:spPr>
           <a:xfrm>
             <a:off x="640080" y="749880"/>
-            <a:ext cx="10056960" cy="684360"/>
+            <a:ext cx="10056600" cy="684000"/>
           </a:xfrm>
           <a:prstGeom prst="rect">
             <a:avLst/>
@@ -12893,7 +14951,7 @@
         <p:spPr>
           <a:xfrm>
             <a:off x="640080" y="1417320"/>
-            <a:ext cx="7313760" cy="364320"/>
+            <a:ext cx="7313400" cy="363960"/>
           </a:xfrm>
           <a:prstGeom prst="rect">
             <a:avLst/>
@@ -12954,7 +15012,7 @@
         <p:spPr>
           <a:xfrm>
             <a:off x="640080" y="1965960"/>
-            <a:ext cx="2604600" cy="3244680"/>
+            <a:ext cx="2604240" cy="3244320"/>
           </a:xfrm>
           <a:prstGeom prst="roundRect">
             <a:avLst>
@@ -13011,7 +15069,7 @@
         <p:spPr>
           <a:xfrm>
             <a:off x="868680" y="2148840"/>
-            <a:ext cx="1370160" cy="547200"/>
+            <a:ext cx="1369800" cy="546840"/>
           </a:xfrm>
           <a:prstGeom prst="rect">
             <a:avLst/>
@@ -13072,7 +15130,7 @@
         <p:spPr>
           <a:xfrm>
             <a:off x="868680" y="2697480"/>
-            <a:ext cx="2147400" cy="455760"/>
+            <a:ext cx="2147040" cy="455400"/>
           </a:xfrm>
           <a:prstGeom prst="rect">
             <a:avLst/>
@@ -13133,7 +15191,7 @@
         <p:spPr>
           <a:xfrm>
             <a:off x="868680" y="3154680"/>
-            <a:ext cx="2147400" cy="1735920"/>
+            <a:ext cx="2147040" cy="1735560"/>
           </a:xfrm>
           <a:prstGeom prst="rect">
             <a:avLst/>
@@ -13194,7 +15252,7 @@
         <p:spPr>
           <a:xfrm>
             <a:off x="3474720" y="1965960"/>
-            <a:ext cx="2604600" cy="3244680"/>
+            <a:ext cx="2604240" cy="3244320"/>
           </a:xfrm>
           <a:prstGeom prst="roundRect">
             <a:avLst>
@@ -13251,7 +15309,7 @@
         <p:spPr>
           <a:xfrm>
             <a:off x="3703320" y="2148840"/>
-            <a:ext cx="1370160" cy="547200"/>
+            <a:ext cx="1369800" cy="546840"/>
           </a:xfrm>
           <a:prstGeom prst="rect">
             <a:avLst/>
@@ -13312,7 +15370,7 @@
         <p:spPr>
           <a:xfrm>
             <a:off x="3703320" y="2697480"/>
-            <a:ext cx="2147400" cy="455760"/>
+            <a:ext cx="2147040" cy="455400"/>
           </a:xfrm>
           <a:prstGeom prst="rect">
             <a:avLst/>
@@ -13373,7 +15431,7 @@
         <p:spPr>
           <a:xfrm>
             <a:off x="3703320" y="3154680"/>
-            <a:ext cx="2147400" cy="1735920"/>
+            <a:ext cx="2147040" cy="1735560"/>
           </a:xfrm>
           <a:prstGeom prst="rect">
             <a:avLst/>
@@ -13434,7 +15492,7 @@
         <p:spPr>
           <a:xfrm>
             <a:off x="6309360" y="1965960"/>
-            <a:ext cx="2604600" cy="3244680"/>
+            <a:ext cx="2604240" cy="3244320"/>
           </a:xfrm>
           <a:prstGeom prst="roundRect">
             <a:avLst>
@@ -13491,7 +15549,7 @@
         <p:spPr>
           <a:xfrm>
             <a:off x="6537960" y="2148840"/>
-            <a:ext cx="1370160" cy="547200"/>
+            <a:ext cx="1369800" cy="546840"/>
           </a:xfrm>
           <a:prstGeom prst="rect">
             <a:avLst/>
@@ -13552,7 +15610,7 @@
         <p:spPr>
           <a:xfrm>
             <a:off x="6537960" y="2697480"/>
-            <a:ext cx="2147400" cy="455760"/>
+            <a:ext cx="2147040" cy="455400"/>
           </a:xfrm>
           <a:prstGeom prst="rect">
             <a:avLst/>
@@ -13613,7 +15671,7 @@
         <p:spPr>
           <a:xfrm>
             <a:off x="6537960" y="3154680"/>
-            <a:ext cx="2147400" cy="1735920"/>
+            <a:ext cx="2147040" cy="1735560"/>
           </a:xfrm>
           <a:prstGeom prst="rect">
             <a:avLst/>
@@ -13674,7 +15732,7 @@
         <p:spPr>
           <a:xfrm>
             <a:off x="9144000" y="1965960"/>
-            <a:ext cx="2604600" cy="3244680"/>
+            <a:ext cx="2604240" cy="3244320"/>
           </a:xfrm>
           <a:prstGeom prst="roundRect">
             <a:avLst>
@@ -13731,7 +15789,7 @@
         <p:spPr>
           <a:xfrm>
             <a:off x="9372600" y="2148840"/>
-            <a:ext cx="1370160" cy="547200"/>
+            <a:ext cx="1369800" cy="546840"/>
           </a:xfrm>
           <a:prstGeom prst="rect">
             <a:avLst/>
@@ -13792,7 +15850,7 @@
         <p:spPr>
           <a:xfrm>
             <a:off x="9372600" y="2697480"/>
-            <a:ext cx="2147400" cy="455760"/>
+            <a:ext cx="2147040" cy="455400"/>
           </a:xfrm>
           <a:prstGeom prst="rect">
             <a:avLst/>
@@ -13853,7 +15911,7 @@
         <p:spPr>
           <a:xfrm>
             <a:off x="9372600" y="3154680"/>
-            <a:ext cx="2147400" cy="1735920"/>
+            <a:ext cx="2147040" cy="1735560"/>
           </a:xfrm>
           <a:prstGeom prst="rect">
             <a:avLst/>
@@ -13914,7 +15972,7 @@
         <p:spPr>
           <a:xfrm>
             <a:off x="457200" y="6537960"/>
-            <a:ext cx="5484960" cy="272880"/>
+            <a:ext cx="5484600" cy="272520"/>
           </a:xfrm>
           <a:prstGeom prst="rect">
             <a:avLst/>
@@ -13975,7 +16033,7 @@
         <p:spPr>
           <a:xfrm>
             <a:off x="11521440" y="6537960"/>
-            <a:ext cx="455760" cy="272880"/>
+            <a:ext cx="455400" cy="272520"/>
           </a:xfrm>
           <a:prstGeom prst="rect">
             <a:avLst/>
@@ -14073,7 +16131,7 @@
         <p:spPr>
           <a:xfrm>
             <a:off x="640080" y="457200"/>
-            <a:ext cx="7313760" cy="318600"/>
+            <a:ext cx="7313400" cy="318240"/>
           </a:xfrm>
           <a:prstGeom prst="rect">
             <a:avLst/>
@@ -14134,7 +16192,7 @@
         <p:spPr>
           <a:xfrm>
             <a:off x="640080" y="749880"/>
-            <a:ext cx="10056960" cy="684360"/>
+            <a:ext cx="10056600" cy="684000"/>
           </a:xfrm>
           <a:prstGeom prst="rect">
             <a:avLst/>
@@ -14173,7 +16231,7 @@
                 <a:latin typeface="Poppins"/>
                 <a:ea typeface="Poppins"/>
               </a:rPr>
-              <a:t>Demonstração</a:t>
+              <a:t>Demonstração da user view</a:t>
             </a:r>
             <a:endParaRPr lang="pt-PT" sz="2800" b="0" u="none" strike="noStrike">
               <a:solidFill>
@@ -14194,8 +16252,8 @@
         </p:nvSpPr>
         <p:spPr>
           <a:xfrm rot="5429400">
-            <a:off x="883800" y="1900080"/>
-            <a:ext cx="2674440" cy="3664800"/>
+            <a:off x="883800" y="1899720"/>
+            <a:ext cx="2674080" cy="3664440"/>
           </a:xfrm>
           <a:prstGeom prst="roundRect">
             <a:avLst>
@@ -14227,6 +16285,11 @@
             <a:noAutofit/>
           </a:bodyPr>
           <a:p>
+            <a:pPr>
+              <a:lnSpc>
+                <a:spcPct val="100000"/>
+              </a:lnSpc>
+            </a:pPr>
             <a:endParaRPr lang="pt-PT" sz="1800" b="0" u="none" strike="noStrike">
               <a:solidFill>
                 <a:srgbClr val="000000"/>
@@ -14247,7 +16310,7 @@
         <p:spPr>
           <a:xfrm>
             <a:off x="597600" y="2563560"/>
-            <a:ext cx="2205360" cy="468000"/>
+            <a:ext cx="2205000" cy="467640"/>
           </a:xfrm>
           <a:prstGeom prst="rect">
             <a:avLst/>
@@ -14308,7 +16371,7 @@
         <p:spPr>
           <a:xfrm>
             <a:off x="457200" y="6537960"/>
-            <a:ext cx="5484960" cy="272880"/>
+            <a:ext cx="5484600" cy="272520"/>
           </a:xfrm>
           <a:prstGeom prst="rect">
             <a:avLst/>
@@ -14369,7 +16432,7 @@
         <p:spPr>
           <a:xfrm>
             <a:off x="11521440" y="6537960"/>
-            <a:ext cx="455760" cy="272880"/>
+            <a:ext cx="455400" cy="272520"/>
           </a:xfrm>
           <a:prstGeom prst="rect">
             <a:avLst/>
@@ -14434,7 +16497,7 @@
         <p:spPr>
           <a:xfrm>
             <a:off x="586440" y="3144600"/>
-            <a:ext cx="3257640" cy="1761840"/>
+            <a:ext cx="3257280" cy="1761480"/>
           </a:xfrm>
           <a:prstGeom prst="rect">
             <a:avLst/>
@@ -14453,8 +16516,8 @@
         </p:nvSpPr>
         <p:spPr>
           <a:xfrm rot="5427600">
-            <a:off x="4651200" y="1988280"/>
-            <a:ext cx="2674440" cy="3503880"/>
+            <a:off x="4651560" y="1987920"/>
+            <a:ext cx="2674080" cy="3503520"/>
           </a:xfrm>
           <a:prstGeom prst="roundRect">
             <a:avLst>
@@ -14486,6 +16549,11 @@
             <a:noAutofit/>
           </a:bodyPr>
           <a:p>
+            <a:pPr>
+              <a:lnSpc>
+                <a:spcPct val="100000"/>
+              </a:lnSpc>
+            </a:pPr>
             <a:endParaRPr lang="pt-PT" sz="1800" b="0" u="none" strike="noStrike">
               <a:solidFill>
                 <a:srgbClr val="000000"/>
@@ -14505,8 +16573,8 @@
         </p:nvSpPr>
         <p:spPr>
           <a:xfrm rot="5428800">
-            <a:off x="8393760" y="2021760"/>
-            <a:ext cx="2674800" cy="3535200"/>
+            <a:off x="8394120" y="2021400"/>
+            <a:ext cx="2674440" cy="3534840"/>
           </a:xfrm>
           <a:prstGeom prst="roundRect">
             <a:avLst>
@@ -14538,6 +16606,11 @@
             <a:noAutofit/>
           </a:bodyPr>
           <a:p>
+            <a:pPr>
+              <a:lnSpc>
+                <a:spcPct val="100000"/>
+              </a:lnSpc>
+            </a:pPr>
             <a:endParaRPr lang="pt-PT" sz="1800" b="0" u="none" strike="noStrike">
               <a:solidFill>
                 <a:srgbClr val="000000"/>
@@ -14558,7 +16631,7 @@
         <p:spPr>
           <a:xfrm>
             <a:off x="4406040" y="2608920"/>
-            <a:ext cx="2205000" cy="468000"/>
+            <a:ext cx="2204640" cy="467640"/>
           </a:xfrm>
           <a:prstGeom prst="rect">
             <a:avLst/>
@@ -14619,7 +16692,7 @@
         <p:spPr>
           <a:xfrm>
             <a:off x="8132040" y="2608560"/>
-            <a:ext cx="2205000" cy="468000"/>
+            <a:ext cx="2204640" cy="467640"/>
           </a:xfrm>
           <a:prstGeom prst="rect">
             <a:avLst/>
@@ -14684,7 +16757,7 @@
         <p:spPr>
           <a:xfrm>
             <a:off x="4409280" y="3115440"/>
-            <a:ext cx="3136680" cy="1784880"/>
+            <a:ext cx="3136320" cy="1784520"/>
           </a:xfrm>
           <a:prstGeom prst="rect">
             <a:avLst/>
@@ -14708,7 +16781,7 @@
         <p:spPr>
           <a:xfrm>
             <a:off x="8131680" y="3128040"/>
-            <a:ext cx="3181320" cy="1810440"/>
+            <a:ext cx="3180960" cy="1810080"/>
           </a:xfrm>
           <a:prstGeom prst="rect">
             <a:avLst/>
